--- a/Mochila01_MetaHeuristicas_TabuVsAG.pptx
+++ b/Mochila01_MetaHeuristicas_TabuVsAG.pptx
@@ -4,6 +4,9 @@
   <p:sldMasterIdLst>
     <p:sldMasterId id="2147483648" r:id="rId1"/>
   </p:sldMasterIdLst>
+  <p:notesMasterIdLst>
+    <p:notesMasterId r:id="rId14"/>
+  </p:notesMasterIdLst>
   <p:sldIdLst>
     <p:sldId id="256" r:id="rId2"/>
     <p:sldId id="257" r:id="rId3"/>
@@ -18,9 +21,6 @@
     <p:sldId id="266" r:id="rId12"/>
     <p:sldId id="267" r:id="rId13"/>
   </p:sldIdLst>
-  <p:notesMasterIdLst>
-    <p:notesMasterId r:id="rId14"/>
-  </p:notesMasterIdLst>
   <p:sldSz cx="12192000" cy="6858000"/>
   <p:notesSz cx="6858000" cy="12192000"/>
   <p:defaultTextStyle>
@@ -115,13 +115,20 @@
       </a:defRPr>
     </a:lvl9pPr>
   </p:defaultTextStyle>
+  <p:extLst>
+    <p:ext uri="{EFAFB233-063F-42B5-8137-9DF3F51BA10A}">
+      <p15:sldGuideLst xmlns:p15="http://schemas.microsoft.com/office/powerpoint/2012/main"/>
+    </p:ext>
+  </p:extLst>
 </p:presentation>
 </file>
 
 <file path=ppt/charts/chart1.xml><?xml version="1.0" encoding="utf-8"?>
-<c:chartSpace xmlns:c="http://schemas.openxmlformats.org/drawingml/2006/chart" xmlns:a="http://schemas.openxmlformats.org/drawingml/2006/main" xmlns:r="http://schemas.openxmlformats.org/officeDocument/2006/relationships">
+<c:chartSpace xmlns:c="http://schemas.openxmlformats.org/drawingml/2006/chart" xmlns:a="http://schemas.openxmlformats.org/drawingml/2006/main" xmlns:r="http://schemas.openxmlformats.org/officeDocument/2006/relationships" xmlns:c16r2="http://schemas.microsoft.com/office/drawing/2015/06/chart">
   <c:date1904 val="0"/>
+  <c:lang val="pt-BR"/>
   <c:roundedCorners val="1"/>
+  <c:style val="2"/>
   <c:chart>
     <c:autoTitleDeleted val="1"/>
     <c:plotArea>
@@ -151,66 +158,40 @@
             <a:effectLst/>
           </c:spPr>
           <c:invertIfNegative val="0"/>
-          <c:dLbls>
-            <c:numFmt formatCode="#,##0" sourceLinked="0"/>
-            <c:txPr>
-              <a:bodyPr/>
-              <a:lstStyle/>
-              <a:p>
-                <a:pPr>
-                  <a:defRPr b="0" i="0" strike="noStrike" sz="1200" u="none">
-                    <a:solidFill>
-                      <a:srgbClr val="39415C"/>
-                    </a:solidFill>
-                    <a:latin typeface="Arial"/>
-                  </a:defRPr>
-                </a:pPr>
-              </a:p>
-            </c:txPr>
-            <c:showLegendKey val="0"/>
-            <c:showVal val="0"/>
-            <c:showCatName val="0"/>
-            <c:showSerName val="0"/>
-            <c:showPercent val="0"/>
-            <c:showBubbleSize val="0"/>
-            <c:showLeaderLines val="0"/>
-          </c:dLbls>
           <c:cat>
-            <c:multiLvlStrRef>
+            <c:strRef>
               <c:f>Sheet1!$A$2:$A$10</c:f>
-              <c:multiLvlStrCache>
+              <c:strCache>
                 <c:ptCount val="9"/>
-                <c:lvl>
-                  <c:pt idx="0">
-                    <c:v>P01</c:v>
-                  </c:pt>
-                  <c:pt idx="1">
-                    <c:v>P02</c:v>
-                  </c:pt>
-                  <c:pt idx="2">
-                    <c:v>P03</c:v>
-                  </c:pt>
-                  <c:pt idx="3">
-                    <c:v>P04</c:v>
-                  </c:pt>
-                  <c:pt idx="4">
-                    <c:v>P05</c:v>
-                  </c:pt>
-                  <c:pt idx="5">
-                    <c:v>P06</c:v>
-                  </c:pt>
-                  <c:pt idx="6">
-                    <c:v>P07</c:v>
-                  </c:pt>
-                  <c:pt idx="7">
-                    <c:v>P08</c:v>
-                  </c:pt>
-                  <c:pt idx="8">
-                    <c:v>knapPI_1_100</c:v>
-                  </c:pt>
-                </c:lvl>
-              </c:multiLvlStrCache>
-            </c:multiLvlStrRef>
+                <c:pt idx="0">
+                  <c:v>P01</c:v>
+                </c:pt>
+                <c:pt idx="1">
+                  <c:v>P02</c:v>
+                </c:pt>
+                <c:pt idx="2">
+                  <c:v>P03</c:v>
+                </c:pt>
+                <c:pt idx="3">
+                  <c:v>P04</c:v>
+                </c:pt>
+                <c:pt idx="4">
+                  <c:v>P05</c:v>
+                </c:pt>
+                <c:pt idx="5">
+                  <c:v>P06</c:v>
+                </c:pt>
+                <c:pt idx="6">
+                  <c:v>P07</c:v>
+                </c:pt>
+                <c:pt idx="7">
+                  <c:v>P08</c:v>
+                </c:pt>
+                <c:pt idx="8">
+                  <c:v>knapPI_1_100</c:v>
+                </c:pt>
+              </c:strCache>
+            </c:strRef>
           </c:cat>
           <c:val>
             <c:numRef>
@@ -248,6 +229,11 @@
               </c:numCache>
             </c:numRef>
           </c:val>
+          <c:extLst>
+            <c:ext xmlns:c16="http://schemas.microsoft.com/office/drawing/2014/chart" uri="{C3380CC4-5D6E-409C-BE32-E72D297353CC}">
+              <c16:uniqueId val="{00000000-F53A-4414-8BD7-946677FE04D6}"/>
+            </c:ext>
+          </c:extLst>
         </c:ser>
         <c:ser>
           <c:idx val="1"/>
@@ -270,66 +256,40 @@
             <a:effectLst/>
           </c:spPr>
           <c:invertIfNegative val="0"/>
-          <c:dLbls>
-            <c:numFmt formatCode="#,##0" sourceLinked="0"/>
-            <c:txPr>
-              <a:bodyPr/>
-              <a:lstStyle/>
-              <a:p>
-                <a:pPr>
-                  <a:defRPr b="0" i="0" strike="noStrike" sz="1200" u="none">
-                    <a:solidFill>
-                      <a:srgbClr val="39415C"/>
-                    </a:solidFill>
-                    <a:latin typeface="Arial"/>
-                  </a:defRPr>
-                </a:pPr>
-              </a:p>
-            </c:txPr>
-            <c:showLegendKey val="0"/>
-            <c:showVal val="0"/>
-            <c:showCatName val="0"/>
-            <c:showSerName val="0"/>
-            <c:showPercent val="0"/>
-            <c:showBubbleSize val="0"/>
-            <c:showLeaderLines val="0"/>
-          </c:dLbls>
           <c:cat>
-            <c:multiLvlStrRef>
+            <c:strRef>
               <c:f>Sheet1!$A$2:$A$10</c:f>
-              <c:multiLvlStrCache>
+              <c:strCache>
                 <c:ptCount val="9"/>
-                <c:lvl>
-                  <c:pt idx="0">
-                    <c:v>P01</c:v>
-                  </c:pt>
-                  <c:pt idx="1">
-                    <c:v>P02</c:v>
-                  </c:pt>
-                  <c:pt idx="2">
-                    <c:v>P03</c:v>
-                  </c:pt>
-                  <c:pt idx="3">
-                    <c:v>P04</c:v>
-                  </c:pt>
-                  <c:pt idx="4">
-                    <c:v>P05</c:v>
-                  </c:pt>
-                  <c:pt idx="5">
-                    <c:v>P06</c:v>
-                  </c:pt>
-                  <c:pt idx="6">
-                    <c:v>P07</c:v>
-                  </c:pt>
-                  <c:pt idx="7">
-                    <c:v>P08</c:v>
-                  </c:pt>
-                  <c:pt idx="8">
-                    <c:v>knapPI_1_100</c:v>
-                  </c:pt>
-                </c:lvl>
-              </c:multiLvlStrCache>
-            </c:multiLvlStrRef>
+                <c:pt idx="0">
+                  <c:v>P01</c:v>
+                </c:pt>
+                <c:pt idx="1">
+                  <c:v>P02</c:v>
+                </c:pt>
+                <c:pt idx="2">
+                  <c:v>P03</c:v>
+                </c:pt>
+                <c:pt idx="3">
+                  <c:v>P04</c:v>
+                </c:pt>
+                <c:pt idx="4">
+                  <c:v>P05</c:v>
+                </c:pt>
+                <c:pt idx="5">
+                  <c:v>P06</c:v>
+                </c:pt>
+                <c:pt idx="6">
+                  <c:v>P07</c:v>
+                </c:pt>
+                <c:pt idx="7">
+                  <c:v>P08</c:v>
+                </c:pt>
+                <c:pt idx="8">
+                  <c:v>knapPI_1_100</c:v>
+                </c:pt>
+              </c:strCache>
+            </c:strRef>
           </c:cat>
           <c:val>
             <c:numRef>
@@ -367,36 +327,23 @@
               </c:numCache>
             </c:numRef>
           </c:val>
+          <c:extLst>
+            <c:ext xmlns:c16="http://schemas.microsoft.com/office/drawing/2014/chart" uri="{C3380CC4-5D6E-409C-BE32-E72D297353CC}">
+              <c16:uniqueId val="{00000001-F53A-4414-8BD7-946677FE04D6}"/>
+            </c:ext>
+          </c:extLst>
         </c:ser>
         <c:dLbls>
-          <c:numFmt formatCode="#,##0" sourceLinked="0"/>
-          <c:txPr>
-            <a:bodyPr/>
-            <a:lstStyle/>
-            <a:p>
-              <a:pPr>
-                <a:defRPr b="0" i="0" strike="noStrike" sz="1200" u="none">
-                  <a:solidFill>
-                    <a:srgbClr val="39415C"/>
-                  </a:solidFill>
-                  <a:latin typeface="Arial"/>
-                </a:defRPr>
-              </a:pPr>
-            </a:p>
-          </c:txPr>
           <c:showLegendKey val="0"/>
           <c:showVal val="0"/>
           <c:showCatName val="0"/>
           <c:showSerName val="0"/>
           <c:showPercent val="0"/>
           <c:showBubbleSize val="0"/>
-          <c:showLeaderLines val="0"/>
         </c:dLbls>
         <c:gapWidth val="30"/>
-        <c:overlap val="0"/>
         <c:axId val="2094734554"/>
         <c:axId val="2094734552"/>
-        <c:axId val="2094734556"/>
       </c:barChart>
       <c:catAx>
         <c:axId val="2094734554"/>
@@ -430,13 +377,14 @@
                 <a:latin typeface="Arial"/>
               </a:defRPr>
             </a:pPr>
-            <a:endParaRPr lang="en-US"/>
+            <a:endParaRPr lang="pt-BR"/>
           </a:p>
         </c:txPr>
         <c:crossAx val="2094734552"/>
         <c:crosses val="autoZero"/>
         <c:auto val="1"/>
         <c:lblAlgn val="ctr"/>
+        <c:lblOffset val="100"/>
         <c:noMultiLvlLbl val="1"/>
       </c:catAx>
       <c:valAx>
@@ -472,7 +420,7 @@
                   </a:defRPr>
                 </a:pPr>
                 <a:r>
-                  <a:rPr sz="1000" b="0" i="0" u="none" strike="noStrike">
+                  <a:rPr lang="pt-BR" sz="1000" b="0" i="0" u="none" strike="noStrike">
                     <a:solidFill>
                       <a:srgbClr val="39415C"/>
                     </a:solidFill>
@@ -483,7 +431,6 @@
               </a:p>
             </c:rich>
           </c:tx>
-          <c:layout/>
           <c:overlay val="0"/>
         </c:title>
         <c:numFmt formatCode="General" sourceLinked="0"/>
@@ -511,7 +458,7 @@
                 <a:latin typeface="Arial"/>
               </a:defRPr>
             </a:pPr>
-            <a:endParaRPr lang="en-US"/>
+            <a:endParaRPr lang="pt-BR"/>
           </a:p>
         </c:txPr>
         <c:crossAx val="2094734554"/>
@@ -540,12 +487,13 @@
               </a:solidFill>
             </a:defRPr>
           </a:pPr>
-          <a:endParaRPr lang="en-US"/>
+          <a:endParaRPr lang="pt-BR"/>
         </a:p>
       </c:txPr>
     </c:legend>
     <c:plotVisOnly val="1"/>
     <c:dispBlanksAs val="span"/>
+    <c:showDLblsOverMax val="1"/>
   </c:chart>
   <c:spPr>
     <a:noFill/>
@@ -582,234 +530,10 @@
           <a:chExt cx="0" cy="0"/>
         </a:xfrm>
       </p:grpSpPr>
-      <p:sp>
-        <p:nvSpPr>
-          <p:cNvPr id="2" name="Header Placeholder 1"/>
-          <p:cNvSpPr>
-            <a:spLocks noGrp="1"/>
-          </p:cNvSpPr>
-          <p:nvPr>
-            <p:ph type="hdr" sz="quarter"/>
-          </p:nvPr>
-        </p:nvSpPr>
-        <p:spPr>
-          <a:xfrm>
-            <a:off x="0" y="0"/>
-            <a:ext cx="2971800" cy="458788"/>
-          </a:xfrm>
-          <a:prstGeom prst="rect">
-            <a:avLst/>
-          </a:prstGeom>
-        </p:spPr>
-        <p:txBody>
-          <a:bodyPr vert="horz" lIns="91440" tIns="45720" rIns="91440" bIns="45720" rtlCol="0"/>
-          <a:lstStyle>
-            <a:lvl1pPr algn="l">
-              <a:defRPr sz="1200"/>
-            </a:lvl1pPr>
-          </a:lstStyle>
-          <a:p>
-            <a:endParaRPr lang="en-US"/>
-          </a:p>
-        </p:txBody>
-      </p:sp>
-      <p:sp>
-        <p:nvSpPr>
-          <p:cNvPr id="3" name="Date Placeholder 2"/>
-          <p:cNvSpPr>
-            <a:spLocks noGrp="1"/>
-          </p:cNvSpPr>
-          <p:nvPr>
-            <p:ph type="dt" idx="1"/>
-          </p:nvPr>
-        </p:nvSpPr>
-        <p:spPr>
-          <a:xfrm>
-            <a:off x="3884613" y="0"/>
-            <a:ext cx="2971800" cy="458788"/>
-          </a:xfrm>
-          <a:prstGeom prst="rect">
-            <a:avLst/>
-          </a:prstGeom>
-        </p:spPr>
-        <p:txBody>
-          <a:bodyPr vert="horz" lIns="91440" tIns="45720" rIns="91440" bIns="45720" rtlCol="0"/>
-          <a:lstStyle>
-            <a:lvl1pPr algn="r">
-              <a:defRPr sz="1200"/>
-            </a:lvl1pPr>
-          </a:lstStyle>
-          <a:p>
-            <a:fld id="{5282F153-3F37-0F45-9E97-73ACFA13230C}" type="datetimeFigureOut">
-              <a:rPr lang="en-US"/>
-              <a:t>7/23/19</a:t>
-            </a:fld>
-            <a:endParaRPr lang="en-US"/>
-          </a:p>
-        </p:txBody>
-      </p:sp>
-      <p:sp>
-        <p:nvSpPr>
-          <p:cNvPr id="4" name="Slide Image Placeholder 3"/>
-          <p:cNvSpPr>
-            <a:spLocks noGrp="1" noRot="1" noChangeAspect="1"/>
-          </p:cNvSpPr>
-          <p:nvPr>
-            <p:ph type="sldImg" idx="2"/>
-          </p:nvPr>
-        </p:nvSpPr>
-        <p:spPr>
-          <a:xfrm>
-            <a:off x="685800" y="1143000"/>
-            <a:ext cx="5486400" cy="3086100"/>
-          </a:xfrm>
-          <a:prstGeom prst="rect">
-            <a:avLst/>
-          </a:prstGeom>
-          <a:noFill/>
-          <a:ln w="12700">
-            <a:solidFill>
-              <a:prstClr val="black"/>
-            </a:solidFill>
-          </a:ln>
-        </p:spPr>
-        <p:txBody>
-          <a:bodyPr vert="horz" lIns="91440" tIns="45720" rIns="91440" bIns="45720" rtlCol="0" anchor="ctr"/>
-          <a:lstStyle/>
-          <a:p>
-            <a:endParaRPr lang="en-US"/>
-          </a:p>
-        </p:txBody>
-      </p:sp>
-      <p:sp>
-        <p:nvSpPr>
-          <p:cNvPr id="5" name="Notes Placeholder 4"/>
-          <p:cNvSpPr>
-            <a:spLocks noGrp="1"/>
-          </p:cNvSpPr>
-          <p:nvPr>
-            <p:ph type="body" sz="quarter" idx="3"/>
-          </p:nvPr>
-        </p:nvSpPr>
-        <p:spPr>
-          <a:xfrm>
-            <a:off x="685800" y="4400550"/>
-            <a:ext cx="5486400" cy="3600450"/>
-          </a:xfrm>
-          <a:prstGeom prst="rect">
-            <a:avLst/>
-          </a:prstGeom>
-        </p:spPr>
-        <p:txBody>
-          <a:bodyPr vert="horz" lIns="91440" tIns="45720" rIns="91440" bIns="45720" rtlCol="0"/>
-          <a:lstStyle/>
-          <a:p>
-            <a:pPr lvl="0"/>
-            <a:r>
-              <a:rPr lang="en-US"/>
-              <a:t>Click to edit Master text styles</a:t>
-            </a:r>
-          </a:p>
-          <a:p>
-            <a:pPr lvl="1"/>
-            <a:r>
-              <a:rPr lang="en-US"/>
-              <a:t>Second level</a:t>
-            </a:r>
-          </a:p>
-          <a:p>
-            <a:pPr lvl="2"/>
-            <a:r>
-              <a:rPr lang="en-US"/>
-              <a:t>Third level</a:t>
-            </a:r>
-          </a:p>
-          <a:p>
-            <a:pPr lvl="3"/>
-            <a:r>
-              <a:rPr lang="en-US"/>
-              <a:t>Fourth level</a:t>
-            </a:r>
-          </a:p>
-          <a:p>
-            <a:pPr lvl="4"/>
-            <a:r>
-              <a:rPr lang="en-US"/>
-              <a:t>Fifth level</a:t>
-            </a:r>
-          </a:p>
-        </p:txBody>
-      </p:sp>
-      <p:sp>
-        <p:nvSpPr>
-          <p:cNvPr id="6" name="Footer Placeholder 5"/>
-          <p:cNvSpPr>
-            <a:spLocks noGrp="1"/>
-          </p:cNvSpPr>
-          <p:nvPr>
-            <p:ph type="ftr" sz="quarter" idx="4"/>
-          </p:nvPr>
-        </p:nvSpPr>
-        <p:spPr>
-          <a:xfrm>
-            <a:off x="0" y="8685213"/>
-            <a:ext cx="2971800" cy="458787"/>
-          </a:xfrm>
-          <a:prstGeom prst="rect">
-            <a:avLst/>
-          </a:prstGeom>
-        </p:spPr>
-        <p:txBody>
-          <a:bodyPr vert="horz" lIns="91440" tIns="45720" rIns="91440" bIns="45720" rtlCol="0" anchor="b"/>
-          <a:lstStyle>
-            <a:lvl1pPr algn="l">
-              <a:defRPr sz="1200"/>
-            </a:lvl1pPr>
-          </a:lstStyle>
-          <a:p>
-            <a:endParaRPr lang="en-US"/>
-          </a:p>
-        </p:txBody>
-      </p:sp>
-      <p:sp>
-        <p:nvSpPr>
-          <p:cNvPr id="7" name="Slide Number Placeholder 6"/>
-          <p:cNvSpPr>
-            <a:spLocks noGrp="1"/>
-          </p:cNvSpPr>
-          <p:nvPr>
-            <p:ph type="sldNum" sz="quarter" idx="5"/>
-          </p:nvPr>
-        </p:nvSpPr>
-        <p:spPr>
-          <a:xfrm>
-            <a:off x="3884613" y="8685213"/>
-            <a:ext cx="2971800" cy="458787"/>
-          </a:xfrm>
-          <a:prstGeom prst="rect">
-            <a:avLst/>
-          </a:prstGeom>
-        </p:spPr>
-        <p:txBody>
-          <a:bodyPr vert="horz" lIns="91440" tIns="45720" rIns="91440" bIns="45720" rtlCol="0" anchor="b"/>
-          <a:lstStyle>
-            <a:lvl1pPr algn="r">
-              <a:defRPr sz="1200"/>
-            </a:lvl1pPr>
-          </a:lstStyle>
-          <a:p>
-            <a:fld id="{CE5E9CC1-C706-0F49-92D6-E571CC5EEA8F}" type="slidenum">
-              <a:rPr lang="en-US"/>
-              <a:t>‹#›</a:t>
-            </a:fld>
-            <a:endParaRPr lang="en-US"/>
-          </a:p>
-        </p:txBody>
-      </p:sp>
     </p:spTree>
     <p:extLst>
       <p:ext uri="{BB962C8B-B14F-4D97-AF65-F5344CB8AC3E}">
-        <p14:creationId xmlns:p14="http://schemas.microsoft.com/office/powerpoint/2010/main" val="1024086991"/>
+        <p14:creationId xmlns:p14="http://schemas.microsoft.com/office/powerpoint/2010/main" val="1601823473"/>
       </p:ext>
     </p:extLst>
   </p:cSld>
@@ -953,10 +677,6 @@
           <a:bodyPr/>
           <a:lstStyle/>
           <a:p>
-            <a:r>
-              <a:rPr lang="en-US" dirty="0"/>
-              <a:t/>
-            </a:r>
             <a:endParaRPr lang="en-US" dirty="0"/>
           </a:p>
         </p:txBody>
@@ -1041,10 +761,6 @@
           <a:bodyPr/>
           <a:lstStyle/>
           <a:p>
-            <a:r>
-              <a:rPr lang="en-US" dirty="0"/>
-              <a:t/>
-            </a:r>
             <a:endParaRPr lang="en-US" dirty="0"/>
           </a:p>
         </p:txBody>
@@ -1129,10 +845,6 @@
           <a:bodyPr/>
           <a:lstStyle/>
           <a:p>
-            <a:r>
-              <a:rPr lang="en-US" dirty="0"/>
-              <a:t/>
-            </a:r>
             <a:endParaRPr lang="en-US" dirty="0"/>
           </a:p>
         </p:txBody>
@@ -1217,10 +929,6 @@
           <a:bodyPr/>
           <a:lstStyle/>
           <a:p>
-            <a:r>
-              <a:rPr lang="en-US" dirty="0"/>
-              <a:t/>
-            </a:r>
             <a:endParaRPr lang="en-US" dirty="0"/>
           </a:p>
         </p:txBody>
@@ -1305,10 +1013,6 @@
           <a:bodyPr/>
           <a:lstStyle/>
           <a:p>
-            <a:r>
-              <a:rPr lang="en-US" dirty="0"/>
-              <a:t/>
-            </a:r>
             <a:endParaRPr lang="en-US" dirty="0"/>
           </a:p>
         </p:txBody>
@@ -1393,10 +1097,6 @@
           <a:bodyPr/>
           <a:lstStyle/>
           <a:p>
-            <a:r>
-              <a:rPr lang="en-US" dirty="0"/>
-              <a:t/>
-            </a:r>
             <a:endParaRPr lang="en-US" dirty="0"/>
           </a:p>
         </p:txBody>
@@ -1481,10 +1181,6 @@
           <a:bodyPr/>
           <a:lstStyle/>
           <a:p>
-            <a:r>
-              <a:rPr lang="en-US" dirty="0"/>
-              <a:t/>
-            </a:r>
             <a:endParaRPr lang="en-US" dirty="0"/>
           </a:p>
         </p:txBody>
@@ -1569,10 +1265,6 @@
           <a:bodyPr/>
           <a:lstStyle/>
           <a:p>
-            <a:r>
-              <a:rPr lang="en-US" dirty="0"/>
-              <a:t/>
-            </a:r>
             <a:endParaRPr lang="en-US" dirty="0"/>
           </a:p>
         </p:txBody>
@@ -1657,10 +1349,6 @@
           <a:bodyPr/>
           <a:lstStyle/>
           <a:p>
-            <a:r>
-              <a:rPr lang="en-US" dirty="0"/>
-              <a:t/>
-            </a:r>
             <a:endParaRPr lang="en-US" dirty="0"/>
           </a:p>
         </p:txBody>
@@ -1745,10 +1433,6 @@
           <a:bodyPr/>
           <a:lstStyle/>
           <a:p>
-            <a:r>
-              <a:rPr lang="en-US" dirty="0"/>
-              <a:t/>
-            </a:r>
             <a:endParaRPr lang="en-US" dirty="0"/>
           </a:p>
         </p:txBody>
@@ -1833,10 +1517,6 @@
           <a:bodyPr/>
           <a:lstStyle/>
           <a:p>
-            <a:r>
-              <a:rPr lang="en-US" dirty="0"/>
-              <a:t/>
-            </a:r>
             <a:endParaRPr lang="en-US" dirty="0"/>
           </a:p>
         </p:txBody>
@@ -1921,10 +1601,6 @@
           <a:bodyPr/>
           <a:lstStyle/>
           <a:p>
-            <a:r>
-              <a:rPr lang="en-US" dirty="0"/>
-              <a:t/>
-            </a:r>
             <a:endParaRPr lang="en-US" dirty="0"/>
           </a:p>
         </p:txBody>
@@ -1998,6 +1674,11 @@
 <file path=ppt/slideMasters/slideMaster1.xml><?xml version="1.0" encoding="utf-8"?>
 <p:sldMaster xmlns:a="http://schemas.openxmlformats.org/drawingml/2006/main" xmlns:r="http://schemas.openxmlformats.org/officeDocument/2006/relationships" xmlns:p="http://schemas.openxmlformats.org/presentationml/2006/main">
   <p:cSld>
+    <p:bg>
+      <p:bgRef idx="1001">
+        <a:schemeClr val="bg1"/>
+      </p:bgRef>
+    </p:bg>
     <p:spTree>
       <p:nvGrpSpPr>
         <p:cNvPr id="1" name=""/>
@@ -2280,6 +1961,7 @@
         <a:solidFill>
           <a:srgbClr val="10162B"/>
         </a:solidFill>
+        <a:effectLst/>
       </p:bgPr>
     </p:bg>
     <p:spTree>
@@ -2361,20 +2043,9 @@
           <a:bodyPr wrap="square" lIns="0" tIns="0" rIns="0" bIns="0" rtlCol="0" anchor="ctr"/>
           <a:lstStyle/>
           <a:p>
-            <a:pPr indent="0" marL="0">
+            <a:pPr marL="0" indent="0">
               <a:buNone/>
             </a:pPr>
-            <a:r>
-              <a:rPr lang="en-US" sz="1300" b="1" spc="200" kern="0" dirty="0">
-                <a:solidFill>
-                  <a:srgbClr val="D4AF37"/>
-                </a:solidFill>
-                <a:latin typeface="Calibri" pitchFamily="34" charset="0"/>
-                <a:ea typeface="Calibri" pitchFamily="34" charset="-122"/>
-                <a:cs typeface="Calibri" pitchFamily="34" charset="-120"/>
-              </a:rPr>
-              <a:t>TRABALHO DE CONCLUSÃO DE CURSO</a:t>
-            </a:r>
             <a:endParaRPr lang="en-US" sz="1300" dirty="0"/>
           </a:p>
         </p:txBody>
@@ -2400,7 +2071,7 @@
           <a:bodyPr wrap="square" lIns="0" tIns="0" rIns="0" bIns="0" rtlCol="0" anchor="ctr"/>
           <a:lstStyle/>
           <a:p>
-            <a:pPr indent="0" marL="0">
+            <a:pPr marL="0" indent="0">
               <a:buNone/>
             </a:pPr>
             <a:r>
@@ -2439,7 +2110,7 @@
           <a:bodyPr wrap="square" lIns="0" tIns="0" rIns="0" bIns="0" rtlCol="0" anchor="ctr"/>
           <a:lstStyle/>
           <a:p>
-            <a:pPr indent="0" marL="0">
+            <a:pPr marL="0" indent="0">
               <a:buNone/>
             </a:pPr>
             <a:r>
@@ -2501,7 +2172,7 @@
           <a:bodyPr wrap="square" lIns="0" tIns="0" rIns="0" bIns="0" rtlCol="0" anchor="ctr"/>
           <a:lstStyle/>
           <a:p>
-            <a:pPr indent="0" marL="0">
+            <a:pPr marL="0" indent="0">
               <a:buNone/>
             </a:pPr>
             <a:r>
@@ -2521,14 +2192,14 @@
       </p:sp>
       <p:pic>
         <p:nvPicPr>
-          <p:cNvPr id="9" name="Image 0" descr="/home/claude/knapsack_pptx/icons/gradcap_gold.png">    </p:cNvPr>
+          <p:cNvPr id="9" name="Image 0" descr="/home/claude/knapsack_pptx/icons/gradcap_gold.png"/>
           <p:cNvPicPr>
             <a:picLocks noChangeAspect="1"/>
           </p:cNvPicPr>
           <p:nvPr/>
         </p:nvPicPr>
         <p:blipFill>
-          <a:blip r:embed="rId1"/>
+          <a:blip r:embed="rId3"/>
           <a:stretch>
             <a:fillRect/>
           </a:stretch>
@@ -2564,7 +2235,7 @@
           <a:bodyPr wrap="square" lIns="0" tIns="0" rIns="0" bIns="0" rtlCol="0" anchor="t"/>
           <a:lstStyle/>
           <a:p>
-            <a:pPr indent="0" marL="0">
+            <a:pPr marL="0" indent="0">
               <a:lnSpc>
                 <a:spcPts val="2000"/>
               </a:lnSpc>
@@ -2579,15 +2250,41 @@
                 <a:ea typeface="Calibri" pitchFamily="34" charset="-122"/>
                 <a:cs typeface="Calibri" pitchFamily="34" charset="-120"/>
               </a:rPr>
-              <a:t>Maycon
+              <a:t>Maycon Luís Franco Carpes</a:t>
+            </a:r>
+            <a:br>
+              <a:rPr lang="en-US" sz="1600" b="1" dirty="0">
+                <a:solidFill>
+                  <a:srgbClr val="FFFFFF"/>
+                </a:solidFill>
+                <a:latin typeface="Calibri" pitchFamily="34" charset="0"/>
+                <a:ea typeface="Calibri" pitchFamily="34" charset="-122"/>
+                <a:cs typeface="Calibri" pitchFamily="34" charset="-120"/>
+              </a:rPr>
+            </a:br>
+            <a:r>
+              <a:rPr lang="en-US" sz="1600" b="1" dirty="0" err="1">
+                <a:solidFill>
+                  <a:srgbClr val="FFFFFF"/>
+                </a:solidFill>
+                <a:latin typeface="Calibri" pitchFamily="34" charset="0"/>
+                <a:ea typeface="Calibri" pitchFamily="34" charset="-122"/>
+                <a:cs typeface="Calibri" pitchFamily="34" charset="-120"/>
+              </a:rPr>
+              <a:t>Cauã</a:t>
+            </a:r>
+            <a:r>
+              <a:rPr lang="en-US" sz="1600" b="1" dirty="0">
+                <a:solidFill>
+                  <a:srgbClr val="FFFFFF"/>
+                </a:solidFill>
+                <a:latin typeface="Calibri" pitchFamily="34" charset="0"/>
+                <a:ea typeface="Calibri" pitchFamily="34" charset="-122"/>
+                <a:cs typeface="Calibri" pitchFamily="34" charset="-120"/>
+              </a:rPr>
+              <a:t> Fortes Vieira
 </a:t>
             </a:r>
-            <a:pPr indent="0" marL="0">
-              <a:lnSpc>
-                <a:spcPts val="2000"/>
-              </a:lnSpc>
-              <a:buNone/>
-            </a:pPr>
             <a:r>
               <a:rPr lang="en-US" sz="1300" dirty="0">
                 <a:solidFill>
@@ -2600,23 +2297,6 @@
               <a:t>Sistemas de Informação — IFSULDEMINAS, Campus Machado
 </a:t>
             </a:r>
-            <a:pPr indent="0" marL="0">
-              <a:lnSpc>
-                <a:spcPts val="2000"/>
-              </a:lnSpc>
-              <a:buNone/>
-            </a:pPr>
-            <a:r>
-              <a:rPr lang="en-US" sz="1300" dirty="0">
-                <a:solidFill>
-                  <a:srgbClr val="9BA6C4"/>
-                </a:solidFill>
-                <a:latin typeface="Calibri" pitchFamily="34" charset="0"/>
-                <a:ea typeface="Calibri" pitchFamily="34" charset="-122"/>
-                <a:cs typeface="Calibri" pitchFamily="34" charset="-120"/>
-              </a:rPr>
-              <a:t>Orientadora: Profª. Drª. Daniela Augusta Guimarães Dias</a:t>
-            </a:r>
             <a:endParaRPr lang="en-US" sz="1600" dirty="0"/>
           </a:p>
         </p:txBody>
@@ -2642,7 +2322,7 @@
           <a:bodyPr wrap="square" lIns="0" tIns="0" rIns="0" bIns="0" rtlCol="0" anchor="ctr"/>
           <a:lstStyle/>
           <a:p>
-            <a:pPr algn="r" indent="0" marL="0">
+            <a:pPr marL="0" indent="0" algn="r">
               <a:buNone/>
             </a:pPr>
             <a:r>
@@ -2676,6 +2356,7 @@
         <a:solidFill>
           <a:srgbClr val="FFFFFF"/>
         </a:solidFill>
+        <a:effectLst/>
       </p:bgPr>
     </p:bg>
     <p:spTree>
@@ -2713,11 +2394,11 @@
           <a:bodyPr wrap="square" lIns="0" tIns="0" rIns="0" bIns="0" rtlCol="0" anchor="ctr"/>
           <a:lstStyle/>
           <a:p>
-            <a:pPr algn="l" indent="0" marL="0">
+            <a:pPr marL="0" indent="0" algn="l">
               <a:buNone/>
             </a:pPr>
             <a:r>
-              <a:rPr lang="en-US" sz="1200" b="1" spc="200" kern="0" dirty="0">
+              <a:rPr lang="en-US" sz="1200" b="1" kern="0" spc="200" dirty="0">
                 <a:solidFill>
                   <a:srgbClr val="D4AF37"/>
                 </a:solidFill>
@@ -2752,7 +2433,7 @@
           <a:bodyPr wrap="square" lIns="0" tIns="0" rIns="0" bIns="0" rtlCol="0" anchor="ctr"/>
           <a:lstStyle/>
           <a:p>
-            <a:pPr indent="0" marL="0">
+            <a:pPr marL="0" indent="0">
               <a:buNone/>
             </a:pPr>
             <a:r>
@@ -2799,14 +2480,14 @@
       </p:sp>
       <p:pic>
         <p:nvPicPr>
-          <p:cNvPr id="5" name="Image 0" descr="/home/claude/knapsack_pptx/icons/clock_navy.png">    </p:cNvPr>
+          <p:cNvPr id="5" name="Image 0" descr="/home/claude/knapsack_pptx/icons/clock_navy.png"/>
           <p:cNvPicPr>
             <a:picLocks noChangeAspect="1"/>
           </p:cNvPicPr>
           <p:nvPr/>
         </p:nvPicPr>
         <p:blipFill>
-          <a:blip r:embed="rId1"/>
+          <a:blip r:embed="rId3"/>
           <a:stretch>
             <a:fillRect/>
           </a:stretch>
@@ -2842,7 +2523,7 @@
           <a:bodyPr wrap="square" lIns="0" tIns="0" rIns="0" bIns="0" rtlCol="0" anchor="ctr"/>
           <a:lstStyle/>
           <a:p>
-            <a:pPr indent="0" marL="0">
+            <a:pPr marL="0" indent="0">
               <a:buNone/>
             </a:pPr>
             <a:r>
@@ -2881,7 +2562,7 @@
           <a:bodyPr wrap="square" lIns="0" tIns="0" rIns="0" bIns="0" rtlCol="0" anchor="t"/>
           <a:lstStyle/>
           <a:p>
-            <a:pPr indent="0" marL="0">
+            <a:pPr marL="0" indent="0">
               <a:lnSpc>
                 <a:spcPts val="1700"/>
               </a:lnSpc>
@@ -2898,12 +2579,6 @@
               </a:rPr>
               <a:t>Tabu é mais rápido em instâncias pequenas (</a:t>
             </a:r>
-            <a:pPr indent="0" marL="0">
-              <a:lnSpc>
-                <a:spcPts val="1700"/>
-              </a:lnSpc>
-              <a:buNone/>
-            </a:pPr>
             <a:r>
               <a:rPr lang="en-US" sz="1250" b="1" dirty="0">
                 <a:solidFill>
@@ -2915,12 +2590,6 @@
               </a:rPr>
               <a:t>0.001s</a:t>
             </a:r>
-            <a:pPr indent="0" marL="0">
-              <a:lnSpc>
-                <a:spcPts val="1700"/>
-              </a:lnSpc>
-              <a:buNone/>
-            </a:pPr>
             <a:r>
               <a:rPr lang="en-US" sz="1250" dirty="0">
                 <a:solidFill>
@@ -2932,12 +2601,6 @@
               </a:rPr>
               <a:t> vs </a:t>
             </a:r>
-            <a:pPr indent="0" marL="0">
-              <a:lnSpc>
-                <a:spcPts val="1700"/>
-              </a:lnSpc>
-              <a:buNone/>
-            </a:pPr>
             <a:r>
               <a:rPr lang="en-US" sz="1250" b="1" dirty="0">
                 <a:solidFill>
@@ -2949,12 +2612,6 @@
               </a:rPr>
               <a:t>0.02s</a:t>
             </a:r>
-            <a:pPr indent="0" marL="0">
-              <a:lnSpc>
-                <a:spcPts val="1700"/>
-              </a:lnSpc>
-              <a:buNone/>
-            </a:pPr>
             <a:r>
               <a:rPr lang="en-US" sz="1250" dirty="0">
                 <a:solidFill>
@@ -2999,14 +2656,14 @@
       </p:sp>
       <p:pic>
         <p:nvPicPr>
-          <p:cNvPr id="9" name="Image 1" descr="/home/claude/knapsack_pptx/icons/chartline_navy.png">    </p:cNvPr>
+          <p:cNvPr id="9" name="Image 1" descr="/home/claude/knapsack_pptx/icons/chartline_navy.png"/>
           <p:cNvPicPr>
             <a:picLocks noChangeAspect="1"/>
           </p:cNvPicPr>
           <p:nvPr/>
         </p:nvPicPr>
         <p:blipFill>
-          <a:blip r:embed="rId2"/>
+          <a:blip r:embed="rId4"/>
           <a:stretch>
             <a:fillRect/>
           </a:stretch>
@@ -3042,7 +2699,7 @@
           <a:bodyPr wrap="square" lIns="0" tIns="0" rIns="0" bIns="0" rtlCol="0" anchor="ctr"/>
           <a:lstStyle/>
           <a:p>
-            <a:pPr indent="0" marL="0">
+            <a:pPr marL="0" indent="0">
               <a:buNone/>
             </a:pPr>
             <a:r>
@@ -3081,7 +2738,7 @@
           <a:bodyPr wrap="square" lIns="0" tIns="0" rIns="0" bIns="0" rtlCol="0" anchor="t"/>
           <a:lstStyle/>
           <a:p>
-            <a:pPr indent="0" marL="0">
+            <a:pPr marL="0" indent="0">
               <a:lnSpc>
                 <a:spcPts val="1700"/>
               </a:lnSpc>
@@ -3098,12 +2755,6 @@
               </a:rPr>
               <a:t>Tabu converge rapidamente graças à inicialização gulosa; o AG converge de forma gradual, sustentado pela </a:t>
             </a:r>
-            <a:pPr indent="0" marL="0">
-              <a:lnSpc>
-                <a:spcPts val="1700"/>
-              </a:lnSpc>
-              <a:buNone/>
-            </a:pPr>
             <a:r>
               <a:rPr lang="en-US" sz="1250" b="1" dirty="0">
                 <a:solidFill>
@@ -3115,12 +2766,6 @@
               </a:rPr>
               <a:t>diversidade populacional</a:t>
             </a:r>
-            <a:pPr indent="0" marL="0">
-              <a:lnSpc>
-                <a:spcPts val="1700"/>
-              </a:lnSpc>
-              <a:buNone/>
-            </a:pPr>
             <a:r>
               <a:rPr lang="en-US" sz="1250" dirty="0">
                 <a:solidFill>
@@ -3157,7 +2802,7 @@
           <a:bodyPr wrap="square" lIns="0" tIns="0" rIns="0" bIns="0" rtlCol="0" anchor="ctr"/>
           <a:lstStyle/>
           <a:p>
-            <a:pPr indent="0" marL="0">
+            <a:pPr marL="0" indent="0">
               <a:buNone/>
             </a:pPr>
             <a:r>
@@ -3177,7 +2822,7 @@
       </p:sp>
       <p:graphicFrame>
         <p:nvGraphicFramePr>
-          <p:cNvPr id="13" name="Chart 0" descr=""/>
+          <p:cNvPr id="13" name="Chart 0"/>
           <p:cNvGraphicFramePr/>
           <p:nvPr/>
         </p:nvGraphicFramePr>
@@ -3185,9 +2830,9 @@
           <a:off x="5852160" y="1965960"/>
           <a:ext cx="5760720" cy="3291840"/>
         </p:xfrm>
-        <a:graphic xmlns:a="http://schemas.openxmlformats.org/drawingml/2006/main">
+        <a:graphic>
           <a:graphicData uri="http://schemas.openxmlformats.org/drawingml/2006/chart">
-            <c:chart xmlns:c="http://schemas.openxmlformats.org/drawingml/2006/chart" r:id="rId3"/>
+            <c:chart xmlns:c="http://schemas.openxmlformats.org/drawingml/2006/chart" xmlns:r="http://schemas.openxmlformats.org/officeDocument/2006/relationships" r:id="rId5"/>
           </a:graphicData>
         </a:graphic>
       </p:graphicFrame>
@@ -3212,7 +2857,7 @@
           <a:bodyPr wrap="square" lIns="0" tIns="0" rIns="0" bIns="0" rtlCol="0" anchor="ctr"/>
           <a:lstStyle/>
           <a:p>
-            <a:pPr indent="0" marL="0">
+            <a:pPr marL="0" indent="0">
               <a:buNone/>
             </a:pPr>
             <a:r>
@@ -3251,7 +2896,7 @@
           <a:bodyPr wrap="square" lIns="0" tIns="0" rIns="0" bIns="0" rtlCol="0" anchor="ctr"/>
           <a:lstStyle/>
           <a:p>
-            <a:pPr algn="r" indent="0" marL="0">
+            <a:pPr marL="0" indent="0" algn="r">
               <a:buNone/>
             </a:pPr>
             <a:r>
@@ -3285,6 +2930,7 @@
         <a:solidFill>
           <a:srgbClr val="10162B"/>
         </a:solidFill>
+        <a:effectLst/>
       </p:bgPr>
     </p:bg>
     <p:spTree>
@@ -3322,11 +2968,11 @@
           <a:bodyPr wrap="square" lIns="0" tIns="0" rIns="0" bIns="0" rtlCol="0" anchor="ctr"/>
           <a:lstStyle/>
           <a:p>
-            <a:pPr algn="l" indent="0" marL="0">
+            <a:pPr marL="0" indent="0" algn="l">
               <a:buNone/>
             </a:pPr>
             <a:r>
-              <a:rPr lang="en-US" sz="1200" b="1" spc="200" kern="0" dirty="0">
+              <a:rPr lang="en-US" sz="1200" b="1" kern="0" spc="200" dirty="0">
                 <a:solidFill>
                   <a:srgbClr val="D4AF37"/>
                 </a:solidFill>
@@ -3361,7 +3007,7 @@
           <a:bodyPr wrap="square" lIns="0" tIns="0" rIns="0" bIns="0" rtlCol="0" anchor="ctr"/>
           <a:lstStyle/>
           <a:p>
-            <a:pPr algn="l" indent="0" marL="0">
+            <a:pPr marL="0" indent="0" algn="l">
               <a:buNone/>
             </a:pPr>
             <a:r>
@@ -3428,14 +3074,14 @@
       </p:sp>
       <p:pic>
         <p:nvPicPr>
-          <p:cNvPr id="6" name="Image 0" descr="/home/claude/knapsack_pptx/icons/check_gold.png">    </p:cNvPr>
+          <p:cNvPr id="6" name="Image 0" descr="/home/claude/knapsack_pptx/icons/check_gold.png"/>
           <p:cNvPicPr>
             <a:picLocks noChangeAspect="1"/>
           </p:cNvPicPr>
           <p:nvPr/>
         </p:nvPicPr>
         <p:blipFill>
-          <a:blip r:embed="rId1"/>
+          <a:blip r:embed="rId3"/>
           <a:stretch>
             <a:fillRect/>
           </a:stretch>
@@ -3471,7 +3117,7 @@
           <a:bodyPr wrap="square" lIns="0" tIns="0" rIns="0" bIns="0" rtlCol="0" anchor="t"/>
           <a:lstStyle/>
           <a:p>
-            <a:pPr indent="0" marL="0">
+            <a:pPr marL="0" indent="0">
               <a:buNone/>
             </a:pPr>
             <a:r>
@@ -3510,7 +3156,7 @@
           <a:bodyPr wrap="square" lIns="0" tIns="0" rIns="0" bIns="0" rtlCol="0" anchor="t"/>
           <a:lstStyle/>
           <a:p>
-            <a:pPr indent="0" marL="0">
+            <a:pPr marL="0" indent="0">
               <a:buNone/>
             </a:pPr>
             <a:r>
@@ -3577,14 +3223,14 @@
       </p:sp>
       <p:pic>
         <p:nvPicPr>
-          <p:cNvPr id="11" name="Image 1" descr="/home/claude/knapsack_pptx/icons/clock_ice.png">    </p:cNvPr>
+          <p:cNvPr id="11" name="Image 1" descr="/home/claude/knapsack_pptx/icons/clock_ice.png"/>
           <p:cNvPicPr>
             <a:picLocks noChangeAspect="1"/>
           </p:cNvPicPr>
           <p:nvPr/>
         </p:nvPicPr>
         <p:blipFill>
-          <a:blip r:embed="rId2"/>
+          <a:blip r:embed="rId4"/>
           <a:stretch>
             <a:fillRect/>
           </a:stretch>
@@ -3620,7 +3266,7 @@
           <a:bodyPr wrap="square" lIns="0" tIns="0" rIns="0" bIns="0" rtlCol="0" anchor="t"/>
           <a:lstStyle/>
           <a:p>
-            <a:pPr indent="0" marL="0">
+            <a:pPr marL="0" indent="0">
               <a:buNone/>
             </a:pPr>
             <a:r>
@@ -3659,7 +3305,7 @@
           <a:bodyPr wrap="square" lIns="0" tIns="0" rIns="0" bIns="0" rtlCol="0" anchor="t"/>
           <a:lstStyle/>
           <a:p>
-            <a:pPr indent="0" marL="0">
+            <a:pPr marL="0" indent="0">
               <a:buNone/>
             </a:pPr>
             <a:r>
@@ -3726,14 +3372,14 @@
       </p:sp>
       <p:pic>
         <p:nvPicPr>
-          <p:cNvPr id="16" name="Image 2" descr="/home/claude/knapsack_pptx/icons/layers_ice.png">    </p:cNvPr>
+          <p:cNvPr id="16" name="Image 2" descr="/home/claude/knapsack_pptx/icons/layers_ice.png"/>
           <p:cNvPicPr>
             <a:picLocks noChangeAspect="1"/>
           </p:cNvPicPr>
           <p:nvPr/>
         </p:nvPicPr>
         <p:blipFill>
-          <a:blip r:embed="rId3"/>
+          <a:blip r:embed="rId5"/>
           <a:stretch>
             <a:fillRect/>
           </a:stretch>
@@ -3769,7 +3415,7 @@
           <a:bodyPr wrap="square" lIns="0" tIns="0" rIns="0" bIns="0" rtlCol="0" anchor="t"/>
           <a:lstStyle/>
           <a:p>
-            <a:pPr indent="0" marL="0">
+            <a:pPr marL="0" indent="0">
               <a:buNone/>
             </a:pPr>
             <a:r>
@@ -3808,7 +3454,7 @@
           <a:bodyPr wrap="square" lIns="0" tIns="0" rIns="0" bIns="0" rtlCol="0" anchor="t"/>
           <a:lstStyle/>
           <a:p>
-            <a:pPr indent="0" marL="0">
+            <a:pPr marL="0" indent="0">
               <a:buNone/>
             </a:pPr>
             <a:r>
@@ -3875,14 +3521,14 @@
       </p:sp>
       <p:pic>
         <p:nvPicPr>
-          <p:cNvPr id="21" name="Image 3" descr="/home/claude/knapsack_pptx/icons/target_gold.png">    </p:cNvPr>
+          <p:cNvPr id="21" name="Image 3" descr="/home/claude/knapsack_pptx/icons/target_gold.png"/>
           <p:cNvPicPr>
             <a:picLocks noChangeAspect="1"/>
           </p:cNvPicPr>
           <p:nvPr/>
         </p:nvPicPr>
         <p:blipFill>
-          <a:blip r:embed="rId4"/>
+          <a:blip r:embed="rId6"/>
           <a:stretch>
             <a:fillRect/>
           </a:stretch>
@@ -3918,7 +3564,7 @@
           <a:bodyPr wrap="square" lIns="0" tIns="0" rIns="0" bIns="0" rtlCol="0" anchor="t"/>
           <a:lstStyle/>
           <a:p>
-            <a:pPr indent="0" marL="0">
+            <a:pPr marL="0" indent="0">
               <a:buNone/>
             </a:pPr>
             <a:r>
@@ -3957,7 +3603,7 @@
           <a:bodyPr wrap="square" lIns="0" tIns="0" rIns="0" bIns="0" rtlCol="0" anchor="t"/>
           <a:lstStyle/>
           <a:p>
-            <a:pPr indent="0" marL="0">
+            <a:pPr marL="0" indent="0">
               <a:buNone/>
             </a:pPr>
             <a:r>
@@ -3996,7 +3642,7 @@
           <a:bodyPr wrap="square" lIns="0" tIns="0" rIns="0" bIns="0" rtlCol="0" anchor="ctr"/>
           <a:lstStyle/>
           <a:p>
-            <a:pPr algn="r" indent="0" marL="0">
+            <a:pPr marL="0" indent="0" algn="r">
               <a:buNone/>
             </a:pPr>
             <a:r>
@@ -4030,6 +3676,7 @@
         <a:solidFill>
           <a:srgbClr val="10162B"/>
         </a:solidFill>
+        <a:effectLst/>
       </p:bgPr>
     </p:bg>
     <p:spTree>
@@ -4089,7 +3736,7 @@
           <a:bodyPr wrap="square" lIns="0" tIns="0" rIns="0" bIns="0" rtlCol="0" anchor="ctr"/>
           <a:lstStyle/>
           <a:p>
-            <a:pPr indent="0" marL="0">
+            <a:pPr marL="0" indent="0">
               <a:buNone/>
             </a:pPr>
             <a:r>
@@ -4128,7 +3775,7 @@
           <a:bodyPr wrap="square" lIns="0" tIns="0" rIns="0" bIns="0" rtlCol="0" anchor="ctr"/>
           <a:lstStyle/>
           <a:p>
-            <a:pPr indent="0" marL="0">
+            <a:pPr marL="0" indent="0">
               <a:buNone/>
             </a:pPr>
             <a:r>
@@ -4190,11 +3837,11 @@
           <a:bodyPr wrap="square" lIns="0" tIns="0" rIns="0" bIns="0" rtlCol="0" anchor="ctr"/>
           <a:lstStyle/>
           <a:p>
-            <a:pPr indent="0" marL="0">
+            <a:pPr marL="0" indent="0">
               <a:buNone/>
             </a:pPr>
             <a:r>
-              <a:rPr lang="en-US" sz="1200" b="1" spc="200" kern="0" dirty="0">
+              <a:rPr lang="en-US" sz="1200" b="1" kern="0" spc="200" dirty="0">
                 <a:solidFill>
                   <a:srgbClr val="D4AF37"/>
                 </a:solidFill>
@@ -4210,14 +3857,14 @@
       </p:sp>
       <p:pic>
         <p:nvPicPr>
-          <p:cNvPr id="7" name="Image 0" descr="/home/claude/knapsack_pptx/icons/table_ice.png">    </p:cNvPr>
+          <p:cNvPr id="7" name="Image 0" descr="/home/claude/knapsack_pptx/icons/table_ice.png"/>
           <p:cNvPicPr>
             <a:picLocks noChangeAspect="1"/>
           </p:cNvPicPr>
           <p:nvPr/>
         </p:nvPicPr>
         <p:blipFill>
-          <a:blip r:embed="rId1"/>
+          <a:blip r:embed="rId3"/>
           <a:stretch>
             <a:fillRect/>
           </a:stretch>
@@ -4253,7 +3900,7 @@
           <a:bodyPr wrap="square" lIns="0" tIns="0" rIns="0" bIns="0" rtlCol="0" anchor="t"/>
           <a:lstStyle/>
           <a:p>
-            <a:pPr indent="0" marL="0">
+            <a:pPr marL="0" indent="0">
               <a:lnSpc>
                 <a:spcPts val="1500"/>
               </a:lnSpc>
@@ -4271,12 +3918,6 @@
               <a:t>Dados das instâncias
 </a:t>
             </a:r>
-            <a:pPr indent="0" marL="0">
-              <a:lnSpc>
-                <a:spcPts val="1500"/>
-              </a:lnSpc>
-              <a:buNone/>
-            </a:pPr>
             <a:r>
               <a:rPr lang="en-US" sz="1200" dirty="0">
                 <a:solidFill>
@@ -4294,14 +3935,14 @@
       </p:sp>
       <p:pic>
         <p:nvPicPr>
-          <p:cNvPr id="9" name="Image 1" descr="/home/claude/knapsack_pptx/icons/code_ice.png">    </p:cNvPr>
+          <p:cNvPr id="9" name="Image 1" descr="/home/claude/knapsack_pptx/icons/code_ice.png"/>
           <p:cNvPicPr>
             <a:picLocks noChangeAspect="1"/>
           </p:cNvPicPr>
           <p:nvPr/>
         </p:nvPicPr>
         <p:blipFill>
-          <a:blip r:embed="rId2"/>
+          <a:blip r:embed="rId4"/>
           <a:stretch>
             <a:fillRect/>
           </a:stretch>
@@ -4337,7 +3978,7 @@
           <a:bodyPr wrap="square" lIns="0" tIns="0" rIns="0" bIns="0" rtlCol="0" anchor="t"/>
           <a:lstStyle/>
           <a:p>
-            <a:pPr indent="0" marL="0">
+            <a:pPr marL="0" indent="0">
               <a:lnSpc>
                 <a:spcPts val="1500"/>
               </a:lnSpc>
@@ -4355,12 +3996,6 @@
               <a:t>Linguagem de implementação
 </a:t>
             </a:r>
-            <a:pPr indent="0" marL="0">
-              <a:lnSpc>
-                <a:spcPts val="1500"/>
-              </a:lnSpc>
-              <a:buNone/>
-            </a:pPr>
             <a:r>
               <a:rPr lang="en-US" sz="1200" dirty="0">
                 <a:solidFill>
@@ -4378,14 +4013,14 @@
       </p:sp>
       <p:pic>
         <p:nvPicPr>
-          <p:cNvPr id="11" name="Image 2" descr="/home/claude/knapsack_pptx/icons/filecode_ice.png">    </p:cNvPr>
+          <p:cNvPr id="11" name="Image 2" descr="/home/claude/knapsack_pptx/icons/filecode_ice.png"/>
           <p:cNvPicPr>
             <a:picLocks noChangeAspect="1"/>
           </p:cNvPicPr>
           <p:nvPr/>
         </p:nvPicPr>
         <p:blipFill>
-          <a:blip r:embed="rId3"/>
+          <a:blip r:embed="rId5"/>
           <a:stretch>
             <a:fillRect/>
           </a:stretch>
@@ -4421,7 +4056,7 @@
           <a:bodyPr wrap="square" lIns="0" tIns="0" rIns="0" bIns="0" rtlCol="0" anchor="t"/>
           <a:lstStyle/>
           <a:p>
-            <a:pPr indent="0" marL="0">
+            <a:pPr marL="0" indent="0">
               <a:lnSpc>
                 <a:spcPts val="1500"/>
               </a:lnSpc>
@@ -4439,12 +4074,6 @@
               <a:t>Saídas geradas
 </a:t>
             </a:r>
-            <a:pPr indent="0" marL="0">
-              <a:lnSpc>
-                <a:spcPts val="1500"/>
-              </a:lnSpc>
-              <a:buNone/>
-            </a:pPr>
             <a:r>
               <a:rPr lang="en-US" sz="1200" dirty="0">
                 <a:solidFill>
@@ -4489,14 +4118,14 @@
       </p:sp>
       <p:pic>
         <p:nvPicPr>
-          <p:cNvPr id="14" name="Image 3" descr="/home/claude/knapsack_pptx/icons/gradcap_gold.png">    </p:cNvPr>
+          <p:cNvPr id="14" name="Image 3" descr="/home/claude/knapsack_pptx/icons/gradcap_gold.png"/>
           <p:cNvPicPr>
             <a:picLocks noChangeAspect="1"/>
           </p:cNvPicPr>
           <p:nvPr/>
         </p:nvPicPr>
         <p:blipFill>
-          <a:blip r:embed="rId4"/>
+          <a:blip r:embed="rId6"/>
           <a:stretch>
             <a:fillRect/>
           </a:stretch>
@@ -4532,7 +4161,7 @@
           <a:bodyPr wrap="square" lIns="0" tIns="0" rIns="0" bIns="0" rtlCol="0" anchor="t"/>
           <a:lstStyle/>
           <a:p>
-            <a:pPr indent="0" marL="0">
+            <a:pPr marL="0" indent="0">
               <a:lnSpc>
                 <a:spcPts val="1600"/>
               </a:lnSpc>
@@ -4550,12 +4179,6 @@
               <a:t>Maycon
 </a:t>
             </a:r>
-            <a:pPr indent="0" marL="0">
-              <a:lnSpc>
-                <a:spcPts val="1600"/>
-              </a:lnSpc>
-              <a:buNone/>
-            </a:pPr>
             <a:r>
               <a:rPr lang="en-US" sz="1150" dirty="0">
                 <a:solidFill>
@@ -4566,24 +4189,7 @@
                 <a:cs typeface="Calibri" pitchFamily="34" charset="-120"/>
               </a:rPr>
               <a:t>Sistemas de Informação
-</a:t>
-            </a:r>
-            <a:pPr indent="0" marL="0">
-              <a:lnSpc>
-                <a:spcPts val="1600"/>
-              </a:lnSpc>
-              <a:buNone/>
-            </a:pPr>
-            <a:r>
-              <a:rPr lang="en-US" sz="1150" dirty="0">
-                <a:solidFill>
-                  <a:srgbClr val="9BA6C4"/>
-                </a:solidFill>
-                <a:latin typeface="Calibri" pitchFamily="34" charset="0"/>
-                <a:ea typeface="Calibri" pitchFamily="34" charset="-122"/>
-                <a:cs typeface="Calibri" pitchFamily="34" charset="-120"/>
-              </a:rPr>
-              <a:t>IFSULDEMINAS — Campus Machado</a:t>
+IFSULDEMINAS — Campus Machado</a:t>
             </a:r>
             <a:endParaRPr lang="en-US" sz="1500" dirty="0"/>
           </a:p>
@@ -4610,7 +4216,7 @@
           <a:bodyPr wrap="square" lIns="0" tIns="0" rIns="0" bIns="0" rtlCol="0" anchor="ctr"/>
           <a:lstStyle/>
           <a:p>
-            <a:pPr algn="r" indent="0" marL="0">
+            <a:pPr marL="0" indent="0" algn="r">
               <a:buNone/>
             </a:pPr>
             <a:r>
@@ -4644,6 +4250,7 @@
         <a:solidFill>
           <a:srgbClr val="FFFFFF"/>
         </a:solidFill>
+        <a:effectLst/>
       </p:bgPr>
     </p:bg>
     <p:spTree>
@@ -4681,11 +4288,11 @@
           <a:bodyPr wrap="square" lIns="0" tIns="0" rIns="0" bIns="0" rtlCol="0" anchor="ctr"/>
           <a:lstStyle/>
           <a:p>
-            <a:pPr algn="l" indent="0" marL="0">
+            <a:pPr marL="0" indent="0" algn="l">
               <a:buNone/>
             </a:pPr>
             <a:r>
-              <a:rPr lang="en-US" sz="1200" b="1" spc="200" kern="0" dirty="0">
+              <a:rPr lang="en-US" sz="1200" b="1" kern="0" spc="200" dirty="0">
                 <a:solidFill>
                   <a:srgbClr val="D4AF37"/>
                 </a:solidFill>
@@ -4720,7 +4327,7 @@
           <a:bodyPr wrap="square" lIns="0" tIns="0" rIns="0" bIns="0" rtlCol="0" anchor="ctr"/>
           <a:lstStyle/>
           <a:p>
-            <a:pPr indent="0" marL="0">
+            <a:pPr marL="0" indent="0">
               <a:buNone/>
             </a:pPr>
             <a:r>
@@ -4759,7 +4366,7 @@
           <a:bodyPr wrap="square" lIns="0" tIns="0" rIns="0" bIns="0" rtlCol="0" anchor="t"/>
           <a:lstStyle/>
           <a:p>
-            <a:pPr indent="0" marL="0">
+            <a:pPr marL="0" indent="0">
               <a:lnSpc>
                 <a:spcPts val="2400"/>
               </a:lnSpc>
@@ -4776,12 +4383,6 @@
               </a:rPr>
               <a:t>Dado um conjunto de N itens, cada um com peso </a:t>
             </a:r>
-            <a:pPr indent="0" marL="0">
-              <a:lnSpc>
-                <a:spcPts val="2400"/>
-              </a:lnSpc>
-              <a:buNone/>
-            </a:pPr>
             <a:r>
               <a:rPr lang="en-US" sz="1500" b="1" i="1" dirty="0">
                 <a:solidFill>
@@ -4793,12 +4394,6 @@
               </a:rPr>
               <a:t>wᵢ</a:t>
             </a:r>
-            <a:pPr indent="0" marL="0">
-              <a:lnSpc>
-                <a:spcPts val="2400"/>
-              </a:lnSpc>
-              <a:buNone/>
-            </a:pPr>
             <a:r>
               <a:rPr lang="en-US" sz="1500" dirty="0">
                 <a:solidFill>
@@ -4810,12 +4405,6 @@
               </a:rPr>
               <a:t> e lucro </a:t>
             </a:r>
-            <a:pPr indent="0" marL="0">
-              <a:lnSpc>
-                <a:spcPts val="2400"/>
-              </a:lnSpc>
-              <a:buNone/>
-            </a:pPr>
             <a:r>
               <a:rPr lang="en-US" sz="1500" b="1" i="1" dirty="0">
                 <a:solidFill>
@@ -4827,12 +4416,6 @@
               </a:rPr>
               <a:t>pᵢ</a:t>
             </a:r>
-            <a:pPr indent="0" marL="0">
-              <a:lnSpc>
-                <a:spcPts val="2400"/>
-              </a:lnSpc>
-              <a:buNone/>
-            </a:pPr>
             <a:r>
               <a:rPr lang="en-US" sz="1500" dirty="0">
                 <a:solidFill>
@@ -4844,12 +4427,6 @@
               </a:rPr>
               <a:t>, e uma mochila com capacidade </a:t>
             </a:r>
-            <a:pPr indent="0" marL="0">
-              <a:lnSpc>
-                <a:spcPts val="2400"/>
-              </a:lnSpc>
-              <a:buNone/>
-            </a:pPr>
             <a:r>
               <a:rPr lang="en-US" sz="1500" b="1" i="1" dirty="0">
                 <a:solidFill>
@@ -4861,12 +4438,6 @@
               </a:rPr>
               <a:t>C</a:t>
             </a:r>
-            <a:pPr indent="0" marL="0">
-              <a:lnSpc>
-                <a:spcPts val="2400"/>
-              </a:lnSpc>
-              <a:buNone/>
-            </a:pPr>
             <a:r>
               <a:rPr lang="en-US" sz="1500" dirty="0">
                 <a:solidFill>
@@ -4878,12 +4449,6 @@
               </a:rPr>
               <a:t>, o objetivo é selecionar o subconjunto de itens que </a:t>
             </a:r>
-            <a:pPr indent="0" marL="0">
-              <a:lnSpc>
-                <a:spcPts val="2400"/>
-              </a:lnSpc>
-              <a:buNone/>
-            </a:pPr>
             <a:r>
               <a:rPr lang="en-US" sz="1500" b="1" dirty="0">
                 <a:solidFill>
@@ -4895,12 +4460,6 @@
               </a:rPr>
               <a:t>maximize o lucro total</a:t>
             </a:r>
-            <a:pPr indent="0" marL="0">
-              <a:lnSpc>
-                <a:spcPts val="2400"/>
-              </a:lnSpc>
-              <a:buNone/>
-            </a:pPr>
             <a:r>
               <a:rPr lang="en-US" sz="1500" dirty="0">
                 <a:solidFill>
@@ -4964,7 +4523,7 @@
           <a:bodyPr wrap="square" lIns="0" tIns="0" rIns="0" bIns="0" rtlCol="0" anchor="ctr"/>
           <a:lstStyle/>
           <a:p>
-            <a:pPr algn="l" indent="0" marL="0">
+            <a:pPr marL="0" indent="0" algn="l">
               <a:buNone/>
             </a:pPr>
             <a:r>
@@ -4978,9 +4537,6 @@
               </a:rPr>
               <a:t>maximizar   </a:t>
             </a:r>
-            <a:pPr algn="l" indent="0" marL="0">
-              <a:buNone/>
-            </a:pPr>
             <a:r>
               <a:rPr lang="en-US" sz="1500" b="1" i="1" dirty="0">
                 <a:solidFill>
@@ -4992,9 +4548,6 @@
               </a:rPr>
               <a:t>Σ pᵢxᵢ</a:t>
             </a:r>
-            <a:pPr algn="l" indent="0" marL="0">
-              <a:buNone/>
-            </a:pPr>
             <a:r>
               <a:rPr lang="en-US" sz="1500" b="1" dirty="0">
                 <a:solidFill>
@@ -5006,9 +4559,6 @@
               </a:rPr>
               <a:t>        sujeito a   </a:t>
             </a:r>
-            <a:pPr algn="l" indent="0" marL="0">
-              <a:buNone/>
-            </a:pPr>
             <a:r>
               <a:rPr lang="en-US" sz="1500" b="1" i="1" dirty="0">
                 <a:solidFill>
@@ -5045,7 +4595,7 @@
           <a:bodyPr wrap="square" lIns="0" tIns="0" rIns="0" bIns="0" rtlCol="0" anchor="ctr"/>
           <a:lstStyle/>
           <a:p>
-            <a:pPr indent="0" marL="0">
+            <a:pPr marL="0" indent="0">
               <a:buNone/>
             </a:pPr>
             <a:r>
@@ -5087,14 +4637,14 @@
       </p:sp>
       <p:pic>
         <p:nvPicPr>
-          <p:cNvPr id="9" name="Image 0" descr="/home/claude/knapsack_pptx/icons/flask_gold.png">    </p:cNvPr>
+          <p:cNvPr id="9" name="Image 0" descr="/home/claude/knapsack_pptx/icons/flask_gold.png"/>
           <p:cNvPicPr>
             <a:picLocks noChangeAspect="1"/>
           </p:cNvPicPr>
           <p:nvPr/>
         </p:nvPicPr>
         <p:blipFill>
-          <a:blip r:embed="rId1"/>
+          <a:blip r:embed="rId3"/>
           <a:stretch>
             <a:fillRect/>
           </a:stretch>
@@ -5130,7 +4680,7 @@
           <a:bodyPr wrap="square" lIns="0" tIns="0" rIns="0" bIns="0" rtlCol="0" anchor="t"/>
           <a:lstStyle/>
           <a:p>
-            <a:pPr indent="0" marL="0">
+            <a:pPr marL="0" indent="0">
               <a:lnSpc>
                 <a:spcPts val="1400"/>
               </a:lnSpc>
@@ -5148,12 +4698,6 @@
               <a:t>Classe NP-Difícil
 </a:t>
             </a:r>
-            <a:pPr indent="0" marL="0">
-              <a:lnSpc>
-                <a:spcPts val="1400"/>
-              </a:lnSpc>
-              <a:buNone/>
-            </a:pPr>
             <a:r>
               <a:rPr lang="en-US" sz="1050" dirty="0">
                 <a:solidFill>
@@ -5291,55 +4835,7 @@
       </p:sp>
       <p:pic>
         <p:nvPicPr>
-          <p:cNvPr id="16" name="Image 1" descr="/home/claude/knapsack_pptx/icons/weight_navy.png">    </p:cNvPr>
-          <p:cNvPicPr>
-            <a:picLocks noChangeAspect="1"/>
-          </p:cNvPicPr>
-          <p:nvPr/>
-        </p:nvPicPr>
-        <p:blipFill>
-          <a:blip r:embed="rId2"/>
-          <a:stretch>
-            <a:fillRect/>
-          </a:stretch>
-        </p:blipFill>
-        <p:spPr>
-          <a:xfrm>
-            <a:off x="8915400" y="4343400"/>
-            <a:ext cx="384048" cy="384048"/>
-          </a:xfrm>
-          <a:prstGeom prst="rect">
-            <a:avLst/>
-          </a:prstGeom>
-        </p:spPr>
-      </p:pic>
-      <p:pic>
-        <p:nvPicPr>
-          <p:cNvPr id="17" name="Image 2" descr="/home/claude/knapsack_pptx/icons/coins_gold.png">    </p:cNvPr>
-          <p:cNvPicPr>
-            <a:picLocks noChangeAspect="1"/>
-          </p:cNvPicPr>
-          <p:nvPr/>
-        </p:nvPicPr>
-        <p:blipFill>
-          <a:blip r:embed="rId3"/>
-          <a:stretch>
-            <a:fillRect/>
-          </a:stretch>
-        </p:blipFill>
-        <p:spPr>
-          <a:xfrm>
-            <a:off x="7178040" y="2468880"/>
-            <a:ext cx="502920" cy="502920"/>
-          </a:xfrm>
-          <a:prstGeom prst="rect">
-            <a:avLst/>
-          </a:prstGeom>
-        </p:spPr>
-      </p:pic>
-      <p:pic>
-        <p:nvPicPr>
-          <p:cNvPr id="18" name="Image 3" descr="/home/claude/knapsack_pptx/icons/coins_gold.png">    </p:cNvPr>
+          <p:cNvPr id="16" name="Image 1" descr="/home/claude/knapsack_pptx/icons/weight_navy.png"/>
           <p:cNvPicPr>
             <a:picLocks noChangeAspect="1"/>
           </p:cNvPicPr>
@@ -5353,7 +4849,7 @@
         </p:blipFill>
         <p:spPr>
           <a:xfrm>
-            <a:off x="11109960" y="3291840"/>
+            <a:off x="8915400" y="4343400"/>
             <a:ext cx="384048" cy="384048"/>
           </a:xfrm>
           <a:prstGeom prst="rect">
@@ -5363,7 +4859,7 @@
       </p:pic>
       <p:pic>
         <p:nvPicPr>
-          <p:cNvPr id="19" name="Image 4" descr="/home/claude/knapsack_pptx/icons/weight_navy.png">    </p:cNvPr>
+          <p:cNvPr id="17" name="Image 2" descr="/home/claude/knapsack_pptx/icons/coins_gold.png"/>
           <p:cNvPicPr>
             <a:picLocks noChangeAspect="1"/>
           </p:cNvPicPr>
@@ -5377,6 +4873,54 @@
         </p:blipFill>
         <p:spPr>
           <a:xfrm>
+            <a:off x="7178040" y="2468880"/>
+            <a:ext cx="502920" cy="502920"/>
+          </a:xfrm>
+          <a:prstGeom prst="rect">
+            <a:avLst/>
+          </a:prstGeom>
+        </p:spPr>
+      </p:pic>
+      <p:pic>
+        <p:nvPicPr>
+          <p:cNvPr id="18" name="Image 3" descr="/home/claude/knapsack_pptx/icons/coins_gold.png"/>
+          <p:cNvPicPr>
+            <a:picLocks noChangeAspect="1"/>
+          </p:cNvPicPr>
+          <p:nvPr/>
+        </p:nvPicPr>
+        <p:blipFill>
+          <a:blip r:embed="rId5"/>
+          <a:stretch>
+            <a:fillRect/>
+          </a:stretch>
+        </p:blipFill>
+        <p:spPr>
+          <a:xfrm>
+            <a:off x="11109960" y="3291840"/>
+            <a:ext cx="384048" cy="384048"/>
+          </a:xfrm>
+          <a:prstGeom prst="rect">
+            <a:avLst/>
+          </a:prstGeom>
+        </p:spPr>
+      </p:pic>
+      <p:pic>
+        <p:nvPicPr>
+          <p:cNvPr id="19" name="Image 4" descr="/home/claude/knapsack_pptx/icons/weight_navy.png"/>
+          <p:cNvPicPr>
+            <a:picLocks noChangeAspect="1"/>
+          </p:cNvPicPr>
+          <p:nvPr/>
+        </p:nvPicPr>
+        <p:blipFill>
+          <a:blip r:embed="rId4"/>
+          <a:stretch>
+            <a:fillRect/>
+          </a:stretch>
+        </p:blipFill>
+        <p:spPr>
+          <a:xfrm>
             <a:off x="7223760" y="3931920"/>
             <a:ext cx="365760" cy="365760"/>
           </a:xfrm>
@@ -5406,7 +4950,7 @@
           <a:bodyPr wrap="square" lIns="0" tIns="0" rIns="0" bIns="0" rtlCol="0" anchor="ctr"/>
           <a:lstStyle/>
           <a:p>
-            <a:pPr algn="ctr" indent="0" marL="0">
+            <a:pPr marL="0" indent="0" algn="ctr">
               <a:buNone/>
             </a:pPr>
             <a:r>
@@ -5445,7 +4989,7 @@
           <a:bodyPr wrap="square" lIns="0" tIns="0" rIns="0" bIns="0" rtlCol="0" anchor="ctr"/>
           <a:lstStyle/>
           <a:p>
-            <a:pPr algn="r" indent="0" marL="0">
+            <a:pPr marL="0" indent="0" algn="r">
               <a:buNone/>
             </a:pPr>
             <a:r>
@@ -5479,6 +5023,7 @@
         <a:solidFill>
           <a:srgbClr val="10162B"/>
         </a:solidFill>
+        <a:effectLst/>
       </p:bgPr>
     </p:bg>
     <p:spTree>
@@ -5516,11 +5061,11 @@
           <a:bodyPr wrap="square" lIns="0" tIns="0" rIns="0" bIns="0" rtlCol="0" anchor="ctr"/>
           <a:lstStyle/>
           <a:p>
-            <a:pPr algn="l" indent="0" marL="0">
+            <a:pPr marL="0" indent="0" algn="l">
               <a:buNone/>
             </a:pPr>
             <a:r>
-              <a:rPr lang="en-US" sz="1200" b="1" spc="200" kern="0" dirty="0">
+              <a:rPr lang="en-US" sz="1200" b="1" kern="0" spc="200" dirty="0">
                 <a:solidFill>
                   <a:srgbClr val="D4AF37"/>
                 </a:solidFill>
@@ -5555,7 +5100,7 @@
           <a:bodyPr wrap="square" lIns="0" tIns="0" rIns="0" bIns="0" rtlCol="0" anchor="ctr"/>
           <a:lstStyle/>
           <a:p>
-            <a:pPr algn="l" indent="0" marL="0">
+            <a:pPr marL="0" indent="0" algn="l">
               <a:buNone/>
             </a:pPr>
             <a:r>
@@ -5594,7 +5139,7 @@
           <a:bodyPr wrap="square" lIns="0" tIns="0" rIns="0" bIns="0" rtlCol="0" anchor="ctr"/>
           <a:lstStyle/>
           <a:p>
-            <a:pPr indent="0" marL="0">
+            <a:pPr marL="0" indent="0">
               <a:buNone/>
             </a:pPr>
             <a:r>
@@ -5614,7 +5159,7 @@
       </p:sp>
       <p:graphicFrame>
         <p:nvGraphicFramePr>
-          <p:cNvPr id="4" name="Table 0"/>
+          <p:cNvPr id="5" name="Table 0"/>
           <p:cNvGraphicFramePr>
             <a:graphicFrameLocks noGrp="1"/>
           </p:cNvGraphicFramePr>
@@ -5635,11 +5180,41 @@
             <a:tbl>
               <a:tblPr/>
               <a:tblGrid>
-                <a:gridCol w="2377440"/>
-                <a:gridCol w="1554480"/>
-                <a:gridCol w="2377440"/>
-                <a:gridCol w="2651760"/>
-                <a:gridCol w="2103120"/>
+                <a:gridCol w="2377440">
+                  <a:extLst>
+                    <a:ext uri="{9D8B030D-6E8A-4147-A177-3AD203B41FA5}">
+                      <a16:colId xmlns:a16="http://schemas.microsoft.com/office/drawing/2014/main" val="20000"/>
+                    </a:ext>
+                  </a:extLst>
+                </a:gridCol>
+                <a:gridCol w="1554480">
+                  <a:extLst>
+                    <a:ext uri="{9D8B030D-6E8A-4147-A177-3AD203B41FA5}">
+                      <a16:colId xmlns:a16="http://schemas.microsoft.com/office/drawing/2014/main" val="20001"/>
+                    </a:ext>
+                  </a:extLst>
+                </a:gridCol>
+                <a:gridCol w="2377440">
+                  <a:extLst>
+                    <a:ext uri="{9D8B030D-6E8A-4147-A177-3AD203B41FA5}">
+                      <a16:colId xmlns:a16="http://schemas.microsoft.com/office/drawing/2014/main" val="20002"/>
+                    </a:ext>
+                  </a:extLst>
+                </a:gridCol>
+                <a:gridCol w="2651760">
+                  <a:extLst>
+                    <a:ext uri="{9D8B030D-6E8A-4147-A177-3AD203B41FA5}">
+                      <a16:colId xmlns:a16="http://schemas.microsoft.com/office/drawing/2014/main" val="20003"/>
+                    </a:ext>
+                  </a:extLst>
+                </a:gridCol>
+                <a:gridCol w="2103120">
+                  <a:extLst>
+                    <a:ext uri="{9D8B030D-6E8A-4147-A177-3AD203B41FA5}">
+                      <a16:colId xmlns:a16="http://schemas.microsoft.com/office/drawing/2014/main" val="20004"/>
+                    </a:ext>
+                  </a:extLst>
+                </a:gridCol>
               </a:tblGrid>
               <a:tr h="420624">
                 <a:tc>
@@ -5647,7 +5222,7 @@
                     <a:bodyPr/>
                     <a:lstStyle/>
                     <a:p>
-                      <a:pPr algn="ctr" indent="0" marL="0">
+                      <a:pPr marL="0" indent="0" algn="ctr">
                         <a:buNone/>
                       </a:pPr>
                       <a:r>
@@ -5708,7 +5283,7 @@
                     <a:bodyPr/>
                     <a:lstStyle/>
                     <a:p>
-                      <a:pPr algn="ctr" indent="0" marL="0">
+                      <a:pPr marL="0" indent="0" algn="ctr">
                         <a:buNone/>
                       </a:pPr>
                       <a:r>
@@ -5769,7 +5344,7 @@
                     <a:bodyPr/>
                     <a:lstStyle/>
                     <a:p>
-                      <a:pPr algn="ctr" indent="0" marL="0">
+                      <a:pPr marL="0" indent="0" algn="ctr">
                         <a:buNone/>
                       </a:pPr>
                       <a:r>
@@ -5830,7 +5405,7 @@
                     <a:bodyPr/>
                     <a:lstStyle/>
                     <a:p>
-                      <a:pPr algn="ctr" indent="0" marL="0">
+                      <a:pPr marL="0" indent="0" algn="ctr">
                         <a:buNone/>
                       </a:pPr>
                       <a:r>
@@ -5891,7 +5466,7 @@
                     <a:bodyPr/>
                     <a:lstStyle/>
                     <a:p>
-                      <a:pPr algn="ctr" indent="0" marL="0">
+                      <a:pPr marL="0" indent="0" algn="ctr">
                         <a:buNone/>
                       </a:pPr>
                       <a:r>
@@ -5947,6 +5522,11 @@
                     </a:solidFill>
                   </a:tcPr>
                 </a:tc>
+                <a:extLst>
+                  <a:ext uri="{0D108BD9-81ED-4DB2-BD59-A6C34878D82A}">
+                    <a16:rowId xmlns:a16="http://schemas.microsoft.com/office/drawing/2014/main" val="10000"/>
+                  </a:ext>
+                </a:extLst>
               </a:tr>
               <a:tr h="420624">
                 <a:tc>
@@ -5954,7 +5534,7 @@
                     <a:bodyPr/>
                     <a:lstStyle/>
                     <a:p>
-                      <a:pPr algn="l" indent="0" marL="0">
+                      <a:pPr marL="0" indent="0" algn="l">
                         <a:buNone/>
                       </a:pPr>
                       <a:r>
@@ -6015,7 +5595,7 @@
                     <a:bodyPr/>
                     <a:lstStyle/>
                     <a:p>
-                      <a:pPr algn="ctr" indent="0" marL="0">
+                      <a:pPr marL="0" indent="0" algn="ctr">
                         <a:buNone/>
                       </a:pPr>
                       <a:r>
@@ -6076,7 +5656,7 @@
                     <a:bodyPr/>
                     <a:lstStyle/>
                     <a:p>
-                      <a:pPr algn="ctr" indent="0" marL="0">
+                      <a:pPr marL="0" indent="0" algn="ctr">
                         <a:buNone/>
                       </a:pPr>
                       <a:r>
@@ -6137,7 +5717,7 @@
                     <a:bodyPr/>
                     <a:lstStyle/>
                     <a:p>
-                      <a:pPr algn="ctr" indent="0" marL="0">
+                      <a:pPr marL="0" indent="0" algn="ctr">
                         <a:buNone/>
                       </a:pPr>
                       <a:r>
@@ -6198,7 +5778,7 @@
                     <a:bodyPr/>
                     <a:lstStyle/>
                     <a:p>
-                      <a:pPr algn="l" indent="0" marL="0">
+                      <a:pPr marL="0" indent="0" algn="l">
                         <a:buNone/>
                       </a:pPr>
                       <a:r>
@@ -6254,6 +5834,11 @@
                     </a:solidFill>
                   </a:tcPr>
                 </a:tc>
+                <a:extLst>
+                  <a:ext uri="{0D108BD9-81ED-4DB2-BD59-A6C34878D82A}">
+                    <a16:rowId xmlns:a16="http://schemas.microsoft.com/office/drawing/2014/main" val="10001"/>
+                  </a:ext>
+                </a:extLst>
               </a:tr>
               <a:tr h="420624">
                 <a:tc>
@@ -6261,7 +5846,7 @@
                     <a:bodyPr/>
                     <a:lstStyle/>
                     <a:p>
-                      <a:pPr algn="l" indent="0" marL="0">
+                      <a:pPr marL="0" indent="0" algn="l">
                         <a:buNone/>
                       </a:pPr>
                       <a:r>
@@ -6322,7 +5907,7 @@
                     <a:bodyPr/>
                     <a:lstStyle/>
                     <a:p>
-                      <a:pPr algn="ctr" indent="0" marL="0">
+                      <a:pPr marL="0" indent="0" algn="ctr">
                         <a:buNone/>
                       </a:pPr>
                       <a:r>
@@ -6383,7 +5968,7 @@
                     <a:bodyPr/>
                     <a:lstStyle/>
                     <a:p>
-                      <a:pPr algn="ctr" indent="0" marL="0">
+                      <a:pPr marL="0" indent="0" algn="ctr">
                         <a:buNone/>
                       </a:pPr>
                       <a:r>
@@ -6444,7 +6029,7 @@
                     <a:bodyPr/>
                     <a:lstStyle/>
                     <a:p>
-                      <a:pPr algn="ctr" indent="0" marL="0">
+                      <a:pPr marL="0" indent="0" algn="ctr">
                         <a:buNone/>
                       </a:pPr>
                       <a:r>
@@ -6505,7 +6090,7 @@
                     <a:bodyPr/>
                     <a:lstStyle/>
                     <a:p>
-                      <a:pPr algn="l" indent="0" marL="0">
+                      <a:pPr marL="0" indent="0" algn="l">
                         <a:buNone/>
                       </a:pPr>
                       <a:r>
@@ -6561,6 +6146,11 @@
                     </a:solidFill>
                   </a:tcPr>
                 </a:tc>
+                <a:extLst>
+                  <a:ext uri="{0D108BD9-81ED-4DB2-BD59-A6C34878D82A}">
+                    <a16:rowId xmlns:a16="http://schemas.microsoft.com/office/drawing/2014/main" val="10002"/>
+                  </a:ext>
+                </a:extLst>
               </a:tr>
               <a:tr h="420624">
                 <a:tc>
@@ -6568,7 +6158,7 @@
                     <a:bodyPr/>
                     <a:lstStyle/>
                     <a:p>
-                      <a:pPr algn="l" indent="0" marL="0">
+                      <a:pPr marL="0" indent="0" algn="l">
                         <a:buNone/>
                       </a:pPr>
                       <a:r>
@@ -6629,7 +6219,7 @@
                     <a:bodyPr/>
                     <a:lstStyle/>
                     <a:p>
-                      <a:pPr algn="ctr" indent="0" marL="0">
+                      <a:pPr marL="0" indent="0" algn="ctr">
                         <a:buNone/>
                       </a:pPr>
                       <a:r>
@@ -6690,7 +6280,7 @@
                     <a:bodyPr/>
                     <a:lstStyle/>
                     <a:p>
-                      <a:pPr algn="ctr" indent="0" marL="0">
+                      <a:pPr marL="0" indent="0" algn="ctr">
                         <a:buNone/>
                       </a:pPr>
                       <a:r>
@@ -6751,7 +6341,7 @@
                     <a:bodyPr/>
                     <a:lstStyle/>
                     <a:p>
-                      <a:pPr algn="ctr" indent="0" marL="0">
+                      <a:pPr marL="0" indent="0" algn="ctr">
                         <a:buNone/>
                       </a:pPr>
                       <a:r>
@@ -6812,7 +6402,7 @@
                     <a:bodyPr/>
                     <a:lstStyle/>
                     <a:p>
-                      <a:pPr algn="l" indent="0" marL="0">
+                      <a:pPr marL="0" indent="0" algn="l">
                         <a:buNone/>
                       </a:pPr>
                       <a:r>
@@ -6868,6 +6458,11 @@
                     </a:solidFill>
                   </a:tcPr>
                 </a:tc>
+                <a:extLst>
+                  <a:ext uri="{0D108BD9-81ED-4DB2-BD59-A6C34878D82A}">
+                    <a16:rowId xmlns:a16="http://schemas.microsoft.com/office/drawing/2014/main" val="10003"/>
+                  </a:ext>
+                </a:extLst>
               </a:tr>
               <a:tr h="420624">
                 <a:tc>
@@ -6875,7 +6470,7 @@
                     <a:bodyPr/>
                     <a:lstStyle/>
                     <a:p>
-                      <a:pPr algn="l" indent="0" marL="0">
+                      <a:pPr marL="0" indent="0" algn="l">
                         <a:buNone/>
                       </a:pPr>
                       <a:r>
@@ -6936,7 +6531,7 @@
                     <a:bodyPr/>
                     <a:lstStyle/>
                     <a:p>
-                      <a:pPr algn="ctr" indent="0" marL="0">
+                      <a:pPr marL="0" indent="0" algn="ctr">
                         <a:buNone/>
                       </a:pPr>
                       <a:r>
@@ -6997,7 +6592,7 @@
                     <a:bodyPr/>
                     <a:lstStyle/>
                     <a:p>
-                      <a:pPr algn="ctr" indent="0" marL="0">
+                      <a:pPr marL="0" indent="0" algn="ctr">
                         <a:buNone/>
                       </a:pPr>
                       <a:r>
@@ -7058,7 +6653,7 @@
                     <a:bodyPr/>
                     <a:lstStyle/>
                     <a:p>
-                      <a:pPr algn="ctr" indent="0" marL="0">
+                      <a:pPr marL="0" indent="0" algn="ctr">
                         <a:buNone/>
                       </a:pPr>
                       <a:r>
@@ -7119,7 +6714,7 @@
                     <a:bodyPr/>
                     <a:lstStyle/>
                     <a:p>
-                      <a:pPr algn="l" indent="0" marL="0">
+                      <a:pPr marL="0" indent="0" algn="l">
                         <a:buNone/>
                       </a:pPr>
                       <a:r>
@@ -7175,6 +6770,11 @@
                     </a:solidFill>
                   </a:tcPr>
                 </a:tc>
+                <a:extLst>
+                  <a:ext uri="{0D108BD9-81ED-4DB2-BD59-A6C34878D82A}">
+                    <a16:rowId xmlns:a16="http://schemas.microsoft.com/office/drawing/2014/main" val="10004"/>
+                  </a:ext>
+                </a:extLst>
               </a:tr>
               <a:tr h="420624">
                 <a:tc>
@@ -7182,7 +6782,7 @@
                     <a:bodyPr/>
                     <a:lstStyle/>
                     <a:p>
-                      <a:pPr algn="l" indent="0" marL="0">
+                      <a:pPr marL="0" indent="0" algn="l">
                         <a:buNone/>
                       </a:pPr>
                       <a:r>
@@ -7243,7 +6843,7 @@
                     <a:bodyPr/>
                     <a:lstStyle/>
                     <a:p>
-                      <a:pPr algn="ctr" indent="0" marL="0">
+                      <a:pPr marL="0" indent="0" algn="ctr">
                         <a:buNone/>
                       </a:pPr>
                       <a:r>
@@ -7304,7 +6904,7 @@
                     <a:bodyPr/>
                     <a:lstStyle/>
                     <a:p>
-                      <a:pPr algn="ctr" indent="0" marL="0">
+                      <a:pPr marL="0" indent="0" algn="ctr">
                         <a:buNone/>
                       </a:pPr>
                       <a:r>
@@ -7365,7 +6965,7 @@
                     <a:bodyPr/>
                     <a:lstStyle/>
                     <a:p>
-                      <a:pPr algn="ctr" indent="0" marL="0">
+                      <a:pPr marL="0" indent="0" algn="ctr">
                         <a:buNone/>
                       </a:pPr>
                       <a:r>
@@ -7426,7 +7026,7 @@
                     <a:bodyPr/>
                     <a:lstStyle/>
                     <a:p>
-                      <a:pPr algn="l" indent="0" marL="0">
+                      <a:pPr marL="0" indent="0" algn="l">
                         <a:buNone/>
                       </a:pPr>
                       <a:r>
@@ -7482,6 +7082,11 @@
                     </a:solidFill>
                   </a:tcPr>
                 </a:tc>
+                <a:extLst>
+                  <a:ext uri="{0D108BD9-81ED-4DB2-BD59-A6C34878D82A}">
+                    <a16:rowId xmlns:a16="http://schemas.microsoft.com/office/drawing/2014/main" val="10005"/>
+                  </a:ext>
+                </a:extLst>
               </a:tr>
               <a:tr h="420624">
                 <a:tc>
@@ -7489,7 +7094,7 @@
                     <a:bodyPr/>
                     <a:lstStyle/>
                     <a:p>
-                      <a:pPr algn="l" indent="0" marL="0">
+                      <a:pPr marL="0" indent="0" algn="l">
                         <a:buNone/>
                       </a:pPr>
                       <a:r>
@@ -7550,7 +7155,7 @@
                     <a:bodyPr/>
                     <a:lstStyle/>
                     <a:p>
-                      <a:pPr algn="ctr" indent="0" marL="0">
+                      <a:pPr marL="0" indent="0" algn="ctr">
                         <a:buNone/>
                       </a:pPr>
                       <a:r>
@@ -7611,7 +7216,7 @@
                     <a:bodyPr/>
                     <a:lstStyle/>
                     <a:p>
-                      <a:pPr algn="ctr" indent="0" marL="0">
+                      <a:pPr marL="0" indent="0" algn="ctr">
                         <a:buNone/>
                       </a:pPr>
                       <a:r>
@@ -7672,7 +7277,7 @@
                     <a:bodyPr/>
                     <a:lstStyle/>
                     <a:p>
-                      <a:pPr algn="ctr" indent="0" marL="0">
+                      <a:pPr marL="0" indent="0" algn="ctr">
                         <a:buNone/>
                       </a:pPr>
                       <a:r>
@@ -7733,7 +7338,7 @@
                     <a:bodyPr/>
                     <a:lstStyle/>
                     <a:p>
-                      <a:pPr algn="l" indent="0" marL="0">
+                      <a:pPr marL="0" indent="0" algn="l">
                         <a:buNone/>
                       </a:pPr>
                       <a:r>
@@ -7789,6 +7394,11 @@
                     </a:solidFill>
                   </a:tcPr>
                 </a:tc>
+                <a:extLst>
+                  <a:ext uri="{0D108BD9-81ED-4DB2-BD59-A6C34878D82A}">
+                    <a16:rowId xmlns:a16="http://schemas.microsoft.com/office/drawing/2014/main" val="10006"/>
+                  </a:ext>
+                </a:extLst>
               </a:tr>
               <a:tr h="420624">
                 <a:tc>
@@ -7796,7 +7406,7 @@
                     <a:bodyPr/>
                     <a:lstStyle/>
                     <a:p>
-                      <a:pPr algn="l" indent="0" marL="0">
+                      <a:pPr marL="0" indent="0" algn="l">
                         <a:buNone/>
                       </a:pPr>
                       <a:r>
@@ -7857,7 +7467,7 @@
                     <a:bodyPr/>
                     <a:lstStyle/>
                     <a:p>
-                      <a:pPr algn="ctr" indent="0" marL="0">
+                      <a:pPr marL="0" indent="0" algn="ctr">
                         <a:buNone/>
                       </a:pPr>
                       <a:r>
@@ -7918,7 +7528,7 @@
                     <a:bodyPr/>
                     <a:lstStyle/>
                     <a:p>
-                      <a:pPr algn="ctr" indent="0" marL="0">
+                      <a:pPr marL="0" indent="0" algn="ctr">
                         <a:buNone/>
                       </a:pPr>
                       <a:r>
@@ -7979,7 +7589,7 @@
                     <a:bodyPr/>
                     <a:lstStyle/>
                     <a:p>
-                      <a:pPr algn="ctr" indent="0" marL="0">
+                      <a:pPr marL="0" indent="0" algn="ctr">
                         <a:buNone/>
                       </a:pPr>
                       <a:r>
@@ -8040,7 +7650,7 @@
                     <a:bodyPr/>
                     <a:lstStyle/>
                     <a:p>
-                      <a:pPr algn="l" indent="0" marL="0">
+                      <a:pPr marL="0" indent="0" algn="l">
                         <a:buNone/>
                       </a:pPr>
                       <a:r>
@@ -8096,6 +7706,11 @@
                     </a:solidFill>
                   </a:tcPr>
                 </a:tc>
+                <a:extLst>
+                  <a:ext uri="{0D108BD9-81ED-4DB2-BD59-A6C34878D82A}">
+                    <a16:rowId xmlns:a16="http://schemas.microsoft.com/office/drawing/2014/main" val="10007"/>
+                  </a:ext>
+                </a:extLst>
               </a:tr>
               <a:tr h="420624">
                 <a:tc>
@@ -8103,7 +7718,7 @@
                     <a:bodyPr/>
                     <a:lstStyle/>
                     <a:p>
-                      <a:pPr algn="l" indent="0" marL="0">
+                      <a:pPr marL="0" indent="0" algn="l">
                         <a:buNone/>
                       </a:pPr>
                       <a:r>
@@ -8164,7 +7779,7 @@
                     <a:bodyPr/>
                     <a:lstStyle/>
                     <a:p>
-                      <a:pPr algn="ctr" indent="0" marL="0">
+                      <a:pPr marL="0" indent="0" algn="ctr">
                         <a:buNone/>
                       </a:pPr>
                       <a:r>
@@ -8225,7 +7840,7 @@
                     <a:bodyPr/>
                     <a:lstStyle/>
                     <a:p>
-                      <a:pPr algn="ctr" indent="0" marL="0">
+                      <a:pPr marL="0" indent="0" algn="ctr">
                         <a:buNone/>
                       </a:pPr>
                       <a:r>
@@ -8286,7 +7901,7 @@
                     <a:bodyPr/>
                     <a:lstStyle/>
                     <a:p>
-                      <a:pPr algn="ctr" indent="0" marL="0">
+                      <a:pPr marL="0" indent="0" algn="ctr">
                         <a:buNone/>
                       </a:pPr>
                       <a:r>
@@ -8347,7 +7962,7 @@
                     <a:bodyPr/>
                     <a:lstStyle/>
                     <a:p>
-                      <a:pPr algn="l" indent="0" marL="0">
+                      <a:pPr marL="0" indent="0" algn="l">
                         <a:buNone/>
                       </a:pPr>
                       <a:r>
@@ -8403,6 +8018,11 @@
                     </a:solidFill>
                   </a:tcPr>
                 </a:tc>
+                <a:extLst>
+                  <a:ext uri="{0D108BD9-81ED-4DB2-BD59-A6C34878D82A}">
+                    <a16:rowId xmlns:a16="http://schemas.microsoft.com/office/drawing/2014/main" val="10008"/>
+                  </a:ext>
+                </a:extLst>
               </a:tr>
               <a:tr h="420624">
                 <a:tc>
@@ -8410,7 +8030,7 @@
                     <a:bodyPr/>
                     <a:lstStyle/>
                     <a:p>
-                      <a:pPr algn="l" indent="0" marL="0">
+                      <a:pPr marL="0" indent="0" algn="l">
                         <a:buNone/>
                       </a:pPr>
                       <a:r>
@@ -8471,7 +8091,7 @@
                     <a:bodyPr/>
                     <a:lstStyle/>
                     <a:p>
-                      <a:pPr algn="ctr" indent="0" marL="0">
+                      <a:pPr marL="0" indent="0" algn="ctr">
                         <a:buNone/>
                       </a:pPr>
                       <a:r>
@@ -8532,7 +8152,7 @@
                     <a:bodyPr/>
                     <a:lstStyle/>
                     <a:p>
-                      <a:pPr algn="ctr" indent="0" marL="0">
+                      <a:pPr marL="0" indent="0" algn="ctr">
                         <a:buNone/>
                       </a:pPr>
                       <a:r>
@@ -8593,7 +8213,7 @@
                     <a:bodyPr/>
                     <a:lstStyle/>
                     <a:p>
-                      <a:pPr algn="ctr" indent="0" marL="0">
+                      <a:pPr marL="0" indent="0" algn="ctr">
                         <a:buNone/>
                       </a:pPr>
                       <a:r>
@@ -8654,7 +8274,7 @@
                     <a:bodyPr/>
                     <a:lstStyle/>
                     <a:p>
-                      <a:pPr algn="l" indent="0" marL="0">
+                      <a:pPr marL="0" indent="0" algn="l">
                         <a:buNone/>
                       </a:pPr>
                       <a:r>
@@ -8710,6 +8330,11 @@
                     </a:solidFill>
                   </a:tcPr>
                 </a:tc>
+                <a:extLst>
+                  <a:ext uri="{0D108BD9-81ED-4DB2-BD59-A6C34878D82A}">
+                    <a16:rowId xmlns:a16="http://schemas.microsoft.com/office/drawing/2014/main" val="10009"/>
+                  </a:ext>
+                </a:extLst>
               </a:tr>
             </a:tbl>
           </a:graphicData>
@@ -8736,7 +8361,7 @@
           <a:bodyPr wrap="square" lIns="0" tIns="0" rIns="0" bIns="0" rtlCol="0" anchor="ctr"/>
           <a:lstStyle/>
           <a:p>
-            <a:pPr indent="0" marL="0">
+            <a:pPr marL="0" indent="0">
               <a:buNone/>
             </a:pPr>
             <a:r>
@@ -8775,7 +8400,7 @@
           <a:bodyPr wrap="square" lIns="0" tIns="0" rIns="0" bIns="0" rtlCol="0" anchor="ctr"/>
           <a:lstStyle/>
           <a:p>
-            <a:pPr algn="r" indent="0" marL="0">
+            <a:pPr marL="0" indent="0" algn="r">
               <a:buNone/>
             </a:pPr>
             <a:r>
@@ -8809,6 +8434,7 @@
         <a:solidFill>
           <a:srgbClr val="10162B"/>
         </a:solidFill>
+        <a:effectLst/>
       </p:bgPr>
     </p:bg>
     <p:spTree>
@@ -8846,11 +8472,11 @@
           <a:bodyPr wrap="square" lIns="0" tIns="0" rIns="0" bIns="0" rtlCol="0" anchor="ctr"/>
           <a:lstStyle/>
           <a:p>
-            <a:pPr algn="l" indent="0" marL="0">
+            <a:pPr marL="0" indent="0" algn="l">
               <a:buNone/>
             </a:pPr>
             <a:r>
-              <a:rPr lang="en-US" sz="1200" b="1" spc="200" kern="0" dirty="0">
+              <a:rPr lang="en-US" sz="1200" b="1" kern="0" spc="200" dirty="0">
                 <a:solidFill>
                   <a:srgbClr val="D4AF37"/>
                 </a:solidFill>
@@ -8885,7 +8511,7 @@
           <a:bodyPr wrap="square" lIns="0" tIns="0" rIns="0" bIns="0" rtlCol="0" anchor="ctr"/>
           <a:lstStyle/>
           <a:p>
-            <a:pPr algn="l" indent="0" marL="0">
+            <a:pPr marL="0" indent="0" algn="l">
               <a:buNone/>
             </a:pPr>
             <a:r>
@@ -8924,7 +8550,7 @@
           <a:bodyPr wrap="square" lIns="0" tIns="0" rIns="0" bIns="0" rtlCol="0" anchor="ctr"/>
           <a:lstStyle/>
           <a:p>
-            <a:pPr indent="0" marL="0">
+            <a:pPr marL="0" indent="0">
               <a:buNone/>
             </a:pPr>
             <a:r>
@@ -8971,14 +8597,14 @@
       </p:sp>
       <p:pic>
         <p:nvPicPr>
-          <p:cNvPr id="6" name="Image 0" descr="/home/claude/knapsack_pptx/icons/folder_ice.png">    </p:cNvPr>
+          <p:cNvPr id="6" name="Image 0" descr="/home/claude/knapsack_pptx/icons/folder_ice.png"/>
           <p:cNvPicPr>
             <a:picLocks noChangeAspect="1"/>
           </p:cNvPicPr>
           <p:nvPr/>
         </p:nvPicPr>
         <p:blipFill>
-          <a:blip r:embed="rId1"/>
+          <a:blip r:embed="rId3"/>
           <a:stretch>
             <a:fillRect/>
           </a:stretch>
@@ -9014,7 +8640,7 @@
           <a:bodyPr wrap="square" lIns="0" tIns="0" rIns="0" bIns="0" rtlCol="0" anchor="ctr"/>
           <a:lstStyle/>
           <a:p>
-            <a:pPr indent="0" marL="0">
+            <a:pPr marL="0" indent="0">
               <a:buNone/>
             </a:pPr>
             <a:r>
@@ -9053,7 +8679,7 @@
           <a:bodyPr wrap="square" lIns="0" tIns="0" rIns="0" bIns="0" rtlCol="0" anchor="t"/>
           <a:lstStyle/>
           <a:p>
-            <a:pPr indent="0" marL="0">
+            <a:pPr marL="0" indent="0">
               <a:lnSpc>
                 <a:spcPts val="1400"/>
               </a:lnSpc>
@@ -9073,7 +8699,7 @@
             <a:endParaRPr lang="en-US" sz="1050" dirty="0"/>
           </a:p>
           <a:p>
-            <a:pPr indent="0" marL="0">
+            <a:pPr marL="0" indent="0">
               <a:lnSpc>
                 <a:spcPts val="1400"/>
               </a:lnSpc>
@@ -9123,14 +8749,14 @@
       </p:sp>
       <p:pic>
         <p:nvPicPr>
-          <p:cNvPr id="10" name="Image 1" descr="/home/claude/knapsack_pptx/icons/cogs_gold.png">    </p:cNvPr>
+          <p:cNvPr id="10" name="Image 1" descr="/home/claude/knapsack_pptx/icons/cogs_gold.png"/>
           <p:cNvPicPr>
             <a:picLocks noChangeAspect="1"/>
           </p:cNvPicPr>
           <p:nvPr/>
         </p:nvPicPr>
         <p:blipFill>
-          <a:blip r:embed="rId2"/>
+          <a:blip r:embed="rId4"/>
           <a:stretch>
             <a:fillRect/>
           </a:stretch>
@@ -9166,7 +8792,7 @@
           <a:bodyPr wrap="square" lIns="0" tIns="0" rIns="0" bIns="0" rtlCol="0" anchor="ctr"/>
           <a:lstStyle/>
           <a:p>
-            <a:pPr indent="0" marL="0">
+            <a:pPr marL="0" indent="0">
               <a:buNone/>
             </a:pPr>
             <a:r>
@@ -9205,7 +8831,7 @@
           <a:bodyPr wrap="square" lIns="0" tIns="0" rIns="0" bIns="0" rtlCol="0" anchor="t"/>
           <a:lstStyle/>
           <a:p>
-            <a:pPr indent="0" marL="0">
+            <a:pPr marL="0" indent="0">
               <a:lnSpc>
                 <a:spcPts val="1400"/>
               </a:lnSpc>
@@ -9225,7 +8851,7 @@
             <a:endParaRPr lang="en-US" sz="1050" dirty="0"/>
           </a:p>
           <a:p>
-            <a:pPr indent="0" marL="0">
+            <a:pPr marL="0" indent="0">
               <a:lnSpc>
                 <a:spcPts val="1400"/>
               </a:lnSpc>
@@ -9245,7 +8871,7 @@
             <a:endParaRPr lang="en-US" sz="1050" dirty="0"/>
           </a:p>
           <a:p>
-            <a:pPr indent="0" marL="0">
+            <a:pPr marL="0" indent="0">
               <a:lnSpc>
                 <a:spcPts val="1400"/>
               </a:lnSpc>
@@ -9295,14 +8921,14 @@
       </p:sp>
       <p:pic>
         <p:nvPicPr>
-          <p:cNvPr id="14" name="Image 2" descr="/home/claude/knapsack_pptx/icons/code_ice.png">    </p:cNvPr>
+          <p:cNvPr id="14" name="Image 2" descr="/home/claude/knapsack_pptx/icons/code_ice.png"/>
           <p:cNvPicPr>
             <a:picLocks noChangeAspect="1"/>
           </p:cNvPicPr>
           <p:nvPr/>
         </p:nvPicPr>
         <p:blipFill>
-          <a:blip r:embed="rId3"/>
+          <a:blip r:embed="rId5"/>
           <a:stretch>
             <a:fillRect/>
           </a:stretch>
@@ -9338,7 +8964,7 @@
           <a:bodyPr wrap="square" lIns="0" tIns="0" rIns="0" bIns="0" rtlCol="0" anchor="ctr"/>
           <a:lstStyle/>
           <a:p>
-            <a:pPr indent="0" marL="0">
+            <a:pPr marL="0" indent="0">
               <a:buNone/>
             </a:pPr>
             <a:r>
@@ -9377,7 +9003,7 @@
           <a:bodyPr wrap="square" lIns="0" tIns="0" rIns="0" bIns="0" rtlCol="0" anchor="t"/>
           <a:lstStyle/>
           <a:p>
-            <a:pPr indent="0" marL="0">
+            <a:pPr marL="0" indent="0">
               <a:lnSpc>
                 <a:spcPts val="1400"/>
               </a:lnSpc>
@@ -9397,7 +9023,7 @@
             <a:endParaRPr lang="en-US" sz="1050" dirty="0"/>
           </a:p>
           <a:p>
-            <a:pPr indent="0" marL="0">
+            <a:pPr marL="0" indent="0">
               <a:lnSpc>
                 <a:spcPts val="1400"/>
               </a:lnSpc>
@@ -9447,14 +9073,14 @@
       </p:sp>
       <p:pic>
         <p:nvPicPr>
-          <p:cNvPr id="18" name="Image 3" descr="/home/claude/knapsack_pptx/icons/chartbar_gold.png">    </p:cNvPr>
+          <p:cNvPr id="18" name="Image 3" descr="/home/claude/knapsack_pptx/icons/chartbar_gold.png"/>
           <p:cNvPicPr>
             <a:picLocks noChangeAspect="1"/>
           </p:cNvPicPr>
           <p:nvPr/>
         </p:nvPicPr>
         <p:blipFill>
-          <a:blip r:embed="rId4"/>
+          <a:blip r:embed="rId6"/>
           <a:stretch>
             <a:fillRect/>
           </a:stretch>
@@ -9490,7 +9116,7 @@
           <a:bodyPr wrap="square" lIns="0" tIns="0" rIns="0" bIns="0" rtlCol="0" anchor="ctr"/>
           <a:lstStyle/>
           <a:p>
-            <a:pPr indent="0" marL="0">
+            <a:pPr marL="0" indent="0">
               <a:buNone/>
             </a:pPr>
             <a:r>
@@ -9529,7 +9155,7 @@
           <a:bodyPr wrap="square" lIns="0" tIns="0" rIns="0" bIns="0" rtlCol="0" anchor="t"/>
           <a:lstStyle/>
           <a:p>
-            <a:pPr indent="0" marL="0">
+            <a:pPr marL="0" indent="0">
               <a:lnSpc>
                 <a:spcPts val="1400"/>
               </a:lnSpc>
@@ -9549,7 +9175,7 @@
             <a:endParaRPr lang="en-US" sz="1050" dirty="0"/>
           </a:p>
           <a:p>
-            <a:pPr indent="0" marL="0">
+            <a:pPr marL="0" indent="0">
               <a:lnSpc>
                 <a:spcPts val="1400"/>
               </a:lnSpc>
@@ -9599,14 +9225,14 @@
       </p:sp>
       <p:pic>
         <p:nvPicPr>
-          <p:cNvPr id="22" name="Image 4" descr="/home/claude/knapsack_pptx/icons/filecode_ice.png">    </p:cNvPr>
+          <p:cNvPr id="22" name="Image 4" descr="/home/claude/knapsack_pptx/icons/filecode_ice.png"/>
           <p:cNvPicPr>
             <a:picLocks noChangeAspect="1"/>
           </p:cNvPicPr>
           <p:nvPr/>
         </p:nvPicPr>
         <p:blipFill>
-          <a:blip r:embed="rId5"/>
+          <a:blip r:embed="rId7"/>
           <a:stretch>
             <a:fillRect/>
           </a:stretch>
@@ -9642,7 +9268,7 @@
           <a:bodyPr wrap="square" lIns="0" tIns="0" rIns="0" bIns="0" rtlCol="0" anchor="ctr"/>
           <a:lstStyle/>
           <a:p>
-            <a:pPr indent="0" marL="0">
+            <a:pPr marL="0" indent="0">
               <a:buNone/>
             </a:pPr>
             <a:r>
@@ -9681,7 +9307,7 @@
           <a:bodyPr wrap="square" lIns="0" tIns="0" rIns="0" bIns="0" rtlCol="0" anchor="t"/>
           <a:lstStyle/>
           <a:p>
-            <a:pPr indent="0" marL="0">
+            <a:pPr marL="0" indent="0">
               <a:lnSpc>
                 <a:spcPts val="1400"/>
               </a:lnSpc>
@@ -9726,14 +9352,14 @@
       </p:sp>
       <p:pic>
         <p:nvPicPr>
-          <p:cNvPr id="26" name="Image 5" descr="/home/claude/knapsack_pptx/icons/sitemap_gold.png">    </p:cNvPr>
+          <p:cNvPr id="26" name="Image 5" descr="/home/claude/knapsack_pptx/icons/sitemap_gold.png"/>
           <p:cNvPicPr>
             <a:picLocks noChangeAspect="1"/>
           </p:cNvPicPr>
           <p:nvPr/>
         </p:nvPicPr>
         <p:blipFill>
-          <a:blip r:embed="rId6"/>
+          <a:blip r:embed="rId8"/>
           <a:stretch>
             <a:fillRect/>
           </a:stretch>
@@ -9769,7 +9395,7 @@
           <a:bodyPr wrap="square" lIns="0" tIns="0" rIns="0" bIns="0" rtlCol="0" anchor="ctr"/>
           <a:lstStyle/>
           <a:p>
-            <a:pPr indent="0" marL="0">
+            <a:pPr marL="0" indent="0">
               <a:lnSpc>
                 <a:spcPts val="1800"/>
               </a:lnSpc>
@@ -9786,12 +9412,6 @@
               </a:rPr>
               <a:t>Princípios de projeto:  </a:t>
             </a:r>
-            <a:pPr indent="0" marL="0">
-              <a:lnSpc>
-                <a:spcPts val="1800"/>
-              </a:lnSpc>
-              <a:buNone/>
-            </a:pPr>
             <a:r>
               <a:rPr lang="en-US" sz="1250" dirty="0">
                 <a:solidFill>
@@ -9801,7 +9421,51 @@
                 <a:ea typeface="Calibri" pitchFamily="34" charset="-122"/>
                 <a:cs typeface="Calibri" pitchFamily="34" charset="-120"/>
               </a:rPr>
-              <a:t>Clean Code  ·  Single Responsibility Principle (SRP)  ·  Polimorfismo via classe abstrata BaseAlgorithm, permitindo adicionar novas meta-heurísticas sem alterar o núcleo do sistema.</a:t>
+              <a:t> Single Responsibility Principle ·  Polimorfismo via </a:t>
+            </a:r>
+            <a:r>
+              <a:rPr lang="en-US" sz="1250" dirty="0" err="1">
+                <a:solidFill>
+                  <a:srgbClr val="CADCFC"/>
+                </a:solidFill>
+                <a:latin typeface="Calibri" pitchFamily="34" charset="0"/>
+                <a:ea typeface="Calibri" pitchFamily="34" charset="-122"/>
+                <a:cs typeface="Calibri" pitchFamily="34" charset="-120"/>
+              </a:rPr>
+              <a:t>classe</a:t>
+            </a:r>
+            <a:r>
+              <a:rPr lang="en-US" sz="1250" dirty="0">
+                <a:solidFill>
+                  <a:srgbClr val="CADCFC"/>
+                </a:solidFill>
+                <a:latin typeface="Calibri" pitchFamily="34" charset="0"/>
+                <a:ea typeface="Calibri" pitchFamily="34" charset="-122"/>
+                <a:cs typeface="Calibri" pitchFamily="34" charset="-120"/>
+              </a:rPr>
+              <a:t> </a:t>
+            </a:r>
+            <a:r>
+              <a:rPr lang="en-US" sz="1250" dirty="0" err="1">
+                <a:solidFill>
+                  <a:srgbClr val="CADCFC"/>
+                </a:solidFill>
+                <a:latin typeface="Calibri" pitchFamily="34" charset="0"/>
+                <a:ea typeface="Calibri" pitchFamily="34" charset="-122"/>
+                <a:cs typeface="Calibri" pitchFamily="34" charset="-120"/>
+              </a:rPr>
+              <a:t>abstrata</a:t>
+            </a:r>
+            <a:r>
+              <a:rPr lang="en-US" sz="1250" dirty="0">
+                <a:solidFill>
+                  <a:srgbClr val="CADCFC"/>
+                </a:solidFill>
+                <a:latin typeface="Calibri" pitchFamily="34" charset="0"/>
+                <a:ea typeface="Calibri" pitchFamily="34" charset="-122"/>
+                <a:cs typeface="Calibri" pitchFamily="34" charset="-120"/>
+              </a:rPr>
+              <a:t> · BaseAlgorithm · permitindo adicionar novas meta-heurísticas sem alterar o núcleo do sistema.</a:t>
             </a:r>
             <a:endParaRPr lang="en-US" sz="1250" dirty="0"/>
           </a:p>
@@ -9828,7 +9492,7 @@
           <a:bodyPr wrap="square" lIns="0" tIns="0" rIns="0" bIns="0" rtlCol="0" anchor="ctr"/>
           <a:lstStyle/>
           <a:p>
-            <a:pPr algn="r" indent="0" marL="0">
+            <a:pPr marL="0" indent="0" algn="r">
               <a:buNone/>
             </a:pPr>
             <a:r>
@@ -9862,6 +9526,7 @@
         <a:solidFill>
           <a:srgbClr val="10162B"/>
         </a:solidFill>
+        <a:effectLst/>
       </p:bgPr>
     </p:bg>
     <p:spTree>
@@ -9899,11 +9564,11 @@
           <a:bodyPr wrap="square" lIns="0" tIns="0" rIns="0" bIns="0" rtlCol="0" anchor="ctr"/>
           <a:lstStyle/>
           <a:p>
-            <a:pPr algn="l" indent="0" marL="0">
+            <a:pPr marL="0" indent="0" algn="l">
               <a:buNone/>
             </a:pPr>
             <a:r>
-              <a:rPr lang="en-US" sz="1200" b="1" spc="200" kern="0" dirty="0">
+              <a:rPr lang="en-US" sz="1200" b="1" kern="0" spc="200" dirty="0">
                 <a:solidFill>
                   <a:srgbClr val="D4AF37"/>
                 </a:solidFill>
@@ -9938,7 +9603,7 @@
           <a:bodyPr wrap="square" lIns="0" tIns="0" rIns="0" bIns="0" rtlCol="0" anchor="ctr"/>
           <a:lstStyle/>
           <a:p>
-            <a:pPr algn="l" indent="0" marL="0">
+            <a:pPr marL="0" indent="0" algn="l">
               <a:buNone/>
             </a:pPr>
             <a:r>
@@ -9977,7 +9642,7 @@
           <a:bodyPr wrap="square" lIns="0" tIns="0" rIns="0" bIns="0" rtlCol="0" anchor="t"/>
           <a:lstStyle/>
           <a:p>
-            <a:pPr indent="0" marL="0">
+            <a:pPr marL="0" indent="0">
               <a:lnSpc>
                 <a:spcPts val="2000"/>
               </a:lnSpc>
@@ -9994,12 +9659,6 @@
               </a:rPr>
               <a:t>Meta-heurística de </a:t>
             </a:r>
-            <a:pPr indent="0" marL="0">
-              <a:lnSpc>
-                <a:spcPts val="2000"/>
-              </a:lnSpc>
-              <a:buNone/>
-            </a:pPr>
             <a:r>
               <a:rPr lang="en-US" sz="1450" b="1" dirty="0">
                 <a:solidFill>
@@ -10011,12 +9670,6 @@
               </a:rPr>
               <a:t>busca local com memória de curto prazo</a:t>
             </a:r>
-            <a:pPr indent="0" marL="0">
-              <a:lnSpc>
-                <a:spcPts val="2000"/>
-              </a:lnSpc>
-              <a:buNone/>
-            </a:pPr>
             <a:r>
               <a:rPr lang="en-US" sz="1450" dirty="0">
                 <a:solidFill>
@@ -10028,12 +9681,6 @@
               </a:rPr>
               <a:t>. Explora vizinhanças da solução atual, evitando revisitar movimentos recentes por meio de uma </a:t>
             </a:r>
-            <a:pPr indent="0" marL="0">
-              <a:lnSpc>
-                <a:spcPts val="2000"/>
-              </a:lnSpc>
-              <a:buNone/>
-            </a:pPr>
             <a:r>
               <a:rPr lang="en-US" sz="1450" b="1" dirty="0">
                 <a:solidFill>
@@ -10043,14 +9690,8 @@
                 <a:ea typeface="Calibri" pitchFamily="34" charset="-122"/>
                 <a:cs typeface="Calibri" pitchFamily="34" charset="-120"/>
               </a:rPr>
-              <a:t>lista tabu</a:t>
+              <a:t>lista FIFO tabu</a:t>
             </a:r>
-            <a:pPr indent="0" marL="0">
-              <a:lnSpc>
-                <a:spcPts val="2000"/>
-              </a:lnSpc>
-              <a:buNone/>
-            </a:pPr>
             <a:r>
               <a:rPr lang="en-US" sz="1450" dirty="0">
                 <a:solidFill>
@@ -10115,14 +9756,14 @@
       </p:sp>
       <p:pic>
         <p:nvPicPr>
-          <p:cNvPr id="7" name="Image 0" descr="/home/claude/knapsack_pptx/icons/random_ice.png">    </p:cNvPr>
+          <p:cNvPr id="7" name="Image 0" descr="/home/claude/knapsack_pptx/icons/random_ice.png"/>
           <p:cNvPicPr>
             <a:picLocks noChangeAspect="1"/>
           </p:cNvPicPr>
           <p:nvPr/>
         </p:nvPicPr>
         <p:blipFill>
-          <a:blip r:embed="rId1"/>
+          <a:blip r:embed="rId3"/>
           <a:stretch>
             <a:fillRect/>
           </a:stretch>
@@ -10158,7 +9799,7 @@
           <a:bodyPr wrap="square" lIns="0" tIns="0" rIns="0" bIns="0" rtlCol="0" anchor="t"/>
           <a:lstStyle/>
           <a:p>
-            <a:pPr algn="ctr" indent="0" marL="0">
+            <a:pPr marL="0" indent="0" algn="ctr">
               <a:buNone/>
             </a:pPr>
             <a:r>
@@ -10197,7 +9838,7 @@
           <a:bodyPr wrap="square" lIns="0" tIns="0" rIns="0" bIns="0" rtlCol="0" anchor="t"/>
           <a:lstStyle/>
           <a:p>
-            <a:pPr algn="ctr" indent="0" marL="0">
+            <a:pPr marL="0" indent="0" algn="ctr">
               <a:buNone/>
             </a:pPr>
             <a:r>
@@ -10236,7 +9877,7 @@
           <a:bodyPr wrap="square" lIns="0" tIns="0" rIns="0" bIns="0" rtlCol="0" anchor="ctr"/>
           <a:lstStyle/>
           <a:p>
-            <a:pPr algn="ctr" indent="0" marL="0">
+            <a:pPr marL="0" indent="0" algn="ctr">
               <a:buNone/>
             </a:pPr>
             <a:r>
@@ -10303,14 +9944,14 @@
       </p:sp>
       <p:pic>
         <p:nvPicPr>
-          <p:cNvPr id="13" name="Image 1" descr="/home/claude/knapsack_pptx/icons/search_ice.png">    </p:cNvPr>
+          <p:cNvPr id="13" name="Image 1" descr="/home/claude/knapsack_pptx/icons/search_ice.png"/>
           <p:cNvPicPr>
             <a:picLocks noChangeAspect="1"/>
           </p:cNvPicPr>
           <p:nvPr/>
         </p:nvPicPr>
         <p:blipFill>
-          <a:blip r:embed="rId2"/>
+          <a:blip r:embed="rId4"/>
           <a:stretch>
             <a:fillRect/>
           </a:stretch>
@@ -10346,7 +9987,7 @@
           <a:bodyPr wrap="square" lIns="0" tIns="0" rIns="0" bIns="0" rtlCol="0" anchor="t"/>
           <a:lstStyle/>
           <a:p>
-            <a:pPr algn="ctr" indent="0" marL="0">
+            <a:pPr marL="0" indent="0" algn="ctr">
               <a:buNone/>
             </a:pPr>
             <a:r>
@@ -10385,7 +10026,7 @@
           <a:bodyPr wrap="square" lIns="0" tIns="0" rIns="0" bIns="0" rtlCol="0" anchor="t"/>
           <a:lstStyle/>
           <a:p>
-            <a:pPr algn="ctr" indent="0" marL="0">
+            <a:pPr marL="0" indent="0" algn="ctr">
               <a:buNone/>
             </a:pPr>
             <a:r>
@@ -10424,7 +10065,7 @@
           <a:bodyPr wrap="square" lIns="0" tIns="0" rIns="0" bIns="0" rtlCol="0" anchor="ctr"/>
           <a:lstStyle/>
           <a:p>
-            <a:pPr algn="ctr" indent="0" marL="0">
+            <a:pPr marL="0" indent="0" algn="ctr">
               <a:buNone/>
             </a:pPr>
             <a:r>
@@ -10491,14 +10132,14 @@
       </p:sp>
       <p:pic>
         <p:nvPicPr>
-          <p:cNvPr id="19" name="Image 2" descr="/home/claude/knapsack_pptx/icons/xmark_gold.png">    </p:cNvPr>
+          <p:cNvPr id="19" name="Image 2" descr="/home/claude/knapsack_pptx/icons/xmark_gold.png"/>
           <p:cNvPicPr>
             <a:picLocks noChangeAspect="1"/>
           </p:cNvPicPr>
           <p:nvPr/>
         </p:nvPicPr>
         <p:blipFill>
-          <a:blip r:embed="rId3"/>
+          <a:blip r:embed="rId5"/>
           <a:stretch>
             <a:fillRect/>
           </a:stretch>
@@ -10534,7 +10175,7 @@
           <a:bodyPr wrap="square" lIns="0" tIns="0" rIns="0" bIns="0" rtlCol="0" anchor="t"/>
           <a:lstStyle/>
           <a:p>
-            <a:pPr algn="ctr" indent="0" marL="0">
+            <a:pPr marL="0" indent="0" algn="ctr">
               <a:buNone/>
             </a:pPr>
             <a:r>
@@ -10573,7 +10214,7 @@
           <a:bodyPr wrap="square" lIns="0" tIns="0" rIns="0" bIns="0" rtlCol="0" anchor="t"/>
           <a:lstStyle/>
           <a:p>
-            <a:pPr algn="ctr" indent="0" marL="0">
+            <a:pPr marL="0" indent="0" algn="ctr">
               <a:buNone/>
             </a:pPr>
             <a:r>
@@ -10612,7 +10253,7 @@
           <a:bodyPr wrap="square" lIns="0" tIns="0" rIns="0" bIns="0" rtlCol="0" anchor="ctr"/>
           <a:lstStyle/>
           <a:p>
-            <a:pPr algn="ctr" indent="0" marL="0">
+            <a:pPr marL="0" indent="0" algn="ctr">
               <a:buNone/>
             </a:pPr>
             <a:r>
@@ -10679,14 +10320,14 @@
       </p:sp>
       <p:pic>
         <p:nvPicPr>
-          <p:cNvPr id="25" name="Image 3" descr="/home/claude/knapsack_pptx/icons/check_gold.png">    </p:cNvPr>
+          <p:cNvPr id="25" name="Image 3" descr="/home/claude/knapsack_pptx/icons/check_gold.png"/>
           <p:cNvPicPr>
             <a:picLocks noChangeAspect="1"/>
           </p:cNvPicPr>
           <p:nvPr/>
         </p:nvPicPr>
         <p:blipFill>
-          <a:blip r:embed="rId4"/>
+          <a:blip r:embed="rId6"/>
           <a:stretch>
             <a:fillRect/>
           </a:stretch>
@@ -10722,7 +10363,7 @@
           <a:bodyPr wrap="square" lIns="0" tIns="0" rIns="0" bIns="0" rtlCol="0" anchor="t"/>
           <a:lstStyle/>
           <a:p>
-            <a:pPr algn="ctr" indent="0" marL="0">
+            <a:pPr marL="0" indent="0" algn="ctr">
               <a:buNone/>
             </a:pPr>
             <a:r>
@@ -10761,7 +10402,7 @@
           <a:bodyPr wrap="square" lIns="0" tIns="0" rIns="0" bIns="0" rtlCol="0" anchor="t"/>
           <a:lstStyle/>
           <a:p>
-            <a:pPr algn="ctr" indent="0" marL="0">
+            <a:pPr marL="0" indent="0" algn="ctr">
               <a:buNone/>
             </a:pPr>
             <a:r>
@@ -10800,7 +10441,7 @@
           <a:bodyPr wrap="square" lIns="0" tIns="0" rIns="0" bIns="0" rtlCol="0" anchor="ctr"/>
           <a:lstStyle/>
           <a:p>
-            <a:pPr algn="ctr" indent="0" marL="0">
+            <a:pPr marL="0" indent="0" algn="ctr">
               <a:buNone/>
             </a:pPr>
             <a:r>
@@ -10867,14 +10508,14 @@
       </p:sp>
       <p:pic>
         <p:nvPicPr>
-          <p:cNvPr id="31" name="Image 4" descr="/home/claude/knapsack_pptx/icons/target_ice.png">    </p:cNvPr>
+          <p:cNvPr id="31" name="Image 4" descr="/home/claude/knapsack_pptx/icons/target_ice.png"/>
           <p:cNvPicPr>
             <a:picLocks noChangeAspect="1"/>
           </p:cNvPicPr>
           <p:nvPr/>
         </p:nvPicPr>
         <p:blipFill>
-          <a:blip r:embed="rId5"/>
+          <a:blip r:embed="rId7"/>
           <a:stretch>
             <a:fillRect/>
           </a:stretch>
@@ -10910,7 +10551,7 @@
           <a:bodyPr wrap="square" lIns="0" tIns="0" rIns="0" bIns="0" rtlCol="0" anchor="t"/>
           <a:lstStyle/>
           <a:p>
-            <a:pPr algn="ctr" indent="0" marL="0">
+            <a:pPr marL="0" indent="0" algn="ctr">
               <a:buNone/>
             </a:pPr>
             <a:r>
@@ -10949,7 +10590,7 @@
           <a:bodyPr wrap="square" lIns="0" tIns="0" rIns="0" bIns="0" rtlCol="0" anchor="t"/>
           <a:lstStyle/>
           <a:p>
-            <a:pPr algn="ctr" indent="0" marL="0">
+            <a:pPr marL="0" indent="0" algn="ctr">
               <a:buNone/>
             </a:pPr>
             <a:r>
@@ -10988,7 +10629,7 @@
           <a:bodyPr wrap="square" lIns="0" tIns="0" rIns="0" bIns="0" rtlCol="0" anchor="ctr"/>
           <a:lstStyle/>
           <a:p>
-            <a:pPr algn="ctr" indent="0" marL="0">
+            <a:pPr marL="0" indent="0" algn="ctr">
               <a:buNone/>
             </a:pPr>
             <a:r>
@@ -11030,14 +10671,14 @@
       </p:sp>
       <p:pic>
         <p:nvPicPr>
-          <p:cNvPr id="36" name="Image 5" descr="/home/claude/knapsack_pptx/icons/brain_gold.png">    </p:cNvPr>
+          <p:cNvPr id="36" name="Image 5" descr="/home/claude/knapsack_pptx/icons/brain_gold.png"/>
           <p:cNvPicPr>
             <a:picLocks noChangeAspect="1"/>
           </p:cNvPicPr>
           <p:nvPr/>
         </p:nvPicPr>
         <p:blipFill>
-          <a:blip r:embed="rId6"/>
+          <a:blip r:embed="rId8"/>
           <a:stretch>
             <a:fillRect/>
           </a:stretch>
@@ -11073,7 +10714,7 @@
           <a:bodyPr wrap="square" lIns="0" tIns="0" rIns="0" bIns="0" rtlCol="0" anchor="ctr"/>
           <a:lstStyle/>
           <a:p>
-            <a:pPr indent="0" marL="0">
+            <a:pPr marL="0" indent="0">
               <a:lnSpc>
                 <a:spcPts val="1700"/>
               </a:lnSpc>
@@ -11090,12 +10731,6 @@
               </a:rPr>
               <a:t>Lista Tabu FIFO: </a:t>
             </a:r>
-            <a:pPr indent="0" marL="0">
-              <a:lnSpc>
-                <a:spcPts val="1700"/>
-              </a:lnSpc>
-              <a:buNone/>
-            </a:pPr>
             <a:r>
               <a:rPr lang="en-US" sz="1250" dirty="0">
                 <a:solidFill>
@@ -11132,7 +10767,7 @@
           <a:bodyPr wrap="square" lIns="0" tIns="0" rIns="0" bIns="0" rtlCol="0" anchor="ctr"/>
           <a:lstStyle/>
           <a:p>
-            <a:pPr algn="r" indent="0" marL="0">
+            <a:pPr marL="0" indent="0" algn="r">
               <a:buNone/>
             </a:pPr>
             <a:r>
@@ -11166,6 +10801,7 @@
         <a:solidFill>
           <a:srgbClr val="10162B"/>
         </a:solidFill>
+        <a:effectLst/>
       </p:bgPr>
     </p:bg>
     <p:spTree>
@@ -11203,11 +10839,11 @@
           <a:bodyPr wrap="square" lIns="0" tIns="0" rIns="0" bIns="0" rtlCol="0" anchor="ctr"/>
           <a:lstStyle/>
           <a:p>
-            <a:pPr algn="l" indent="0" marL="0">
+            <a:pPr marL="0" indent="0" algn="l">
               <a:buNone/>
             </a:pPr>
             <a:r>
-              <a:rPr lang="en-US" sz="1200" b="1" spc="200" kern="0" dirty="0">
+              <a:rPr lang="en-US" sz="1200" b="1" kern="0" spc="200" dirty="0">
                 <a:solidFill>
                   <a:srgbClr val="D4AF37"/>
                 </a:solidFill>
@@ -11242,7 +10878,7 @@
           <a:bodyPr wrap="square" lIns="0" tIns="0" rIns="0" bIns="0" rtlCol="0" anchor="ctr"/>
           <a:lstStyle/>
           <a:p>
-            <a:pPr algn="l" indent="0" marL="0">
+            <a:pPr marL="0" indent="0" algn="l">
               <a:buNone/>
             </a:pPr>
             <a:r>
@@ -11269,22 +10905,34 @@
           <p:nvPr>
             <p:extLst>
               <p:ext uri="{D42A27DB-BD31-4B8C-83A1-F6EECF244321}">
-                <p14:modId xmlns:p14="http://schemas.microsoft.com/office/powerpoint/2010/main" val="1579011935"/>
+                <p14:modId xmlns:p14="http://schemas.microsoft.com/office/powerpoint/2010/main" val="1624244911"/>
               </p:ext>
             </p:extLst>
           </p:nvPr>
         </p:nvGraphicFramePr>
         <p:xfrm>
-          <a:off x="548640" y="1737360"/>
-          <a:ext cx="6035040" cy="1463040"/>
+          <a:off x="2765628" y="1611383"/>
+          <a:ext cx="6335239" cy="1463040"/>
         </p:xfrm>
         <a:graphic>
           <a:graphicData uri="http://schemas.openxmlformats.org/drawingml/2006/table">
             <a:tbl>
               <a:tblPr/>
               <a:tblGrid>
-                <a:gridCol w="2926080"/>
-                <a:gridCol w="3108960"/>
+                <a:gridCol w="3071631">
+                  <a:extLst>
+                    <a:ext uri="{9D8B030D-6E8A-4147-A177-3AD203B41FA5}">
+                      <a16:colId xmlns:a16="http://schemas.microsoft.com/office/drawing/2014/main" val="20000"/>
+                    </a:ext>
+                  </a:extLst>
+                </a:gridCol>
+                <a:gridCol w="3263608">
+                  <a:extLst>
+                    <a:ext uri="{9D8B030D-6E8A-4147-A177-3AD203B41FA5}">
+                      <a16:colId xmlns:a16="http://schemas.microsoft.com/office/drawing/2014/main" val="20001"/>
+                    </a:ext>
+                  </a:extLst>
+                </a:gridCol>
               </a:tblGrid>
               <a:tr h="487680">
                 <a:tc>
@@ -11292,7 +10940,7 @@
                     <a:bodyPr/>
                     <a:lstStyle/>
                     <a:p>
-                      <a:pPr algn="l" indent="0" marL="0">
+                      <a:pPr marL="0" indent="0" algn="l">
                         <a:buNone/>
                       </a:pPr>
                       <a:r>
@@ -11353,7 +11001,7 @@
                     <a:bodyPr/>
                     <a:lstStyle/>
                     <a:p>
-                      <a:pPr algn="l" indent="0" marL="0">
+                      <a:pPr marL="0" indent="0" algn="l">
                         <a:buNone/>
                       </a:pPr>
                       <a:r>
@@ -11409,6 +11057,11 @@
                     </a:solidFill>
                   </a:tcPr>
                 </a:tc>
+                <a:extLst>
+                  <a:ext uri="{0D108BD9-81ED-4DB2-BD59-A6C34878D82A}">
+                    <a16:rowId xmlns:a16="http://schemas.microsoft.com/office/drawing/2014/main" val="10000"/>
+                  </a:ext>
+                </a:extLst>
               </a:tr>
               <a:tr h="487680">
                 <a:tc>
@@ -11416,7 +11069,7 @@
                     <a:bodyPr/>
                     <a:lstStyle/>
                     <a:p>
-                      <a:pPr algn="l" indent="0" marL="0">
+                      <a:pPr marL="0" indent="0" algn="l">
                         <a:buNone/>
                       </a:pPr>
                       <a:r>
@@ -11477,7 +11130,7 @@
                     <a:bodyPr/>
                     <a:lstStyle/>
                     <a:p>
-                      <a:pPr algn="l" indent="0" marL="0">
+                      <a:pPr marL="0" indent="0" algn="l">
                         <a:buNone/>
                       </a:pPr>
                       <a:r>
@@ -11533,6 +11186,11 @@
                     </a:solidFill>
                   </a:tcPr>
                 </a:tc>
+                <a:extLst>
+                  <a:ext uri="{0D108BD9-81ED-4DB2-BD59-A6C34878D82A}">
+                    <a16:rowId xmlns:a16="http://schemas.microsoft.com/office/drawing/2014/main" val="10001"/>
+                  </a:ext>
+                </a:extLst>
               </a:tr>
               <a:tr h="487680">
                 <a:tc>
@@ -11540,7 +11198,7 @@
                     <a:bodyPr/>
                     <a:lstStyle/>
                     <a:p>
-                      <a:pPr algn="l" indent="0" marL="0">
+                      <a:pPr marL="0" indent="0" algn="l">
                         <a:buNone/>
                       </a:pPr>
                       <a:r>
@@ -11601,7 +11259,7 @@
                     <a:bodyPr/>
                     <a:lstStyle/>
                     <a:p>
-                      <a:pPr algn="l" indent="0" marL="0">
+                      <a:pPr marL="0" indent="0" algn="l">
                         <a:buNone/>
                       </a:pPr>
                       <a:r>
@@ -11657,6 +11315,11 @@
                     </a:solidFill>
                   </a:tcPr>
                 </a:tc>
+                <a:extLst>
+                  <a:ext uri="{0D108BD9-81ED-4DB2-BD59-A6C34878D82A}">
+                    <a16:rowId xmlns:a16="http://schemas.microsoft.com/office/drawing/2014/main" val="10002"/>
+                  </a:ext>
+                </a:extLst>
               </a:tr>
             </a:tbl>
           </a:graphicData>
@@ -11664,53 +11327,14 @@
       </p:graphicFrame>
       <p:sp>
         <p:nvSpPr>
-          <p:cNvPr id="5" name="Text 2"/>
-          <p:cNvSpPr/>
-          <p:nvPr/>
-        </p:nvSpPr>
-        <p:spPr>
-          <a:xfrm>
-            <a:off x="548640" y="3429000"/>
-            <a:ext cx="6035040" cy="365760"/>
-          </a:xfrm>
-          <a:prstGeom prst="rect">
-            <a:avLst/>
-          </a:prstGeom>
-          <a:noFill/>
-          <a:ln/>
-        </p:spPr>
-        <p:txBody>
-          <a:bodyPr wrap="square" lIns="0" tIns="0" rIns="0" bIns="0" rtlCol="0" anchor="ctr"/>
-          <a:lstStyle/>
-          <a:p>
-            <a:pPr indent="0" marL="0">
-              <a:buNone/>
-            </a:pPr>
-            <a:r>
-              <a:rPr lang="en-US" sz="1300" i="1" dirty="0">
-                <a:solidFill>
-                  <a:srgbClr val="9BA6C4"/>
-                </a:solidFill>
-                <a:latin typeface="Calibri" pitchFamily="34" charset="0"/>
-                <a:ea typeface="Calibri" pitchFamily="34" charset="-122"/>
-                <a:cs typeface="Calibri" pitchFamily="34" charset="-120"/>
-              </a:rPr>
-              <a:t>3 × 3 = 9 combinações de parâmetros</a:t>
-            </a:r>
-            <a:endParaRPr lang="en-US" sz="1300" dirty="0"/>
-          </a:p>
-        </p:txBody>
-      </p:sp>
-      <p:sp>
-        <p:nvSpPr>
           <p:cNvPr id="6" name="Shape 3"/>
           <p:cNvSpPr/>
           <p:nvPr/>
         </p:nvSpPr>
         <p:spPr>
           <a:xfrm>
-            <a:off x="7040880" y="1737360"/>
-            <a:ext cx="4572000" cy="3566160"/>
+            <a:off x="3573061" y="3200399"/>
+            <a:ext cx="4290779" cy="3152955"/>
           </a:xfrm>
           <a:prstGeom prst="roundRect">
             <a:avLst>
@@ -11727,25 +11351,32 @@
             <a:prstDash val="solid"/>
           </a:ln>
         </p:spPr>
+        <p:txBody>
+          <a:bodyPr/>
+          <a:lstStyle/>
+          <a:p>
+            <a:endParaRPr lang="pt-BR" dirty="0"/>
+          </a:p>
+        </p:txBody>
       </p:sp>
       <p:pic>
         <p:nvPicPr>
-          <p:cNvPr id="7" name="Image 0" descr="/home/claude/knapsack_pptx/icons/cogs_gold.png">    </p:cNvPr>
+          <p:cNvPr id="4" name="Image 0" descr="/home/claude/knapsack_pptx/icons/cogs_gold.png"/>
           <p:cNvPicPr>
             <a:picLocks noChangeAspect="1"/>
           </p:cNvPicPr>
           <p:nvPr/>
         </p:nvPicPr>
         <p:blipFill>
-          <a:blip r:embed="rId1"/>
+          <a:blip r:embed="rId3"/>
           <a:stretch>
             <a:fillRect/>
           </a:stretch>
         </p:blipFill>
         <p:spPr>
           <a:xfrm>
-            <a:off x="8778240" y="2011680"/>
-            <a:ext cx="594360" cy="594360"/>
+            <a:off x="5310421" y="3331457"/>
+            <a:ext cx="557801" cy="557801"/>
           </a:xfrm>
           <a:prstGeom prst="rect">
             <a:avLst/>
@@ -11760,8 +11391,8 @@
         </p:nvSpPr>
         <p:spPr>
           <a:xfrm>
-            <a:off x="7040880" y="2697480"/>
-            <a:ext cx="4572000" cy="1005840"/>
+            <a:off x="3573061" y="3863859"/>
+            <a:ext cx="4290779" cy="889295"/>
           </a:xfrm>
           <a:prstGeom prst="rect">
             <a:avLst/>
@@ -11773,7 +11404,7 @@
           <a:bodyPr wrap="square" lIns="0" tIns="0" rIns="0" bIns="0" rtlCol="0" anchor="ctr"/>
           <a:lstStyle/>
           <a:p>
-            <a:pPr algn="ctr" indent="0" marL="0">
+            <a:pPr marL="0" indent="0" algn="ctr">
               <a:buNone/>
             </a:pPr>
             <a:r>
@@ -11799,8 +11430,8 @@
         </p:nvSpPr>
         <p:spPr>
           <a:xfrm>
-            <a:off x="7040880" y="3611880"/>
-            <a:ext cx="4572000" cy="365760"/>
+            <a:off x="3573061" y="4704095"/>
+            <a:ext cx="4290779" cy="323380"/>
           </a:xfrm>
           <a:prstGeom prst="rect">
             <a:avLst/>
@@ -11812,7 +11443,7 @@
           <a:bodyPr wrap="square" lIns="0" tIns="0" rIns="0" bIns="0" rtlCol="0" anchor="ctr"/>
           <a:lstStyle/>
           <a:p>
-            <a:pPr algn="ctr" indent="0" marL="0">
+            <a:pPr marL="0" indent="0" algn="ctr">
               <a:buNone/>
             </a:pPr>
             <a:r>
@@ -11838,8 +11469,8 @@
         </p:nvSpPr>
         <p:spPr>
           <a:xfrm>
-            <a:off x="7680960" y="4114800"/>
-            <a:ext cx="3291840" cy="0"/>
+            <a:off x="4213141" y="5164635"/>
+            <a:ext cx="3089361" cy="0"/>
           </a:xfrm>
           <a:prstGeom prst="line">
             <a:avLst/>
@@ -11861,8 +11492,8 @@
         </p:nvSpPr>
         <p:spPr>
           <a:xfrm>
-            <a:off x="7040880" y="4251960"/>
-            <a:ext cx="4572000" cy="822960"/>
+            <a:off x="3573061" y="5397149"/>
+            <a:ext cx="4290779" cy="727605"/>
           </a:xfrm>
           <a:prstGeom prst="rect">
             <a:avLst/>
@@ -11874,7 +11505,7 @@
           <a:bodyPr wrap="square" lIns="0" tIns="0" rIns="0" bIns="0" rtlCol="0" anchor="t"/>
           <a:lstStyle/>
           <a:p>
-            <a:pPr algn="ctr" indent="0" marL="0">
+            <a:pPr marL="0" indent="0" algn="ctr">
               <a:buNone/>
             </a:pPr>
             <a:r>
@@ -11888,9 +11519,6 @@
               </a:rPr>
               <a:t>9 </a:t>
             </a:r>
-            <a:pPr algn="ctr" indent="0" marL="0">
-              <a:buNone/>
-            </a:pPr>
             <a:r>
               <a:rPr lang="en-US" sz="1350" dirty="0">
                 <a:solidFill>
@@ -11902,9 +11530,6 @@
               </a:rPr>
               <a:t>combinações  ×  </a:t>
             </a:r>
-            <a:pPr algn="ctr" indent="0" marL="0">
-              <a:buNone/>
-            </a:pPr>
             <a:r>
               <a:rPr lang="en-US" sz="1350" b="1" dirty="0">
                 <a:solidFill>
@@ -11916,9 +11541,6 @@
               </a:rPr>
               <a:t>9 </a:t>
             </a:r>
-            <a:pPr algn="ctr" indent="0" marL="0">
-              <a:buNone/>
-            </a:pPr>
             <a:r>
               <a:rPr lang="en-US" sz="1350" dirty="0">
                 <a:solidFill>
@@ -11930,9 +11552,6 @@
               </a:rPr>
               <a:t>instâncias  ×  </a:t>
             </a:r>
-            <a:pPr algn="ctr" indent="0" marL="0">
-              <a:buNone/>
-            </a:pPr>
             <a:r>
               <a:rPr lang="en-US" sz="1350" b="1" dirty="0">
                 <a:solidFill>
@@ -11944,9 +11563,6 @@
               </a:rPr>
               <a:t>3 </a:t>
             </a:r>
-            <a:pPr algn="ctr" indent="0" marL="0">
-              <a:buNone/>
-            </a:pPr>
             <a:r>
               <a:rPr lang="en-US" sz="1350" dirty="0">
                 <a:solidFill>
@@ -11983,7 +11599,7 @@
           <a:bodyPr wrap="square" lIns="0" tIns="0" rIns="0" bIns="0" rtlCol="0" anchor="ctr"/>
           <a:lstStyle/>
           <a:p>
-            <a:pPr algn="r" indent="0" marL="0">
+            <a:pPr marL="0" indent="0" algn="r">
               <a:buNone/>
             </a:pPr>
             <a:r>
@@ -12017,6 +11633,7 @@
         <a:solidFill>
           <a:srgbClr val="10162B"/>
         </a:solidFill>
+        <a:effectLst/>
       </p:bgPr>
     </p:bg>
     <p:spTree>
@@ -12054,11 +11671,11 @@
           <a:bodyPr wrap="square" lIns="0" tIns="0" rIns="0" bIns="0" rtlCol="0" anchor="ctr"/>
           <a:lstStyle/>
           <a:p>
-            <a:pPr algn="l" indent="0" marL="0">
+            <a:pPr marL="0" indent="0" algn="l">
               <a:buNone/>
             </a:pPr>
             <a:r>
-              <a:rPr lang="en-US" sz="1200" b="1" spc="200" kern="0" dirty="0">
+              <a:rPr lang="en-US" sz="1200" b="1" kern="0" spc="200" dirty="0">
                 <a:solidFill>
                   <a:srgbClr val="D4AF37"/>
                 </a:solidFill>
@@ -12093,7 +11710,7 @@
           <a:bodyPr wrap="square" lIns="0" tIns="0" rIns="0" bIns="0" rtlCol="0" anchor="ctr"/>
           <a:lstStyle/>
           <a:p>
-            <a:pPr algn="l" indent="0" marL="0">
+            <a:pPr marL="0" indent="0" algn="l">
               <a:buNone/>
             </a:pPr>
             <a:r>
@@ -12132,7 +11749,7 @@
           <a:bodyPr wrap="square" lIns="0" tIns="0" rIns="0" bIns="0" rtlCol="0" anchor="t"/>
           <a:lstStyle/>
           <a:p>
-            <a:pPr indent="0" marL="0">
+            <a:pPr marL="0" indent="0">
               <a:lnSpc>
                 <a:spcPts val="2000"/>
               </a:lnSpc>
@@ -12149,12 +11766,6 @@
               </a:rPr>
               <a:t>Meta-heurística </a:t>
             </a:r>
-            <a:pPr indent="0" marL="0">
-              <a:lnSpc>
-                <a:spcPts val="2000"/>
-              </a:lnSpc>
-              <a:buNone/>
-            </a:pPr>
             <a:r>
               <a:rPr lang="en-US" sz="1450" b="1" dirty="0">
                 <a:solidFill>
@@ -12166,12 +11777,6 @@
               </a:rPr>
               <a:t>populacional</a:t>
             </a:r>
-            <a:pPr indent="0" marL="0">
-              <a:lnSpc>
-                <a:spcPts val="2000"/>
-              </a:lnSpc>
-              <a:buNone/>
-            </a:pPr>
             <a:r>
               <a:rPr lang="en-US" sz="1450" dirty="0">
                 <a:solidFill>
@@ -12236,14 +11841,14 @@
       </p:sp>
       <p:pic>
         <p:nvPicPr>
-          <p:cNvPr id="7" name="Image 0" descr="/home/claude/knapsack_pptx/icons/layers_ice.png">    </p:cNvPr>
+          <p:cNvPr id="7" name="Image 0" descr="/home/claude/knapsack_pptx/icons/layers_ice.png"/>
           <p:cNvPicPr>
             <a:picLocks noChangeAspect="1"/>
           </p:cNvPicPr>
           <p:nvPr/>
         </p:nvPicPr>
         <p:blipFill>
-          <a:blip r:embed="rId1"/>
+          <a:blip r:embed="rId3"/>
           <a:stretch>
             <a:fillRect/>
           </a:stretch>
@@ -12279,7 +11884,7 @@
           <a:bodyPr wrap="square" lIns="0" tIns="0" rIns="0" bIns="0" rtlCol="0" anchor="t"/>
           <a:lstStyle/>
           <a:p>
-            <a:pPr algn="ctr" indent="0" marL="0">
+            <a:pPr marL="0" indent="0" algn="ctr">
               <a:buNone/>
             </a:pPr>
             <a:r>
@@ -12318,7 +11923,7 @@
           <a:bodyPr wrap="square" lIns="0" tIns="0" rIns="0" bIns="0" rtlCol="0" anchor="t"/>
           <a:lstStyle/>
           <a:p>
-            <a:pPr algn="ctr" indent="0" marL="0">
+            <a:pPr marL="0" indent="0" algn="ctr">
               <a:buNone/>
             </a:pPr>
             <a:r>
@@ -12357,7 +11962,7 @@
           <a:bodyPr wrap="square" lIns="0" tIns="0" rIns="0" bIns="0" rtlCol="0" anchor="ctr"/>
           <a:lstStyle/>
           <a:p>
-            <a:pPr algn="ctr" indent="0" marL="0">
+            <a:pPr marL="0" indent="0" algn="ctr">
               <a:buNone/>
             </a:pPr>
             <a:r>
@@ -12424,14 +12029,14 @@
       </p:sp>
       <p:pic>
         <p:nvPicPr>
-          <p:cNvPr id="13" name="Image 1" descr="/home/claude/knapsack_pptx/icons/chartline_gold.png">    </p:cNvPr>
+          <p:cNvPr id="13" name="Image 1" descr="/home/claude/knapsack_pptx/icons/chartline_gold.png"/>
           <p:cNvPicPr>
             <a:picLocks noChangeAspect="1"/>
           </p:cNvPicPr>
           <p:nvPr/>
         </p:nvPicPr>
         <p:blipFill>
-          <a:blip r:embed="rId2"/>
+          <a:blip r:embed="rId4"/>
           <a:stretch>
             <a:fillRect/>
           </a:stretch>
@@ -12467,7 +12072,7 @@
           <a:bodyPr wrap="square" lIns="0" tIns="0" rIns="0" bIns="0" rtlCol="0" anchor="t"/>
           <a:lstStyle/>
           <a:p>
-            <a:pPr algn="ctr" indent="0" marL="0">
+            <a:pPr marL="0" indent="0" algn="ctr">
               <a:buNone/>
             </a:pPr>
             <a:r>
@@ -12506,7 +12111,7 @@
           <a:bodyPr wrap="square" lIns="0" tIns="0" rIns="0" bIns="0" rtlCol="0" anchor="t"/>
           <a:lstStyle/>
           <a:p>
-            <a:pPr algn="ctr" indent="0" marL="0">
+            <a:pPr marL="0" indent="0" algn="ctr">
               <a:buNone/>
             </a:pPr>
             <a:r>
@@ -12545,7 +12150,7 @@
           <a:bodyPr wrap="square" lIns="0" tIns="0" rIns="0" bIns="0" rtlCol="0" anchor="ctr"/>
           <a:lstStyle/>
           <a:p>
-            <a:pPr algn="ctr" indent="0" marL="0">
+            <a:pPr marL="0" indent="0" algn="ctr">
               <a:buNone/>
             </a:pPr>
             <a:r>
@@ -12612,14 +12217,14 @@
       </p:sp>
       <p:pic>
         <p:nvPicPr>
-          <p:cNvPr id="19" name="Image 2" descr="/home/claude/knapsack_pptx/icons/target_ice.png">    </p:cNvPr>
+          <p:cNvPr id="19" name="Image 2" descr="/home/claude/knapsack_pptx/icons/target_ice.png"/>
           <p:cNvPicPr>
             <a:picLocks noChangeAspect="1"/>
           </p:cNvPicPr>
           <p:nvPr/>
         </p:nvPicPr>
         <p:blipFill>
-          <a:blip r:embed="rId3"/>
+          <a:blip r:embed="rId5"/>
           <a:stretch>
             <a:fillRect/>
           </a:stretch>
@@ -12655,7 +12260,7 @@
           <a:bodyPr wrap="square" lIns="0" tIns="0" rIns="0" bIns="0" rtlCol="0" anchor="t"/>
           <a:lstStyle/>
           <a:p>
-            <a:pPr algn="ctr" indent="0" marL="0">
+            <a:pPr marL="0" indent="0" algn="ctr">
               <a:buNone/>
             </a:pPr>
             <a:r>
@@ -12694,7 +12299,7 @@
           <a:bodyPr wrap="square" lIns="0" tIns="0" rIns="0" bIns="0" rtlCol="0" anchor="t"/>
           <a:lstStyle/>
           <a:p>
-            <a:pPr algn="ctr" indent="0" marL="0">
+            <a:pPr marL="0" indent="0" algn="ctr">
               <a:buNone/>
             </a:pPr>
             <a:r>
@@ -12733,7 +12338,7 @@
           <a:bodyPr wrap="square" lIns="0" tIns="0" rIns="0" bIns="0" rtlCol="0" anchor="ctr"/>
           <a:lstStyle/>
           <a:p>
-            <a:pPr algn="ctr" indent="0" marL="0">
+            <a:pPr marL="0" indent="0" algn="ctr">
               <a:buNone/>
             </a:pPr>
             <a:r>
@@ -12800,14 +12405,14 @@
       </p:sp>
       <p:pic>
         <p:nvPicPr>
-          <p:cNvPr id="25" name="Image 3" descr="/home/claude/knapsack_pptx/icons/random_gold.png">    </p:cNvPr>
+          <p:cNvPr id="25" name="Image 3" descr="/home/claude/knapsack_pptx/icons/random_gold.png"/>
           <p:cNvPicPr>
             <a:picLocks noChangeAspect="1"/>
           </p:cNvPicPr>
           <p:nvPr/>
         </p:nvPicPr>
         <p:blipFill>
-          <a:blip r:embed="rId4"/>
+          <a:blip r:embed="rId6"/>
           <a:stretch>
             <a:fillRect/>
           </a:stretch>
@@ -12843,7 +12448,7 @@
           <a:bodyPr wrap="square" lIns="0" tIns="0" rIns="0" bIns="0" rtlCol="0" anchor="t"/>
           <a:lstStyle/>
           <a:p>
-            <a:pPr algn="ctr" indent="0" marL="0">
+            <a:pPr marL="0" indent="0" algn="ctr">
               <a:buNone/>
             </a:pPr>
             <a:r>
@@ -12882,7 +12487,7 @@
           <a:bodyPr wrap="square" lIns="0" tIns="0" rIns="0" bIns="0" rtlCol="0" anchor="t"/>
           <a:lstStyle/>
           <a:p>
-            <a:pPr algn="ctr" indent="0" marL="0">
+            <a:pPr marL="0" indent="0" algn="ctr">
               <a:buNone/>
             </a:pPr>
             <a:r>
@@ -12921,7 +12526,7 @@
           <a:bodyPr wrap="square" lIns="0" tIns="0" rIns="0" bIns="0" rtlCol="0" anchor="ctr"/>
           <a:lstStyle/>
           <a:p>
-            <a:pPr algn="ctr" indent="0" marL="0">
+            <a:pPr marL="0" indent="0" algn="ctr">
               <a:buNone/>
             </a:pPr>
             <a:r>
@@ -12988,14 +12593,14 @@
       </p:sp>
       <p:pic>
         <p:nvPicPr>
-          <p:cNvPr id="31" name="Image 4" descr="/home/claude/knapsack_pptx/icons/dna_ice.png">    </p:cNvPr>
+          <p:cNvPr id="31" name="Image 4" descr="/home/claude/knapsack_pptx/icons/dna_ice.png"/>
           <p:cNvPicPr>
             <a:picLocks noChangeAspect="1"/>
           </p:cNvPicPr>
           <p:nvPr/>
         </p:nvPicPr>
         <p:blipFill>
-          <a:blip r:embed="rId5"/>
+          <a:blip r:embed="rId7"/>
           <a:stretch>
             <a:fillRect/>
           </a:stretch>
@@ -13031,7 +12636,7 @@
           <a:bodyPr wrap="square" lIns="0" tIns="0" rIns="0" bIns="0" rtlCol="0" anchor="t"/>
           <a:lstStyle/>
           <a:p>
-            <a:pPr algn="ctr" indent="0" marL="0">
+            <a:pPr marL="0" indent="0" algn="ctr">
               <a:buNone/>
             </a:pPr>
             <a:r>
@@ -13070,7 +12675,7 @@
           <a:bodyPr wrap="square" lIns="0" tIns="0" rIns="0" bIns="0" rtlCol="0" anchor="t"/>
           <a:lstStyle/>
           <a:p>
-            <a:pPr algn="ctr" indent="0" marL="0">
+            <a:pPr marL="0" indent="0" algn="ctr">
               <a:buNone/>
             </a:pPr>
             <a:r>
@@ -13109,7 +12714,7 @@
           <a:bodyPr wrap="square" lIns="0" tIns="0" rIns="0" bIns="0" rtlCol="0" anchor="ctr"/>
           <a:lstStyle/>
           <a:p>
-            <a:pPr algn="ctr" indent="0" marL="0">
+            <a:pPr marL="0" indent="0" algn="ctr">
               <a:buNone/>
             </a:pPr>
             <a:r>
@@ -13176,14 +12781,14 @@
       </p:sp>
       <p:pic>
         <p:nvPicPr>
-          <p:cNvPr id="37" name="Image 5" descr="/home/claude/knapsack_pptx/icons/check_gold.png">    </p:cNvPr>
+          <p:cNvPr id="37" name="Image 5" descr="/home/claude/knapsack_pptx/icons/check_gold.png"/>
           <p:cNvPicPr>
             <a:picLocks noChangeAspect="1"/>
           </p:cNvPicPr>
           <p:nvPr/>
         </p:nvPicPr>
         <p:blipFill>
-          <a:blip r:embed="rId6"/>
+          <a:blip r:embed="rId8"/>
           <a:stretch>
             <a:fillRect/>
           </a:stretch>
@@ -13219,7 +12824,7 @@
           <a:bodyPr wrap="square" lIns="0" tIns="0" rIns="0" bIns="0" rtlCol="0" anchor="t"/>
           <a:lstStyle/>
           <a:p>
-            <a:pPr algn="ctr" indent="0" marL="0">
+            <a:pPr marL="0" indent="0" algn="ctr">
               <a:buNone/>
             </a:pPr>
             <a:r>
@@ -13258,7 +12863,7 @@
           <a:bodyPr wrap="square" lIns="0" tIns="0" rIns="0" bIns="0" rtlCol="0" anchor="t"/>
           <a:lstStyle/>
           <a:p>
-            <a:pPr algn="ctr" indent="0" marL="0">
+            <a:pPr marL="0" indent="0" algn="ctr">
               <a:buNone/>
             </a:pPr>
             <a:r>
@@ -13297,7 +12902,7 @@
           <a:bodyPr wrap="square" lIns="0" tIns="0" rIns="0" bIns="0" rtlCol="0" anchor="ctr"/>
           <a:lstStyle/>
           <a:p>
-            <a:pPr algn="ctr" indent="0" marL="0">
+            <a:pPr marL="0" indent="0" algn="ctr">
               <a:buNone/>
             </a:pPr>
             <a:r>
@@ -13364,14 +12969,14 @@
       </p:sp>
       <p:pic>
         <p:nvPicPr>
-          <p:cNvPr id="43" name="Image 6" descr="/home/claude/knapsack_pptx/icons/sitemap_ice.png">    </p:cNvPr>
+          <p:cNvPr id="43" name="Image 6" descr="/home/claude/knapsack_pptx/icons/sitemap_ice.png"/>
           <p:cNvPicPr>
             <a:picLocks noChangeAspect="1"/>
           </p:cNvPicPr>
           <p:nvPr/>
         </p:nvPicPr>
         <p:blipFill>
-          <a:blip r:embed="rId7"/>
+          <a:blip r:embed="rId9"/>
           <a:stretch>
             <a:fillRect/>
           </a:stretch>
@@ -13407,7 +13012,7 @@
           <a:bodyPr wrap="square" lIns="0" tIns="0" rIns="0" bIns="0" rtlCol="0" anchor="t"/>
           <a:lstStyle/>
           <a:p>
-            <a:pPr algn="ctr" indent="0" marL="0">
+            <a:pPr marL="0" indent="0" algn="ctr">
               <a:buNone/>
             </a:pPr>
             <a:r>
@@ -13446,7 +13051,7 @@
           <a:bodyPr wrap="square" lIns="0" tIns="0" rIns="0" bIns="0" rtlCol="0" anchor="t"/>
           <a:lstStyle/>
           <a:p>
-            <a:pPr algn="ctr" indent="0" marL="0">
+            <a:pPr marL="0" indent="0" algn="ctr">
               <a:buNone/>
             </a:pPr>
             <a:r>
@@ -13485,7 +13090,7 @@
           <a:bodyPr wrap="square" lIns="0" tIns="0" rIns="0" bIns="0" rtlCol="0" anchor="ctr"/>
           <a:lstStyle/>
           <a:p>
-            <a:pPr algn="ctr" indent="0" marL="0">
+            <a:pPr marL="0" indent="0" algn="ctr">
               <a:buNone/>
             </a:pPr>
             <a:r>
@@ -13527,14 +13132,14 @@
       </p:sp>
       <p:pic>
         <p:nvPicPr>
-          <p:cNvPr id="48" name="Image 7" descr="/home/claude/knapsack_pptx/icons/brain_gold.png">    </p:cNvPr>
+          <p:cNvPr id="48" name="Image 7" descr="/home/claude/knapsack_pptx/icons/brain_gold.png"/>
           <p:cNvPicPr>
             <a:picLocks noChangeAspect="1"/>
           </p:cNvPicPr>
           <p:nvPr/>
         </p:nvPicPr>
         <p:blipFill>
-          <a:blip r:embed="rId8"/>
+          <a:blip r:embed="rId10"/>
           <a:stretch>
             <a:fillRect/>
           </a:stretch>
@@ -13570,7 +13175,7 @@
           <a:bodyPr wrap="square" lIns="0" tIns="0" rIns="0" bIns="0" rtlCol="0" anchor="ctr"/>
           <a:lstStyle/>
           <a:p>
-            <a:pPr indent="0" marL="0">
+            <a:pPr marL="0" indent="0">
               <a:lnSpc>
                 <a:spcPts val="1600"/>
               </a:lnSpc>
@@ -13587,12 +13192,6 @@
               </a:rPr>
               <a:t>Reparo de factibilidade: </a:t>
             </a:r>
-            <a:pPr indent="0" marL="0">
-              <a:lnSpc>
-                <a:spcPts val="1600"/>
-              </a:lnSpc>
-              <a:buNone/>
-            </a:pPr>
             <a:r>
               <a:rPr lang="en-US" sz="1200" dirty="0">
                 <a:solidFill>
@@ -13629,7 +13228,7 @@
           <a:bodyPr wrap="square" lIns="0" tIns="0" rIns="0" bIns="0" rtlCol="0" anchor="ctr"/>
           <a:lstStyle/>
           <a:p>
-            <a:pPr algn="r" indent="0" marL="0">
+            <a:pPr marL="0" indent="0" algn="r">
               <a:buNone/>
             </a:pPr>
             <a:r>
@@ -13663,6 +13262,7 @@
         <a:solidFill>
           <a:srgbClr val="10162B"/>
         </a:solidFill>
+        <a:effectLst/>
       </p:bgPr>
     </p:bg>
     <p:spTree>
@@ -13700,11 +13300,11 @@
           <a:bodyPr wrap="square" lIns="0" tIns="0" rIns="0" bIns="0" rtlCol="0" anchor="ctr"/>
           <a:lstStyle/>
           <a:p>
-            <a:pPr algn="l" indent="0" marL="0">
+            <a:pPr marL="0" indent="0" algn="l">
               <a:buNone/>
             </a:pPr>
             <a:r>
-              <a:rPr lang="en-US" sz="1200" b="1" spc="200" kern="0" dirty="0">
+              <a:rPr lang="en-US" sz="1200" b="1" kern="0" spc="200" dirty="0">
                 <a:solidFill>
                   <a:srgbClr val="D4AF37"/>
                 </a:solidFill>
@@ -13739,7 +13339,7 @@
           <a:bodyPr wrap="square" lIns="0" tIns="0" rIns="0" bIns="0" rtlCol="0" anchor="ctr"/>
           <a:lstStyle/>
           <a:p>
-            <a:pPr algn="l" indent="0" marL="0">
+            <a:pPr marL="0" indent="0" algn="l">
               <a:buNone/>
             </a:pPr>
             <a:r>
@@ -13780,8 +13380,20 @@
             <a:tbl>
               <a:tblPr/>
               <a:tblGrid>
-                <a:gridCol w="2926080"/>
-                <a:gridCol w="3108960"/>
+                <a:gridCol w="2926080">
+                  <a:extLst>
+                    <a:ext uri="{9D8B030D-6E8A-4147-A177-3AD203B41FA5}">
+                      <a16:colId xmlns:a16="http://schemas.microsoft.com/office/drawing/2014/main" val="20000"/>
+                    </a:ext>
+                  </a:extLst>
+                </a:gridCol>
+                <a:gridCol w="3108960">
+                  <a:extLst>
+                    <a:ext uri="{9D8B030D-6E8A-4147-A177-3AD203B41FA5}">
+                      <a16:colId xmlns:a16="http://schemas.microsoft.com/office/drawing/2014/main" val="20001"/>
+                    </a:ext>
+                  </a:extLst>
+                </a:gridCol>
               </a:tblGrid>
               <a:tr h="530352">
                 <a:tc>
@@ -13789,7 +13401,7 @@
                     <a:bodyPr/>
                     <a:lstStyle/>
                     <a:p>
-                      <a:pPr algn="l" indent="0" marL="0">
+                      <a:pPr marL="0" indent="0" algn="l">
                         <a:buNone/>
                       </a:pPr>
                       <a:r>
@@ -13850,7 +13462,7 @@
                     <a:bodyPr/>
                     <a:lstStyle/>
                     <a:p>
-                      <a:pPr algn="l" indent="0" marL="0">
+                      <a:pPr marL="0" indent="0" algn="l">
                         <a:buNone/>
                       </a:pPr>
                       <a:r>
@@ -13906,6 +13518,11 @@
                     </a:solidFill>
                   </a:tcPr>
                 </a:tc>
+                <a:extLst>
+                  <a:ext uri="{0D108BD9-81ED-4DB2-BD59-A6C34878D82A}">
+                    <a16:rowId xmlns:a16="http://schemas.microsoft.com/office/drawing/2014/main" val="10000"/>
+                  </a:ext>
+                </a:extLst>
               </a:tr>
               <a:tr h="530352">
                 <a:tc>
@@ -13913,7 +13530,7 @@
                     <a:bodyPr/>
                     <a:lstStyle/>
                     <a:p>
-                      <a:pPr algn="l" indent="0" marL="0">
+                      <a:pPr marL="0" indent="0" algn="l">
                         <a:buNone/>
                       </a:pPr>
                       <a:r>
@@ -13974,7 +13591,7 @@
                     <a:bodyPr/>
                     <a:lstStyle/>
                     <a:p>
-                      <a:pPr algn="l" indent="0" marL="0">
+                      <a:pPr marL="0" indent="0" algn="l">
                         <a:buNone/>
                       </a:pPr>
                       <a:r>
@@ -14030,6 +13647,11 @@
                     </a:solidFill>
                   </a:tcPr>
                 </a:tc>
+                <a:extLst>
+                  <a:ext uri="{0D108BD9-81ED-4DB2-BD59-A6C34878D82A}">
+                    <a16:rowId xmlns:a16="http://schemas.microsoft.com/office/drawing/2014/main" val="10001"/>
+                  </a:ext>
+                </a:extLst>
               </a:tr>
               <a:tr h="530352">
                 <a:tc>
@@ -14037,7 +13659,7 @@
                     <a:bodyPr/>
                     <a:lstStyle/>
                     <a:p>
-                      <a:pPr algn="l" indent="0" marL="0">
+                      <a:pPr marL="0" indent="0" algn="l">
                         <a:buNone/>
                       </a:pPr>
                       <a:r>
@@ -14098,7 +13720,7 @@
                     <a:bodyPr/>
                     <a:lstStyle/>
                     <a:p>
-                      <a:pPr algn="l" indent="0" marL="0">
+                      <a:pPr marL="0" indent="0" algn="l">
                         <a:buNone/>
                       </a:pPr>
                       <a:r>
@@ -14154,6 +13776,11 @@
                     </a:solidFill>
                   </a:tcPr>
                 </a:tc>
+                <a:extLst>
+                  <a:ext uri="{0D108BD9-81ED-4DB2-BD59-A6C34878D82A}">
+                    <a16:rowId xmlns:a16="http://schemas.microsoft.com/office/drawing/2014/main" val="10002"/>
+                  </a:ext>
+                </a:extLst>
               </a:tr>
               <a:tr h="530352">
                 <a:tc>
@@ -14161,7 +13788,7 @@
                     <a:bodyPr/>
                     <a:lstStyle/>
                     <a:p>
-                      <a:pPr algn="l" indent="0" marL="0">
+                      <a:pPr marL="0" indent="0" algn="l">
                         <a:buNone/>
                       </a:pPr>
                       <a:r>
@@ -14222,7 +13849,7 @@
                     <a:bodyPr/>
                     <a:lstStyle/>
                     <a:p>
-                      <a:pPr algn="l" indent="0" marL="0">
+                      <a:pPr marL="0" indent="0" algn="l">
                         <a:buNone/>
                       </a:pPr>
                       <a:r>
@@ -14278,6 +13905,11 @@
                     </a:solidFill>
                   </a:tcPr>
                 </a:tc>
+                <a:extLst>
+                  <a:ext uri="{0D108BD9-81ED-4DB2-BD59-A6C34878D82A}">
+                    <a16:rowId xmlns:a16="http://schemas.microsoft.com/office/drawing/2014/main" val="10003"/>
+                  </a:ext>
+                </a:extLst>
               </a:tr>
               <a:tr h="530352">
                 <a:tc>
@@ -14285,7 +13917,7 @@
                     <a:bodyPr/>
                     <a:lstStyle/>
                     <a:p>
-                      <a:pPr algn="l" indent="0" marL="0">
+                      <a:pPr marL="0" indent="0" algn="l">
                         <a:buNone/>
                       </a:pPr>
                       <a:r>
@@ -14346,7 +13978,7 @@
                     <a:bodyPr/>
                     <a:lstStyle/>
                     <a:p>
-                      <a:pPr algn="l" indent="0" marL="0">
+                      <a:pPr marL="0" indent="0" algn="l">
                         <a:buNone/>
                       </a:pPr>
                       <a:r>
@@ -14402,6 +14034,11 @@
                     </a:solidFill>
                   </a:tcPr>
                 </a:tc>
+                <a:extLst>
+                  <a:ext uri="{0D108BD9-81ED-4DB2-BD59-A6C34878D82A}">
+                    <a16:rowId xmlns:a16="http://schemas.microsoft.com/office/drawing/2014/main" val="10004"/>
+                  </a:ext>
+                </a:extLst>
               </a:tr>
             </a:tbl>
           </a:graphicData>
@@ -14428,7 +14065,7 @@
           <a:bodyPr wrap="square" lIns="0" tIns="0" rIns="0" bIns="0" rtlCol="0" anchor="ctr"/>
           <a:lstStyle/>
           <a:p>
-            <a:pPr indent="0" marL="0">
+            <a:pPr marL="0" indent="0">
               <a:buNone/>
             </a:pPr>
             <a:r>
@@ -14475,14 +14112,14 @@
       </p:sp>
       <p:pic>
         <p:nvPicPr>
-          <p:cNvPr id="7" name="Image 0" descr="/home/claude/knapsack_pptx/icons/dna_gold.png">    </p:cNvPr>
+          <p:cNvPr id="7" name="Image 0" descr="/home/claude/knapsack_pptx/icons/dna_gold.png"/>
           <p:cNvPicPr>
             <a:picLocks noChangeAspect="1"/>
           </p:cNvPicPr>
           <p:nvPr/>
         </p:nvPicPr>
         <p:blipFill>
-          <a:blip r:embed="rId1"/>
+          <a:blip r:embed="rId3"/>
           <a:stretch>
             <a:fillRect/>
           </a:stretch>
@@ -14518,7 +14155,7 @@
           <a:bodyPr wrap="square" lIns="0" tIns="0" rIns="0" bIns="0" rtlCol="0" anchor="ctr"/>
           <a:lstStyle/>
           <a:p>
-            <a:pPr algn="ctr" indent="0" marL="0">
+            <a:pPr marL="0" indent="0" algn="ctr">
               <a:buNone/>
             </a:pPr>
             <a:r>
@@ -14538,7 +14175,7 @@
       </p:sp>
       <p:sp>
         <p:nvSpPr>
-          <p:cNvPr id="9" name="Text 5"/>
+          <p:cNvPr id="4" name="Text 5"/>
           <p:cNvSpPr/>
           <p:nvPr/>
         </p:nvSpPr>
@@ -14557,7 +14194,7 @@
           <a:bodyPr wrap="square" lIns="0" tIns="0" rIns="0" bIns="0" rtlCol="0" anchor="ctr"/>
           <a:lstStyle/>
           <a:p>
-            <a:pPr algn="ctr" indent="0" marL="0">
+            <a:pPr marL="0" indent="0" algn="ctr">
               <a:buNone/>
             </a:pPr>
             <a:r>
@@ -14619,7 +14256,7 @@
           <a:bodyPr wrap="square" lIns="0" tIns="0" rIns="0" bIns="0" rtlCol="0" anchor="t"/>
           <a:lstStyle/>
           <a:p>
-            <a:pPr algn="ctr" indent="0" marL="0">
+            <a:pPr marL="0" indent="0" algn="ctr">
               <a:buNone/>
             </a:pPr>
             <a:r>
@@ -14633,9 +14270,6 @@
               </a:rPr>
               <a:t>12 </a:t>
             </a:r>
-            <a:pPr algn="ctr" indent="0" marL="0">
-              <a:buNone/>
-            </a:pPr>
             <a:r>
               <a:rPr lang="en-US" sz="1350" dirty="0">
                 <a:solidFill>
@@ -14647,9 +14281,6 @@
               </a:rPr>
               <a:t>combinações  ×  </a:t>
             </a:r>
-            <a:pPr algn="ctr" indent="0" marL="0">
-              <a:buNone/>
-            </a:pPr>
             <a:r>
               <a:rPr lang="en-US" sz="1350" b="1" dirty="0">
                 <a:solidFill>
@@ -14661,9 +14292,6 @@
               </a:rPr>
               <a:t>9 </a:t>
             </a:r>
-            <a:pPr algn="ctr" indent="0" marL="0">
-              <a:buNone/>
-            </a:pPr>
             <a:r>
               <a:rPr lang="en-US" sz="1350" dirty="0">
                 <a:solidFill>
@@ -14675,9 +14303,6 @@
               </a:rPr>
               <a:t>instâncias  ×  </a:t>
             </a:r>
-            <a:pPr algn="ctr" indent="0" marL="0">
-              <a:buNone/>
-            </a:pPr>
             <a:r>
               <a:rPr lang="en-US" sz="1350" b="1" dirty="0">
                 <a:solidFill>
@@ -14689,9 +14314,6 @@
               </a:rPr>
               <a:t>3 </a:t>
             </a:r>
-            <a:pPr algn="ctr" indent="0" marL="0">
-              <a:buNone/>
-            </a:pPr>
             <a:r>
               <a:rPr lang="en-US" sz="1350" dirty="0">
                 <a:solidFill>
@@ -14728,7 +14350,7 @@
           <a:bodyPr wrap="square" lIns="0" tIns="0" rIns="0" bIns="0" rtlCol="0" anchor="ctr"/>
           <a:lstStyle/>
           <a:p>
-            <a:pPr algn="r" indent="0" marL="0">
+            <a:pPr marL="0" indent="0" algn="r">
               <a:buNone/>
             </a:pPr>
             <a:r>
@@ -14762,6 +14384,7 @@
         <a:solidFill>
           <a:srgbClr val="10162B"/>
         </a:solidFill>
+        <a:effectLst/>
       </p:bgPr>
     </p:bg>
     <p:spTree>
@@ -14799,11 +14422,11 @@
           <a:bodyPr wrap="square" lIns="0" tIns="0" rIns="0" bIns="0" rtlCol="0" anchor="ctr"/>
           <a:lstStyle/>
           <a:p>
-            <a:pPr algn="l" indent="0" marL="0">
+            <a:pPr marL="0" indent="0" algn="l">
               <a:buNone/>
             </a:pPr>
             <a:r>
-              <a:rPr lang="en-US" sz="1200" b="1" spc="200" kern="0" dirty="0">
+              <a:rPr lang="en-US" sz="1200" b="1" kern="0" spc="200" dirty="0">
                 <a:solidFill>
                   <a:srgbClr val="D4AF37"/>
                 </a:solidFill>
@@ -14838,7 +14461,7 @@
           <a:bodyPr wrap="square" lIns="0" tIns="0" rIns="0" bIns="0" rtlCol="0" anchor="ctr"/>
           <a:lstStyle/>
           <a:p>
-            <a:pPr algn="l" indent="0" marL="0">
+            <a:pPr marL="0" indent="0" algn="l">
               <a:buNone/>
             </a:pPr>
             <a:r>
@@ -14865,26 +14488,62 @@
           <p:nvPr>
             <p:extLst>
               <p:ext uri="{D42A27DB-BD31-4B8C-83A1-F6EECF244321}">
-                <p14:modId xmlns:p14="http://schemas.microsoft.com/office/powerpoint/2010/main" val="1579011935"/>
+                <p14:modId xmlns:p14="http://schemas.microsoft.com/office/powerpoint/2010/main" val="3182395407"/>
               </p:ext>
             </p:extLst>
           </p:nvPr>
         </p:nvGraphicFramePr>
         <p:xfrm>
           <a:off x="548640" y="1600200"/>
-          <a:ext cx="11064240" cy="4023360"/>
+          <a:ext cx="11064240" cy="4047744"/>
         </p:xfrm>
         <a:graphic>
           <a:graphicData uri="http://schemas.openxmlformats.org/drawingml/2006/table">
             <a:tbl>
               <a:tblPr/>
               <a:tblGrid>
-                <a:gridCol w="2103120"/>
-                <a:gridCol w="1828800"/>
-                <a:gridCol w="1828800"/>
-                <a:gridCol w="1783080"/>
-                <a:gridCol w="1828800"/>
-                <a:gridCol w="1691640"/>
+                <a:gridCol w="2103120">
+                  <a:extLst>
+                    <a:ext uri="{9D8B030D-6E8A-4147-A177-3AD203B41FA5}">
+                      <a16:colId xmlns:a16="http://schemas.microsoft.com/office/drawing/2014/main" val="20000"/>
+                    </a:ext>
+                  </a:extLst>
+                </a:gridCol>
+                <a:gridCol w="1828800">
+                  <a:extLst>
+                    <a:ext uri="{9D8B030D-6E8A-4147-A177-3AD203B41FA5}">
+                      <a16:colId xmlns:a16="http://schemas.microsoft.com/office/drawing/2014/main" val="20001"/>
+                    </a:ext>
+                  </a:extLst>
+                </a:gridCol>
+                <a:gridCol w="1828800">
+                  <a:extLst>
+                    <a:ext uri="{9D8B030D-6E8A-4147-A177-3AD203B41FA5}">
+                      <a16:colId xmlns:a16="http://schemas.microsoft.com/office/drawing/2014/main" val="20002"/>
+                    </a:ext>
+                  </a:extLst>
+                </a:gridCol>
+                <a:gridCol w="1783080">
+                  <a:extLst>
+                    <a:ext uri="{9D8B030D-6E8A-4147-A177-3AD203B41FA5}">
+                      <a16:colId xmlns:a16="http://schemas.microsoft.com/office/drawing/2014/main" val="20003"/>
+                    </a:ext>
+                  </a:extLst>
+                </a:gridCol>
+                <a:gridCol w="1828800">
+                  <a:extLst>
+                    <a:ext uri="{9D8B030D-6E8A-4147-A177-3AD203B41FA5}">
+                      <a16:colId xmlns:a16="http://schemas.microsoft.com/office/drawing/2014/main" val="20004"/>
+                    </a:ext>
+                  </a:extLst>
+                </a:gridCol>
+                <a:gridCol w="1691640">
+                  <a:extLst>
+                    <a:ext uri="{9D8B030D-6E8A-4147-A177-3AD203B41FA5}">
+                      <a16:colId xmlns:a16="http://schemas.microsoft.com/office/drawing/2014/main" val="20005"/>
+                    </a:ext>
+                  </a:extLst>
+                </a:gridCol>
               </a:tblGrid>
               <a:tr h="402336">
                 <a:tc>
@@ -14892,7 +14551,7 @@
                     <a:bodyPr/>
                     <a:lstStyle/>
                     <a:p>
-                      <a:pPr algn="ctr" indent="0" marL="0">
+                      <a:pPr marL="0" indent="0" algn="ctr">
                         <a:buNone/>
                       </a:pPr>
                       <a:r>
@@ -14953,7 +14612,7 @@
                     <a:bodyPr/>
                     <a:lstStyle/>
                     <a:p>
-                      <a:pPr algn="ctr" indent="0" marL="0">
+                      <a:pPr marL="0" indent="0" algn="ctr">
                         <a:buNone/>
                       </a:pPr>
                       <a:r>
@@ -15014,7 +14673,7 @@
                     <a:bodyPr/>
                     <a:lstStyle/>
                     <a:p>
-                      <a:pPr algn="ctr" indent="0" marL="0">
+                      <a:pPr marL="0" indent="0" algn="ctr">
                         <a:buNone/>
                       </a:pPr>
                       <a:r>
@@ -15028,7 +14687,7 @@
                       <a:endParaRPr lang="en-US" sz="1150" dirty="0"/>
                     </a:p>
                     <a:p>
-                      <a:pPr algn="ctr" indent="0" marL="0">
+                      <a:pPr marL="0" indent="0" algn="ctr">
                         <a:buNone/>
                       </a:pPr>
                       <a:r>
@@ -15089,7 +14748,7 @@
                     <a:bodyPr/>
                     <a:lstStyle/>
                     <a:p>
-                      <a:pPr algn="ctr" indent="0" marL="0">
+                      <a:pPr marL="0" indent="0" algn="ctr">
                         <a:buNone/>
                       </a:pPr>
                       <a:r>
@@ -15103,7 +14762,7 @@
                       <a:endParaRPr lang="en-US" sz="1150" dirty="0"/>
                     </a:p>
                     <a:p>
-                      <a:pPr algn="ctr" indent="0" marL="0">
+                      <a:pPr marL="0" indent="0" algn="ctr">
                         <a:buNone/>
                       </a:pPr>
                       <a:r>
@@ -15164,7 +14823,7 @@
                     <a:bodyPr/>
                     <a:lstStyle/>
                     <a:p>
-                      <a:pPr algn="ctr" indent="0" marL="0">
+                      <a:pPr marL="0" indent="0" algn="ctr">
                         <a:buNone/>
                       </a:pPr>
                       <a:r>
@@ -15178,7 +14837,7 @@
                       <a:endParaRPr lang="en-US" sz="1150" dirty="0"/>
                     </a:p>
                     <a:p>
-                      <a:pPr algn="ctr" indent="0" marL="0">
+                      <a:pPr marL="0" indent="0" algn="ctr">
                         <a:buNone/>
                       </a:pPr>
                       <a:r>
@@ -15239,7 +14898,7 @@
                     <a:bodyPr/>
                     <a:lstStyle/>
                     <a:p>
-                      <a:pPr algn="ctr" indent="0" marL="0">
+                      <a:pPr marL="0" indent="0" algn="ctr">
                         <a:buNone/>
                       </a:pPr>
                       <a:r>
@@ -15253,7 +14912,7 @@
                       <a:endParaRPr lang="en-US" sz="1150" dirty="0"/>
                     </a:p>
                     <a:p>
-                      <a:pPr algn="ctr" indent="0" marL="0">
+                      <a:pPr marL="0" indent="0" algn="ctr">
                         <a:buNone/>
                       </a:pPr>
                       <a:r>
@@ -15309,6 +14968,11 @@
                     </a:solidFill>
                   </a:tcPr>
                 </a:tc>
+                <a:extLst>
+                  <a:ext uri="{0D108BD9-81ED-4DB2-BD59-A6C34878D82A}">
+                    <a16:rowId xmlns:a16="http://schemas.microsoft.com/office/drawing/2014/main" val="10000"/>
+                  </a:ext>
+                </a:extLst>
               </a:tr>
               <a:tr h="402336">
                 <a:tc>
@@ -15316,7 +14980,7 @@
                     <a:bodyPr/>
                     <a:lstStyle/>
                     <a:p>
-                      <a:pPr algn="l" indent="0" marL="0">
+                      <a:pPr marL="0" indent="0" algn="l">
                         <a:buNone/>
                       </a:pPr>
                       <a:r>
@@ -15377,7 +15041,7 @@
                     <a:bodyPr/>
                     <a:lstStyle/>
                     <a:p>
-                      <a:pPr algn="ctr" indent="0" marL="0">
+                      <a:pPr marL="0" indent="0" algn="ctr">
                         <a:buNone/>
                       </a:pPr>
                       <a:r>
@@ -15438,7 +15102,7 @@
                     <a:bodyPr/>
                     <a:lstStyle/>
                     <a:p>
-                      <a:pPr algn="ctr" indent="0" marL="0">
+                      <a:pPr marL="0" indent="0" algn="ctr">
                         <a:buNone/>
                       </a:pPr>
                       <a:r>
@@ -15499,7 +15163,7 @@
                     <a:bodyPr/>
                     <a:lstStyle/>
                     <a:p>
-                      <a:pPr algn="ctr" indent="0" marL="0">
+                      <a:pPr marL="0" indent="0" algn="ctr">
                         <a:buNone/>
                       </a:pPr>
                       <a:r>
@@ -15560,7 +15224,7 @@
                     <a:bodyPr/>
                     <a:lstStyle/>
                     <a:p>
-                      <a:pPr algn="ctr" indent="0" marL="0">
+                      <a:pPr marL="0" indent="0" algn="ctr">
                         <a:buNone/>
                       </a:pPr>
                       <a:r>
@@ -15621,7 +15285,7 @@
                     <a:bodyPr/>
                     <a:lstStyle/>
                     <a:p>
-                      <a:pPr algn="ctr" indent="0" marL="0">
+                      <a:pPr marL="0" indent="0" algn="ctr">
                         <a:buNone/>
                       </a:pPr>
                       <a:r>
@@ -15677,6 +15341,11 @@
                     </a:solidFill>
                   </a:tcPr>
                 </a:tc>
+                <a:extLst>
+                  <a:ext uri="{0D108BD9-81ED-4DB2-BD59-A6C34878D82A}">
+                    <a16:rowId xmlns:a16="http://schemas.microsoft.com/office/drawing/2014/main" val="10001"/>
+                  </a:ext>
+                </a:extLst>
               </a:tr>
               <a:tr h="402336">
                 <a:tc>
@@ -15684,7 +15353,7 @@
                     <a:bodyPr/>
                     <a:lstStyle/>
                     <a:p>
-                      <a:pPr algn="l" indent="0" marL="0">
+                      <a:pPr marL="0" indent="0" algn="l">
                         <a:buNone/>
                       </a:pPr>
                       <a:r>
@@ -15745,7 +15414,7 @@
                     <a:bodyPr/>
                     <a:lstStyle/>
                     <a:p>
-                      <a:pPr algn="ctr" indent="0" marL="0">
+                      <a:pPr marL="0" indent="0" algn="ctr">
                         <a:buNone/>
                       </a:pPr>
                       <a:r>
@@ -15806,7 +15475,7 @@
                     <a:bodyPr/>
                     <a:lstStyle/>
                     <a:p>
-                      <a:pPr algn="ctr" indent="0" marL="0">
+                      <a:pPr marL="0" indent="0" algn="ctr">
                         <a:buNone/>
                       </a:pPr>
                       <a:r>
@@ -15867,7 +15536,129 @@
                     <a:bodyPr/>
                     <a:lstStyle/>
                     <a:p>
-                      <a:pPr algn="ctr" indent="0" marL="0">
+                      <a:pPr marL="0" indent="0" algn="ctr">
+                        <a:buNone/>
+                      </a:pPr>
+                      <a:r>
+                        <a:rPr lang="en-US" sz="1150" b="1" dirty="0">
+                          <a:solidFill>
+                            <a:srgbClr val="D97757"/>
+                          </a:solidFill>
+                        </a:rPr>
+                        <a:t>7.84%</a:t>
+                      </a:r>
+                      <a:endParaRPr lang="en-US" sz="1150" dirty="0"/>
+                    </a:p>
+                  </a:txBody>
+                  <a:tcPr marL="50800" marR="50800" marT="38100" marB="38100" anchor="ctr">
+                    <a:lnL w="9525" cap="flat" cmpd="sng" algn="ctr">
+                      <a:solidFill>
+                        <a:srgbClr val="2A3560"/>
+                      </a:solidFill>
+                      <a:prstDash val="solid"/>
+                      <a:round/>
+                      <a:headEnd type="none" w="med" len="med"/>
+                      <a:tailEnd type="none" w="med" len="med"/>
+                    </a:lnL>
+                    <a:lnR w="9525" cap="flat" cmpd="sng" algn="ctr">
+                      <a:solidFill>
+                        <a:srgbClr val="2A3560"/>
+                      </a:solidFill>
+                      <a:prstDash val="solid"/>
+                      <a:round/>
+                      <a:headEnd type="none" w="med" len="med"/>
+                      <a:tailEnd type="none" w="med" len="med"/>
+                    </a:lnR>
+                    <a:lnT w="9525" cap="flat" cmpd="sng" algn="ctr">
+                      <a:solidFill>
+                        <a:srgbClr val="2A3560"/>
+                      </a:solidFill>
+                      <a:prstDash val="solid"/>
+                      <a:round/>
+                      <a:headEnd type="none" w="med" len="med"/>
+                      <a:tailEnd type="none" w="med" len="med"/>
+                    </a:lnT>
+                    <a:lnB w="9525" cap="flat" cmpd="sng" algn="ctr">
+                      <a:solidFill>
+                        <a:srgbClr val="2A3560"/>
+                      </a:solidFill>
+                      <a:prstDash val="solid"/>
+                      <a:round/>
+                      <a:headEnd type="none" w="med" len="med"/>
+                      <a:tailEnd type="none" w="med" len="med"/>
+                    </a:lnB>
+                    <a:solidFill>
+                      <a:srgbClr val="10162B"/>
+                    </a:solidFill>
+                  </a:tcPr>
+                </a:tc>
+                <a:tc>
+                  <a:txBody>
+                    <a:bodyPr/>
+                    <a:lstStyle/>
+                    <a:p>
+                      <a:pPr marL="0" indent="0" algn="ctr">
+                        <a:buNone/>
+                      </a:pPr>
+                      <a:r>
+                        <a:rPr lang="en-US" sz="1150" dirty="0">
+                          <a:solidFill>
+                            <a:srgbClr val="CADCFC"/>
+                          </a:solidFill>
+                        </a:rPr>
+                        <a:t>51</a:t>
+                      </a:r>
+                      <a:endParaRPr lang="en-US" sz="1150" dirty="0"/>
+                    </a:p>
+                  </a:txBody>
+                  <a:tcPr marL="50800" marR="50800" marT="38100" marB="38100" anchor="ctr">
+                    <a:lnL w="9525" cap="flat" cmpd="sng" algn="ctr">
+                      <a:solidFill>
+                        <a:srgbClr val="2A3560"/>
+                      </a:solidFill>
+                      <a:prstDash val="solid"/>
+                      <a:round/>
+                      <a:headEnd type="none" w="med" len="med"/>
+                      <a:tailEnd type="none" w="med" len="med"/>
+                    </a:lnL>
+                    <a:lnR w="9525" cap="flat" cmpd="sng" algn="ctr">
+                      <a:solidFill>
+                        <a:srgbClr val="2A3560"/>
+                      </a:solidFill>
+                      <a:prstDash val="solid"/>
+                      <a:round/>
+                      <a:headEnd type="none" w="med" len="med"/>
+                      <a:tailEnd type="none" w="med" len="med"/>
+                    </a:lnR>
+                    <a:lnT w="9525" cap="flat" cmpd="sng" algn="ctr">
+                      <a:solidFill>
+                        <a:srgbClr val="2A3560"/>
+                      </a:solidFill>
+                      <a:prstDash val="solid"/>
+                      <a:round/>
+                      <a:headEnd type="none" w="med" len="med"/>
+                      <a:tailEnd type="none" w="med" len="med"/>
+                    </a:lnT>
+                    <a:lnB w="9525" cap="flat" cmpd="sng" algn="ctr">
+                      <a:solidFill>
+                        <a:srgbClr val="2A3560"/>
+                      </a:solidFill>
+                      <a:prstDash val="solid"/>
+                      <a:round/>
+                      <a:headEnd type="none" w="med" len="med"/>
+                      <a:tailEnd type="none" w="med" len="med"/>
+                    </a:lnB>
+                    <a:solidFill>
+                      <a:srgbClr val="10162B"/>
+                    </a:solidFill>
+                  </a:tcPr>
+                </a:tc>
+                <a:tc>
+                  <a:txBody>
+                    <a:bodyPr/>
+                    <a:lstStyle/>
+                    <a:p>
+                      <a:pPr marL="0" indent="0" algn="ctr">
                         <a:buNone/>
                       </a:pPr>
                       <a:r>
@@ -15923,12 +15714,80 @@
                     </a:solidFill>
                   </a:tcPr>
                 </a:tc>
+                <a:extLst>
+                  <a:ext uri="{0D108BD9-81ED-4DB2-BD59-A6C34878D82A}">
+                    <a16:rowId xmlns:a16="http://schemas.microsoft.com/office/drawing/2014/main" val="10002"/>
+                  </a:ext>
+                </a:extLst>
+              </a:tr>
+              <a:tr h="402336">
                 <a:tc>
                   <a:txBody>
                     <a:bodyPr/>
                     <a:lstStyle/>
                     <a:p>
-                      <a:pPr algn="ctr" indent="0" marL="0">
+                      <a:pPr marL="0" indent="0" algn="l">
+                        <a:buNone/>
+                      </a:pPr>
+                      <a:r>
+                        <a:rPr lang="en-US" sz="1150" b="1" dirty="0">
+                          <a:solidFill>
+                            <a:srgbClr val="CADCFC"/>
+                          </a:solidFill>
+                        </a:rPr>
+                        <a:t>P03</a:t>
+                      </a:r>
+                      <a:endParaRPr lang="en-US" sz="1150" dirty="0"/>
+                    </a:p>
+                  </a:txBody>
+                  <a:tcPr marL="50800" marR="50800" marT="38100" marB="38100" anchor="ctr">
+                    <a:lnL w="9525" cap="flat" cmpd="sng" algn="ctr">
+                      <a:solidFill>
+                        <a:srgbClr val="2A3560"/>
+                      </a:solidFill>
+                      <a:prstDash val="solid"/>
+                      <a:round/>
+                      <a:headEnd type="none" w="med" len="med"/>
+                      <a:tailEnd type="none" w="med" len="med"/>
+                    </a:lnL>
+                    <a:lnR w="9525" cap="flat" cmpd="sng" algn="ctr">
+                      <a:solidFill>
+                        <a:srgbClr val="2A3560"/>
+                      </a:solidFill>
+                      <a:prstDash val="solid"/>
+                      <a:round/>
+                      <a:headEnd type="none" w="med" len="med"/>
+                      <a:tailEnd type="none" w="med" len="med"/>
+                    </a:lnR>
+                    <a:lnT w="9525" cap="flat" cmpd="sng" algn="ctr">
+                      <a:solidFill>
+                        <a:srgbClr val="2A3560"/>
+                      </a:solidFill>
+                      <a:prstDash val="solid"/>
+                      <a:round/>
+                      <a:headEnd type="none" w="med" len="med"/>
+                      <a:tailEnd type="none" w="med" len="med"/>
+                    </a:lnT>
+                    <a:lnB w="9525" cap="flat" cmpd="sng" algn="ctr">
+                      <a:solidFill>
+                        <a:srgbClr val="2A3560"/>
+                      </a:solidFill>
+                      <a:prstDash val="solid"/>
+                      <a:round/>
+                      <a:headEnd type="none" w="med" len="med"/>
+                      <a:tailEnd type="none" w="med" len="med"/>
+                    </a:lnB>
+                    <a:solidFill>
+                      <a:srgbClr val="161D38"/>
+                    </a:solidFill>
+                  </a:tcPr>
+                </a:tc>
+                <a:tc>
+                  <a:txBody>
+                    <a:bodyPr/>
+                    <a:lstStyle/>
+                    <a:p>
+                      <a:pPr marL="0" indent="0" algn="ctr">
                         <a:buNone/>
                       </a:pPr>
                       <a:r>
@@ -15937,7 +15796,7 @@
                             <a:srgbClr val="CADCFC"/>
                           </a:solidFill>
                         </a:rPr>
-                        <a:t>51</a:t>
+                        <a:t>150</a:t>
                       </a:r>
                       <a:endParaRPr lang="en-US" sz="1150" dirty="0"/>
                     </a:p>
@@ -15980,7 +15839,7 @@
                       <a:tailEnd type="none" w="med" len="med"/>
                     </a:lnB>
                     <a:solidFill>
-                      <a:srgbClr val="10162B"/>
+                      <a:srgbClr val="161D38"/>
                     </a:solidFill>
                   </a:tcPr>
                 </a:tc>
@@ -15989,7 +15848,68 @@
                     <a:bodyPr/>
                     <a:lstStyle/>
                     <a:p>
-                      <a:pPr algn="ctr" indent="0" marL="0">
+                      <a:pPr marL="0" indent="0" algn="ctr">
+                        <a:buNone/>
+                      </a:pPr>
+                      <a:r>
+                        <a:rPr lang="en-US" sz="1150" dirty="0">
+                          <a:solidFill>
+                            <a:srgbClr val="CADCFC"/>
+                          </a:solidFill>
+                        </a:rPr>
+                        <a:t>150</a:t>
+                      </a:r>
+                      <a:endParaRPr lang="en-US" sz="1150" dirty="0"/>
+                    </a:p>
+                  </a:txBody>
+                  <a:tcPr marL="50800" marR="50800" marT="38100" marB="38100" anchor="ctr">
+                    <a:lnL w="9525" cap="flat" cmpd="sng" algn="ctr">
+                      <a:solidFill>
+                        <a:srgbClr val="2A3560"/>
+                      </a:solidFill>
+                      <a:prstDash val="solid"/>
+                      <a:round/>
+                      <a:headEnd type="none" w="med" len="med"/>
+                      <a:tailEnd type="none" w="med" len="med"/>
+                    </a:lnL>
+                    <a:lnR w="9525" cap="flat" cmpd="sng" algn="ctr">
+                      <a:solidFill>
+                        <a:srgbClr val="2A3560"/>
+                      </a:solidFill>
+                      <a:prstDash val="solid"/>
+                      <a:round/>
+                      <a:headEnd type="none" w="med" len="med"/>
+                      <a:tailEnd type="none" w="med" len="med"/>
+                    </a:lnR>
+                    <a:lnT w="9525" cap="flat" cmpd="sng" algn="ctr">
+                      <a:solidFill>
+                        <a:srgbClr val="2A3560"/>
+                      </a:solidFill>
+                      <a:prstDash val="solid"/>
+                      <a:round/>
+                      <a:headEnd type="none" w="med" len="med"/>
+                      <a:tailEnd type="none" w="med" len="med"/>
+                    </a:lnT>
+                    <a:lnB w="9525" cap="flat" cmpd="sng" algn="ctr">
+                      <a:solidFill>
+                        <a:srgbClr val="2A3560"/>
+                      </a:solidFill>
+                      <a:prstDash val="solid"/>
+                      <a:round/>
+                      <a:headEnd type="none" w="med" len="med"/>
+                      <a:tailEnd type="none" w="med" len="med"/>
+                    </a:lnB>
+                    <a:solidFill>
+                      <a:srgbClr val="161D38"/>
+                    </a:solidFill>
+                  </a:tcPr>
+                </a:tc>
+                <a:tc>
+                  <a:txBody>
+                    <a:bodyPr/>
+                    <a:lstStyle/>
+                    <a:p>
+                      <a:pPr marL="0" indent="0" algn="ctr">
                         <a:buNone/>
                       </a:pPr>
                       <a:r>
@@ -16041,69 +15961,6 @@
                       <a:tailEnd type="none" w="med" len="med"/>
                     </a:lnB>
                     <a:solidFill>
-                      <a:srgbClr val="10162B"/>
-                    </a:solidFill>
-                  </a:tcPr>
-                </a:tc>
-              </a:tr>
-              <a:tr h="402336">
-                <a:tc>
-                  <a:txBody>
-                    <a:bodyPr/>
-                    <a:lstStyle/>
-                    <a:p>
-                      <a:pPr algn="l" indent="0" marL="0">
-                        <a:buNone/>
-                      </a:pPr>
-                      <a:r>
-                        <a:rPr lang="en-US" sz="1150" b="1" dirty="0">
-                          <a:solidFill>
-                            <a:srgbClr val="CADCFC"/>
-                          </a:solidFill>
-                        </a:rPr>
-                        <a:t>P03</a:t>
-                      </a:r>
-                      <a:endParaRPr lang="en-US" sz="1150" dirty="0"/>
-                    </a:p>
-                  </a:txBody>
-                  <a:tcPr marL="50800" marR="50800" marT="38100" marB="38100" anchor="ctr">
-                    <a:lnL w="9525" cap="flat" cmpd="sng" algn="ctr">
-                      <a:solidFill>
-                        <a:srgbClr val="2A3560"/>
-                      </a:solidFill>
-                      <a:prstDash val="solid"/>
-                      <a:round/>
-                      <a:headEnd type="none" w="med" len="med"/>
-                      <a:tailEnd type="none" w="med" len="med"/>
-                    </a:lnL>
-                    <a:lnR w="9525" cap="flat" cmpd="sng" algn="ctr">
-                      <a:solidFill>
-                        <a:srgbClr val="2A3560"/>
-                      </a:solidFill>
-                      <a:prstDash val="solid"/>
-                      <a:round/>
-                      <a:headEnd type="none" w="med" len="med"/>
-                      <a:tailEnd type="none" w="med" len="med"/>
-                    </a:lnR>
-                    <a:lnT w="9525" cap="flat" cmpd="sng" algn="ctr">
-                      <a:solidFill>
-                        <a:srgbClr val="2A3560"/>
-                      </a:solidFill>
-                      <a:prstDash val="solid"/>
-                      <a:round/>
-                      <a:headEnd type="none" w="med" len="med"/>
-                      <a:tailEnd type="none" w="med" len="med"/>
-                    </a:lnT>
-                    <a:lnB w="9525" cap="flat" cmpd="sng" algn="ctr">
-                      <a:solidFill>
-                        <a:srgbClr val="2A3560"/>
-                      </a:solidFill>
-                      <a:prstDash val="solid"/>
-                      <a:round/>
-                      <a:headEnd type="none" w="med" len="med"/>
-                      <a:tailEnd type="none" w="med" len="med"/>
-                    </a:lnB>
-                    <a:solidFill>
                       <a:srgbClr val="161D38"/>
                     </a:solidFill>
                   </a:tcPr>
@@ -16113,7 +15970,7 @@
                     <a:bodyPr/>
                     <a:lstStyle/>
                     <a:p>
-                      <a:pPr algn="ctr" indent="0" marL="0">
+                      <a:pPr marL="0" indent="0" algn="ctr">
                         <a:buNone/>
                       </a:pPr>
                       <a:r>
@@ -16174,68 +16031,7 @@
                     <a:bodyPr/>
                     <a:lstStyle/>
                     <a:p>
-                      <a:pPr algn="ctr" indent="0" marL="0">
-                        <a:buNone/>
-                      </a:pPr>
-                      <a:r>
-                        <a:rPr lang="en-US" sz="1150" dirty="0">
-                          <a:solidFill>
-                            <a:srgbClr val="CADCFC"/>
-                          </a:solidFill>
-                        </a:rPr>
-                        <a:t>150</a:t>
-                      </a:r>
-                      <a:endParaRPr lang="en-US" sz="1150" dirty="0"/>
-                    </a:p>
-                  </a:txBody>
-                  <a:tcPr marL="50800" marR="50800" marT="38100" marB="38100" anchor="ctr">
-                    <a:lnL w="9525" cap="flat" cmpd="sng" algn="ctr">
-                      <a:solidFill>
-                        <a:srgbClr val="2A3560"/>
-                      </a:solidFill>
-                      <a:prstDash val="solid"/>
-                      <a:round/>
-                      <a:headEnd type="none" w="med" len="med"/>
-                      <a:tailEnd type="none" w="med" len="med"/>
-                    </a:lnL>
-                    <a:lnR w="9525" cap="flat" cmpd="sng" algn="ctr">
-                      <a:solidFill>
-                        <a:srgbClr val="2A3560"/>
-                      </a:solidFill>
-                      <a:prstDash val="solid"/>
-                      <a:round/>
-                      <a:headEnd type="none" w="med" len="med"/>
-                      <a:tailEnd type="none" w="med" len="med"/>
-                    </a:lnR>
-                    <a:lnT w="9525" cap="flat" cmpd="sng" algn="ctr">
-                      <a:solidFill>
-                        <a:srgbClr val="2A3560"/>
-                      </a:solidFill>
-                      <a:prstDash val="solid"/>
-                      <a:round/>
-                      <a:headEnd type="none" w="med" len="med"/>
-                      <a:tailEnd type="none" w="med" len="med"/>
-                    </a:lnT>
-                    <a:lnB w="9525" cap="flat" cmpd="sng" algn="ctr">
-                      <a:solidFill>
-                        <a:srgbClr val="2A3560"/>
-                      </a:solidFill>
-                      <a:prstDash val="solid"/>
-                      <a:round/>
-                      <a:headEnd type="none" w="med" len="med"/>
-                      <a:tailEnd type="none" w="med" len="med"/>
-                    </a:lnB>
-                    <a:solidFill>
-                      <a:srgbClr val="161D38"/>
-                    </a:solidFill>
-                  </a:tcPr>
-                </a:tc>
-                <a:tc>
-                  <a:txBody>
-                    <a:bodyPr/>
-                    <a:lstStyle/>
-                    <a:p>
-                      <a:pPr algn="ctr" indent="0" marL="0">
+                      <a:pPr marL="0" indent="0" algn="ctr">
                         <a:buNone/>
                       </a:pPr>
                       <a:r>
@@ -16291,12 +16087,80 @@
                     </a:solidFill>
                   </a:tcPr>
                 </a:tc>
+                <a:extLst>
+                  <a:ext uri="{0D108BD9-81ED-4DB2-BD59-A6C34878D82A}">
+                    <a16:rowId xmlns:a16="http://schemas.microsoft.com/office/drawing/2014/main" val="10003"/>
+                  </a:ext>
+                </a:extLst>
+              </a:tr>
+              <a:tr h="402336">
                 <a:tc>
                   <a:txBody>
                     <a:bodyPr/>
                     <a:lstStyle/>
                     <a:p>
-                      <a:pPr algn="ctr" indent="0" marL="0">
+                      <a:pPr marL="0" indent="0" algn="l">
+                        <a:buNone/>
+                      </a:pPr>
+                      <a:r>
+                        <a:rPr lang="en-US" sz="1150" b="1" dirty="0">
+                          <a:solidFill>
+                            <a:srgbClr val="CADCFC"/>
+                          </a:solidFill>
+                        </a:rPr>
+                        <a:t>P04</a:t>
+                      </a:r>
+                      <a:endParaRPr lang="en-US" sz="1150" dirty="0"/>
+                    </a:p>
+                  </a:txBody>
+                  <a:tcPr marL="50800" marR="50800" marT="38100" marB="38100" anchor="ctr">
+                    <a:lnL w="9525" cap="flat" cmpd="sng" algn="ctr">
+                      <a:solidFill>
+                        <a:srgbClr val="2A3560"/>
+                      </a:solidFill>
+                      <a:prstDash val="solid"/>
+                      <a:round/>
+                      <a:headEnd type="none" w="med" len="med"/>
+                      <a:tailEnd type="none" w="med" len="med"/>
+                    </a:lnL>
+                    <a:lnR w="9525" cap="flat" cmpd="sng" algn="ctr">
+                      <a:solidFill>
+                        <a:srgbClr val="2A3560"/>
+                      </a:solidFill>
+                      <a:prstDash val="solid"/>
+                      <a:round/>
+                      <a:headEnd type="none" w="med" len="med"/>
+                      <a:tailEnd type="none" w="med" len="med"/>
+                    </a:lnR>
+                    <a:lnT w="9525" cap="flat" cmpd="sng" algn="ctr">
+                      <a:solidFill>
+                        <a:srgbClr val="2A3560"/>
+                      </a:solidFill>
+                      <a:prstDash val="solid"/>
+                      <a:round/>
+                      <a:headEnd type="none" w="med" len="med"/>
+                      <a:tailEnd type="none" w="med" len="med"/>
+                    </a:lnT>
+                    <a:lnB w="9525" cap="flat" cmpd="sng" algn="ctr">
+                      <a:solidFill>
+                        <a:srgbClr val="2A3560"/>
+                      </a:solidFill>
+                      <a:prstDash val="solid"/>
+                      <a:round/>
+                      <a:headEnd type="none" w="med" len="med"/>
+                      <a:tailEnd type="none" w="med" len="med"/>
+                    </a:lnB>
+                    <a:solidFill>
+                      <a:srgbClr val="10162B"/>
+                    </a:solidFill>
+                  </a:tcPr>
+                </a:tc>
+                <a:tc>
+                  <a:txBody>
+                    <a:bodyPr/>
+                    <a:lstStyle/>
+                    <a:p>
+                      <a:pPr marL="0" indent="0" algn="ctr">
                         <a:buNone/>
                       </a:pPr>
                       <a:r>
@@ -16305,7 +16169,7 @@
                             <a:srgbClr val="CADCFC"/>
                           </a:solidFill>
                         </a:rPr>
-                        <a:t>150</a:t>
+                        <a:t>107</a:t>
                       </a:r>
                       <a:endParaRPr lang="en-US" sz="1150" dirty="0"/>
                     </a:p>
@@ -16348,7 +16212,7 @@
                       <a:tailEnd type="none" w="med" len="med"/>
                     </a:lnB>
                     <a:solidFill>
-                      <a:srgbClr val="161D38"/>
+                      <a:srgbClr val="10162B"/>
                     </a:solidFill>
                   </a:tcPr>
                 </a:tc>
@@ -16357,7 +16221,68 @@
                     <a:bodyPr/>
                     <a:lstStyle/>
                     <a:p>
-                      <a:pPr algn="ctr" indent="0" marL="0">
+                      <a:pPr marL="0" indent="0" algn="ctr">
+                        <a:buNone/>
+                      </a:pPr>
+                      <a:r>
+                        <a:rPr lang="en-US" sz="1150" dirty="0">
+                          <a:solidFill>
+                            <a:srgbClr val="CADCFC"/>
+                          </a:solidFill>
+                        </a:rPr>
+                        <a:t>103</a:t>
+                      </a:r>
+                      <a:endParaRPr lang="en-US" sz="1150" dirty="0"/>
+                    </a:p>
+                  </a:txBody>
+                  <a:tcPr marL="50800" marR="50800" marT="38100" marB="38100" anchor="ctr">
+                    <a:lnL w="9525" cap="flat" cmpd="sng" algn="ctr">
+                      <a:solidFill>
+                        <a:srgbClr val="2A3560"/>
+                      </a:solidFill>
+                      <a:prstDash val="solid"/>
+                      <a:round/>
+                      <a:headEnd type="none" w="med" len="med"/>
+                      <a:tailEnd type="none" w="med" len="med"/>
+                    </a:lnL>
+                    <a:lnR w="9525" cap="flat" cmpd="sng" algn="ctr">
+                      <a:solidFill>
+                        <a:srgbClr val="2A3560"/>
+                      </a:solidFill>
+                      <a:prstDash val="solid"/>
+                      <a:round/>
+                      <a:headEnd type="none" w="med" len="med"/>
+                      <a:tailEnd type="none" w="med" len="med"/>
+                    </a:lnR>
+                    <a:lnT w="9525" cap="flat" cmpd="sng" algn="ctr">
+                      <a:solidFill>
+                        <a:srgbClr val="2A3560"/>
+                      </a:solidFill>
+                      <a:prstDash val="solid"/>
+                      <a:round/>
+                      <a:headEnd type="none" w="med" len="med"/>
+                      <a:tailEnd type="none" w="med" len="med"/>
+                    </a:lnT>
+                    <a:lnB w="9525" cap="flat" cmpd="sng" algn="ctr">
+                      <a:solidFill>
+                        <a:srgbClr val="2A3560"/>
+                      </a:solidFill>
+                      <a:prstDash val="solid"/>
+                      <a:round/>
+                      <a:headEnd type="none" w="med" len="med"/>
+                      <a:tailEnd type="none" w="med" len="med"/>
+                    </a:lnB>
+                    <a:solidFill>
+                      <a:srgbClr val="10162B"/>
+                    </a:solidFill>
+                  </a:tcPr>
+                </a:tc>
+                <a:tc>
+                  <a:txBody>
+                    <a:bodyPr/>
+                    <a:lstStyle/>
+                    <a:p>
+                      <a:pPr marL="0" indent="0" algn="ctr">
                         <a:buNone/>
                       </a:pPr>
                       <a:r>
@@ -16409,69 +16334,6 @@
                       <a:tailEnd type="none" w="med" len="med"/>
                     </a:lnB>
                     <a:solidFill>
-                      <a:srgbClr val="161D38"/>
-                    </a:solidFill>
-                  </a:tcPr>
-                </a:tc>
-              </a:tr>
-              <a:tr h="402336">
-                <a:tc>
-                  <a:txBody>
-                    <a:bodyPr/>
-                    <a:lstStyle/>
-                    <a:p>
-                      <a:pPr algn="l" indent="0" marL="0">
-                        <a:buNone/>
-                      </a:pPr>
-                      <a:r>
-                        <a:rPr lang="en-US" sz="1150" b="1" dirty="0">
-                          <a:solidFill>
-                            <a:srgbClr val="CADCFC"/>
-                          </a:solidFill>
-                        </a:rPr>
-                        <a:t>P04</a:t>
-                      </a:r>
-                      <a:endParaRPr lang="en-US" sz="1150" dirty="0"/>
-                    </a:p>
-                  </a:txBody>
-                  <a:tcPr marL="50800" marR="50800" marT="38100" marB="38100" anchor="ctr">
-                    <a:lnL w="9525" cap="flat" cmpd="sng" algn="ctr">
-                      <a:solidFill>
-                        <a:srgbClr val="2A3560"/>
-                      </a:solidFill>
-                      <a:prstDash val="solid"/>
-                      <a:round/>
-                      <a:headEnd type="none" w="med" len="med"/>
-                      <a:tailEnd type="none" w="med" len="med"/>
-                    </a:lnL>
-                    <a:lnR w="9525" cap="flat" cmpd="sng" algn="ctr">
-                      <a:solidFill>
-                        <a:srgbClr val="2A3560"/>
-                      </a:solidFill>
-                      <a:prstDash val="solid"/>
-                      <a:round/>
-                      <a:headEnd type="none" w="med" len="med"/>
-                      <a:tailEnd type="none" w="med" len="med"/>
-                    </a:lnR>
-                    <a:lnT w="9525" cap="flat" cmpd="sng" algn="ctr">
-                      <a:solidFill>
-                        <a:srgbClr val="2A3560"/>
-                      </a:solidFill>
-                      <a:prstDash val="solid"/>
-                      <a:round/>
-                      <a:headEnd type="none" w="med" len="med"/>
-                      <a:tailEnd type="none" w="med" len="med"/>
-                    </a:lnT>
-                    <a:lnB w="9525" cap="flat" cmpd="sng" algn="ctr">
-                      <a:solidFill>
-                        <a:srgbClr val="2A3560"/>
-                      </a:solidFill>
-                      <a:prstDash val="solid"/>
-                      <a:round/>
-                      <a:headEnd type="none" w="med" len="med"/>
-                      <a:tailEnd type="none" w="med" len="med"/>
-                    </a:lnB>
-                    <a:solidFill>
                       <a:srgbClr val="10162B"/>
                     </a:solidFill>
                   </a:tcPr>
@@ -16481,7 +16343,7 @@
                     <a:bodyPr/>
                     <a:lstStyle/>
                     <a:p>
-                      <a:pPr algn="ctr" indent="0" marL="0">
+                      <a:pPr marL="0" indent="0" algn="ctr">
                         <a:buNone/>
                       </a:pPr>
                       <a:r>
@@ -16542,190 +16404,7 @@
                     <a:bodyPr/>
                     <a:lstStyle/>
                     <a:p>
-                      <a:pPr algn="ctr" indent="0" marL="0">
-                        <a:buNone/>
-                      </a:pPr>
-                      <a:r>
-                        <a:rPr lang="en-US" sz="1150" dirty="0">
-                          <a:solidFill>
-                            <a:srgbClr val="CADCFC"/>
-                          </a:solidFill>
-                        </a:rPr>
-                        <a:t>103</a:t>
-                      </a:r>
-                      <a:endParaRPr lang="en-US" sz="1150" dirty="0"/>
-                    </a:p>
-                  </a:txBody>
-                  <a:tcPr marL="50800" marR="50800" marT="38100" marB="38100" anchor="ctr">
-                    <a:lnL w="9525" cap="flat" cmpd="sng" algn="ctr">
-                      <a:solidFill>
-                        <a:srgbClr val="2A3560"/>
-                      </a:solidFill>
-                      <a:prstDash val="solid"/>
-                      <a:round/>
-                      <a:headEnd type="none" w="med" len="med"/>
-                      <a:tailEnd type="none" w="med" len="med"/>
-                    </a:lnL>
-                    <a:lnR w="9525" cap="flat" cmpd="sng" algn="ctr">
-                      <a:solidFill>
-                        <a:srgbClr val="2A3560"/>
-                      </a:solidFill>
-                      <a:prstDash val="solid"/>
-                      <a:round/>
-                      <a:headEnd type="none" w="med" len="med"/>
-                      <a:tailEnd type="none" w="med" len="med"/>
-                    </a:lnR>
-                    <a:lnT w="9525" cap="flat" cmpd="sng" algn="ctr">
-                      <a:solidFill>
-                        <a:srgbClr val="2A3560"/>
-                      </a:solidFill>
-                      <a:prstDash val="solid"/>
-                      <a:round/>
-                      <a:headEnd type="none" w="med" len="med"/>
-                      <a:tailEnd type="none" w="med" len="med"/>
-                    </a:lnT>
-                    <a:lnB w="9525" cap="flat" cmpd="sng" algn="ctr">
-                      <a:solidFill>
-                        <a:srgbClr val="2A3560"/>
-                      </a:solidFill>
-                      <a:prstDash val="solid"/>
-                      <a:round/>
-                      <a:headEnd type="none" w="med" len="med"/>
-                      <a:tailEnd type="none" w="med" len="med"/>
-                    </a:lnB>
-                    <a:solidFill>
-                      <a:srgbClr val="10162B"/>
-                    </a:solidFill>
-                  </a:tcPr>
-                </a:tc>
-                <a:tc>
-                  <a:txBody>
-                    <a:bodyPr/>
-                    <a:lstStyle/>
-                    <a:p>
-                      <a:pPr algn="ctr" indent="0" marL="0">
-                        <a:buNone/>
-                      </a:pPr>
-                      <a:r>
-                        <a:rPr lang="en-US" sz="1150" b="1" dirty="0">
-                          <a:solidFill>
-                            <a:srgbClr val="D97757"/>
-                          </a:solidFill>
-                        </a:rPr>
-                        <a:t>3.74%</a:t>
-                      </a:r>
-                      <a:endParaRPr lang="en-US" sz="1150" dirty="0"/>
-                    </a:p>
-                  </a:txBody>
-                  <a:tcPr marL="50800" marR="50800" marT="38100" marB="38100" anchor="ctr">
-                    <a:lnL w="9525" cap="flat" cmpd="sng" algn="ctr">
-                      <a:solidFill>
-                        <a:srgbClr val="2A3560"/>
-                      </a:solidFill>
-                      <a:prstDash val="solid"/>
-                      <a:round/>
-                      <a:headEnd type="none" w="med" len="med"/>
-                      <a:tailEnd type="none" w="med" len="med"/>
-                    </a:lnL>
-                    <a:lnR w="9525" cap="flat" cmpd="sng" algn="ctr">
-                      <a:solidFill>
-                        <a:srgbClr val="2A3560"/>
-                      </a:solidFill>
-                      <a:prstDash val="solid"/>
-                      <a:round/>
-                      <a:headEnd type="none" w="med" len="med"/>
-                      <a:tailEnd type="none" w="med" len="med"/>
-                    </a:lnR>
-                    <a:lnT w="9525" cap="flat" cmpd="sng" algn="ctr">
-                      <a:solidFill>
-                        <a:srgbClr val="2A3560"/>
-                      </a:solidFill>
-                      <a:prstDash val="solid"/>
-                      <a:round/>
-                      <a:headEnd type="none" w="med" len="med"/>
-                      <a:tailEnd type="none" w="med" len="med"/>
-                    </a:lnT>
-                    <a:lnB w="9525" cap="flat" cmpd="sng" algn="ctr">
-                      <a:solidFill>
-                        <a:srgbClr val="2A3560"/>
-                      </a:solidFill>
-                      <a:prstDash val="solid"/>
-                      <a:round/>
-                      <a:headEnd type="none" w="med" len="med"/>
-                      <a:tailEnd type="none" w="med" len="med"/>
-                    </a:lnB>
-                    <a:solidFill>
-                      <a:srgbClr val="10162B"/>
-                    </a:solidFill>
-                  </a:tcPr>
-                </a:tc>
-                <a:tc>
-                  <a:txBody>
-                    <a:bodyPr/>
-                    <a:lstStyle/>
-                    <a:p>
-                      <a:pPr algn="ctr" indent="0" marL="0">
-                        <a:buNone/>
-                      </a:pPr>
-                      <a:r>
-                        <a:rPr lang="en-US" sz="1150" dirty="0">
-                          <a:solidFill>
-                            <a:srgbClr val="CADCFC"/>
-                          </a:solidFill>
-                        </a:rPr>
-                        <a:t>107</a:t>
-                      </a:r>
-                      <a:endParaRPr lang="en-US" sz="1150" dirty="0"/>
-                    </a:p>
-                  </a:txBody>
-                  <a:tcPr marL="50800" marR="50800" marT="38100" marB="38100" anchor="ctr">
-                    <a:lnL w="9525" cap="flat" cmpd="sng" algn="ctr">
-                      <a:solidFill>
-                        <a:srgbClr val="2A3560"/>
-                      </a:solidFill>
-                      <a:prstDash val="solid"/>
-                      <a:round/>
-                      <a:headEnd type="none" w="med" len="med"/>
-                      <a:tailEnd type="none" w="med" len="med"/>
-                    </a:lnL>
-                    <a:lnR w="9525" cap="flat" cmpd="sng" algn="ctr">
-                      <a:solidFill>
-                        <a:srgbClr val="2A3560"/>
-                      </a:solidFill>
-                      <a:prstDash val="solid"/>
-                      <a:round/>
-                      <a:headEnd type="none" w="med" len="med"/>
-                      <a:tailEnd type="none" w="med" len="med"/>
-                    </a:lnR>
-                    <a:lnT w="9525" cap="flat" cmpd="sng" algn="ctr">
-                      <a:solidFill>
-                        <a:srgbClr val="2A3560"/>
-                      </a:solidFill>
-                      <a:prstDash val="solid"/>
-                      <a:round/>
-                      <a:headEnd type="none" w="med" len="med"/>
-                      <a:tailEnd type="none" w="med" len="med"/>
-                    </a:lnT>
-                    <a:lnB w="9525" cap="flat" cmpd="sng" algn="ctr">
-                      <a:solidFill>
-                        <a:srgbClr val="2A3560"/>
-                      </a:solidFill>
-                      <a:prstDash val="solid"/>
-                      <a:round/>
-                      <a:headEnd type="none" w="med" len="med"/>
-                      <a:tailEnd type="none" w="med" len="med"/>
-                    </a:lnB>
-                    <a:solidFill>
-                      <a:srgbClr val="10162B"/>
-                    </a:solidFill>
-                  </a:tcPr>
-                </a:tc>
-                <a:tc>
-                  <a:txBody>
-                    <a:bodyPr/>
-                    <a:lstStyle/>
-                    <a:p>
-                      <a:pPr algn="ctr" indent="0" marL="0">
+                      <a:pPr marL="0" indent="0" algn="ctr">
                         <a:buNone/>
                       </a:pPr>
                       <a:r>
@@ -16781,6 +16460,11 @@
                     </a:solidFill>
                   </a:tcPr>
                 </a:tc>
+                <a:extLst>
+                  <a:ext uri="{0D108BD9-81ED-4DB2-BD59-A6C34878D82A}">
+                    <a16:rowId xmlns:a16="http://schemas.microsoft.com/office/drawing/2014/main" val="10004"/>
+                  </a:ext>
+                </a:extLst>
               </a:tr>
               <a:tr h="402336">
                 <a:tc>
@@ -16788,7 +16472,7 @@
                     <a:bodyPr/>
                     <a:lstStyle/>
                     <a:p>
-                      <a:pPr algn="l" indent="0" marL="0">
+                      <a:pPr marL="0" indent="0" algn="l">
                         <a:buNone/>
                       </a:pPr>
                       <a:r>
@@ -16849,7 +16533,7 @@
                     <a:bodyPr/>
                     <a:lstStyle/>
                     <a:p>
-                      <a:pPr algn="ctr" indent="0" marL="0">
+                      <a:pPr marL="0" indent="0" algn="ctr">
                         <a:buNone/>
                       </a:pPr>
                       <a:r>
@@ -16910,7 +16594,7 @@
                     <a:bodyPr/>
                     <a:lstStyle/>
                     <a:p>
-                      <a:pPr algn="ctr" indent="0" marL="0">
+                      <a:pPr marL="0" indent="0" algn="ctr">
                         <a:buNone/>
                       </a:pPr>
                       <a:r>
@@ -16971,7 +16655,7 @@
                     <a:bodyPr/>
                     <a:lstStyle/>
                     <a:p>
-                      <a:pPr algn="ctr" indent="0" marL="0">
+                      <a:pPr marL="0" indent="0" algn="ctr">
                         <a:buNone/>
                       </a:pPr>
                       <a:r>
@@ -16980,7 +16664,7 @@
                             <a:srgbClr val="D97757"/>
                           </a:solidFill>
                         </a:rPr>
-                        <a:t>1.00%</a:t>
+                        <a:t>4.67%</a:t>
                       </a:r>
                       <a:endParaRPr lang="en-US" sz="1150" dirty="0"/>
                     </a:p>
@@ -17032,7 +16716,7 @@
                     <a:bodyPr/>
                     <a:lstStyle/>
                     <a:p>
-                      <a:pPr algn="ctr" indent="0" marL="0">
+                      <a:pPr marL="0" indent="0" algn="ctr">
                         <a:buNone/>
                       </a:pPr>
                       <a:r>
@@ -17093,7 +16777,7 @@
                     <a:bodyPr/>
                     <a:lstStyle/>
                     <a:p>
-                      <a:pPr algn="ctr" indent="0" marL="0">
+                      <a:pPr marL="0" indent="0" algn="ctr">
                         <a:buNone/>
                       </a:pPr>
                       <a:r>
@@ -17149,6 +16833,11 @@
                     </a:solidFill>
                   </a:tcPr>
                 </a:tc>
+                <a:extLst>
+                  <a:ext uri="{0D108BD9-81ED-4DB2-BD59-A6C34878D82A}">
+                    <a16:rowId xmlns:a16="http://schemas.microsoft.com/office/drawing/2014/main" val="10005"/>
+                  </a:ext>
+                </a:extLst>
               </a:tr>
               <a:tr h="402336">
                 <a:tc>
@@ -17156,7 +16845,7 @@
                     <a:bodyPr/>
                     <a:lstStyle/>
                     <a:p>
-                      <a:pPr algn="l" indent="0" marL="0">
+                      <a:pPr marL="0" indent="0" algn="l">
                         <a:buNone/>
                       </a:pPr>
                       <a:r>
@@ -17217,7 +16906,7 @@
                     <a:bodyPr/>
                     <a:lstStyle/>
                     <a:p>
-                      <a:pPr algn="ctr" indent="0" marL="0">
+                      <a:pPr marL="0" indent="0" algn="ctr">
                         <a:buNone/>
                       </a:pPr>
                       <a:r>
@@ -17278,7 +16967,7 @@
                     <a:bodyPr/>
                     <a:lstStyle/>
                     <a:p>
-                      <a:pPr algn="ctr" indent="0" marL="0">
+                      <a:pPr marL="0" indent="0" algn="ctr">
                         <a:buNone/>
                       </a:pPr>
                       <a:r>
@@ -17339,7 +17028,7 @@
                     <a:bodyPr/>
                     <a:lstStyle/>
                     <a:p>
-                      <a:pPr algn="ctr" indent="0" marL="0">
+                      <a:pPr marL="0" indent="0" algn="ctr">
                         <a:buNone/>
                       </a:pPr>
                       <a:r>
@@ -17400,7 +17089,7 @@
                     <a:bodyPr/>
                     <a:lstStyle/>
                     <a:p>
-                      <a:pPr algn="ctr" indent="0" marL="0">
+                      <a:pPr marL="0" indent="0" algn="ctr">
                         <a:buNone/>
                       </a:pPr>
                       <a:r>
@@ -17461,7 +17150,7 @@
                     <a:bodyPr/>
                     <a:lstStyle/>
                     <a:p>
-                      <a:pPr algn="ctr" indent="0" marL="0">
+                      <a:pPr marL="0" indent="0" algn="ctr">
                         <a:buNone/>
                       </a:pPr>
                       <a:r>
@@ -17517,6 +17206,11 @@
                     </a:solidFill>
                   </a:tcPr>
                 </a:tc>
+                <a:extLst>
+                  <a:ext uri="{0D108BD9-81ED-4DB2-BD59-A6C34878D82A}">
+                    <a16:rowId xmlns:a16="http://schemas.microsoft.com/office/drawing/2014/main" val="10006"/>
+                  </a:ext>
+                </a:extLst>
               </a:tr>
               <a:tr h="402336">
                 <a:tc>
@@ -17524,7 +17218,7 @@
                     <a:bodyPr/>
                     <a:lstStyle/>
                     <a:p>
-                      <a:pPr algn="l" indent="0" marL="0">
+                      <a:pPr marL="0" indent="0" algn="l">
                         <a:buNone/>
                       </a:pPr>
                       <a:r>
@@ -17585,7 +17279,7 @@
                     <a:bodyPr/>
                     <a:lstStyle/>
                     <a:p>
-                      <a:pPr algn="ctr" indent="0" marL="0">
+                      <a:pPr marL="0" indent="0" algn="ctr">
                         <a:buNone/>
                       </a:pPr>
                       <a:r>
@@ -17646,7 +17340,7 @@
                     <a:bodyPr/>
                     <a:lstStyle/>
                     <a:p>
-                      <a:pPr algn="ctr" indent="0" marL="0">
+                      <a:pPr marL="0" indent="0" algn="ctr">
                         <a:buNone/>
                       </a:pPr>
                       <a:r>
@@ -17707,18 +17401,28 @@
                     <a:bodyPr/>
                     <a:lstStyle/>
                     <a:p>
-                      <a:pPr algn="ctr" indent="0" marL="0">
+                      <a:pPr marL="0" indent="0" algn="ctr">
                         <a:buNone/>
                       </a:pPr>
                       <a:r>
                         <a:rPr lang="en-US" sz="1150" b="1" dirty="0">
                           <a:solidFill>
-                            <a:srgbClr val="D97757"/>
+                            <a:schemeClr val="accent4">
+                              <a:lumMod val="60000"/>
+                              <a:lumOff val="40000"/>
+                            </a:schemeClr>
                           </a:solidFill>
                         </a:rPr>
-                        <a:t>3.98%</a:t>
+                        <a:t>0.14%</a:t>
                       </a:r>
-                      <a:endParaRPr lang="en-US" sz="1150" dirty="0"/>
+                      <a:endParaRPr lang="en-US" sz="1150" dirty="0">
+                        <a:solidFill>
+                          <a:schemeClr val="accent4">
+                            <a:lumMod val="60000"/>
+                            <a:lumOff val="40000"/>
+                          </a:schemeClr>
+                        </a:solidFill>
+                      </a:endParaRPr>
                     </a:p>
                   </a:txBody>
                   <a:tcPr marL="50800" marR="50800" marT="38100" marB="38100" anchor="ctr">
@@ -17768,7 +17472,7 @@
                     <a:bodyPr/>
                     <a:lstStyle/>
                     <a:p>
-                      <a:pPr algn="ctr" indent="0" marL="0">
+                      <a:pPr marL="0" indent="0" algn="ctr">
                         <a:buNone/>
                       </a:pPr>
                       <a:r>
@@ -17829,7 +17533,7 @@
                     <a:bodyPr/>
                     <a:lstStyle/>
                     <a:p>
-                      <a:pPr algn="ctr" indent="0" marL="0">
+                      <a:pPr marL="0" indent="0" algn="ctr">
                         <a:buNone/>
                       </a:pPr>
                       <a:r>
@@ -17885,6 +17589,11 @@
                     </a:solidFill>
                   </a:tcPr>
                 </a:tc>
+                <a:extLst>
+                  <a:ext uri="{0D108BD9-81ED-4DB2-BD59-A6C34878D82A}">
+                    <a16:rowId xmlns:a16="http://schemas.microsoft.com/office/drawing/2014/main" val="10007"/>
+                  </a:ext>
+                </a:extLst>
               </a:tr>
               <a:tr h="402336">
                 <a:tc>
@@ -17892,7 +17601,7 @@
                     <a:bodyPr/>
                     <a:lstStyle/>
                     <a:p>
-                      <a:pPr algn="l" indent="0" marL="0">
+                      <a:pPr marL="0" indent="0" algn="l">
                         <a:buNone/>
                       </a:pPr>
                       <a:r>
@@ -17953,7 +17662,7 @@
                     <a:bodyPr/>
                     <a:lstStyle/>
                     <a:p>
-                      <a:pPr algn="ctr" indent="0" marL="0">
+                      <a:pPr marL="0" indent="0" algn="ctr">
                         <a:buNone/>
                       </a:pPr>
                       <a:r>
@@ -18014,7 +17723,7 @@
                     <a:bodyPr/>
                     <a:lstStyle/>
                     <a:p>
-                      <a:pPr algn="ctr" indent="0" marL="0">
+                      <a:pPr marL="0" indent="0" algn="ctr">
                         <a:buNone/>
                       </a:pPr>
                       <a:r>
@@ -18075,18 +17784,28 @@
                     <a:bodyPr/>
                     <a:lstStyle/>
                     <a:p>
-                      <a:pPr algn="ctr" indent="0" marL="0">
+                      <a:pPr marL="0" indent="0" algn="ctr">
                         <a:buNone/>
                       </a:pPr>
                       <a:r>
                         <a:rPr lang="en-US" sz="1150" b="1" dirty="0">
                           <a:solidFill>
-                            <a:srgbClr val="D97757"/>
+                            <a:schemeClr val="accent4">
+                              <a:lumMod val="60000"/>
+                              <a:lumOff val="40000"/>
+                            </a:schemeClr>
                           </a:solidFill>
                         </a:rPr>
-                        <a:t>7.84%</a:t>
+                        <a:t>0.73%</a:t>
                       </a:r>
-                      <a:endParaRPr lang="en-US" sz="1150" dirty="0"/>
+                      <a:endParaRPr lang="en-US" sz="1150" dirty="0">
+                        <a:solidFill>
+                          <a:schemeClr val="accent4">
+                            <a:lumMod val="60000"/>
+                            <a:lumOff val="40000"/>
+                          </a:schemeClr>
+                        </a:solidFill>
+                      </a:endParaRPr>
                     </a:p>
                   </a:txBody>
                   <a:tcPr marL="50800" marR="50800" marT="38100" marB="38100" anchor="ctr">
@@ -18136,7 +17855,7 @@
                     <a:bodyPr/>
                     <a:lstStyle/>
                     <a:p>
-                      <a:pPr algn="ctr" indent="0" marL="0">
+                      <a:pPr marL="0" indent="0" algn="ctr">
                         <a:buNone/>
                       </a:pPr>
                       <a:r>
@@ -18197,7 +17916,7 @@
                     <a:bodyPr/>
                     <a:lstStyle/>
                     <a:p>
-                      <a:pPr algn="ctr" indent="0" marL="0">
+                      <a:pPr marL="0" indent="0" algn="ctr">
                         <a:buNone/>
                       </a:pPr>
                       <a:r>
@@ -18253,6 +17972,11 @@
                     </a:solidFill>
                   </a:tcPr>
                 </a:tc>
+                <a:extLst>
+                  <a:ext uri="{0D108BD9-81ED-4DB2-BD59-A6C34878D82A}">
+                    <a16:rowId xmlns:a16="http://schemas.microsoft.com/office/drawing/2014/main" val="10008"/>
+                  </a:ext>
+                </a:extLst>
               </a:tr>
               <a:tr h="402336">
                 <a:tc>
@@ -18260,7 +17984,7 @@
                     <a:bodyPr/>
                     <a:lstStyle/>
                     <a:p>
-                      <a:pPr algn="l" indent="0" marL="0">
+                      <a:pPr marL="0" indent="0" algn="l">
                         <a:buNone/>
                       </a:pPr>
                       <a:r>
@@ -18321,7 +18045,7 @@
                     <a:bodyPr/>
                     <a:lstStyle/>
                     <a:p>
-                      <a:pPr algn="ctr" indent="0" marL="0">
+                      <a:pPr marL="0" indent="0" algn="ctr">
                         <a:buNone/>
                       </a:pPr>
                       <a:r>
@@ -18382,7 +18106,7 @@
                     <a:bodyPr/>
                     <a:lstStyle/>
                     <a:p>
-                      <a:pPr algn="ctr" indent="0" marL="0">
+                      <a:pPr marL="0" indent="0" algn="ctr">
                         <a:buNone/>
                       </a:pPr>
                       <a:r>
@@ -18391,7 +18115,7 @@
                             <a:srgbClr val="CADCFC"/>
                           </a:solidFill>
                         </a:rPr>
-                        <a:t>8.679</a:t>
+                        <a:t>8.817</a:t>
                       </a:r>
                       <a:endParaRPr lang="en-US" sz="1150" dirty="0"/>
                     </a:p>
@@ -18443,7 +18167,7 @@
                     <a:bodyPr/>
                     <a:lstStyle/>
                     <a:p>
-                      <a:pPr algn="ctr" indent="0" marL="0">
+                      <a:pPr marL="0" indent="0" algn="ctr">
                         <a:buNone/>
                       </a:pPr>
                       <a:r>
@@ -18452,7 +18176,7 @@
                             <a:srgbClr val="D97757"/>
                           </a:solidFill>
                         </a:rPr>
-                        <a:t>5.12%</a:t>
+                        <a:t>3.61%</a:t>
                       </a:r>
                       <a:endParaRPr lang="en-US" sz="1150" dirty="0"/>
                     </a:p>
@@ -18504,7 +18228,7 @@
                     <a:bodyPr/>
                     <a:lstStyle/>
                     <a:p>
-                      <a:pPr algn="ctr" indent="0" marL="0">
+                      <a:pPr marL="0" indent="0" algn="ctr">
                         <a:buNone/>
                       </a:pPr>
                       <a:r>
@@ -18565,7 +18289,7 @@
                     <a:bodyPr/>
                     <a:lstStyle/>
                     <a:p>
-                      <a:pPr algn="ctr" indent="0" marL="0">
+                      <a:pPr marL="0" indent="0" algn="ctr">
                         <a:buNone/>
                       </a:pPr>
                       <a:r>
@@ -18621,6 +18345,11 @@
                     </a:solidFill>
                   </a:tcPr>
                 </a:tc>
+                <a:extLst>
+                  <a:ext uri="{0D108BD9-81ED-4DB2-BD59-A6C34878D82A}">
+                    <a16:rowId xmlns:a16="http://schemas.microsoft.com/office/drawing/2014/main" val="10009"/>
+                  </a:ext>
+                </a:extLst>
               </a:tr>
             </a:tbl>
           </a:graphicData>
@@ -18650,14 +18379,14 @@
       </p:sp>
       <p:pic>
         <p:nvPicPr>
-          <p:cNvPr id="6" name="Image 0" descr="/home/claude/knapsack_pptx/icons/check_gold.png">    </p:cNvPr>
+          <p:cNvPr id="6" name="Image 0" descr="/home/claude/knapsack_pptx/icons/check_gold.png"/>
           <p:cNvPicPr>
             <a:picLocks noChangeAspect="1"/>
           </p:cNvPicPr>
           <p:nvPr/>
         </p:nvPicPr>
         <p:blipFill>
-          <a:blip r:embed="rId1"/>
+          <a:blip r:embed="rId3"/>
           <a:stretch>
             <a:fillRect/>
           </a:stretch>
@@ -18693,7 +18422,7 @@
           <a:bodyPr wrap="square" lIns="0" tIns="0" rIns="0" bIns="0" rtlCol="0" anchor="ctr"/>
           <a:lstStyle/>
           <a:p>
-            <a:pPr indent="0" marL="0">
+            <a:pPr marL="0" indent="0">
               <a:buNone/>
             </a:pPr>
             <a:r>
@@ -18707,9 +18436,6 @@
               </a:rPr>
               <a:t>AG: </a:t>
             </a:r>
-            <a:pPr indent="0" marL="0">
-              <a:buNone/>
-            </a:pPr>
             <a:r>
               <a:rPr lang="en-US" sz="1250" dirty="0">
                 <a:solidFill>
@@ -18754,14 +18480,14 @@
       </p:sp>
       <p:pic>
         <p:nvPicPr>
-          <p:cNvPr id="9" name="Image 1" descr="/home/claude/knapsack_pptx/icons/xmark_gold.png">    </p:cNvPr>
+          <p:cNvPr id="9" name="Image 1" descr="/home/claude/knapsack_pptx/icons/xmark_gold.png"/>
           <p:cNvPicPr>
             <a:picLocks noChangeAspect="1"/>
           </p:cNvPicPr>
           <p:nvPr/>
         </p:nvPicPr>
         <p:blipFill>
-          <a:blip r:embed="rId2"/>
+          <a:blip r:embed="rId4"/>
           <a:stretch>
             <a:fillRect/>
           </a:stretch>
@@ -18778,7 +18504,7 @@
       </p:pic>
       <p:sp>
         <p:nvSpPr>
-          <p:cNvPr id="10" name="Text 5"/>
+          <p:cNvPr id="4" name="Text 5"/>
           <p:cNvSpPr/>
           <p:nvPr/>
         </p:nvSpPr>
@@ -18797,7 +18523,7 @@
           <a:bodyPr wrap="square" lIns="0" tIns="0" rIns="0" bIns="0" rtlCol="0" anchor="ctr"/>
           <a:lstStyle/>
           <a:p>
-            <a:pPr indent="0" marL="0">
+            <a:pPr marL="0" indent="0">
               <a:buNone/>
             </a:pPr>
             <a:r>
@@ -18811,9 +18537,6 @@
               </a:rPr>
               <a:t>Tabu: </a:t>
             </a:r>
-            <a:pPr indent="0" marL="0">
-              <a:buNone/>
-            </a:pPr>
             <a:r>
               <a:rPr lang="en-US" sz="1250" dirty="0">
                 <a:solidFill>
@@ -18823,7 +18546,29 @@
                 <a:ea typeface="Calibri" pitchFamily="34" charset="-122"/>
                 <a:cs typeface="Calibri" pitchFamily="34" charset="-120"/>
               </a:rPr>
-              <a:t>ótimo em 4/9, gap máximo de 7.84%</a:t>
+              <a:t>ótimo </a:t>
+            </a:r>
+            <a:r>
+              <a:rPr lang="en-US" sz="1250" dirty="0" err="1">
+                <a:solidFill>
+                  <a:srgbClr val="CADCFC"/>
+                </a:solidFill>
+                <a:latin typeface="Calibri" pitchFamily="34" charset="0"/>
+                <a:ea typeface="Calibri" pitchFamily="34" charset="-122"/>
+                <a:cs typeface="Calibri" pitchFamily="34" charset="-120"/>
+              </a:rPr>
+              <a:t>em</a:t>
+            </a:r>
+            <a:r>
+              <a:rPr lang="en-US" sz="1250" dirty="0">
+                <a:solidFill>
+                  <a:srgbClr val="CADCFC"/>
+                </a:solidFill>
+                <a:latin typeface="Calibri" pitchFamily="34" charset="0"/>
+                <a:ea typeface="Calibri" pitchFamily="34" charset="-122"/>
+                <a:cs typeface="Calibri" pitchFamily="34" charset="-120"/>
+              </a:rPr>
+              <a:t> 5/9, gap máximo de 7.84%</a:t>
             </a:r>
             <a:endParaRPr lang="en-US" sz="1250" dirty="0"/>
           </a:p>
@@ -18850,7 +18595,7 @@
           <a:bodyPr wrap="square" lIns="0" tIns="0" rIns="0" bIns="0" rtlCol="0" anchor="ctr"/>
           <a:lstStyle/>
           <a:p>
-            <a:pPr algn="r" indent="0" marL="0">
+            <a:pPr marL="0" indent="0" algn="r">
               <a:buNone/>
             </a:pPr>
             <a:r>
@@ -19169,4 +18914,319 @@
     </a:ext>
   </a:extLst>
 </a:theme>
+</file>
+
+<file path=ppt/theme/theme2.xml><?xml version="1.0" encoding="utf-8"?>
+<a:theme xmlns:a="http://schemas.openxmlformats.org/drawingml/2006/main" name="Tema do Office">
+  <a:themeElements>
+    <a:clrScheme name="Office">
+      <a:dk1>
+        <a:sysClr val="windowText" lastClr="000000"/>
+      </a:dk1>
+      <a:lt1>
+        <a:sysClr val="window" lastClr="FFFFFF"/>
+      </a:lt1>
+      <a:dk2>
+        <a:srgbClr val="0E2841"/>
+      </a:dk2>
+      <a:lt2>
+        <a:srgbClr val="E8E8E8"/>
+      </a:lt2>
+      <a:accent1>
+        <a:srgbClr val="156082"/>
+      </a:accent1>
+      <a:accent2>
+        <a:srgbClr val="E97132"/>
+      </a:accent2>
+      <a:accent3>
+        <a:srgbClr val="196B24"/>
+      </a:accent3>
+      <a:accent4>
+        <a:srgbClr val="0F9ED5"/>
+      </a:accent4>
+      <a:accent5>
+        <a:srgbClr val="A02B93"/>
+      </a:accent5>
+      <a:accent6>
+        <a:srgbClr val="4EA72E"/>
+      </a:accent6>
+      <a:hlink>
+        <a:srgbClr val="467886"/>
+      </a:hlink>
+      <a:folHlink>
+        <a:srgbClr val="96607D"/>
+      </a:folHlink>
+    </a:clrScheme>
+    <a:fontScheme name="Office">
+      <a:majorFont>
+        <a:latin typeface="Aptos Display" panose="02110004020202020204"/>
+        <a:ea typeface=""/>
+        <a:cs typeface=""/>
+        <a:font script="Jpan" typeface="游ゴシック Light"/>
+        <a:font script="Hang" typeface="맑은 고딕"/>
+        <a:font script="Hans" typeface="等线 Light"/>
+        <a:font script="Hant" typeface="新細明體"/>
+        <a:font script="Arab" typeface="Times New Roman"/>
+        <a:font script="Hebr" typeface="Times New Roman"/>
+        <a:font script="Thai" typeface="Angsana New"/>
+        <a:font script="Ethi" typeface="Nyala"/>
+        <a:font script="Beng" typeface="Vrinda"/>
+        <a:font script="Gujr" typeface="Shruti"/>
+        <a:font script="Khmr" typeface="MoolBoran"/>
+        <a:font script="Knda" typeface="Tunga"/>
+        <a:font script="Guru" typeface="Raavi"/>
+        <a:font script="Cans" typeface="Euphemia"/>
+        <a:font script="Cher" typeface="Plantagenet Cherokee"/>
+        <a:font script="Yiii" typeface="Microsoft Yi Baiti"/>
+        <a:font script="Tibt" typeface="Microsoft Himalaya"/>
+        <a:font script="Thaa" typeface="MV Boli"/>
+        <a:font script="Deva" typeface="Mangal"/>
+        <a:font script="Telu" typeface="Gautami"/>
+        <a:font script="Taml" typeface="Latha"/>
+        <a:font script="Syrc" typeface="Estrangelo Edessa"/>
+        <a:font script="Orya" typeface="Kalinga"/>
+        <a:font script="Mlym" typeface="Kartika"/>
+        <a:font script="Laoo" typeface="DokChampa"/>
+        <a:font script="Sinh" typeface="Iskoola Pota"/>
+        <a:font script="Mong" typeface="Mongolian Baiti"/>
+        <a:font script="Viet" typeface="Times New Roman"/>
+        <a:font script="Uigh" typeface="Microsoft Uighur"/>
+        <a:font script="Geor" typeface="Sylfaen"/>
+        <a:font script="Armn" typeface="Arial"/>
+        <a:font script="Bugi" typeface="Leelawadee UI"/>
+        <a:font script="Bopo" typeface="Microsoft JhengHei"/>
+        <a:font script="Java" typeface="Javanese Text"/>
+        <a:font script="Lisu" typeface="Segoe UI"/>
+        <a:font script="Mymr" typeface="Myanmar Text"/>
+        <a:font script="Nkoo" typeface="Ebrima"/>
+        <a:font script="Olck" typeface="Nirmala UI"/>
+        <a:font script="Osma" typeface="Ebrima"/>
+        <a:font script="Phag" typeface="Phagspa"/>
+        <a:font script="Syrn" typeface="Estrangelo Edessa"/>
+        <a:font script="Syrj" typeface="Estrangelo Edessa"/>
+        <a:font script="Syre" typeface="Estrangelo Edessa"/>
+        <a:font script="Sora" typeface="Nirmala UI"/>
+        <a:font script="Tale" typeface="Microsoft Tai Le"/>
+        <a:font script="Talu" typeface="Microsoft New Tai Lue"/>
+        <a:font script="Tfng" typeface="Ebrima"/>
+      </a:majorFont>
+      <a:minorFont>
+        <a:latin typeface="Aptos" panose="02110004020202020204"/>
+        <a:ea typeface=""/>
+        <a:cs typeface=""/>
+        <a:font script="Jpan" typeface="游ゴシック"/>
+        <a:font script="Hang" typeface="맑은 고딕"/>
+        <a:font script="Hans" typeface="等线"/>
+        <a:font script="Hant" typeface="新細明體"/>
+        <a:font script="Arab" typeface="Arial"/>
+        <a:font script="Hebr" typeface="Arial"/>
+        <a:font script="Thai" typeface="Cordia New"/>
+        <a:font script="Ethi" typeface="Nyala"/>
+        <a:font script="Beng" typeface="Vrinda"/>
+        <a:font script="Gujr" typeface="Shruti"/>
+        <a:font script="Khmr" typeface="DaunPenh"/>
+        <a:font script="Knda" typeface="Tunga"/>
+        <a:font script="Guru" typeface="Raavi"/>
+        <a:font script="Cans" typeface="Euphemia"/>
+        <a:font script="Cher" typeface="Plantagenet Cherokee"/>
+        <a:font script="Yiii" typeface="Microsoft Yi Baiti"/>
+        <a:font script="Tibt" typeface="Microsoft Himalaya"/>
+        <a:font script="Thaa" typeface="MV Boli"/>
+        <a:font script="Deva" typeface="Mangal"/>
+        <a:font script="Telu" typeface="Gautami"/>
+        <a:font script="Taml" typeface="Latha"/>
+        <a:font script="Syrc" typeface="Estrangelo Edessa"/>
+        <a:font script="Orya" typeface="Kalinga"/>
+        <a:font script="Mlym" typeface="Kartika"/>
+        <a:font script="Laoo" typeface="DokChampa"/>
+        <a:font script="Sinh" typeface="Iskoola Pota"/>
+        <a:font script="Mong" typeface="Mongolian Baiti"/>
+        <a:font script="Viet" typeface="Arial"/>
+        <a:font script="Uigh" typeface="Microsoft Uighur"/>
+        <a:font script="Geor" typeface="Sylfaen"/>
+        <a:font script="Armn" typeface="Arial"/>
+        <a:font script="Bugi" typeface="Leelawadee UI"/>
+        <a:font script="Bopo" typeface="Microsoft JhengHei"/>
+        <a:font script="Java" typeface="Javanese Text"/>
+        <a:font script="Lisu" typeface="Segoe UI"/>
+        <a:font script="Mymr" typeface="Myanmar Text"/>
+        <a:font script="Nkoo" typeface="Ebrima"/>
+        <a:font script="Olck" typeface="Nirmala UI"/>
+        <a:font script="Osma" typeface="Ebrima"/>
+        <a:font script="Phag" typeface="Phagspa"/>
+        <a:font script="Syrn" typeface="Estrangelo Edessa"/>
+        <a:font script="Syrj" typeface="Estrangelo Edessa"/>
+        <a:font script="Syre" typeface="Estrangelo Edessa"/>
+        <a:font script="Sora" typeface="Nirmala UI"/>
+        <a:font script="Tale" typeface="Microsoft Tai Le"/>
+        <a:font script="Talu" typeface="Microsoft New Tai Lue"/>
+        <a:font script="Tfng" typeface="Ebrima"/>
+      </a:minorFont>
+    </a:fontScheme>
+    <a:fmtScheme name="Office">
+      <a:fillStyleLst>
+        <a:solidFill>
+          <a:schemeClr val="phClr"/>
+        </a:solidFill>
+        <a:gradFill rotWithShape="1">
+          <a:gsLst>
+            <a:gs pos="0">
+              <a:schemeClr val="phClr">
+                <a:lumMod val="110000"/>
+                <a:satMod val="105000"/>
+                <a:tint val="67000"/>
+              </a:schemeClr>
+            </a:gs>
+            <a:gs pos="50000">
+              <a:schemeClr val="phClr">
+                <a:lumMod val="105000"/>
+                <a:satMod val="103000"/>
+                <a:tint val="73000"/>
+              </a:schemeClr>
+            </a:gs>
+            <a:gs pos="100000">
+              <a:schemeClr val="phClr">
+                <a:lumMod val="105000"/>
+                <a:satMod val="109000"/>
+                <a:tint val="81000"/>
+              </a:schemeClr>
+            </a:gs>
+          </a:gsLst>
+          <a:lin ang="5400000" scaled="0"/>
+        </a:gradFill>
+        <a:gradFill rotWithShape="1">
+          <a:gsLst>
+            <a:gs pos="0">
+              <a:schemeClr val="phClr">
+                <a:satMod val="103000"/>
+                <a:lumMod val="102000"/>
+                <a:tint val="94000"/>
+              </a:schemeClr>
+            </a:gs>
+            <a:gs pos="50000">
+              <a:schemeClr val="phClr">
+                <a:satMod val="110000"/>
+                <a:lumMod val="100000"/>
+                <a:shade val="100000"/>
+              </a:schemeClr>
+            </a:gs>
+            <a:gs pos="100000">
+              <a:schemeClr val="phClr">
+                <a:lumMod val="99000"/>
+                <a:satMod val="120000"/>
+                <a:shade val="78000"/>
+              </a:schemeClr>
+            </a:gs>
+          </a:gsLst>
+          <a:lin ang="5400000" scaled="0"/>
+        </a:gradFill>
+      </a:fillStyleLst>
+      <a:lnStyleLst>
+        <a:ln w="12700" cap="flat" cmpd="sng" algn="ctr">
+          <a:solidFill>
+            <a:schemeClr val="phClr"/>
+          </a:solidFill>
+          <a:prstDash val="solid"/>
+          <a:miter lim="800000"/>
+        </a:ln>
+        <a:ln w="19050" cap="flat" cmpd="sng" algn="ctr">
+          <a:solidFill>
+            <a:schemeClr val="phClr"/>
+          </a:solidFill>
+          <a:prstDash val="solid"/>
+          <a:miter lim="800000"/>
+        </a:ln>
+        <a:ln w="25400" cap="flat" cmpd="sng" algn="ctr">
+          <a:solidFill>
+            <a:schemeClr val="phClr"/>
+          </a:solidFill>
+          <a:prstDash val="solid"/>
+          <a:miter lim="800000"/>
+        </a:ln>
+      </a:lnStyleLst>
+      <a:effectStyleLst>
+        <a:effectStyle>
+          <a:effectLst/>
+        </a:effectStyle>
+        <a:effectStyle>
+          <a:effectLst/>
+        </a:effectStyle>
+        <a:effectStyle>
+          <a:effectLst>
+            <a:outerShdw blurRad="57150" dist="19050" dir="5400000" algn="ctr" rotWithShape="0">
+              <a:srgbClr val="000000">
+                <a:alpha val="63000"/>
+              </a:srgbClr>
+            </a:outerShdw>
+          </a:effectLst>
+        </a:effectStyle>
+      </a:effectStyleLst>
+      <a:bgFillStyleLst>
+        <a:solidFill>
+          <a:schemeClr val="phClr"/>
+        </a:solidFill>
+        <a:solidFill>
+          <a:schemeClr val="phClr">
+            <a:tint val="95000"/>
+            <a:satMod val="170000"/>
+          </a:schemeClr>
+        </a:solidFill>
+        <a:gradFill rotWithShape="1">
+          <a:gsLst>
+            <a:gs pos="0">
+              <a:schemeClr val="phClr">
+                <a:tint val="93000"/>
+                <a:satMod val="150000"/>
+                <a:shade val="98000"/>
+                <a:lumMod val="102000"/>
+              </a:schemeClr>
+            </a:gs>
+            <a:gs pos="50000">
+              <a:schemeClr val="phClr">
+                <a:tint val="98000"/>
+                <a:satMod val="130000"/>
+                <a:shade val="90000"/>
+                <a:lumMod val="103000"/>
+              </a:schemeClr>
+            </a:gs>
+            <a:gs pos="100000">
+              <a:schemeClr val="phClr">
+                <a:shade val="63000"/>
+                <a:satMod val="120000"/>
+              </a:schemeClr>
+            </a:gs>
+          </a:gsLst>
+          <a:lin ang="5400000" scaled="0"/>
+        </a:gradFill>
+      </a:bgFillStyleLst>
+    </a:fmtScheme>
+  </a:themeElements>
+  <a:objectDefaults>
+    <a:lnDef>
+      <a:spPr/>
+      <a:bodyPr/>
+      <a:lstStyle/>
+      <a:style>
+        <a:lnRef idx="2">
+          <a:schemeClr val="accent1"/>
+        </a:lnRef>
+        <a:fillRef idx="0">
+          <a:schemeClr val="accent1"/>
+        </a:fillRef>
+        <a:effectRef idx="1">
+          <a:schemeClr val="accent1"/>
+        </a:effectRef>
+        <a:fontRef idx="minor">
+          <a:schemeClr val="tx1"/>
+        </a:fontRef>
+      </a:style>
+    </a:lnDef>
+  </a:objectDefaults>
+  <a:extraClrSchemeLst/>
+  <a:extLst>
+    <a:ext uri="{05A4C25C-085E-4340-85A3-A5531E510DB2}">
+      <thm15:themeFamily xmlns:thm15="http://schemas.microsoft.com/office/thememl/2012/main" name="Office Theme" id="{2E142A2C-CD16-42D6-873A-C26D2A0506FA}" vid="{1BDDFF52-6CD6-40A5-AB3C-68EB2F1E4D0A}"/>
+    </a:ext>
+  </a:extLst>
+</a:theme>
 </file>
--- a/Mochila01_MetaHeuristicas_TabuVsAG.pptx
+++ b/Mochila01_MetaHeuristicas_TabuVsAG.pptx
@@ -5,20 +5,20 @@
     <p:sldMasterId id="2147483648" r:id="rId1"/>
   </p:sldMasterIdLst>
   <p:sldIdLst>
-    <p:sldId id="256" r:id="rId7"/>
-    <p:sldId id="257" r:id="rId8"/>
-    <p:sldId id="258" r:id="rId9"/>
-    <p:sldId id="259" r:id="rId10"/>
-    <p:sldId id="260" r:id="rId11"/>
-    <p:sldId id="261" r:id="rId12"/>
-    <p:sldId id="262" r:id="rId13"/>
-    <p:sldId id="263" r:id="rId14"/>
-    <p:sldId id="264" r:id="rId15"/>
-    <p:sldId id="265" r:id="rId16"/>
-    <p:sldId id="266" r:id="rId17"/>
-    <p:sldId id="267" r:id="rId18"/>
+    <p:sldId id="256" r:id="rId2"/>
+    <p:sldId id="257" r:id="rId3"/>
+    <p:sldId id="258" r:id="rId4"/>
+    <p:sldId id="259" r:id="rId5"/>
+    <p:sldId id="260" r:id="rId6"/>
+    <p:sldId id="261" r:id="rId7"/>
+    <p:sldId id="262" r:id="rId8"/>
+    <p:sldId id="263" r:id="rId9"/>
+    <p:sldId id="264" r:id="rId10"/>
+    <p:sldId id="265" r:id="rId11"/>
+    <p:sldId id="266" r:id="rId12"/>
+    <p:sldId id="267" r:id="rId13"/>
   </p:sldIdLst>
-  <p:sldSz cx="12191695" cy="6858000" type="screen4x3"/>
+  <p:sldSz cx="12192000" cy="6858000"/>
   <p:notesSz cx="6858000" cy="9144000"/>
   <p:defaultTextStyle>
     <a:defPPr>
@@ -115,6 +115,22 @@
       </a:defRPr>
     </a:lvl9pPr>
   </p:defaultTextStyle>
+  <p:extLst>
+    <p:ext uri="{EFAFB233-063F-42B5-8137-9DF3F51BA10A}">
+      <p15:sldGuideLst xmlns:p15="http://schemas.microsoft.com/office/powerpoint/2012/main">
+        <p15:guide id="1" orient="horz" pos="2160">
+          <p15:clr>
+            <a:srgbClr val="A4A3A4"/>
+          </p15:clr>
+        </p15:guide>
+        <p15:guide id="2" pos="2880">
+          <p15:clr>
+            <a:srgbClr val="A4A3A4"/>
+          </p15:clr>
+        </p15:guide>
+      </p15:sldGuideLst>
+    </p:ext>
+  </p:extLst>
 </p:presentation>
 </file>
 
@@ -156,10 +172,9 @@
           <a:lstStyle/>
           <a:p>
             <a:r>
-              <a:rPr lang="en-US" smtClean="0"/>
+              <a:rPr lang="en-US"/>
               <a:t>Click to edit Master title style</a:t>
             </a:r>
-            <a:endParaRPr lang="en-US"/>
           </a:p>
         </p:txBody>
       </p:sp>
@@ -275,10 +290,9 @@
           </a:lstStyle>
           <a:p>
             <a:r>
-              <a:rPr lang="en-US" smtClean="0"/>
+              <a:rPr lang="en-US"/>
               <a:t>Click to edit Master subtitle style</a:t>
             </a:r>
-            <a:endParaRPr lang="en-US"/>
           </a:p>
         </p:txBody>
       </p:sp>
@@ -299,7 +313,7 @@
           <a:p>
             <a:fld id="{5BCAD085-E8A6-8845-BD4E-CB4CCA059FC4}" type="datetimeFigureOut">
               <a:rPr lang="en-US" smtClean="0"/>
-              <a:t>1/27/13</a:t>
+              <a:t>9/20/2026</a:t>
             </a:fld>
             <a:endParaRPr lang="en-US"/>
           </a:p>
@@ -341,7 +355,7 @@
           <a:p>
             <a:fld id="{C1FF6DA9-008F-8B48-92A6-B652298478BF}" type="slidenum">
               <a:rPr lang="en-US" smtClean="0"/>
-              <a:t>‹#›</a:t>
+              <a:t>‹nº›</a:t>
             </a:fld>
             <a:endParaRPr lang="en-US"/>
           </a:p>
@@ -393,10 +407,9 @@
           <a:lstStyle/>
           <a:p>
             <a:r>
-              <a:rPr lang="en-US" smtClean="0"/>
+              <a:rPr lang="en-US"/>
               <a:t>Click to edit Master title style</a:t>
             </a:r>
-            <a:endParaRPr lang="en-US"/>
           </a:p>
         </p:txBody>
       </p:sp>
@@ -417,38 +430,37 @@
           <a:p>
             <a:pPr lvl="0"/>
             <a:r>
-              <a:rPr lang="en-US" smtClean="0"/>
+              <a:rPr lang="en-US"/>
               <a:t>Click to edit Master text styles</a:t>
             </a:r>
           </a:p>
           <a:p>
             <a:pPr lvl="1"/>
             <a:r>
-              <a:rPr lang="en-US" smtClean="0"/>
+              <a:rPr lang="en-US"/>
               <a:t>Second level</a:t>
             </a:r>
           </a:p>
           <a:p>
             <a:pPr lvl="2"/>
             <a:r>
-              <a:rPr lang="en-US" smtClean="0"/>
+              <a:rPr lang="en-US"/>
               <a:t>Third level</a:t>
             </a:r>
           </a:p>
           <a:p>
             <a:pPr lvl="3"/>
             <a:r>
-              <a:rPr lang="en-US" smtClean="0"/>
+              <a:rPr lang="en-US"/>
               <a:t>Fourth level</a:t>
             </a:r>
           </a:p>
           <a:p>
             <a:pPr lvl="4"/>
             <a:r>
-              <a:rPr lang="en-US" smtClean="0"/>
+              <a:rPr lang="en-US"/>
               <a:t>Fifth level</a:t>
             </a:r>
-            <a:endParaRPr lang="en-US"/>
           </a:p>
         </p:txBody>
       </p:sp>
@@ -469,7 +481,7 @@
           <a:p>
             <a:fld id="{5BCAD085-E8A6-8845-BD4E-CB4CCA059FC4}" type="datetimeFigureOut">
               <a:rPr lang="en-US" smtClean="0"/>
-              <a:t>1/27/13</a:t>
+              <a:t>9/20/2026</a:t>
             </a:fld>
             <a:endParaRPr lang="en-US"/>
           </a:p>
@@ -511,7 +523,7 @@
           <a:p>
             <a:fld id="{C1FF6DA9-008F-8B48-92A6-B652298478BF}" type="slidenum">
               <a:rPr lang="en-US" smtClean="0"/>
-              <a:t>‹#›</a:t>
+              <a:t>‹nº›</a:t>
             </a:fld>
             <a:endParaRPr lang="en-US"/>
           </a:p>
@@ -568,10 +580,9 @@
           <a:lstStyle/>
           <a:p>
             <a:r>
-              <a:rPr lang="en-US" smtClean="0"/>
+              <a:rPr lang="en-US"/>
               <a:t>Click to edit Master title style</a:t>
             </a:r>
-            <a:endParaRPr lang="en-US"/>
           </a:p>
         </p:txBody>
       </p:sp>
@@ -597,38 +608,37 @@
           <a:p>
             <a:pPr lvl="0"/>
             <a:r>
-              <a:rPr lang="en-US" smtClean="0"/>
+              <a:rPr lang="en-US"/>
               <a:t>Click to edit Master text styles</a:t>
             </a:r>
           </a:p>
           <a:p>
             <a:pPr lvl="1"/>
             <a:r>
-              <a:rPr lang="en-US" smtClean="0"/>
+              <a:rPr lang="en-US"/>
               <a:t>Second level</a:t>
             </a:r>
           </a:p>
           <a:p>
             <a:pPr lvl="2"/>
             <a:r>
-              <a:rPr lang="en-US" smtClean="0"/>
+              <a:rPr lang="en-US"/>
               <a:t>Third level</a:t>
             </a:r>
           </a:p>
           <a:p>
             <a:pPr lvl="3"/>
             <a:r>
-              <a:rPr lang="en-US" smtClean="0"/>
+              <a:rPr lang="en-US"/>
               <a:t>Fourth level</a:t>
             </a:r>
           </a:p>
           <a:p>
             <a:pPr lvl="4"/>
             <a:r>
-              <a:rPr lang="en-US" smtClean="0"/>
+              <a:rPr lang="en-US"/>
               <a:t>Fifth level</a:t>
             </a:r>
-            <a:endParaRPr lang="en-US"/>
           </a:p>
         </p:txBody>
       </p:sp>
@@ -649,7 +659,7 @@
           <a:p>
             <a:fld id="{5BCAD085-E8A6-8845-BD4E-CB4CCA059FC4}" type="datetimeFigureOut">
               <a:rPr lang="en-US" smtClean="0"/>
-              <a:t>1/27/13</a:t>
+              <a:t>9/20/2026</a:t>
             </a:fld>
             <a:endParaRPr lang="en-US"/>
           </a:p>
@@ -691,7 +701,7 @@
           <a:p>
             <a:fld id="{C1FF6DA9-008F-8B48-92A6-B652298478BF}" type="slidenum">
               <a:rPr lang="en-US" smtClean="0"/>
-              <a:t>‹#›</a:t>
+              <a:t>‹nº›</a:t>
             </a:fld>
             <a:endParaRPr lang="en-US"/>
           </a:p>
@@ -743,10 +753,9 @@
           <a:lstStyle/>
           <a:p>
             <a:r>
-              <a:rPr lang="en-US" smtClean="0"/>
+              <a:rPr lang="en-US"/>
               <a:t>Click to edit Master title style</a:t>
             </a:r>
-            <a:endParaRPr lang="en-US"/>
           </a:p>
         </p:txBody>
       </p:sp>
@@ -767,38 +776,37 @@
           <a:p>
             <a:pPr lvl="0"/>
             <a:r>
-              <a:rPr lang="en-US" smtClean="0"/>
+              <a:rPr lang="en-US"/>
               <a:t>Click to edit Master text styles</a:t>
             </a:r>
           </a:p>
           <a:p>
             <a:pPr lvl="1"/>
             <a:r>
-              <a:rPr lang="en-US" smtClean="0"/>
+              <a:rPr lang="en-US"/>
               <a:t>Second level</a:t>
             </a:r>
           </a:p>
           <a:p>
             <a:pPr lvl="2"/>
             <a:r>
-              <a:rPr lang="en-US" smtClean="0"/>
+              <a:rPr lang="en-US"/>
               <a:t>Third level</a:t>
             </a:r>
           </a:p>
           <a:p>
             <a:pPr lvl="3"/>
             <a:r>
-              <a:rPr lang="en-US" smtClean="0"/>
+              <a:rPr lang="en-US"/>
               <a:t>Fourth level</a:t>
             </a:r>
           </a:p>
           <a:p>
             <a:pPr lvl="4"/>
             <a:r>
-              <a:rPr lang="en-US" smtClean="0"/>
+              <a:rPr lang="en-US"/>
               <a:t>Fifth level</a:t>
             </a:r>
-            <a:endParaRPr lang="en-US"/>
           </a:p>
         </p:txBody>
       </p:sp>
@@ -819,7 +827,7 @@
           <a:p>
             <a:fld id="{5BCAD085-E8A6-8845-BD4E-CB4CCA059FC4}" type="datetimeFigureOut">
               <a:rPr lang="en-US" smtClean="0"/>
-              <a:t>1/27/13</a:t>
+              <a:t>9/20/2026</a:t>
             </a:fld>
             <a:endParaRPr lang="en-US"/>
           </a:p>
@@ -861,7 +869,7 @@
           <a:p>
             <a:fld id="{C1FF6DA9-008F-8B48-92A6-B652298478BF}" type="slidenum">
               <a:rPr lang="en-US" smtClean="0"/>
-              <a:t>‹#›</a:t>
+              <a:t>‹nº›</a:t>
             </a:fld>
             <a:endParaRPr lang="en-US"/>
           </a:p>
@@ -922,10 +930,9 @@
           </a:lstStyle>
           <a:p>
             <a:r>
-              <a:rPr lang="en-US" smtClean="0"/>
+              <a:rPr lang="en-US"/>
               <a:t>Click to edit Master title style</a:t>
             </a:r>
-            <a:endParaRPr lang="en-US"/>
           </a:p>
         </p:txBody>
       </p:sp>
@@ -1042,7 +1049,7 @@
           <a:p>
             <a:pPr lvl="0"/>
             <a:r>
-              <a:rPr lang="en-US" smtClean="0"/>
+              <a:rPr lang="en-US"/>
               <a:t>Click to edit Master text styles</a:t>
             </a:r>
           </a:p>
@@ -1065,7 +1072,7 @@
           <a:p>
             <a:fld id="{5BCAD085-E8A6-8845-BD4E-CB4CCA059FC4}" type="datetimeFigureOut">
               <a:rPr lang="en-US" smtClean="0"/>
-              <a:t>1/27/13</a:t>
+              <a:t>9/20/2026</a:t>
             </a:fld>
             <a:endParaRPr lang="en-US"/>
           </a:p>
@@ -1107,7 +1114,7 @@
           <a:p>
             <a:fld id="{C1FF6DA9-008F-8B48-92A6-B652298478BF}" type="slidenum">
               <a:rPr lang="en-US" smtClean="0"/>
-              <a:t>‹#›</a:t>
+              <a:t>‹nº›</a:t>
             </a:fld>
             <a:endParaRPr lang="en-US"/>
           </a:p>
@@ -1159,10 +1166,9 @@
           <a:lstStyle/>
           <a:p>
             <a:r>
-              <a:rPr lang="en-US" smtClean="0"/>
+              <a:rPr lang="en-US"/>
               <a:t>Click to edit Master title style</a:t>
             </a:r>
-            <a:endParaRPr lang="en-US"/>
           </a:p>
         </p:txBody>
       </p:sp>
@@ -1216,38 +1222,37 @@
           <a:p>
             <a:pPr lvl="0"/>
             <a:r>
-              <a:rPr lang="en-US" smtClean="0"/>
+              <a:rPr lang="en-US"/>
               <a:t>Click to edit Master text styles</a:t>
             </a:r>
           </a:p>
           <a:p>
             <a:pPr lvl="1"/>
             <a:r>
-              <a:rPr lang="en-US" smtClean="0"/>
+              <a:rPr lang="en-US"/>
               <a:t>Second level</a:t>
             </a:r>
           </a:p>
           <a:p>
             <a:pPr lvl="2"/>
             <a:r>
-              <a:rPr lang="en-US" smtClean="0"/>
+              <a:rPr lang="en-US"/>
               <a:t>Third level</a:t>
             </a:r>
           </a:p>
           <a:p>
             <a:pPr lvl="3"/>
             <a:r>
-              <a:rPr lang="en-US" smtClean="0"/>
+              <a:rPr lang="en-US"/>
               <a:t>Fourth level</a:t>
             </a:r>
           </a:p>
           <a:p>
             <a:pPr lvl="4"/>
             <a:r>
-              <a:rPr lang="en-US" smtClean="0"/>
+              <a:rPr lang="en-US"/>
               <a:t>Fifth level</a:t>
             </a:r>
-            <a:endParaRPr lang="en-US"/>
           </a:p>
         </p:txBody>
       </p:sp>
@@ -1301,38 +1306,37 @@
           <a:p>
             <a:pPr lvl="0"/>
             <a:r>
-              <a:rPr lang="en-US" smtClean="0"/>
+              <a:rPr lang="en-US"/>
               <a:t>Click to edit Master text styles</a:t>
             </a:r>
           </a:p>
           <a:p>
             <a:pPr lvl="1"/>
             <a:r>
-              <a:rPr lang="en-US" smtClean="0"/>
+              <a:rPr lang="en-US"/>
               <a:t>Second level</a:t>
             </a:r>
           </a:p>
           <a:p>
             <a:pPr lvl="2"/>
             <a:r>
-              <a:rPr lang="en-US" smtClean="0"/>
+              <a:rPr lang="en-US"/>
               <a:t>Third level</a:t>
             </a:r>
           </a:p>
           <a:p>
             <a:pPr lvl="3"/>
             <a:r>
-              <a:rPr lang="en-US" smtClean="0"/>
+              <a:rPr lang="en-US"/>
               <a:t>Fourth level</a:t>
             </a:r>
           </a:p>
           <a:p>
             <a:pPr lvl="4"/>
             <a:r>
-              <a:rPr lang="en-US" smtClean="0"/>
+              <a:rPr lang="en-US"/>
               <a:t>Fifth level</a:t>
             </a:r>
-            <a:endParaRPr lang="en-US"/>
           </a:p>
         </p:txBody>
       </p:sp>
@@ -1353,7 +1357,7 @@
           <a:p>
             <a:fld id="{5BCAD085-E8A6-8845-BD4E-CB4CCA059FC4}" type="datetimeFigureOut">
               <a:rPr lang="en-US" smtClean="0"/>
-              <a:t>1/27/13</a:t>
+              <a:t>9/20/2026</a:t>
             </a:fld>
             <a:endParaRPr lang="en-US"/>
           </a:p>
@@ -1395,7 +1399,7 @@
           <a:p>
             <a:fld id="{C1FF6DA9-008F-8B48-92A6-B652298478BF}" type="slidenum">
               <a:rPr lang="en-US" smtClean="0"/>
-              <a:t>‹#›</a:t>
+              <a:t>‹nº›</a:t>
             </a:fld>
             <a:endParaRPr lang="en-US"/>
           </a:p>
@@ -1451,10 +1455,9 @@
           </a:lstStyle>
           <a:p>
             <a:r>
-              <a:rPr lang="en-US" smtClean="0"/>
+              <a:rPr lang="en-US"/>
               <a:t>Click to edit Master title style</a:t>
             </a:r>
-            <a:endParaRPr lang="en-US"/>
           </a:p>
         </p:txBody>
       </p:sp>
@@ -1517,7 +1520,7 @@
           <a:p>
             <a:pPr lvl="0"/>
             <a:r>
-              <a:rPr lang="en-US" smtClean="0"/>
+              <a:rPr lang="en-US"/>
               <a:t>Click to edit Master text styles</a:t>
             </a:r>
           </a:p>
@@ -1573,38 +1576,37 @@
           <a:p>
             <a:pPr lvl="0"/>
             <a:r>
-              <a:rPr lang="en-US" smtClean="0"/>
+              <a:rPr lang="en-US"/>
               <a:t>Click to edit Master text styles</a:t>
             </a:r>
           </a:p>
           <a:p>
             <a:pPr lvl="1"/>
             <a:r>
-              <a:rPr lang="en-US" smtClean="0"/>
+              <a:rPr lang="en-US"/>
               <a:t>Second level</a:t>
             </a:r>
           </a:p>
           <a:p>
             <a:pPr lvl="2"/>
             <a:r>
-              <a:rPr lang="en-US" smtClean="0"/>
+              <a:rPr lang="en-US"/>
               <a:t>Third level</a:t>
             </a:r>
           </a:p>
           <a:p>
             <a:pPr lvl="3"/>
             <a:r>
-              <a:rPr lang="en-US" smtClean="0"/>
+              <a:rPr lang="en-US"/>
               <a:t>Fourth level</a:t>
             </a:r>
           </a:p>
           <a:p>
             <a:pPr lvl="4"/>
             <a:r>
-              <a:rPr lang="en-US" smtClean="0"/>
+              <a:rPr lang="en-US"/>
               <a:t>Fifth level</a:t>
             </a:r>
-            <a:endParaRPr lang="en-US"/>
           </a:p>
         </p:txBody>
       </p:sp>
@@ -1667,7 +1669,7 @@
           <a:p>
             <a:pPr lvl="0"/>
             <a:r>
-              <a:rPr lang="en-US" smtClean="0"/>
+              <a:rPr lang="en-US"/>
               <a:t>Click to edit Master text styles</a:t>
             </a:r>
           </a:p>
@@ -1723,38 +1725,37 @@
           <a:p>
             <a:pPr lvl="0"/>
             <a:r>
-              <a:rPr lang="en-US" smtClean="0"/>
+              <a:rPr lang="en-US"/>
               <a:t>Click to edit Master text styles</a:t>
             </a:r>
           </a:p>
           <a:p>
             <a:pPr lvl="1"/>
             <a:r>
-              <a:rPr lang="en-US" smtClean="0"/>
+              <a:rPr lang="en-US"/>
               <a:t>Second level</a:t>
             </a:r>
           </a:p>
           <a:p>
             <a:pPr lvl="2"/>
             <a:r>
-              <a:rPr lang="en-US" smtClean="0"/>
+              <a:rPr lang="en-US"/>
               <a:t>Third level</a:t>
             </a:r>
           </a:p>
           <a:p>
             <a:pPr lvl="3"/>
             <a:r>
-              <a:rPr lang="en-US" smtClean="0"/>
+              <a:rPr lang="en-US"/>
               <a:t>Fourth level</a:t>
             </a:r>
           </a:p>
           <a:p>
             <a:pPr lvl="4"/>
             <a:r>
-              <a:rPr lang="en-US" smtClean="0"/>
+              <a:rPr lang="en-US"/>
               <a:t>Fifth level</a:t>
             </a:r>
-            <a:endParaRPr lang="en-US"/>
           </a:p>
         </p:txBody>
       </p:sp>
@@ -1775,7 +1776,7 @@
           <a:p>
             <a:fld id="{5BCAD085-E8A6-8845-BD4E-CB4CCA059FC4}" type="datetimeFigureOut">
               <a:rPr lang="en-US" smtClean="0"/>
-              <a:t>1/27/13</a:t>
+              <a:t>9/20/2026</a:t>
             </a:fld>
             <a:endParaRPr lang="en-US"/>
           </a:p>
@@ -1817,7 +1818,7 @@
           <a:p>
             <a:fld id="{C1FF6DA9-008F-8B48-92A6-B652298478BF}" type="slidenum">
               <a:rPr lang="en-US" smtClean="0"/>
-              <a:t>‹#›</a:t>
+              <a:t>‹nº›</a:t>
             </a:fld>
             <a:endParaRPr lang="en-US"/>
           </a:p>
@@ -1869,10 +1870,9 @@
           <a:lstStyle/>
           <a:p>
             <a:r>
-              <a:rPr lang="en-US" smtClean="0"/>
+              <a:rPr lang="en-US"/>
               <a:t>Click to edit Master title style</a:t>
             </a:r>
-            <a:endParaRPr lang="en-US"/>
           </a:p>
         </p:txBody>
       </p:sp>
@@ -1893,7 +1893,7 @@
           <a:p>
             <a:fld id="{5BCAD085-E8A6-8845-BD4E-CB4CCA059FC4}" type="datetimeFigureOut">
               <a:rPr lang="en-US" smtClean="0"/>
-              <a:t>1/27/13</a:t>
+              <a:t>9/20/2026</a:t>
             </a:fld>
             <a:endParaRPr lang="en-US"/>
           </a:p>
@@ -1935,7 +1935,7 @@
           <a:p>
             <a:fld id="{C1FF6DA9-008F-8B48-92A6-B652298478BF}" type="slidenum">
               <a:rPr lang="en-US" smtClean="0"/>
-              <a:t>‹#›</a:t>
+              <a:t>‹nº›</a:t>
             </a:fld>
             <a:endParaRPr lang="en-US"/>
           </a:p>
@@ -1988,7 +1988,7 @@
           <a:p>
             <a:fld id="{5BCAD085-E8A6-8845-BD4E-CB4CCA059FC4}" type="datetimeFigureOut">
               <a:rPr lang="en-US" smtClean="0"/>
-              <a:t>1/27/13</a:t>
+              <a:t>9/20/2026</a:t>
             </a:fld>
             <a:endParaRPr lang="en-US"/>
           </a:p>
@@ -2030,7 +2030,7 @@
           <a:p>
             <a:fld id="{C1FF6DA9-008F-8B48-92A6-B652298478BF}" type="slidenum">
               <a:rPr lang="en-US" smtClean="0"/>
-              <a:t>‹#›</a:t>
+              <a:t>‹nº›</a:t>
             </a:fld>
             <a:endParaRPr lang="en-US"/>
           </a:p>
@@ -2091,10 +2091,9 @@
           </a:lstStyle>
           <a:p>
             <a:r>
-              <a:rPr lang="en-US" smtClean="0"/>
+              <a:rPr lang="en-US"/>
               <a:t>Click to edit Master title style</a:t>
             </a:r>
-            <a:endParaRPr lang="en-US"/>
           </a:p>
         </p:txBody>
       </p:sp>
@@ -2148,38 +2147,37 @@
           <a:p>
             <a:pPr lvl="0"/>
             <a:r>
-              <a:rPr lang="en-US" smtClean="0"/>
+              <a:rPr lang="en-US"/>
               <a:t>Click to edit Master text styles</a:t>
             </a:r>
           </a:p>
           <a:p>
             <a:pPr lvl="1"/>
             <a:r>
-              <a:rPr lang="en-US" smtClean="0"/>
+              <a:rPr lang="en-US"/>
               <a:t>Second level</a:t>
             </a:r>
           </a:p>
           <a:p>
             <a:pPr lvl="2"/>
             <a:r>
-              <a:rPr lang="en-US" smtClean="0"/>
+              <a:rPr lang="en-US"/>
               <a:t>Third level</a:t>
             </a:r>
           </a:p>
           <a:p>
             <a:pPr lvl="3"/>
             <a:r>
-              <a:rPr lang="en-US" smtClean="0"/>
+              <a:rPr lang="en-US"/>
               <a:t>Fourth level</a:t>
             </a:r>
           </a:p>
           <a:p>
             <a:pPr lvl="4"/>
             <a:r>
-              <a:rPr lang="en-US" smtClean="0"/>
+              <a:rPr lang="en-US"/>
               <a:t>Fifth level</a:t>
             </a:r>
-            <a:endParaRPr lang="en-US"/>
           </a:p>
         </p:txBody>
       </p:sp>
@@ -2242,7 +2240,7 @@
           <a:p>
             <a:pPr lvl="0"/>
             <a:r>
-              <a:rPr lang="en-US" smtClean="0"/>
+              <a:rPr lang="en-US"/>
               <a:t>Click to edit Master text styles</a:t>
             </a:r>
           </a:p>
@@ -2265,7 +2263,7 @@
           <a:p>
             <a:fld id="{5BCAD085-E8A6-8845-BD4E-CB4CCA059FC4}" type="datetimeFigureOut">
               <a:rPr lang="en-US" smtClean="0"/>
-              <a:t>1/27/13</a:t>
+              <a:t>9/20/2026</a:t>
             </a:fld>
             <a:endParaRPr lang="en-US"/>
           </a:p>
@@ -2307,7 +2305,7 @@
           <a:p>
             <a:fld id="{C1FF6DA9-008F-8B48-92A6-B652298478BF}" type="slidenum">
               <a:rPr lang="en-US" smtClean="0"/>
-              <a:t>‹#›</a:t>
+              <a:t>‹nº›</a:t>
             </a:fld>
             <a:endParaRPr lang="en-US"/>
           </a:p>
@@ -2368,10 +2366,9 @@
           </a:lstStyle>
           <a:p>
             <a:r>
-              <a:rPr lang="en-US" smtClean="0"/>
+              <a:rPr lang="en-US"/>
               <a:t>Click to edit Master title style</a:t>
             </a:r>
-            <a:endParaRPr lang="en-US"/>
           </a:p>
         </p:txBody>
       </p:sp>
@@ -2495,7 +2492,7 @@
           <a:p>
             <a:pPr lvl="0"/>
             <a:r>
-              <a:rPr lang="en-US" smtClean="0"/>
+              <a:rPr lang="en-US"/>
               <a:t>Click to edit Master text styles</a:t>
             </a:r>
           </a:p>
@@ -2518,7 +2515,7 @@
           <a:p>
             <a:fld id="{5BCAD085-E8A6-8845-BD4E-CB4CCA059FC4}" type="datetimeFigureOut">
               <a:rPr lang="en-US" smtClean="0"/>
-              <a:t>1/27/13</a:t>
+              <a:t>9/20/2026</a:t>
             </a:fld>
             <a:endParaRPr lang="en-US"/>
           </a:p>
@@ -2560,7 +2557,7 @@
           <a:p>
             <a:fld id="{C1FF6DA9-008F-8B48-92A6-B652298478BF}" type="slidenum">
               <a:rPr lang="en-US" smtClean="0"/>
-              <a:t>‹#›</a:t>
+              <a:t>‹nº›</a:t>
             </a:fld>
             <a:endParaRPr lang="en-US"/>
           </a:p>
@@ -2627,10 +2624,9 @@
           <a:lstStyle/>
           <a:p>
             <a:r>
-              <a:rPr lang="en-US" smtClean="0"/>
+              <a:rPr lang="en-US"/>
               <a:t>Click to edit Master title style</a:t>
             </a:r>
-            <a:endParaRPr lang="en-US"/>
           </a:p>
         </p:txBody>
       </p:sp>
@@ -2661,38 +2657,37 @@
           <a:p>
             <a:pPr lvl="0"/>
             <a:r>
-              <a:rPr lang="en-US" smtClean="0"/>
+              <a:rPr lang="en-US"/>
               <a:t>Click to edit Master text styles</a:t>
             </a:r>
           </a:p>
           <a:p>
             <a:pPr lvl="1"/>
             <a:r>
-              <a:rPr lang="en-US" smtClean="0"/>
+              <a:rPr lang="en-US"/>
               <a:t>Second level</a:t>
             </a:r>
           </a:p>
           <a:p>
             <a:pPr lvl="2"/>
             <a:r>
-              <a:rPr lang="en-US" smtClean="0"/>
+              <a:rPr lang="en-US"/>
               <a:t>Third level</a:t>
             </a:r>
           </a:p>
           <a:p>
             <a:pPr lvl="3"/>
             <a:r>
-              <a:rPr lang="en-US" smtClean="0"/>
+              <a:rPr lang="en-US"/>
               <a:t>Fourth level</a:t>
             </a:r>
           </a:p>
           <a:p>
             <a:pPr lvl="4"/>
             <a:r>
-              <a:rPr lang="en-US" smtClean="0"/>
+              <a:rPr lang="en-US"/>
               <a:t>Fifth level</a:t>
             </a:r>
-            <a:endParaRPr lang="en-US"/>
           </a:p>
         </p:txBody>
       </p:sp>
@@ -2731,7 +2726,7 @@
           <a:p>
             <a:fld id="{5BCAD085-E8A6-8845-BD4E-CB4CCA059FC4}" type="datetimeFigureOut">
               <a:rPr lang="en-US" smtClean="0"/>
-              <a:t>1/27/13</a:t>
+              <a:t>9/20/2026</a:t>
             </a:fld>
             <a:endParaRPr lang="en-US"/>
           </a:p>
@@ -2809,7 +2804,7 @@
           <a:p>
             <a:fld id="{C1FF6DA9-008F-8B48-92A6-B652298478BF}" type="slidenum">
               <a:rPr lang="en-US" smtClean="0"/>
-              <a:t>‹#›</a:t>
+              <a:t>‹nº›</a:t>
             </a:fld>
             <a:endParaRPr lang="en-US"/>
           </a:p>
@@ -3090,7 +3085,7 @@
 </file>
 
 <file path=ppt/slides/slide1.xml><?xml version="1.0" encoding="utf-8"?>
-<p:sld xmlns:a="http://schemas.openxmlformats.org/drawingml/2006/main" xmlns:p="http://schemas.openxmlformats.org/presentationml/2006/main" xmlns:r="http://schemas.openxmlformats.org/officeDocument/2006/relationships">
+<p:sld xmlns:a="http://schemas.openxmlformats.org/drawingml/2006/main" xmlns:r="http://schemas.openxmlformats.org/officeDocument/2006/relationships" xmlns:p="http://schemas.openxmlformats.org/presentationml/2006/main">
   <p:cSld>
     <p:spTree>
       <p:nvGrpSpPr>
@@ -3098,7 +3093,14 @@
         <p:cNvGrpSpPr/>
         <p:nvPr/>
       </p:nvGrpSpPr>
-      <p:grpSpPr/>
+      <p:grpSpPr>
+        <a:xfrm>
+          <a:off x="0" y="0"/>
+          <a:ext cx="0" cy="0"/>
+          <a:chOff x="0" y="0"/>
+          <a:chExt cx="0" cy="0"/>
+        </a:xfrm>
+      </p:grpSpPr>
       <p:sp>
         <p:nvSpPr>
           <p:cNvPr id="2" name="Rectangle 1"/>
@@ -3139,6 +3141,7 @@
           <a:lstStyle/>
           <a:p>
             <a:pPr algn="ctr"/>
+            <a:endParaRPr/>
           </a:p>
         </p:txBody>
       </p:sp>
@@ -3151,7 +3154,7 @@
         <p:spPr>
           <a:xfrm>
             <a:off x="914400" y="2011680"/>
-            <a:ext cx="10362895" cy="3200400"/>
+            <a:ext cx="10362895" cy="2585323"/>
           </a:xfrm>
           <a:prstGeom prst="rect">
             <a:avLst/>
@@ -3172,6 +3175,7 @@
               </a:defRPr>
             </a:pPr>
             <a:r>
+              <a:rPr dirty="0"/>
               <a:t>PROBLEMA DA MOCHILA 0/1</a:t>
             </a:r>
           </a:p>
@@ -3184,8 +3188,34 @@
               </a:defRPr>
             </a:pPr>
             <a:r>
-              <a:t>Resolução por Meta-Heurísticas Local e Populacional</a:t>
-            </a:r>
+              <a:rPr dirty="0" err="1"/>
+              <a:t>Resolução</a:t>
+            </a:r>
+            <a:r>
+              <a:rPr dirty="0"/>
+              <a:t> </a:t>
+            </a:r>
+            <a:r>
+              <a:rPr dirty="0" err="1"/>
+              <a:t>por</a:t>
+            </a:r>
+            <a:r>
+              <a:rPr dirty="0"/>
+              <a:t> Meta-</a:t>
+            </a:r>
+            <a:r>
+              <a:rPr dirty="0" err="1"/>
+              <a:t>Heurísticas</a:t>
+            </a:r>
+            <a:r>
+              <a:rPr dirty="0"/>
+              <a:t> Local e </a:t>
+            </a:r>
+            <a:r>
+              <a:rPr dirty="0" err="1"/>
+              <a:t>Populacional</a:t>
+            </a:r>
+            <a:endParaRPr dirty="0"/>
           </a:p>
           <a:p>
             <a:pPr>
@@ -3196,21 +3226,119 @@
               </a:defRPr>
             </a:pPr>
             <a:r>
-              <a:t>Análise Comparativa: Busca Tabu vs Algoritmo Genético em 9 Instâncias Benchmark</a:t>
-            </a:r>
-          </a:p>
-          <a:p>
-            <a:br/>
-            <a:pPr>
-              <a:defRPr sz="1400" b="1">
+              <a:rPr dirty="0" err="1"/>
+              <a:t>Análise</a:t>
+            </a:r>
+            <a:r>
+              <a:rPr dirty="0"/>
+              <a:t> </a:t>
+            </a:r>
+            <a:r>
+              <a:rPr dirty="0" err="1"/>
+              <a:t>Comparativa</a:t>
+            </a:r>
+            <a:r>
+              <a:rPr dirty="0"/>
+              <a:t>: </a:t>
+            </a:r>
+            <a:r>
+              <a:rPr dirty="0" err="1"/>
+              <a:t>Busca</a:t>
+            </a:r>
+            <a:r>
+              <a:rPr dirty="0"/>
+              <a:t> Tabu vs </a:t>
+            </a:r>
+            <a:r>
+              <a:rPr dirty="0" err="1"/>
+              <a:t>Algoritmo</a:t>
+            </a:r>
+            <a:r>
+              <a:rPr dirty="0"/>
+              <a:t> </a:t>
+            </a:r>
+            <a:r>
+              <a:rPr dirty="0" err="1"/>
+              <a:t>Genético</a:t>
+            </a:r>
+            <a:r>
+              <a:rPr dirty="0"/>
+              <a:t> </a:t>
+            </a:r>
+            <a:r>
+              <a:rPr dirty="0" err="1"/>
+              <a:t>em</a:t>
+            </a:r>
+            <a:r>
+              <a:rPr dirty="0"/>
+              <a:t> 9 </a:t>
+            </a:r>
+            <a:r>
+              <a:rPr dirty="0" err="1"/>
+              <a:t>Instâncias</a:t>
+            </a:r>
+            <a:r>
+              <a:rPr dirty="0"/>
+              <a:t> Benchmark</a:t>
+            </a:r>
+          </a:p>
+          <a:p>
+            <a:br>
+              <a:rPr lang="pt-BR" dirty="0"/>
+            </a:br>
+            <a:br>
+              <a:rPr lang="pt-BR" dirty="0"/>
+            </a:br>
+            <a:r>
+              <a:rPr lang="pt-BR" dirty="0" err="1">
                 <a:solidFill>
-                  <a:srgbClr val="FFFFFF"/>
+                  <a:schemeClr val="bg1"/>
                 </a:solidFill>
-              </a:defRPr>
-            </a:pPr>
-            <a:r>
-              <a:t>Autor: Maycon Carpes</a:t>
-            </a:r>
+              </a:rPr>
+              <a:t>realiado</a:t>
+            </a:r>
+            <a:r>
+              <a:rPr lang="pt-BR" dirty="0">
+                <a:solidFill>
+                  <a:schemeClr val="bg1"/>
+                </a:solidFill>
+              </a:rPr>
+              <a:t> por: </a:t>
+            </a:r>
+            <a:br>
+              <a:rPr dirty="0"/>
+            </a:br>
+            <a:r>
+              <a:rPr dirty="0">
+                <a:solidFill>
+                  <a:schemeClr val="bg1"/>
+                </a:solidFill>
+              </a:rPr>
+              <a:t>Maycon Carpes</a:t>
+            </a:r>
+            <a:r>
+              <a:rPr lang="pt-BR" dirty="0">
+                <a:solidFill>
+                  <a:schemeClr val="bg1"/>
+                </a:solidFill>
+              </a:rPr>
+              <a:t> </a:t>
+            </a:r>
+          </a:p>
+          <a:p>
+            <a:r>
+              <a:rPr lang="pt-BR" dirty="0">
+                <a:solidFill>
+                  <a:schemeClr val="bg1"/>
+                </a:solidFill>
+              </a:rPr>
+              <a:t>Cauã Fortes</a:t>
+            </a:r>
+            <a:endParaRPr dirty="0">
+              <a:solidFill>
+                <a:schemeClr val="bg1"/>
+              </a:solidFill>
+            </a:endParaRPr>
           </a:p>
         </p:txBody>
       </p:sp>
@@ -3223,7 +3351,7 @@
 </file>
 
 <file path=ppt/slides/slide10.xml><?xml version="1.0" encoding="utf-8"?>
-<p:sld xmlns:a="http://schemas.openxmlformats.org/drawingml/2006/main" xmlns:p="http://schemas.openxmlformats.org/presentationml/2006/main" xmlns:r="http://schemas.openxmlformats.org/officeDocument/2006/relationships">
+<p:sld xmlns:a="http://schemas.openxmlformats.org/drawingml/2006/main" xmlns:r="http://schemas.openxmlformats.org/officeDocument/2006/relationships" xmlns:p="http://schemas.openxmlformats.org/presentationml/2006/main">
   <p:cSld>
     <p:spTree>
       <p:nvGrpSpPr>
@@ -3231,7 +3359,14 @@
         <p:cNvGrpSpPr/>
         <p:nvPr/>
       </p:nvGrpSpPr>
-      <p:grpSpPr/>
+      <p:grpSpPr>
+        <a:xfrm>
+          <a:off x="0" y="0"/>
+          <a:ext cx="0" cy="0"/>
+          <a:chOff x="0" y="0"/>
+          <a:chExt cx="0" cy="0"/>
+        </a:xfrm>
+      </p:grpSpPr>
       <p:sp>
         <p:nvSpPr>
           <p:cNvPr id="2" name="Rectangle 1"/>
@@ -3272,6 +3407,7 @@
           <a:lstStyle/>
           <a:p>
             <a:pPr algn="ctr"/>
+            <a:endParaRPr/>
           </a:p>
         </p:txBody>
       </p:sp>
@@ -3313,7 +3449,7 @@
           </a:fontRef>
         </p:style>
         <p:txBody>
-          <a:bodyPr rtlCol="0" anchor="ctr" wrap="square" lIns="731520" tIns="137160"/>
+          <a:bodyPr wrap="square" lIns="731520" tIns="137160" rtlCol="0" anchor="ctr"/>
           <a:lstStyle/>
           <a:p>
             <a:pPr algn="ctr">
@@ -3360,12 +3496,48 @@
                 <a:tableStyleId>{5C22544A-7EE6-4342-B048-85BDC9FD1C3A}</a:tableStyleId>
               </a:tblPr>
               <a:tblGrid>
-                <a:gridCol w="2286000"/>
-                <a:gridCol w="1371600"/>
-                <a:gridCol w="2011680"/>
-                <a:gridCol w="2011680"/>
-                <a:gridCol w="1645920"/>
-                <a:gridCol w="1401775"/>
+                <a:gridCol w="2286000">
+                  <a:extLst>
+                    <a:ext uri="{9D8B030D-6E8A-4147-A177-3AD203B41FA5}">
+                      <a16:colId xmlns:a16="http://schemas.microsoft.com/office/drawing/2014/main" val="20000"/>
+                    </a:ext>
+                  </a:extLst>
+                </a:gridCol>
+                <a:gridCol w="1371600">
+                  <a:extLst>
+                    <a:ext uri="{9D8B030D-6E8A-4147-A177-3AD203B41FA5}">
+                      <a16:colId xmlns:a16="http://schemas.microsoft.com/office/drawing/2014/main" val="20001"/>
+                    </a:ext>
+                  </a:extLst>
+                </a:gridCol>
+                <a:gridCol w="2011680">
+                  <a:extLst>
+                    <a:ext uri="{9D8B030D-6E8A-4147-A177-3AD203B41FA5}">
+                      <a16:colId xmlns:a16="http://schemas.microsoft.com/office/drawing/2014/main" val="20002"/>
+                    </a:ext>
+                  </a:extLst>
+                </a:gridCol>
+                <a:gridCol w="2011680">
+                  <a:extLst>
+                    <a:ext uri="{9D8B030D-6E8A-4147-A177-3AD203B41FA5}">
+                      <a16:colId xmlns:a16="http://schemas.microsoft.com/office/drawing/2014/main" val="20003"/>
+                    </a:ext>
+                  </a:extLst>
+                </a:gridCol>
+                <a:gridCol w="1645920">
+                  <a:extLst>
+                    <a:ext uri="{9D8B030D-6E8A-4147-A177-3AD203B41FA5}">
+                      <a16:colId xmlns:a16="http://schemas.microsoft.com/office/drawing/2014/main" val="20004"/>
+                    </a:ext>
+                  </a:extLst>
+                </a:gridCol>
+                <a:gridCol w="1401775">
+                  <a:extLst>
+                    <a:ext uri="{9D8B030D-6E8A-4147-A177-3AD203B41FA5}">
+                      <a16:colId xmlns:a16="http://schemas.microsoft.com/office/drawing/2014/main" val="20005"/>
+                    </a:ext>
+                  </a:extLst>
+                </a:gridCol>
               </a:tblGrid>
               <a:tr h="493776">
                 <a:tc>
@@ -3374,7 +3546,7 @@
                     <a:lstStyle/>
                     <a:p>
                       <a:pPr algn="ctr">
-                        <a:defRPr b="1" sz="1200">
+                        <a:defRPr sz="1200" b="1">
                           <a:solidFill>
                             <a:srgbClr val="FFFFFF"/>
                           </a:solidFill>
@@ -3397,7 +3569,7 @@
                     <a:lstStyle/>
                     <a:p>
                       <a:pPr algn="ctr">
-                        <a:defRPr b="1" sz="1200">
+                        <a:defRPr sz="1200" b="1">
                           <a:solidFill>
                             <a:srgbClr val="FFFFFF"/>
                           </a:solidFill>
@@ -3420,7 +3592,7 @@
                     <a:lstStyle/>
                     <a:p>
                       <a:pPr algn="ctr">
-                        <a:defRPr b="1" sz="1200">
+                        <a:defRPr sz="1200" b="1">
                           <a:solidFill>
                             <a:srgbClr val="FFFFFF"/>
                           </a:solidFill>
@@ -3443,7 +3615,7 @@
                     <a:lstStyle/>
                     <a:p>
                       <a:pPr algn="ctr">
-                        <a:defRPr b="1" sz="1200">
+                        <a:defRPr sz="1200" b="1">
                           <a:solidFill>
                             <a:srgbClr val="FFFFFF"/>
                           </a:solidFill>
@@ -3466,7 +3638,7 @@
                     <a:lstStyle/>
                     <a:p>
                       <a:pPr algn="ctr">
-                        <a:defRPr b="1" sz="1200">
+                        <a:defRPr sz="1200" b="1">
                           <a:solidFill>
                             <a:srgbClr val="FFFFFF"/>
                           </a:solidFill>
@@ -3489,7 +3661,7 @@
                     <a:lstStyle/>
                     <a:p>
                       <a:pPr algn="ctr">
-                        <a:defRPr b="1" sz="1200">
+                        <a:defRPr sz="1200" b="1">
                           <a:solidFill>
                             <a:srgbClr val="FFFFFF"/>
                           </a:solidFill>
@@ -3506,6 +3678,11 @@
                     </a:solidFill>
                   </a:tcPr>
                 </a:tc>
+                <a:extLst>
+                  <a:ext uri="{0D108BD9-81ED-4DB2-BD59-A6C34878D82A}">
+                    <a16:rowId xmlns:a16="http://schemas.microsoft.com/office/drawing/2014/main" val="10000"/>
+                  </a:ext>
+                </a:extLst>
               </a:tr>
               <a:tr h="493776">
                 <a:tc>
@@ -3622,6 +3799,11 @@
                     </a:solidFill>
                   </a:tcPr>
                 </a:tc>
+                <a:extLst>
+                  <a:ext uri="{0D108BD9-81ED-4DB2-BD59-A6C34878D82A}">
+                    <a16:rowId xmlns:a16="http://schemas.microsoft.com/office/drawing/2014/main" val="10001"/>
+                  </a:ext>
+                </a:extLst>
               </a:tr>
               <a:tr h="493776">
                 <a:tc>
@@ -3738,6 +3920,11 @@
                     </a:solidFill>
                   </a:tcPr>
                 </a:tc>
+                <a:extLst>
+                  <a:ext uri="{0D108BD9-81ED-4DB2-BD59-A6C34878D82A}">
+                    <a16:rowId xmlns:a16="http://schemas.microsoft.com/office/drawing/2014/main" val="10002"/>
+                  </a:ext>
+                </a:extLst>
               </a:tr>
               <a:tr h="493776">
                 <a:tc>
@@ -3854,6 +4041,11 @@
                     </a:solidFill>
                   </a:tcPr>
                 </a:tc>
+                <a:extLst>
+                  <a:ext uri="{0D108BD9-81ED-4DB2-BD59-A6C34878D82A}">
+                    <a16:rowId xmlns:a16="http://schemas.microsoft.com/office/drawing/2014/main" val="10003"/>
+                  </a:ext>
+                </a:extLst>
               </a:tr>
               <a:tr h="493776">
                 <a:tc>
@@ -3970,6 +4162,11 @@
                     </a:solidFill>
                   </a:tcPr>
                 </a:tc>
+                <a:extLst>
+                  <a:ext uri="{0D108BD9-81ED-4DB2-BD59-A6C34878D82A}">
+                    <a16:rowId xmlns:a16="http://schemas.microsoft.com/office/drawing/2014/main" val="10004"/>
+                  </a:ext>
+                </a:extLst>
               </a:tr>
               <a:tr h="493776">
                 <a:tc>
@@ -4086,6 +4283,11 @@
                     </a:solidFill>
                   </a:tcPr>
                 </a:tc>
+                <a:extLst>
+                  <a:ext uri="{0D108BD9-81ED-4DB2-BD59-A6C34878D82A}">
+                    <a16:rowId xmlns:a16="http://schemas.microsoft.com/office/drawing/2014/main" val="10005"/>
+                  </a:ext>
+                </a:extLst>
               </a:tr>
               <a:tr h="493776">
                 <a:tc>
@@ -4202,6 +4404,11 @@
                     </a:solidFill>
                   </a:tcPr>
                 </a:tc>
+                <a:extLst>
+                  <a:ext uri="{0D108BD9-81ED-4DB2-BD59-A6C34878D82A}">
+                    <a16:rowId xmlns:a16="http://schemas.microsoft.com/office/drawing/2014/main" val="10006"/>
+                  </a:ext>
+                </a:extLst>
               </a:tr>
               <a:tr h="493776">
                 <a:tc>
@@ -4318,6 +4525,11 @@
                     </a:solidFill>
                   </a:tcPr>
                 </a:tc>
+                <a:extLst>
+                  <a:ext uri="{0D108BD9-81ED-4DB2-BD59-A6C34878D82A}">
+                    <a16:rowId xmlns:a16="http://schemas.microsoft.com/office/drawing/2014/main" val="10007"/>
+                  </a:ext>
+                </a:extLst>
               </a:tr>
               <a:tr h="493776">
                 <a:tc>
@@ -4434,6 +4646,11 @@
                     </a:solidFill>
                   </a:tcPr>
                 </a:tc>
+                <a:extLst>
+                  <a:ext uri="{0D108BD9-81ED-4DB2-BD59-A6C34878D82A}">
+                    <a16:rowId xmlns:a16="http://schemas.microsoft.com/office/drawing/2014/main" val="10008"/>
+                  </a:ext>
+                </a:extLst>
               </a:tr>
               <a:tr h="493776">
                 <a:tc>
@@ -4550,6 +4767,11 @@
                     </a:solidFill>
                   </a:tcPr>
                 </a:tc>
+                <a:extLst>
+                  <a:ext uri="{0D108BD9-81ED-4DB2-BD59-A6C34878D82A}">
+                    <a16:rowId xmlns:a16="http://schemas.microsoft.com/office/drawing/2014/main" val="10009"/>
+                  </a:ext>
+                </a:extLst>
               </a:tr>
             </a:tbl>
           </a:graphicData>
@@ -4564,7 +4786,7 @@
 </file>
 
 <file path=ppt/slides/slide11.xml><?xml version="1.0" encoding="utf-8"?>
-<p:sld xmlns:a="http://schemas.openxmlformats.org/drawingml/2006/main" xmlns:p="http://schemas.openxmlformats.org/presentationml/2006/main" xmlns:r="http://schemas.openxmlformats.org/officeDocument/2006/relationships">
+<p:sld xmlns:a="http://schemas.openxmlformats.org/drawingml/2006/main" xmlns:r="http://schemas.openxmlformats.org/officeDocument/2006/relationships" xmlns:p="http://schemas.openxmlformats.org/presentationml/2006/main">
   <p:cSld>
     <p:spTree>
       <p:nvGrpSpPr>
@@ -4572,7 +4794,14 @@
         <p:cNvGrpSpPr/>
         <p:nvPr/>
       </p:nvGrpSpPr>
-      <p:grpSpPr/>
+      <p:grpSpPr>
+        <a:xfrm>
+          <a:off x="0" y="0"/>
+          <a:ext cx="0" cy="0"/>
+          <a:chOff x="0" y="0"/>
+          <a:chExt cx="0" cy="0"/>
+        </a:xfrm>
+      </p:grpSpPr>
       <p:sp>
         <p:nvSpPr>
           <p:cNvPr id="2" name="Rectangle 1"/>
@@ -4613,6 +4842,7 @@
           <a:lstStyle/>
           <a:p>
             <a:pPr algn="ctr"/>
+            <a:endParaRPr/>
           </a:p>
         </p:txBody>
       </p:sp>
@@ -4654,7 +4884,7 @@
           </a:fontRef>
         </p:style>
         <p:txBody>
-          <a:bodyPr rtlCol="0" anchor="ctr" wrap="square" lIns="731520" tIns="137160"/>
+          <a:bodyPr wrap="square" lIns="731520" tIns="137160" rtlCol="0" anchor="ctr"/>
           <a:lstStyle/>
           <a:p>
             <a:pPr algn="ctr">
@@ -4715,7 +4945,7 @@
           </a:fontRef>
         </p:style>
         <p:txBody>
-          <a:bodyPr rtlCol="0" anchor="ctr" wrap="square" lIns="274320" tIns="274320"/>
+          <a:bodyPr wrap="square" lIns="274320" tIns="274320" rtlCol="0" anchor="ctr"/>
           <a:lstStyle/>
           <a:p>
             <a:pPr algn="ctr">
@@ -4731,7 +4961,7 @@
           </a:p>
           <a:p>
             <a:pPr>
-              <a:defRPr b="1" sz="1300"/>
+              <a:defRPr sz="1300" b="1"/>
             </a:pPr>
             <a:r>
               <a:t>• Algoritmo Genético: </a:t>
@@ -4743,7 +4973,7 @@
           </a:p>
           <a:p>
             <a:pPr>
-              <a:defRPr b="1" sz="1300"/>
+              <a:defRPr sz="1300" b="1"/>
             </a:pPr>
             <a:r>
               <a:t>• Busca Tabu: </a:t>
@@ -4755,7 +4985,7 @@
           </a:p>
           <a:p>
             <a:pPr>
-              <a:defRPr b="1" sz="1300"/>
+              <a:defRPr sz="1300" b="1"/>
             </a:pPr>
             <a:r>
               <a:t>• Escalabilidade (100 itens): </a:t>
@@ -4800,7 +5030,7 @@
           </a:fontRef>
         </p:style>
         <p:txBody>
-          <a:bodyPr rtlCol="0" anchor="ctr" wrap="square" lIns="274320" tIns="274320"/>
+          <a:bodyPr wrap="square" lIns="274320" tIns="274320" rtlCol="0" anchor="ctr"/>
           <a:lstStyle/>
           <a:p>
             <a:pPr algn="ctr">
@@ -4816,7 +5046,7 @@
           </a:p>
           <a:p>
             <a:pPr>
-              <a:defRPr b="1" sz="1300"/>
+              <a:defRPr sz="1300" b="1"/>
             </a:pPr>
             <a:r>
               <a:t>• Velocidade da Busca Tabu: </a:t>
@@ -4828,7 +5058,7 @@
           </a:p>
           <a:p>
             <a:pPr>
-              <a:defRPr b="1" sz="1300"/>
+              <a:defRPr sz="1300" b="1"/>
             </a:pPr>
             <a:r>
               <a:t>• Poder da População no AG: </a:t>
@@ -4840,7 +5070,7 @@
           </a:p>
           <a:p>
             <a:pPr>
-              <a:defRPr b="1" sz="1300"/>
+              <a:defRPr sz="1300" b="1"/>
             </a:pPr>
             <a:r>
               <a:t>• Recomendação Final: </a:t>
@@ -4861,7 +5091,7 @@
 </file>
 
 <file path=ppt/slides/slide12.xml><?xml version="1.0" encoding="utf-8"?>
-<p:sld xmlns:a="http://schemas.openxmlformats.org/drawingml/2006/main" xmlns:p="http://schemas.openxmlformats.org/presentationml/2006/main" xmlns:r="http://schemas.openxmlformats.org/officeDocument/2006/relationships">
+<p:sld xmlns:a="http://schemas.openxmlformats.org/drawingml/2006/main" xmlns:r="http://schemas.openxmlformats.org/officeDocument/2006/relationships" xmlns:p="http://schemas.openxmlformats.org/presentationml/2006/main">
   <p:cSld>
     <p:spTree>
       <p:nvGrpSpPr>
@@ -4869,7 +5099,14 @@
         <p:cNvGrpSpPr/>
         <p:nvPr/>
       </p:nvGrpSpPr>
-      <p:grpSpPr/>
+      <p:grpSpPr>
+        <a:xfrm>
+          <a:off x="0" y="0"/>
+          <a:ext cx="0" cy="0"/>
+          <a:chOff x="0" y="0"/>
+          <a:chExt cx="0" cy="0"/>
+        </a:xfrm>
+      </p:grpSpPr>
       <p:sp>
         <p:nvSpPr>
           <p:cNvPr id="2" name="Rectangle 1"/>
@@ -4910,6 +5147,7 @@
           <a:lstStyle/>
           <a:p>
             <a:pPr algn="ctr"/>
+            <a:endParaRPr/>
           </a:p>
         </p:txBody>
       </p:sp>
@@ -4960,13 +5198,6 @@
           </a:p>
           <a:p>
             <a:br/>
-            <a:pPr algn="ctr">
-              <a:defRPr sz="1600">
-                <a:solidFill>
-                  <a:srgbClr val="C8D7F0"/>
-                </a:solidFill>
-              </a:defRPr>
-            </a:pPr>
             <a:r>
               <a:t>Repositório: github.com/MayconCarpes/Mochila01</a:t>
             </a:r>
@@ -4982,7 +5213,7 @@
 </file>
 
 <file path=ppt/slides/slide2.xml><?xml version="1.0" encoding="utf-8"?>
-<p:sld xmlns:a="http://schemas.openxmlformats.org/drawingml/2006/main" xmlns:p="http://schemas.openxmlformats.org/presentationml/2006/main" xmlns:r="http://schemas.openxmlformats.org/officeDocument/2006/relationships">
+<p:sld xmlns:a="http://schemas.openxmlformats.org/drawingml/2006/main" xmlns:r="http://schemas.openxmlformats.org/officeDocument/2006/relationships" xmlns:p="http://schemas.openxmlformats.org/presentationml/2006/main">
   <p:cSld>
     <p:spTree>
       <p:nvGrpSpPr>
@@ -4990,7 +5221,14 @@
         <p:cNvGrpSpPr/>
         <p:nvPr/>
       </p:nvGrpSpPr>
-      <p:grpSpPr/>
+      <p:grpSpPr>
+        <a:xfrm>
+          <a:off x="0" y="0"/>
+          <a:ext cx="0" cy="0"/>
+          <a:chOff x="0" y="0"/>
+          <a:chExt cx="0" cy="0"/>
+        </a:xfrm>
+      </p:grpSpPr>
       <p:sp>
         <p:nvSpPr>
           <p:cNvPr id="2" name="Rectangle 1"/>
@@ -5031,6 +5269,7 @@
           <a:lstStyle/>
           <a:p>
             <a:pPr algn="ctr"/>
+            <a:endParaRPr/>
           </a:p>
         </p:txBody>
       </p:sp>
@@ -5072,7 +5311,7 @@
           </a:fontRef>
         </p:style>
         <p:txBody>
-          <a:bodyPr rtlCol="0" anchor="ctr" wrap="square" lIns="731520" tIns="137160"/>
+          <a:bodyPr wrap="square" lIns="731520" tIns="137160" rtlCol="0" anchor="ctr"/>
           <a:lstStyle/>
           <a:p>
             <a:pPr algn="ctr">
@@ -5138,7 +5377,7 @@
           </a:fontRef>
         </p:style>
         <p:txBody>
-          <a:bodyPr rtlCol="0" anchor="ctr" wrap="square" lIns="274320" rIns="274320" tIns="274320"/>
+          <a:bodyPr wrap="square" lIns="274320" tIns="274320" rIns="274320" rtlCol="0" anchor="ctr"/>
           <a:lstStyle/>
           <a:p>
             <a:pPr algn="ctr">
@@ -5154,7 +5393,7 @@
           </a:p>
           <a:p>
             <a:pPr>
-              <a:defRPr b="1" sz="1400">
+              <a:defRPr sz="1400" b="1">
                 <a:solidFill>
                   <a:srgbClr val="1E1E1E"/>
                 </a:solidFill>
@@ -5170,7 +5409,7 @@
           </a:p>
           <a:p>
             <a:pPr>
-              <a:defRPr b="1" sz="1400">
+              <a:defRPr sz="1400" b="1">
                 <a:solidFill>
                   <a:srgbClr val="1E1E1E"/>
                 </a:solidFill>
@@ -5186,7 +5425,7 @@
           </a:p>
           <a:p>
             <a:pPr>
-              <a:defRPr b="1" sz="1400">
+              <a:defRPr sz="1400" b="1">
                 <a:solidFill>
                   <a:srgbClr val="1E1E1E"/>
                 </a:solidFill>
@@ -5202,7 +5441,7 @@
           </a:p>
           <a:p>
             <a:pPr>
-              <a:defRPr b="1" sz="1400">
+              <a:defRPr sz="1400" b="1">
                 <a:solidFill>
                   <a:srgbClr val="1E1E1E"/>
                 </a:solidFill>
@@ -5256,7 +5495,7 @@
           </a:fontRef>
         </p:style>
         <p:txBody>
-          <a:bodyPr rtlCol="0" anchor="ctr" wrap="square" lIns="274320" rIns="274320" tIns="274320"/>
+          <a:bodyPr wrap="square" lIns="274320" tIns="274320" rIns="274320" rtlCol="0" anchor="ctr"/>
           <a:lstStyle/>
           <a:p>
             <a:pPr algn="ctr">
@@ -5272,7 +5511,7 @@
           </a:p>
           <a:p>
             <a:pPr>
-              <a:defRPr b="1" sz="1400">
+              <a:defRPr sz="1400" b="1">
                 <a:solidFill>
                   <a:srgbClr val="1E1E1E"/>
                 </a:solidFill>
@@ -5290,7 +5529,7 @@
           </a:p>
           <a:p>
             <a:pPr>
-              <a:defRPr b="1" sz="1400">
+              <a:defRPr sz="1400" b="1">
                 <a:solidFill>
                   <a:srgbClr val="1E1E1E"/>
                 </a:solidFill>
@@ -5307,7 +5546,7 @@
           </a:p>
           <a:p>
             <a:pPr>
-              <a:defRPr b="1" sz="1400">
+              <a:defRPr sz="1400" b="1">
                 <a:solidFill>
                   <a:srgbClr val="1E1E1E"/>
                 </a:solidFill>
@@ -5324,7 +5563,7 @@
           </a:p>
           <a:p>
             <a:pPr>
-              <a:defRPr b="1" sz="1400">
+              <a:defRPr sz="1400" b="1">
                 <a:solidFill>
                   <a:srgbClr val="1E1E1E"/>
                 </a:solidFill>
@@ -5350,7 +5589,7 @@
 </file>
 
 <file path=ppt/slides/slide3.xml><?xml version="1.0" encoding="utf-8"?>
-<p:sld xmlns:a="http://schemas.openxmlformats.org/drawingml/2006/main" xmlns:p="http://schemas.openxmlformats.org/presentationml/2006/main" xmlns:r="http://schemas.openxmlformats.org/officeDocument/2006/relationships">
+<p:sld xmlns:a="http://schemas.openxmlformats.org/drawingml/2006/main" xmlns:r="http://schemas.openxmlformats.org/officeDocument/2006/relationships" xmlns:p="http://schemas.openxmlformats.org/presentationml/2006/main">
   <p:cSld>
     <p:spTree>
       <p:nvGrpSpPr>
@@ -5358,7 +5597,14 @@
         <p:cNvGrpSpPr/>
         <p:nvPr/>
       </p:nvGrpSpPr>
-      <p:grpSpPr/>
+      <p:grpSpPr>
+        <a:xfrm>
+          <a:off x="0" y="0"/>
+          <a:ext cx="0" cy="0"/>
+          <a:chOff x="0" y="0"/>
+          <a:chExt cx="0" cy="0"/>
+        </a:xfrm>
+      </p:grpSpPr>
       <p:sp>
         <p:nvSpPr>
           <p:cNvPr id="2" name="Rectangle 1"/>
@@ -5399,6 +5645,7 @@
           <a:lstStyle/>
           <a:p>
             <a:pPr algn="ctr"/>
+            <a:endParaRPr/>
           </a:p>
         </p:txBody>
       </p:sp>
@@ -5440,7 +5687,7 @@
           </a:fontRef>
         </p:style>
         <p:txBody>
-          <a:bodyPr rtlCol="0" anchor="ctr" wrap="square" lIns="731520" tIns="137160"/>
+          <a:bodyPr wrap="square" lIns="731520" tIns="137160" rtlCol="0" anchor="ctr"/>
           <a:lstStyle/>
           <a:p>
             <a:pPr algn="ctr">
@@ -5487,11 +5734,41 @@
                 <a:tableStyleId>{5C22544A-7EE6-4342-B048-85BDC9FD1C3A}</a:tableStyleId>
               </a:tblPr>
               <a:tblGrid>
-                <a:gridCol w="2011680"/>
-                <a:gridCol w="1645920"/>
-                <a:gridCol w="2286000"/>
-                <a:gridCol w="2286000"/>
-                <a:gridCol w="2499055"/>
+                <a:gridCol w="2011680">
+                  <a:extLst>
+                    <a:ext uri="{9D8B030D-6E8A-4147-A177-3AD203B41FA5}">
+                      <a16:colId xmlns:a16="http://schemas.microsoft.com/office/drawing/2014/main" val="20000"/>
+                    </a:ext>
+                  </a:extLst>
+                </a:gridCol>
+                <a:gridCol w="1645920">
+                  <a:extLst>
+                    <a:ext uri="{9D8B030D-6E8A-4147-A177-3AD203B41FA5}">
+                      <a16:colId xmlns:a16="http://schemas.microsoft.com/office/drawing/2014/main" val="20001"/>
+                    </a:ext>
+                  </a:extLst>
+                </a:gridCol>
+                <a:gridCol w="2286000">
+                  <a:extLst>
+                    <a:ext uri="{9D8B030D-6E8A-4147-A177-3AD203B41FA5}">
+                      <a16:colId xmlns:a16="http://schemas.microsoft.com/office/drawing/2014/main" val="20002"/>
+                    </a:ext>
+                  </a:extLst>
+                </a:gridCol>
+                <a:gridCol w="2286000">
+                  <a:extLst>
+                    <a:ext uri="{9D8B030D-6E8A-4147-A177-3AD203B41FA5}">
+                      <a16:colId xmlns:a16="http://schemas.microsoft.com/office/drawing/2014/main" val="20003"/>
+                    </a:ext>
+                  </a:extLst>
+                </a:gridCol>
+                <a:gridCol w="2499055">
+                  <a:extLst>
+                    <a:ext uri="{9D8B030D-6E8A-4147-A177-3AD203B41FA5}">
+                      <a16:colId xmlns:a16="http://schemas.microsoft.com/office/drawing/2014/main" val="20004"/>
+                    </a:ext>
+                  </a:extLst>
+                </a:gridCol>
               </a:tblGrid>
               <a:tr h="493776">
                 <a:tc>
@@ -5500,7 +5777,7 @@
                     <a:lstStyle/>
                     <a:p>
                       <a:pPr algn="ctr">
-                        <a:defRPr b="1" sz="1300">
+                        <a:defRPr sz="1300" b="1">
                           <a:solidFill>
                             <a:srgbClr val="FFFFFF"/>
                           </a:solidFill>
@@ -5523,7 +5800,7 @@
                     <a:lstStyle/>
                     <a:p>
                       <a:pPr algn="ctr">
-                        <a:defRPr b="1" sz="1300">
+                        <a:defRPr sz="1300" b="1">
                           <a:solidFill>
                             <a:srgbClr val="FFFFFF"/>
                           </a:solidFill>
@@ -5546,7 +5823,7 @@
                     <a:lstStyle/>
                     <a:p>
                       <a:pPr algn="ctr">
-                        <a:defRPr b="1" sz="1300">
+                        <a:defRPr sz="1300" b="1">
                           <a:solidFill>
                             <a:srgbClr val="FFFFFF"/>
                           </a:solidFill>
@@ -5569,7 +5846,7 @@
                     <a:lstStyle/>
                     <a:p>
                       <a:pPr algn="ctr">
-                        <a:defRPr b="1" sz="1300">
+                        <a:defRPr sz="1300" b="1">
                           <a:solidFill>
                             <a:srgbClr val="FFFFFF"/>
                           </a:solidFill>
@@ -5592,7 +5869,7 @@
                     <a:lstStyle/>
                     <a:p>
                       <a:pPr algn="ctr">
-                        <a:defRPr b="1" sz="1300">
+                        <a:defRPr sz="1300" b="1">
                           <a:solidFill>
                             <a:srgbClr val="FFFFFF"/>
                           </a:solidFill>
@@ -5609,6 +5886,11 @@
                     </a:solidFill>
                   </a:tcPr>
                 </a:tc>
+                <a:extLst>
+                  <a:ext uri="{0D108BD9-81ED-4DB2-BD59-A6C34878D82A}">
+                    <a16:rowId xmlns:a16="http://schemas.microsoft.com/office/drawing/2014/main" val="10000"/>
+                  </a:ext>
+                </a:extLst>
               </a:tr>
               <a:tr h="493776">
                 <a:tc>
@@ -5726,6 +6008,11 @@
                     </a:solidFill>
                   </a:tcPr>
                 </a:tc>
+                <a:extLst>
+                  <a:ext uri="{0D108BD9-81ED-4DB2-BD59-A6C34878D82A}">
+                    <a16:rowId xmlns:a16="http://schemas.microsoft.com/office/drawing/2014/main" val="10001"/>
+                  </a:ext>
+                </a:extLst>
               </a:tr>
               <a:tr h="493776">
                 <a:tc>
@@ -5843,6 +6130,11 @@
                     </a:solidFill>
                   </a:tcPr>
                 </a:tc>
+                <a:extLst>
+                  <a:ext uri="{0D108BD9-81ED-4DB2-BD59-A6C34878D82A}">
+                    <a16:rowId xmlns:a16="http://schemas.microsoft.com/office/drawing/2014/main" val="10002"/>
+                  </a:ext>
+                </a:extLst>
               </a:tr>
               <a:tr h="493776">
                 <a:tc>
@@ -5960,6 +6252,11 @@
                     </a:solidFill>
                   </a:tcPr>
                 </a:tc>
+                <a:extLst>
+                  <a:ext uri="{0D108BD9-81ED-4DB2-BD59-A6C34878D82A}">
+                    <a16:rowId xmlns:a16="http://schemas.microsoft.com/office/drawing/2014/main" val="10003"/>
+                  </a:ext>
+                </a:extLst>
               </a:tr>
               <a:tr h="493776">
                 <a:tc>
@@ -6077,6 +6374,11 @@
                     </a:solidFill>
                   </a:tcPr>
                 </a:tc>
+                <a:extLst>
+                  <a:ext uri="{0D108BD9-81ED-4DB2-BD59-A6C34878D82A}">
+                    <a16:rowId xmlns:a16="http://schemas.microsoft.com/office/drawing/2014/main" val="10004"/>
+                  </a:ext>
+                </a:extLst>
               </a:tr>
               <a:tr h="493776">
                 <a:tc>
@@ -6194,6 +6496,11 @@
                     </a:solidFill>
                   </a:tcPr>
                 </a:tc>
+                <a:extLst>
+                  <a:ext uri="{0D108BD9-81ED-4DB2-BD59-A6C34878D82A}">
+                    <a16:rowId xmlns:a16="http://schemas.microsoft.com/office/drawing/2014/main" val="10005"/>
+                  </a:ext>
+                </a:extLst>
               </a:tr>
               <a:tr h="493776">
                 <a:tc>
@@ -6311,6 +6618,11 @@
                     </a:solidFill>
                   </a:tcPr>
                 </a:tc>
+                <a:extLst>
+                  <a:ext uri="{0D108BD9-81ED-4DB2-BD59-A6C34878D82A}">
+                    <a16:rowId xmlns:a16="http://schemas.microsoft.com/office/drawing/2014/main" val="10006"/>
+                  </a:ext>
+                </a:extLst>
               </a:tr>
               <a:tr h="493776">
                 <a:tc>
@@ -6428,6 +6740,11 @@
                     </a:solidFill>
                   </a:tcPr>
                 </a:tc>
+                <a:extLst>
+                  <a:ext uri="{0D108BD9-81ED-4DB2-BD59-A6C34878D82A}">
+                    <a16:rowId xmlns:a16="http://schemas.microsoft.com/office/drawing/2014/main" val="10007"/>
+                  </a:ext>
+                </a:extLst>
               </a:tr>
               <a:tr h="493776">
                 <a:tc>
@@ -6545,6 +6862,11 @@
                     </a:solidFill>
                   </a:tcPr>
                 </a:tc>
+                <a:extLst>
+                  <a:ext uri="{0D108BD9-81ED-4DB2-BD59-A6C34878D82A}">
+                    <a16:rowId xmlns:a16="http://schemas.microsoft.com/office/drawing/2014/main" val="10008"/>
+                  </a:ext>
+                </a:extLst>
               </a:tr>
               <a:tr h="493776">
                 <a:tc>
@@ -6662,6 +6984,11 @@
                     </a:solidFill>
                   </a:tcPr>
                 </a:tc>
+                <a:extLst>
+                  <a:ext uri="{0D108BD9-81ED-4DB2-BD59-A6C34878D82A}">
+                    <a16:rowId xmlns:a16="http://schemas.microsoft.com/office/drawing/2014/main" val="10009"/>
+                  </a:ext>
+                </a:extLst>
               </a:tr>
             </a:tbl>
           </a:graphicData>
@@ -6676,7 +7003,7 @@
 </file>
 
 <file path=ppt/slides/slide4.xml><?xml version="1.0" encoding="utf-8"?>
-<p:sld xmlns:a="http://schemas.openxmlformats.org/drawingml/2006/main" xmlns:p="http://schemas.openxmlformats.org/presentationml/2006/main" xmlns:r="http://schemas.openxmlformats.org/officeDocument/2006/relationships">
+<p:sld xmlns:a="http://schemas.openxmlformats.org/drawingml/2006/main" xmlns:r="http://schemas.openxmlformats.org/officeDocument/2006/relationships" xmlns:p="http://schemas.openxmlformats.org/presentationml/2006/main">
   <p:cSld>
     <p:spTree>
       <p:nvGrpSpPr>
@@ -6684,7 +7011,14 @@
         <p:cNvGrpSpPr/>
         <p:nvPr/>
       </p:nvGrpSpPr>
-      <p:grpSpPr/>
+      <p:grpSpPr>
+        <a:xfrm>
+          <a:off x="0" y="0"/>
+          <a:ext cx="0" cy="0"/>
+          <a:chOff x="0" y="0"/>
+          <a:chExt cx="0" cy="0"/>
+        </a:xfrm>
+      </p:grpSpPr>
       <p:sp>
         <p:nvSpPr>
           <p:cNvPr id="2" name="Rectangle 1"/>
@@ -6725,6 +7059,7 @@
           <a:lstStyle/>
           <a:p>
             <a:pPr algn="ctr"/>
+            <a:endParaRPr/>
           </a:p>
         </p:txBody>
       </p:sp>
@@ -6766,7 +7101,7 @@
           </a:fontRef>
         </p:style>
         <p:txBody>
-          <a:bodyPr rtlCol="0" anchor="ctr" wrap="square" lIns="731520" tIns="137160"/>
+          <a:bodyPr wrap="square" lIns="731520" tIns="137160" rtlCol="0" anchor="ctr"/>
           <a:lstStyle/>
           <a:p>
             <a:pPr algn="ctr">
@@ -6832,7 +7167,7 @@
           </a:fontRef>
         </p:style>
         <p:txBody>
-          <a:bodyPr rtlCol="0" anchor="ctr" wrap="square" lIns="365760" tIns="274320"/>
+          <a:bodyPr wrap="square" lIns="365760" tIns="274320" rtlCol="0" anchor="ctr"/>
           <a:lstStyle/>
           <a:p>
             <a:pPr algn="ctr">
@@ -6848,7 +7183,7 @@
           </a:p>
           <a:p>
             <a:pPr>
-              <a:defRPr b="1" sz="1300">
+              <a:defRPr sz="1300" b="1">
                 <a:solidFill>
                   <a:srgbClr val="0078D7"/>
                 </a:solidFill>
@@ -6868,7 +7203,7 @@
           </a:p>
           <a:p>
             <a:pPr>
-              <a:defRPr b="1" sz="1300">
+              <a:defRPr sz="1300" b="1">
                 <a:solidFill>
                   <a:srgbClr val="0078D7"/>
                 </a:solidFill>
@@ -6888,7 +7223,7 @@
           </a:p>
           <a:p>
             <a:pPr>
-              <a:defRPr b="1" sz="1300">
+              <a:defRPr sz="1300" b="1">
                 <a:solidFill>
                   <a:srgbClr val="0078D7"/>
                 </a:solidFill>
@@ -6908,7 +7243,7 @@
           </a:p>
           <a:p>
             <a:pPr>
-              <a:defRPr b="1" sz="1300">
+              <a:defRPr sz="1300" b="1">
                 <a:solidFill>
                   <a:srgbClr val="0078D7"/>
                 </a:solidFill>
@@ -6928,7 +7263,7 @@
           </a:p>
           <a:p>
             <a:pPr>
-              <a:defRPr b="1" sz="1300">
+              <a:defRPr sz="1300" b="1">
                 <a:solidFill>
                   <a:srgbClr val="0078D7"/>
                 </a:solidFill>
@@ -6948,7 +7283,7 @@
           </a:p>
           <a:p>
             <a:pPr>
-              <a:defRPr b="1" sz="1300">
+              <a:defRPr sz="1300" b="1">
                 <a:solidFill>
                   <a:srgbClr val="0078D7"/>
                 </a:solidFill>
@@ -6977,7 +7312,7 @@
 </file>
 
 <file path=ppt/slides/slide5.xml><?xml version="1.0" encoding="utf-8"?>
-<p:sld xmlns:a="http://schemas.openxmlformats.org/drawingml/2006/main" xmlns:p="http://schemas.openxmlformats.org/presentationml/2006/main" xmlns:r="http://schemas.openxmlformats.org/officeDocument/2006/relationships">
+<p:sld xmlns:a="http://schemas.openxmlformats.org/drawingml/2006/main" xmlns:r="http://schemas.openxmlformats.org/officeDocument/2006/relationships" xmlns:p="http://schemas.openxmlformats.org/presentationml/2006/main">
   <p:cSld>
     <p:spTree>
       <p:nvGrpSpPr>
@@ -6985,7 +7320,14 @@
         <p:cNvGrpSpPr/>
         <p:nvPr/>
       </p:nvGrpSpPr>
-      <p:grpSpPr/>
+      <p:grpSpPr>
+        <a:xfrm>
+          <a:off x="0" y="0"/>
+          <a:ext cx="0" cy="0"/>
+          <a:chOff x="0" y="0"/>
+          <a:chExt cx="0" cy="0"/>
+        </a:xfrm>
+      </p:grpSpPr>
       <p:sp>
         <p:nvSpPr>
           <p:cNvPr id="2" name="Rectangle 1"/>
@@ -7026,6 +7368,7 @@
           <a:lstStyle/>
           <a:p>
             <a:pPr algn="ctr"/>
+            <a:endParaRPr/>
           </a:p>
         </p:txBody>
       </p:sp>
@@ -7067,7 +7410,7 @@
           </a:fontRef>
         </p:style>
         <p:txBody>
-          <a:bodyPr rtlCol="0" anchor="ctr" wrap="square" lIns="731520" tIns="137160"/>
+          <a:bodyPr wrap="square" lIns="731520" tIns="137160" rtlCol="0" anchor="ctr"/>
           <a:lstStyle/>
           <a:p>
             <a:pPr algn="ctr">
@@ -7128,7 +7471,7 @@
           </a:fontRef>
         </p:style>
         <p:txBody>
-          <a:bodyPr rtlCol="0" anchor="ctr" wrap="square" lIns="274320" tIns="274320"/>
+          <a:bodyPr wrap="square" lIns="274320" tIns="274320" rtlCol="0" anchor="ctr"/>
           <a:lstStyle/>
           <a:p>
             <a:pPr algn="ctr">
@@ -7144,7 +7487,7 @@
           </a:p>
           <a:p>
             <a:pPr>
-              <a:defRPr b="1" sz="1300"/>
+              <a:defRPr sz="1300" b="1"/>
             </a:pPr>
             <a:r>
               <a:t>• Tipo de Busca: </a:t>
@@ -7156,7 +7499,7 @@
           </a:p>
           <a:p>
             <a:pPr>
-              <a:defRPr b="1" sz="1300"/>
+              <a:defRPr sz="1300" b="1"/>
             </a:pPr>
             <a:r>
               <a:t>• Inicialização: </a:t>
@@ -7168,7 +7511,7 @@
           </a:p>
           <a:p>
             <a:pPr>
-              <a:defRPr b="1" sz="1300"/>
+              <a:defRPr sz="1300" b="1"/>
             </a:pPr>
             <a:r>
               <a:t>• Estrutura de Memória: </a:t>
@@ -7180,7 +7523,7 @@
           </a:p>
           <a:p>
             <a:pPr>
-              <a:defRPr b="1" sz="1300"/>
+              <a:defRPr sz="1300" b="1"/>
             </a:pPr>
             <a:r>
               <a:t>• Definição de Vizinhança: </a:t>
@@ -7225,7 +7568,7 @@
           </a:fontRef>
         </p:style>
         <p:txBody>
-          <a:bodyPr rtlCol="0" anchor="ctr" wrap="square" lIns="274320" tIns="274320"/>
+          <a:bodyPr wrap="square" lIns="274320" tIns="274320" rtlCol="0" anchor="ctr"/>
           <a:lstStyle/>
           <a:p>
             <a:pPr algn="ctr">
@@ -7241,7 +7584,7 @@
           </a:p>
           <a:p>
             <a:pPr>
-              <a:defRPr b="1" sz="1300"/>
+              <a:defRPr sz="1300" b="1"/>
             </a:pPr>
             <a:r>
               <a:t>• Critério de Aspiração: </a:t>
@@ -7253,7 +7596,7 @@
           </a:p>
           <a:p>
             <a:pPr>
-              <a:defRPr b="1" sz="1300"/>
+              <a:defRPr sz="1300" b="1"/>
             </a:pPr>
             <a:r>
               <a:t>• Reparo de Vizinhança: </a:t>
@@ -7265,7 +7608,7 @@
           </a:p>
           <a:p>
             <a:pPr>
-              <a:defRPr b="1" sz="1300"/>
+              <a:defRPr sz="1300" b="1"/>
             </a:pPr>
             <a:r>
               <a:t>• Critério de Parada: </a:t>
@@ -7286,7 +7629,7 @@
 </file>
 
 <file path=ppt/slides/slide6.xml><?xml version="1.0" encoding="utf-8"?>
-<p:sld xmlns:a="http://schemas.openxmlformats.org/drawingml/2006/main" xmlns:p="http://schemas.openxmlformats.org/presentationml/2006/main" xmlns:r="http://schemas.openxmlformats.org/officeDocument/2006/relationships">
+<p:sld xmlns:a="http://schemas.openxmlformats.org/drawingml/2006/main" xmlns:r="http://schemas.openxmlformats.org/officeDocument/2006/relationships" xmlns:p="http://schemas.openxmlformats.org/presentationml/2006/main">
   <p:cSld>
     <p:spTree>
       <p:nvGrpSpPr>
@@ -7294,7 +7637,14 @@
         <p:cNvGrpSpPr/>
         <p:nvPr/>
       </p:nvGrpSpPr>
-      <p:grpSpPr/>
+      <p:grpSpPr>
+        <a:xfrm>
+          <a:off x="0" y="0"/>
+          <a:ext cx="0" cy="0"/>
+          <a:chOff x="0" y="0"/>
+          <a:chExt cx="0" cy="0"/>
+        </a:xfrm>
+      </p:grpSpPr>
       <p:sp>
         <p:nvSpPr>
           <p:cNvPr id="2" name="Rectangle 1"/>
@@ -7335,6 +7685,7 @@
           <a:lstStyle/>
           <a:p>
             <a:pPr algn="ctr"/>
+            <a:endParaRPr/>
           </a:p>
         </p:txBody>
       </p:sp>
@@ -7376,7 +7727,7 @@
           </a:fontRef>
         </p:style>
         <p:txBody>
-          <a:bodyPr rtlCol="0" anchor="ctr" wrap="square" lIns="731520" tIns="137160"/>
+          <a:bodyPr wrap="square" lIns="731520" tIns="137160" rtlCol="0" anchor="ctr"/>
           <a:lstStyle/>
           <a:p>
             <a:pPr algn="ctr">
@@ -7423,9 +7774,27 @@
                 <a:tableStyleId>{5C22544A-7EE6-4342-B048-85BDC9FD1C3A}</a:tableStyleId>
               </a:tblPr>
               <a:tblGrid>
-                <a:gridCol w="3108960"/>
-                <a:gridCol w="3108960"/>
-                <a:gridCol w="3230575"/>
+                <a:gridCol w="3108960">
+                  <a:extLst>
+                    <a:ext uri="{9D8B030D-6E8A-4147-A177-3AD203B41FA5}">
+                      <a16:colId xmlns:a16="http://schemas.microsoft.com/office/drawing/2014/main" val="20000"/>
+                    </a:ext>
+                  </a:extLst>
+                </a:gridCol>
+                <a:gridCol w="3108960">
+                  <a:extLst>
+                    <a:ext uri="{9D8B030D-6E8A-4147-A177-3AD203B41FA5}">
+                      <a16:colId xmlns:a16="http://schemas.microsoft.com/office/drawing/2014/main" val="20001"/>
+                    </a:ext>
+                  </a:extLst>
+                </a:gridCol>
+                <a:gridCol w="3230575">
+                  <a:extLst>
+                    <a:ext uri="{9D8B030D-6E8A-4147-A177-3AD203B41FA5}">
+                      <a16:colId xmlns:a16="http://schemas.microsoft.com/office/drawing/2014/main" val="20002"/>
+                    </a:ext>
+                  </a:extLst>
+                </a:gridCol>
               </a:tblGrid>
               <a:tr h="960120">
                 <a:tc>
@@ -7434,7 +7803,7 @@
                     <a:lstStyle/>
                     <a:p>
                       <a:pPr algn="ctr">
-                        <a:defRPr b="1" sz="1400">
+                        <a:defRPr sz="1400" b="1">
                           <a:solidFill>
                             <a:srgbClr val="FFFFFF"/>
                           </a:solidFill>
@@ -7457,7 +7826,7 @@
                     <a:lstStyle/>
                     <a:p>
                       <a:pPr algn="ctr">
-                        <a:defRPr b="1" sz="1400">
+                        <a:defRPr sz="1400" b="1">
                           <a:solidFill>
                             <a:srgbClr val="FFFFFF"/>
                           </a:solidFill>
@@ -7480,7 +7849,7 @@
                     <a:lstStyle/>
                     <a:p>
                       <a:pPr algn="ctr">
-                        <a:defRPr b="1" sz="1400">
+                        <a:defRPr sz="1400" b="1">
                           <a:solidFill>
                             <a:srgbClr val="FFFFFF"/>
                           </a:solidFill>
@@ -7497,6 +7866,11 @@
                     </a:solidFill>
                   </a:tcPr>
                 </a:tc>
+                <a:extLst>
+                  <a:ext uri="{0D108BD9-81ED-4DB2-BD59-A6C34878D82A}">
+                    <a16:rowId xmlns:a16="http://schemas.microsoft.com/office/drawing/2014/main" val="10000"/>
+                  </a:ext>
+                </a:extLst>
               </a:tr>
               <a:tr h="960120">
                 <a:tc>
@@ -7556,6 +7930,11 @@
                     </a:solidFill>
                   </a:tcPr>
                 </a:tc>
+                <a:extLst>
+                  <a:ext uri="{0D108BD9-81ED-4DB2-BD59-A6C34878D82A}">
+                    <a16:rowId xmlns:a16="http://schemas.microsoft.com/office/drawing/2014/main" val="10001"/>
+                  </a:ext>
+                </a:extLst>
               </a:tr>
               <a:tr h="960120">
                 <a:tc>
@@ -7615,6 +7994,11 @@
                     </a:solidFill>
                   </a:tcPr>
                 </a:tc>
+                <a:extLst>
+                  <a:ext uri="{0D108BD9-81ED-4DB2-BD59-A6C34878D82A}">
+                    <a16:rowId xmlns:a16="http://schemas.microsoft.com/office/drawing/2014/main" val="10002"/>
+                  </a:ext>
+                </a:extLst>
               </a:tr>
               <a:tr h="960120">
                 <a:tc>
@@ -7674,6 +8058,11 @@
                     </a:solidFill>
                   </a:tcPr>
                 </a:tc>
+                <a:extLst>
+                  <a:ext uri="{0D108BD9-81ED-4DB2-BD59-A6C34878D82A}">
+                    <a16:rowId xmlns:a16="http://schemas.microsoft.com/office/drawing/2014/main" val="10003"/>
+                  </a:ext>
+                </a:extLst>
               </a:tr>
             </a:tbl>
           </a:graphicData>
@@ -7688,7 +8077,7 @@
 </file>
 
 <file path=ppt/slides/slide7.xml><?xml version="1.0" encoding="utf-8"?>
-<p:sld xmlns:a="http://schemas.openxmlformats.org/drawingml/2006/main" xmlns:p="http://schemas.openxmlformats.org/presentationml/2006/main" xmlns:r="http://schemas.openxmlformats.org/officeDocument/2006/relationships">
+<p:sld xmlns:a="http://schemas.openxmlformats.org/drawingml/2006/main" xmlns:r="http://schemas.openxmlformats.org/officeDocument/2006/relationships" xmlns:p="http://schemas.openxmlformats.org/presentationml/2006/main">
   <p:cSld>
     <p:spTree>
       <p:nvGrpSpPr>
@@ -7696,7 +8085,14 @@
         <p:cNvGrpSpPr/>
         <p:nvPr/>
       </p:nvGrpSpPr>
-      <p:grpSpPr/>
+      <p:grpSpPr>
+        <a:xfrm>
+          <a:off x="0" y="0"/>
+          <a:ext cx="0" cy="0"/>
+          <a:chOff x="0" y="0"/>
+          <a:chExt cx="0" cy="0"/>
+        </a:xfrm>
+      </p:grpSpPr>
       <p:sp>
         <p:nvSpPr>
           <p:cNvPr id="2" name="Rectangle 1"/>
@@ -7737,6 +8133,7 @@
           <a:lstStyle/>
           <a:p>
             <a:pPr algn="ctr"/>
+            <a:endParaRPr/>
           </a:p>
         </p:txBody>
       </p:sp>
@@ -7778,7 +8175,7 @@
           </a:fontRef>
         </p:style>
         <p:txBody>
-          <a:bodyPr rtlCol="0" anchor="ctr" wrap="square" lIns="731520" tIns="137160"/>
+          <a:bodyPr wrap="square" lIns="731520" tIns="137160" rtlCol="0" anchor="ctr"/>
           <a:lstStyle/>
           <a:p>
             <a:pPr algn="ctr">
@@ -7839,7 +8236,7 @@
           </a:fontRef>
         </p:style>
         <p:txBody>
-          <a:bodyPr rtlCol="0" anchor="ctr" wrap="square" lIns="274320" tIns="274320"/>
+          <a:bodyPr wrap="square" lIns="274320" tIns="274320" rtlCol="0" anchor="ctr"/>
           <a:lstStyle/>
           <a:p>
             <a:pPr algn="ctr">
@@ -7855,7 +8252,7 @@
           </a:p>
           <a:p>
             <a:pPr>
-              <a:defRPr b="1" sz="1300"/>
+              <a:defRPr sz="1300" b="1"/>
             </a:pPr>
             <a:r>
               <a:t>• Cromossomo: </a:t>
@@ -7867,7 +8264,7 @@
           </a:p>
           <a:p>
             <a:pPr>
-              <a:defRPr b="1" sz="1300"/>
+              <a:defRPr sz="1300" b="1"/>
             </a:pPr>
             <a:r>
               <a:t>• Inicialização: </a:t>
@@ -7879,7 +8276,7 @@
           </a:p>
           <a:p>
             <a:pPr>
-              <a:defRPr b="1" sz="1300"/>
+              <a:defRPr sz="1300" b="1"/>
             </a:pPr>
             <a:r>
               <a:t>• Seleção por Torneio: </a:t>
@@ -7891,7 +8288,7 @@
           </a:p>
           <a:p>
             <a:pPr>
-              <a:defRPr b="1" sz="1300"/>
+              <a:defRPr sz="1300" b="1"/>
             </a:pPr>
             <a:r>
               <a:t>• Crossover: </a:t>
@@ -7936,7 +8333,7 @@
           </a:fontRef>
         </p:style>
         <p:txBody>
-          <a:bodyPr rtlCol="0" anchor="ctr" wrap="square" lIns="274320" tIns="274320"/>
+          <a:bodyPr wrap="square" lIns="274320" tIns="274320" rtlCol="0" anchor="ctr"/>
           <a:lstStyle/>
           <a:p>
             <a:pPr algn="ctr">
@@ -7952,7 +8349,7 @@
           </a:p>
           <a:p>
             <a:pPr>
-              <a:defRPr b="1" sz="1300"/>
+              <a:defRPr sz="1300" b="1"/>
             </a:pPr>
             <a:r>
               <a:t>• Mutação Bit-Flip: </a:t>
@@ -7964,7 +8361,7 @@
           </a:p>
           <a:p>
             <a:pPr>
-              <a:defRPr b="1" sz="1300"/>
+              <a:defRPr sz="1300" b="1"/>
             </a:pPr>
             <a:r>
               <a:t>• Elitismo Estrito: </a:t>
@@ -7976,7 +8373,7 @@
           </a:p>
           <a:p>
             <a:pPr>
-              <a:defRPr b="1" sz="1300"/>
+              <a:defRPr sz="1300" b="1"/>
             </a:pPr>
             <a:r>
               <a:t>• Garantia de Factibilidade: </a:t>
@@ -7997,7 +8394,7 @@
 </file>
 
 <file path=ppt/slides/slide8.xml><?xml version="1.0" encoding="utf-8"?>
-<p:sld xmlns:a="http://schemas.openxmlformats.org/drawingml/2006/main" xmlns:p="http://schemas.openxmlformats.org/presentationml/2006/main" xmlns:r="http://schemas.openxmlformats.org/officeDocument/2006/relationships">
+<p:sld xmlns:a="http://schemas.openxmlformats.org/drawingml/2006/main" xmlns:r="http://schemas.openxmlformats.org/officeDocument/2006/relationships" xmlns:p="http://schemas.openxmlformats.org/presentationml/2006/main">
   <p:cSld>
     <p:spTree>
       <p:nvGrpSpPr>
@@ -8005,7 +8402,14 @@
         <p:cNvGrpSpPr/>
         <p:nvPr/>
       </p:nvGrpSpPr>
-      <p:grpSpPr/>
+      <p:grpSpPr>
+        <a:xfrm>
+          <a:off x="0" y="0"/>
+          <a:ext cx="0" cy="0"/>
+          <a:chOff x="0" y="0"/>
+          <a:chExt cx="0" cy="0"/>
+        </a:xfrm>
+      </p:grpSpPr>
       <p:sp>
         <p:nvSpPr>
           <p:cNvPr id="2" name="Rectangle 1"/>
@@ -8046,6 +8450,7 @@
           <a:lstStyle/>
           <a:p>
             <a:pPr algn="ctr"/>
+            <a:endParaRPr/>
           </a:p>
         </p:txBody>
       </p:sp>
@@ -8087,7 +8492,7 @@
           </a:fontRef>
         </p:style>
         <p:txBody>
-          <a:bodyPr rtlCol="0" anchor="ctr" wrap="square" lIns="731520" tIns="137160"/>
+          <a:bodyPr wrap="square" lIns="731520" tIns="137160" rtlCol="0" anchor="ctr"/>
           <a:lstStyle/>
           <a:p>
             <a:pPr algn="ctr">
@@ -8134,10 +8539,34 @@
                 <a:tableStyleId>{5C22544A-7EE6-4342-B048-85BDC9FD1C3A}</a:tableStyleId>
               </a:tblPr>
               <a:tblGrid>
-                <a:gridCol w="2560320"/>
-                <a:gridCol w="2560320"/>
-                <a:gridCol w="2560320"/>
-                <a:gridCol w="3047695"/>
+                <a:gridCol w="2560320">
+                  <a:extLst>
+                    <a:ext uri="{9D8B030D-6E8A-4147-A177-3AD203B41FA5}">
+                      <a16:colId xmlns:a16="http://schemas.microsoft.com/office/drawing/2014/main" val="20000"/>
+                    </a:ext>
+                  </a:extLst>
+                </a:gridCol>
+                <a:gridCol w="2560320">
+                  <a:extLst>
+                    <a:ext uri="{9D8B030D-6E8A-4147-A177-3AD203B41FA5}">
+                      <a16:colId xmlns:a16="http://schemas.microsoft.com/office/drawing/2014/main" val="20001"/>
+                    </a:ext>
+                  </a:extLst>
+                </a:gridCol>
+                <a:gridCol w="2560320">
+                  <a:extLst>
+                    <a:ext uri="{9D8B030D-6E8A-4147-A177-3AD203B41FA5}">
+                      <a16:colId xmlns:a16="http://schemas.microsoft.com/office/drawing/2014/main" val="20002"/>
+                    </a:ext>
+                  </a:extLst>
+                </a:gridCol>
+                <a:gridCol w="3047695">
+                  <a:extLst>
+                    <a:ext uri="{9D8B030D-6E8A-4147-A177-3AD203B41FA5}">
+                      <a16:colId xmlns:a16="http://schemas.microsoft.com/office/drawing/2014/main" val="20003"/>
+                    </a:ext>
+                  </a:extLst>
+                </a:gridCol>
               </a:tblGrid>
               <a:tr h="960120">
                 <a:tc>
@@ -8146,7 +8575,7 @@
                     <a:lstStyle/>
                     <a:p>
                       <a:pPr algn="ctr">
-                        <a:defRPr b="1" sz="1400">
+                        <a:defRPr sz="1400" b="1">
                           <a:solidFill>
                             <a:srgbClr val="FFFFFF"/>
                           </a:solidFill>
@@ -8169,7 +8598,7 @@
                     <a:lstStyle/>
                     <a:p>
                       <a:pPr algn="ctr">
-                        <a:defRPr b="1" sz="1400">
+                        <a:defRPr sz="1400" b="1">
                           <a:solidFill>
                             <a:srgbClr val="FFFFFF"/>
                           </a:solidFill>
@@ -8192,7 +8621,7 @@
                     <a:lstStyle/>
                     <a:p>
                       <a:pPr algn="ctr">
-                        <a:defRPr b="1" sz="1400">
+                        <a:defRPr sz="1400" b="1">
                           <a:solidFill>
                             <a:srgbClr val="FFFFFF"/>
                           </a:solidFill>
@@ -8215,7 +8644,7 @@
                     <a:lstStyle/>
                     <a:p>
                       <a:pPr algn="ctr">
-                        <a:defRPr b="1" sz="1400">
+                        <a:defRPr sz="1400" b="1">
                           <a:solidFill>
                             <a:srgbClr val="FFFFFF"/>
                           </a:solidFill>
@@ -8232,6 +8661,11 @@
                     </a:solidFill>
                   </a:tcPr>
                 </a:tc>
+                <a:extLst>
+                  <a:ext uri="{0D108BD9-81ED-4DB2-BD59-A6C34878D82A}">
+                    <a16:rowId xmlns:a16="http://schemas.microsoft.com/office/drawing/2014/main" val="10000"/>
+                  </a:ext>
+                </a:extLst>
               </a:tr>
               <a:tr h="960120">
                 <a:tc>
@@ -8310,6 +8744,11 @@
                     </a:solidFill>
                   </a:tcPr>
                 </a:tc>
+                <a:extLst>
+                  <a:ext uri="{0D108BD9-81ED-4DB2-BD59-A6C34878D82A}">
+                    <a16:rowId xmlns:a16="http://schemas.microsoft.com/office/drawing/2014/main" val="10001"/>
+                  </a:ext>
+                </a:extLst>
               </a:tr>
               <a:tr h="960120">
                 <a:tc>
@@ -8388,6 +8827,11 @@
                     </a:solidFill>
                   </a:tcPr>
                 </a:tc>
+                <a:extLst>
+                  <a:ext uri="{0D108BD9-81ED-4DB2-BD59-A6C34878D82A}">
+                    <a16:rowId xmlns:a16="http://schemas.microsoft.com/office/drawing/2014/main" val="10002"/>
+                  </a:ext>
+                </a:extLst>
               </a:tr>
               <a:tr h="960120">
                 <a:tc>
@@ -8466,6 +8910,11 @@
                     </a:solidFill>
                   </a:tcPr>
                 </a:tc>
+                <a:extLst>
+                  <a:ext uri="{0D108BD9-81ED-4DB2-BD59-A6C34878D82A}">
+                    <a16:rowId xmlns:a16="http://schemas.microsoft.com/office/drawing/2014/main" val="10003"/>
+                  </a:ext>
+                </a:extLst>
               </a:tr>
             </a:tbl>
           </a:graphicData>
@@ -8480,7 +8929,7 @@
 </file>
 
 <file path=ppt/slides/slide9.xml><?xml version="1.0" encoding="utf-8"?>
-<p:sld xmlns:a="http://schemas.openxmlformats.org/drawingml/2006/main" xmlns:p="http://schemas.openxmlformats.org/presentationml/2006/main" xmlns:r="http://schemas.openxmlformats.org/officeDocument/2006/relationships">
+<p:sld xmlns:a="http://schemas.openxmlformats.org/drawingml/2006/main" xmlns:r="http://schemas.openxmlformats.org/officeDocument/2006/relationships" xmlns:p="http://schemas.openxmlformats.org/presentationml/2006/main">
   <p:cSld>
     <p:spTree>
       <p:nvGrpSpPr>
@@ -8488,7 +8937,14 @@
         <p:cNvGrpSpPr/>
         <p:nvPr/>
       </p:nvGrpSpPr>
-      <p:grpSpPr/>
+      <p:grpSpPr>
+        <a:xfrm>
+          <a:off x="0" y="0"/>
+          <a:ext cx="0" cy="0"/>
+          <a:chOff x="0" y="0"/>
+          <a:chExt cx="0" cy="0"/>
+        </a:xfrm>
+      </p:grpSpPr>
       <p:sp>
         <p:nvSpPr>
           <p:cNvPr id="2" name="Rectangle 1"/>
@@ -8529,6 +8985,7 @@
           <a:lstStyle/>
           <a:p>
             <a:pPr algn="ctr"/>
+            <a:endParaRPr/>
           </a:p>
         </p:txBody>
       </p:sp>
@@ -8570,7 +9027,7 @@
           </a:fontRef>
         </p:style>
         <p:txBody>
-          <a:bodyPr rtlCol="0" anchor="ctr" wrap="square" lIns="731520" tIns="137160"/>
+          <a:bodyPr wrap="square" lIns="731520" tIns="137160" rtlCol="0" anchor="ctr"/>
           <a:lstStyle/>
           <a:p>
             <a:pPr algn="ctr">
@@ -8617,13 +9074,55 @@
                 <a:tableStyleId>{5C22544A-7EE6-4342-B048-85BDC9FD1C3A}</a:tableStyleId>
               </a:tblPr>
               <a:tblGrid>
-                <a:gridCol w="2011680"/>
-                <a:gridCol w="1005840"/>
-                <a:gridCol w="1828800"/>
-                <a:gridCol w="1828800"/>
-                <a:gridCol w="1463040"/>
-                <a:gridCol w="1737360"/>
-                <a:gridCol w="1401775"/>
+                <a:gridCol w="2011680">
+                  <a:extLst>
+                    <a:ext uri="{9D8B030D-6E8A-4147-A177-3AD203B41FA5}">
+                      <a16:colId xmlns:a16="http://schemas.microsoft.com/office/drawing/2014/main" val="20000"/>
+                    </a:ext>
+                  </a:extLst>
+                </a:gridCol>
+                <a:gridCol w="1005840">
+                  <a:extLst>
+                    <a:ext uri="{9D8B030D-6E8A-4147-A177-3AD203B41FA5}">
+                      <a16:colId xmlns:a16="http://schemas.microsoft.com/office/drawing/2014/main" val="20001"/>
+                    </a:ext>
+                  </a:extLst>
+                </a:gridCol>
+                <a:gridCol w="1828800">
+                  <a:extLst>
+                    <a:ext uri="{9D8B030D-6E8A-4147-A177-3AD203B41FA5}">
+                      <a16:colId xmlns:a16="http://schemas.microsoft.com/office/drawing/2014/main" val="20002"/>
+                    </a:ext>
+                  </a:extLst>
+                </a:gridCol>
+                <a:gridCol w="1828800">
+                  <a:extLst>
+                    <a:ext uri="{9D8B030D-6E8A-4147-A177-3AD203B41FA5}">
+                      <a16:colId xmlns:a16="http://schemas.microsoft.com/office/drawing/2014/main" val="20003"/>
+                    </a:ext>
+                  </a:extLst>
+                </a:gridCol>
+                <a:gridCol w="1463040">
+                  <a:extLst>
+                    <a:ext uri="{9D8B030D-6E8A-4147-A177-3AD203B41FA5}">
+                      <a16:colId xmlns:a16="http://schemas.microsoft.com/office/drawing/2014/main" val="20004"/>
+                    </a:ext>
+                  </a:extLst>
+                </a:gridCol>
+                <a:gridCol w="1737360">
+                  <a:extLst>
+                    <a:ext uri="{9D8B030D-6E8A-4147-A177-3AD203B41FA5}">
+                      <a16:colId xmlns:a16="http://schemas.microsoft.com/office/drawing/2014/main" val="20005"/>
+                    </a:ext>
+                  </a:extLst>
+                </a:gridCol>
+                <a:gridCol w="1401775">
+                  <a:extLst>
+                    <a:ext uri="{9D8B030D-6E8A-4147-A177-3AD203B41FA5}">
+                      <a16:colId xmlns:a16="http://schemas.microsoft.com/office/drawing/2014/main" val="20006"/>
+                    </a:ext>
+                  </a:extLst>
+                </a:gridCol>
               </a:tblGrid>
               <a:tr h="512064">
                 <a:tc>
@@ -8632,7 +9131,7 @@
                     <a:lstStyle/>
                     <a:p>
                       <a:pPr algn="ctr">
-                        <a:defRPr b="1" sz="1200">
+                        <a:defRPr sz="1200" b="1">
                           <a:solidFill>
                             <a:srgbClr val="FFFFFF"/>
                           </a:solidFill>
@@ -8655,7 +9154,7 @@
                     <a:lstStyle/>
                     <a:p>
                       <a:pPr algn="ctr">
-                        <a:defRPr b="1" sz="1200">
+                        <a:defRPr sz="1200" b="1">
                           <a:solidFill>
                             <a:srgbClr val="FFFFFF"/>
                           </a:solidFill>
@@ -8678,7 +9177,7 @@
                     <a:lstStyle/>
                     <a:p>
                       <a:pPr algn="ctr">
-                        <a:defRPr b="1" sz="1200">
+                        <a:defRPr sz="1200" b="1">
                           <a:solidFill>
                             <a:srgbClr val="FFFFFF"/>
                           </a:solidFill>
@@ -8701,7 +9200,7 @@
                     <a:lstStyle/>
                     <a:p>
                       <a:pPr algn="ctr">
-                        <a:defRPr b="1" sz="1200">
+                        <a:defRPr sz="1200" b="1">
                           <a:solidFill>
                             <a:srgbClr val="FFFFFF"/>
                           </a:solidFill>
@@ -8724,7 +9223,7 @@
                     <a:lstStyle/>
                     <a:p>
                       <a:pPr algn="ctr">
-                        <a:defRPr b="1" sz="1200">
+                        <a:defRPr sz="1200" b="1">
                           <a:solidFill>
                             <a:srgbClr val="FFFFFF"/>
                           </a:solidFill>
@@ -8747,7 +9246,7 @@
                     <a:lstStyle/>
                     <a:p>
                       <a:pPr algn="ctr">
-                        <a:defRPr b="1" sz="1200">
+                        <a:defRPr sz="1200" b="1">
                           <a:solidFill>
                             <a:srgbClr val="FFFFFF"/>
                           </a:solidFill>
@@ -8770,7 +9269,7 @@
                     <a:lstStyle/>
                     <a:p>
                       <a:pPr algn="ctr">
-                        <a:defRPr b="1" sz="1200">
+                        <a:defRPr sz="1200" b="1">
                           <a:solidFill>
                             <a:srgbClr val="FFFFFF"/>
                           </a:solidFill>
@@ -8787,6 +9286,11 @@
                     </a:solidFill>
                   </a:tcPr>
                 </a:tc>
+                <a:extLst>
+                  <a:ext uri="{0D108BD9-81ED-4DB2-BD59-A6C34878D82A}">
+                    <a16:rowId xmlns:a16="http://schemas.microsoft.com/office/drawing/2014/main" val="10000"/>
+                  </a:ext>
+                </a:extLst>
               </a:tr>
               <a:tr h="512064">
                 <a:tc>
@@ -8930,6 +9434,11 @@
                     </a:solidFill>
                   </a:tcPr>
                 </a:tc>
+                <a:extLst>
+                  <a:ext uri="{0D108BD9-81ED-4DB2-BD59-A6C34878D82A}">
+                    <a16:rowId xmlns:a16="http://schemas.microsoft.com/office/drawing/2014/main" val="10001"/>
+                  </a:ext>
+                </a:extLst>
               </a:tr>
               <a:tr h="512064">
                 <a:tc>
@@ -9073,6 +9582,11 @@
                     </a:solidFill>
                   </a:tcPr>
                 </a:tc>
+                <a:extLst>
+                  <a:ext uri="{0D108BD9-81ED-4DB2-BD59-A6C34878D82A}">
+                    <a16:rowId xmlns:a16="http://schemas.microsoft.com/office/drawing/2014/main" val="10002"/>
+                  </a:ext>
+                </a:extLst>
               </a:tr>
               <a:tr h="512064">
                 <a:tc>
@@ -9216,6 +9730,11 @@
                     </a:solidFill>
                   </a:tcPr>
                 </a:tc>
+                <a:extLst>
+                  <a:ext uri="{0D108BD9-81ED-4DB2-BD59-A6C34878D82A}">
+                    <a16:rowId xmlns:a16="http://schemas.microsoft.com/office/drawing/2014/main" val="10003"/>
+                  </a:ext>
+                </a:extLst>
               </a:tr>
               <a:tr h="512064">
                 <a:tc>
@@ -9359,6 +9878,11 @@
                     </a:solidFill>
                   </a:tcPr>
                 </a:tc>
+                <a:extLst>
+                  <a:ext uri="{0D108BD9-81ED-4DB2-BD59-A6C34878D82A}">
+                    <a16:rowId xmlns:a16="http://schemas.microsoft.com/office/drawing/2014/main" val="10004"/>
+                  </a:ext>
+                </a:extLst>
               </a:tr>
               <a:tr h="512064">
                 <a:tc>
@@ -9502,6 +10026,11 @@
                     </a:solidFill>
                   </a:tcPr>
                 </a:tc>
+                <a:extLst>
+                  <a:ext uri="{0D108BD9-81ED-4DB2-BD59-A6C34878D82A}">
+                    <a16:rowId xmlns:a16="http://schemas.microsoft.com/office/drawing/2014/main" val="10005"/>
+                  </a:ext>
+                </a:extLst>
               </a:tr>
               <a:tr h="512064">
                 <a:tc>
@@ -9645,6 +10174,11 @@
                     </a:solidFill>
                   </a:tcPr>
                 </a:tc>
+                <a:extLst>
+                  <a:ext uri="{0D108BD9-81ED-4DB2-BD59-A6C34878D82A}">
+                    <a16:rowId xmlns:a16="http://schemas.microsoft.com/office/drawing/2014/main" val="10006"/>
+                  </a:ext>
+                </a:extLst>
               </a:tr>
               <a:tr h="512064">
                 <a:tc>
@@ -9788,6 +10322,11 @@
                     </a:solidFill>
                   </a:tcPr>
                 </a:tc>
+                <a:extLst>
+                  <a:ext uri="{0D108BD9-81ED-4DB2-BD59-A6C34878D82A}">
+                    <a16:rowId xmlns:a16="http://schemas.microsoft.com/office/drawing/2014/main" val="10007"/>
+                  </a:ext>
+                </a:extLst>
               </a:tr>
               <a:tr h="512064">
                 <a:tc>
@@ -9931,6 +10470,11 @@
                     </a:solidFill>
                   </a:tcPr>
                 </a:tc>
+                <a:extLst>
+                  <a:ext uri="{0D108BD9-81ED-4DB2-BD59-A6C34878D82A}">
+                    <a16:rowId xmlns:a16="http://schemas.microsoft.com/office/drawing/2014/main" val="10008"/>
+                  </a:ext>
+                </a:extLst>
               </a:tr>
               <a:tr h="512064">
                 <a:tc>
@@ -10074,6 +10618,11 @@
                     </a:solidFill>
                   </a:tcPr>
                 </a:tc>
+                <a:extLst>
+                  <a:ext uri="{0D108BD9-81ED-4DB2-BD59-A6C34878D82A}">
+                    <a16:rowId xmlns:a16="http://schemas.microsoft.com/office/drawing/2014/main" val="10009"/>
+                  </a:ext>
+                </a:extLst>
               </a:tr>
             </a:tbl>
           </a:graphicData>

--- a/Mochila01_MetaHeuristicas_TabuVsAG.pptx
+++ b/Mochila01_MetaHeuristicas_TabuVsAG.pptx
@@ -3154,7 +3154,7 @@
         <p:spPr>
           <a:xfrm>
             <a:off x="914400" y="2011680"/>
-            <a:ext cx="10362895" cy="2585323"/>
+            <a:ext cx="10362895" cy="1754326"/>
           </a:xfrm>
           <a:prstGeom prst="rect">
             <a:avLst/>
@@ -3284,18 +3284,19 @@
           </a:p>
           <a:p>
             <a:br>
-              <a:rPr lang="pt-BR" dirty="0"/>
-            </a:br>
-            <a:br>
-              <a:rPr lang="pt-BR" dirty="0"/>
-            </a:br>
-            <a:r>
-              <a:rPr lang="pt-BR" dirty="0" err="1">
+              <a:rPr dirty="0">
                 <a:solidFill>
                   <a:schemeClr val="bg1"/>
                 </a:solidFill>
               </a:rPr>
-              <a:t>realiado</a:t>
+            </a:br>
+            <a:r>
+              <a:rPr dirty="0">
+                <a:solidFill>
+                  <a:schemeClr val="bg1"/>
+                </a:solidFill>
+              </a:rPr>
+              <a:t>Autor: Maycon Carpes</a:t>
             </a:r>
             <a:r>
               <a:rPr lang="pt-BR" dirty="0">
@@ -3303,36 +3304,7 @@
                   <a:schemeClr val="bg1"/>
                 </a:solidFill>
               </a:rPr>
-              <a:t> por: </a:t>
-            </a:r>
-            <a:br>
-              <a:rPr dirty="0"/>
-            </a:br>
-            <a:r>
-              <a:rPr dirty="0">
-                <a:solidFill>
-                  <a:schemeClr val="bg1"/>
-                </a:solidFill>
-              </a:rPr>
-              <a:t>Maycon Carpes</a:t>
-            </a:r>
-            <a:r>
-              <a:rPr lang="pt-BR" dirty="0">
-                <a:solidFill>
-                  <a:schemeClr val="bg1"/>
-                </a:solidFill>
-              </a:rPr>
-              <a:t> </a:t>
-            </a:r>
-          </a:p>
-          <a:p>
-            <a:r>
-              <a:rPr lang="pt-BR" dirty="0">
-                <a:solidFill>
-                  <a:schemeClr val="bg1"/>
-                </a:solidFill>
-              </a:rPr>
-              <a:t>Cauã Fortes</a:t>
+              <a:t> e Cauã Fortes</a:t>
             </a:r>
             <a:endParaRPr dirty="0">
               <a:solidFill>

--- a/Mochila01_MetaHeuristicas_TabuVsAG.pptx
+++ b/Mochila01_MetaHeuristicas_TabuVsAG.pptx
@@ -4,6 +4,9 @@
   <p:sldMasterIdLst>
     <p:sldMasterId id="2147483648" r:id="rId1"/>
   </p:sldMasterIdLst>
+  <p:notesMasterIdLst>
+    <p:notesMasterId r:id="rId14"/>
+  </p:notesMasterIdLst>
   <p:sldIdLst>
     <p:sldId id="256" r:id="rId2"/>
     <p:sldId id="257" r:id="rId3"/>
@@ -18,9 +21,6 @@
     <p:sldId id="266" r:id="rId12"/>
     <p:sldId id="267" r:id="rId13"/>
   </p:sldIdLst>
-  <p:notesMasterIdLst>
-    <p:notesMasterId r:id="rId14"/>
-  </p:notesMasterIdLst>
   <p:sldSz cx="12192000" cy="6858000"/>
   <p:notesSz cx="6858000" cy="12192000"/>
   <p:defaultTextStyle>
@@ -115,13 +115,20 @@
       </a:defRPr>
     </a:lvl9pPr>
   </p:defaultTextStyle>
+  <p:extLst>
+    <p:ext uri="{EFAFB233-063F-42B5-8137-9DF3F51BA10A}">
+      <p15:sldGuideLst xmlns:p15="http://schemas.microsoft.com/office/powerpoint/2012/main"/>
+    </p:ext>
+  </p:extLst>
 </p:presentation>
 </file>
 
 <file path=ppt/charts/chart1.xml><?xml version="1.0" encoding="utf-8"?>
-<c:chartSpace xmlns:c="http://schemas.openxmlformats.org/drawingml/2006/chart" xmlns:a="http://schemas.openxmlformats.org/drawingml/2006/main" xmlns:r="http://schemas.openxmlformats.org/officeDocument/2006/relationships">
+<c:chartSpace xmlns:c="http://schemas.openxmlformats.org/drawingml/2006/chart" xmlns:a="http://schemas.openxmlformats.org/drawingml/2006/main" xmlns:r="http://schemas.openxmlformats.org/officeDocument/2006/relationships" xmlns:c16r2="http://schemas.microsoft.com/office/drawing/2015/06/chart">
   <c:date1904 val="0"/>
+  <c:lang val="pt-BR"/>
   <c:roundedCorners val="1"/>
+  <c:style val="2"/>
   <c:chart>
     <c:autoTitleDeleted val="1"/>
     <c:plotArea>
@@ -151,66 +158,40 @@
             <a:effectLst/>
           </c:spPr>
           <c:invertIfNegative val="0"/>
-          <c:dLbls>
-            <c:numFmt formatCode="#,##0" sourceLinked="0"/>
-            <c:txPr>
-              <a:bodyPr/>
-              <a:lstStyle/>
-              <a:p>
-                <a:pPr>
-                  <a:defRPr b="0" i="0" strike="noStrike" sz="1200" u="none">
-                    <a:solidFill>
-                      <a:srgbClr val="39415C"/>
-                    </a:solidFill>
-                    <a:latin typeface="Arial"/>
-                  </a:defRPr>
-                </a:pPr>
-              </a:p>
-            </c:txPr>
-            <c:showLegendKey val="0"/>
-            <c:showVal val="0"/>
-            <c:showCatName val="0"/>
-            <c:showSerName val="0"/>
-            <c:showPercent val="0"/>
-            <c:showBubbleSize val="0"/>
-            <c:showLeaderLines val="0"/>
-          </c:dLbls>
           <c:cat>
-            <c:multiLvlStrRef>
+            <c:strRef>
               <c:f>Sheet1!$A$2:$A$10</c:f>
-              <c:multiLvlStrCache>
+              <c:strCache>
                 <c:ptCount val="9"/>
-                <c:lvl>
-                  <c:pt idx="0">
-                    <c:v>P01</c:v>
-                  </c:pt>
-                  <c:pt idx="1">
-                    <c:v>P02</c:v>
-                  </c:pt>
-                  <c:pt idx="2">
-                    <c:v>P03</c:v>
-                  </c:pt>
-                  <c:pt idx="3">
-                    <c:v>P04</c:v>
-                  </c:pt>
-                  <c:pt idx="4">
-                    <c:v>P05</c:v>
-                  </c:pt>
-                  <c:pt idx="5">
-                    <c:v>P06</c:v>
-                  </c:pt>
-                  <c:pt idx="6">
-                    <c:v>P07</c:v>
-                  </c:pt>
-                  <c:pt idx="7">
-                    <c:v>P08</c:v>
-                  </c:pt>
-                  <c:pt idx="8">
-                    <c:v>knapPI_1_100</c:v>
-                  </c:pt>
-                </c:lvl>
-              </c:multiLvlStrCache>
-            </c:multiLvlStrRef>
+                <c:pt idx="0">
+                  <c:v>P01</c:v>
+                </c:pt>
+                <c:pt idx="1">
+                  <c:v>P02</c:v>
+                </c:pt>
+                <c:pt idx="2">
+                  <c:v>P03</c:v>
+                </c:pt>
+                <c:pt idx="3">
+                  <c:v>P04</c:v>
+                </c:pt>
+                <c:pt idx="4">
+                  <c:v>P05</c:v>
+                </c:pt>
+                <c:pt idx="5">
+                  <c:v>P06</c:v>
+                </c:pt>
+                <c:pt idx="6">
+                  <c:v>P07</c:v>
+                </c:pt>
+                <c:pt idx="7">
+                  <c:v>P08</c:v>
+                </c:pt>
+                <c:pt idx="8">
+                  <c:v>knapPI_1_100</c:v>
+                </c:pt>
+              </c:strCache>
+            </c:strRef>
           </c:cat>
           <c:val>
             <c:numRef>
@@ -248,6 +229,11 @@
               </c:numCache>
             </c:numRef>
           </c:val>
+          <c:extLst>
+            <c:ext xmlns:c16="http://schemas.microsoft.com/office/drawing/2014/chart" uri="{C3380CC4-5D6E-409C-BE32-E72D297353CC}">
+              <c16:uniqueId val="{00000000-8994-48CE-B878-39CA6E119D27}"/>
+            </c:ext>
+          </c:extLst>
         </c:ser>
         <c:ser>
           <c:idx val="1"/>
@@ -270,66 +256,40 @@
             <a:effectLst/>
           </c:spPr>
           <c:invertIfNegative val="0"/>
-          <c:dLbls>
-            <c:numFmt formatCode="#,##0" sourceLinked="0"/>
-            <c:txPr>
-              <a:bodyPr/>
-              <a:lstStyle/>
-              <a:p>
-                <a:pPr>
-                  <a:defRPr b="0" i="0" strike="noStrike" sz="1200" u="none">
-                    <a:solidFill>
-                      <a:srgbClr val="39415C"/>
-                    </a:solidFill>
-                    <a:latin typeface="Arial"/>
-                  </a:defRPr>
-                </a:pPr>
-              </a:p>
-            </c:txPr>
-            <c:showLegendKey val="0"/>
-            <c:showVal val="0"/>
-            <c:showCatName val="0"/>
-            <c:showSerName val="0"/>
-            <c:showPercent val="0"/>
-            <c:showBubbleSize val="0"/>
-            <c:showLeaderLines val="0"/>
-          </c:dLbls>
           <c:cat>
-            <c:multiLvlStrRef>
+            <c:strRef>
               <c:f>Sheet1!$A$2:$A$10</c:f>
-              <c:multiLvlStrCache>
+              <c:strCache>
                 <c:ptCount val="9"/>
-                <c:lvl>
-                  <c:pt idx="0">
-                    <c:v>P01</c:v>
-                  </c:pt>
-                  <c:pt idx="1">
-                    <c:v>P02</c:v>
-                  </c:pt>
-                  <c:pt idx="2">
-                    <c:v>P03</c:v>
-                  </c:pt>
-                  <c:pt idx="3">
-                    <c:v>P04</c:v>
-                  </c:pt>
-                  <c:pt idx="4">
-                    <c:v>P05</c:v>
-                  </c:pt>
-                  <c:pt idx="5">
-                    <c:v>P06</c:v>
-                  </c:pt>
-                  <c:pt idx="6">
-                    <c:v>P07</c:v>
-                  </c:pt>
-                  <c:pt idx="7">
-                    <c:v>P08</c:v>
-                  </c:pt>
-                  <c:pt idx="8">
-                    <c:v>knapPI_1_100</c:v>
-                  </c:pt>
-                </c:lvl>
-              </c:multiLvlStrCache>
-            </c:multiLvlStrRef>
+                <c:pt idx="0">
+                  <c:v>P01</c:v>
+                </c:pt>
+                <c:pt idx="1">
+                  <c:v>P02</c:v>
+                </c:pt>
+                <c:pt idx="2">
+                  <c:v>P03</c:v>
+                </c:pt>
+                <c:pt idx="3">
+                  <c:v>P04</c:v>
+                </c:pt>
+                <c:pt idx="4">
+                  <c:v>P05</c:v>
+                </c:pt>
+                <c:pt idx="5">
+                  <c:v>P06</c:v>
+                </c:pt>
+                <c:pt idx="6">
+                  <c:v>P07</c:v>
+                </c:pt>
+                <c:pt idx="7">
+                  <c:v>P08</c:v>
+                </c:pt>
+                <c:pt idx="8">
+                  <c:v>knapPI_1_100</c:v>
+                </c:pt>
+              </c:strCache>
+            </c:strRef>
           </c:cat>
           <c:val>
             <c:numRef>
@@ -367,36 +327,23 @@
               </c:numCache>
             </c:numRef>
           </c:val>
+          <c:extLst>
+            <c:ext xmlns:c16="http://schemas.microsoft.com/office/drawing/2014/chart" uri="{C3380CC4-5D6E-409C-BE32-E72D297353CC}">
+              <c16:uniqueId val="{00000001-8994-48CE-B878-39CA6E119D27}"/>
+            </c:ext>
+          </c:extLst>
         </c:ser>
         <c:dLbls>
-          <c:numFmt formatCode="#,##0" sourceLinked="0"/>
-          <c:txPr>
-            <a:bodyPr/>
-            <a:lstStyle/>
-            <a:p>
-              <a:pPr>
-                <a:defRPr b="0" i="0" strike="noStrike" sz="1200" u="none">
-                  <a:solidFill>
-                    <a:srgbClr val="39415C"/>
-                  </a:solidFill>
-                  <a:latin typeface="Arial"/>
-                </a:defRPr>
-              </a:pPr>
-            </a:p>
-          </c:txPr>
           <c:showLegendKey val="0"/>
           <c:showVal val="0"/>
           <c:showCatName val="0"/>
           <c:showSerName val="0"/>
           <c:showPercent val="0"/>
           <c:showBubbleSize val="0"/>
-          <c:showLeaderLines val="0"/>
         </c:dLbls>
         <c:gapWidth val="30"/>
-        <c:overlap val="0"/>
         <c:axId val="2094734554"/>
         <c:axId val="2094734552"/>
-        <c:axId val="2094734556"/>
       </c:barChart>
       <c:catAx>
         <c:axId val="2094734554"/>
@@ -430,13 +377,14 @@
                 <a:latin typeface="Arial"/>
               </a:defRPr>
             </a:pPr>
-            <a:endParaRPr lang="en-US"/>
+            <a:endParaRPr lang="pt-BR"/>
           </a:p>
         </c:txPr>
         <c:crossAx val="2094734552"/>
         <c:crosses val="autoZero"/>
         <c:auto val="1"/>
         <c:lblAlgn val="ctr"/>
+        <c:lblOffset val="100"/>
         <c:noMultiLvlLbl val="1"/>
       </c:catAx>
       <c:valAx>
@@ -472,7 +420,7 @@
                   </a:defRPr>
                 </a:pPr>
                 <a:r>
-                  <a:rPr sz="1000" b="0" i="0" u="none" strike="noStrike">
+                  <a:rPr lang="pt-BR" sz="1000" b="0" i="0" u="none" strike="noStrike">
                     <a:solidFill>
                       <a:srgbClr val="39415C"/>
                     </a:solidFill>
@@ -483,7 +431,6 @@
               </a:p>
             </c:rich>
           </c:tx>
-          <c:layout/>
           <c:overlay val="0"/>
         </c:title>
         <c:numFmt formatCode="General" sourceLinked="0"/>
@@ -511,7 +458,7 @@
                 <a:latin typeface="Arial"/>
               </a:defRPr>
             </a:pPr>
-            <a:endParaRPr lang="en-US"/>
+            <a:endParaRPr lang="pt-BR"/>
           </a:p>
         </c:txPr>
         <c:crossAx val="2094734554"/>
@@ -540,12 +487,13 @@
               </a:solidFill>
             </a:defRPr>
           </a:pPr>
-          <a:endParaRPr lang="en-US"/>
+          <a:endParaRPr lang="pt-BR"/>
         </a:p>
       </c:txPr>
     </c:legend>
     <c:plotVisOnly val="1"/>
     <c:dispBlanksAs val="span"/>
+    <c:showDLblsOverMax val="1"/>
   </c:chart>
   <c:spPr>
     <a:noFill/>
@@ -582,234 +530,10 @@
           <a:chExt cx="0" cy="0"/>
         </a:xfrm>
       </p:grpSpPr>
-      <p:sp>
-        <p:nvSpPr>
-          <p:cNvPr id="2" name="Header Placeholder 1"/>
-          <p:cNvSpPr>
-            <a:spLocks noGrp="1"/>
-          </p:cNvSpPr>
-          <p:nvPr>
-            <p:ph type="hdr" sz="quarter"/>
-          </p:nvPr>
-        </p:nvSpPr>
-        <p:spPr>
-          <a:xfrm>
-            <a:off x="0" y="0"/>
-            <a:ext cx="2971800" cy="458788"/>
-          </a:xfrm>
-          <a:prstGeom prst="rect">
-            <a:avLst/>
-          </a:prstGeom>
-        </p:spPr>
-        <p:txBody>
-          <a:bodyPr vert="horz" lIns="91440" tIns="45720" rIns="91440" bIns="45720" rtlCol="0"/>
-          <a:lstStyle>
-            <a:lvl1pPr algn="l">
-              <a:defRPr sz="1200"/>
-            </a:lvl1pPr>
-          </a:lstStyle>
-          <a:p>
-            <a:endParaRPr lang="en-US"/>
-          </a:p>
-        </p:txBody>
-      </p:sp>
-      <p:sp>
-        <p:nvSpPr>
-          <p:cNvPr id="3" name="Date Placeholder 2"/>
-          <p:cNvSpPr>
-            <a:spLocks noGrp="1"/>
-          </p:cNvSpPr>
-          <p:nvPr>
-            <p:ph type="dt" idx="1"/>
-          </p:nvPr>
-        </p:nvSpPr>
-        <p:spPr>
-          <a:xfrm>
-            <a:off x="3884613" y="0"/>
-            <a:ext cx="2971800" cy="458788"/>
-          </a:xfrm>
-          <a:prstGeom prst="rect">
-            <a:avLst/>
-          </a:prstGeom>
-        </p:spPr>
-        <p:txBody>
-          <a:bodyPr vert="horz" lIns="91440" tIns="45720" rIns="91440" bIns="45720" rtlCol="0"/>
-          <a:lstStyle>
-            <a:lvl1pPr algn="r">
-              <a:defRPr sz="1200"/>
-            </a:lvl1pPr>
-          </a:lstStyle>
-          <a:p>
-            <a:fld id="{5282F153-3F37-0F45-9E97-73ACFA13230C}" type="datetimeFigureOut">
-              <a:rPr lang="en-US"/>
-              <a:t>7/23/19</a:t>
-            </a:fld>
-            <a:endParaRPr lang="en-US"/>
-          </a:p>
-        </p:txBody>
-      </p:sp>
-      <p:sp>
-        <p:nvSpPr>
-          <p:cNvPr id="4" name="Slide Image Placeholder 3"/>
-          <p:cNvSpPr>
-            <a:spLocks noGrp="1" noRot="1" noChangeAspect="1"/>
-          </p:cNvSpPr>
-          <p:nvPr>
-            <p:ph type="sldImg" idx="2"/>
-          </p:nvPr>
-        </p:nvSpPr>
-        <p:spPr>
-          <a:xfrm>
-            <a:off x="685800" y="1143000"/>
-            <a:ext cx="5486400" cy="3086100"/>
-          </a:xfrm>
-          <a:prstGeom prst="rect">
-            <a:avLst/>
-          </a:prstGeom>
-          <a:noFill/>
-          <a:ln w="12700">
-            <a:solidFill>
-              <a:prstClr val="black"/>
-            </a:solidFill>
-          </a:ln>
-        </p:spPr>
-        <p:txBody>
-          <a:bodyPr vert="horz" lIns="91440" tIns="45720" rIns="91440" bIns="45720" rtlCol="0" anchor="ctr"/>
-          <a:lstStyle/>
-          <a:p>
-            <a:endParaRPr lang="en-US"/>
-          </a:p>
-        </p:txBody>
-      </p:sp>
-      <p:sp>
-        <p:nvSpPr>
-          <p:cNvPr id="5" name="Notes Placeholder 4"/>
-          <p:cNvSpPr>
-            <a:spLocks noGrp="1"/>
-          </p:cNvSpPr>
-          <p:nvPr>
-            <p:ph type="body" sz="quarter" idx="3"/>
-          </p:nvPr>
-        </p:nvSpPr>
-        <p:spPr>
-          <a:xfrm>
-            <a:off x="685800" y="4400550"/>
-            <a:ext cx="5486400" cy="3600450"/>
-          </a:xfrm>
-          <a:prstGeom prst="rect">
-            <a:avLst/>
-          </a:prstGeom>
-        </p:spPr>
-        <p:txBody>
-          <a:bodyPr vert="horz" lIns="91440" tIns="45720" rIns="91440" bIns="45720" rtlCol="0"/>
-          <a:lstStyle/>
-          <a:p>
-            <a:pPr lvl="0"/>
-            <a:r>
-              <a:rPr lang="en-US"/>
-              <a:t>Click to edit Master text styles</a:t>
-            </a:r>
-          </a:p>
-          <a:p>
-            <a:pPr lvl="1"/>
-            <a:r>
-              <a:rPr lang="en-US"/>
-              <a:t>Second level</a:t>
-            </a:r>
-          </a:p>
-          <a:p>
-            <a:pPr lvl="2"/>
-            <a:r>
-              <a:rPr lang="en-US"/>
-              <a:t>Third level</a:t>
-            </a:r>
-          </a:p>
-          <a:p>
-            <a:pPr lvl="3"/>
-            <a:r>
-              <a:rPr lang="en-US"/>
-              <a:t>Fourth level</a:t>
-            </a:r>
-          </a:p>
-          <a:p>
-            <a:pPr lvl="4"/>
-            <a:r>
-              <a:rPr lang="en-US"/>
-              <a:t>Fifth level</a:t>
-            </a:r>
-          </a:p>
-        </p:txBody>
-      </p:sp>
-      <p:sp>
-        <p:nvSpPr>
-          <p:cNvPr id="6" name="Footer Placeholder 5"/>
-          <p:cNvSpPr>
-            <a:spLocks noGrp="1"/>
-          </p:cNvSpPr>
-          <p:nvPr>
-            <p:ph type="ftr" sz="quarter" idx="4"/>
-          </p:nvPr>
-        </p:nvSpPr>
-        <p:spPr>
-          <a:xfrm>
-            <a:off x="0" y="8685213"/>
-            <a:ext cx="2971800" cy="458787"/>
-          </a:xfrm>
-          <a:prstGeom prst="rect">
-            <a:avLst/>
-          </a:prstGeom>
-        </p:spPr>
-        <p:txBody>
-          <a:bodyPr vert="horz" lIns="91440" tIns="45720" rIns="91440" bIns="45720" rtlCol="0" anchor="b"/>
-          <a:lstStyle>
-            <a:lvl1pPr algn="l">
-              <a:defRPr sz="1200"/>
-            </a:lvl1pPr>
-          </a:lstStyle>
-          <a:p>
-            <a:endParaRPr lang="en-US"/>
-          </a:p>
-        </p:txBody>
-      </p:sp>
-      <p:sp>
-        <p:nvSpPr>
-          <p:cNvPr id="7" name="Slide Number Placeholder 6"/>
-          <p:cNvSpPr>
-            <a:spLocks noGrp="1"/>
-          </p:cNvSpPr>
-          <p:nvPr>
-            <p:ph type="sldNum" sz="quarter" idx="5"/>
-          </p:nvPr>
-        </p:nvSpPr>
-        <p:spPr>
-          <a:xfrm>
-            <a:off x="3884613" y="8685213"/>
-            <a:ext cx="2971800" cy="458787"/>
-          </a:xfrm>
-          <a:prstGeom prst="rect">
-            <a:avLst/>
-          </a:prstGeom>
-        </p:spPr>
-        <p:txBody>
-          <a:bodyPr vert="horz" lIns="91440" tIns="45720" rIns="91440" bIns="45720" rtlCol="0" anchor="b"/>
-          <a:lstStyle>
-            <a:lvl1pPr algn="r">
-              <a:defRPr sz="1200"/>
-            </a:lvl1pPr>
-          </a:lstStyle>
-          <a:p>
-            <a:fld id="{CE5E9CC1-C706-0F49-92D6-E571CC5EEA8F}" type="slidenum">
-              <a:rPr lang="en-US"/>
-              <a:t>‹#›</a:t>
-            </a:fld>
-            <a:endParaRPr lang="en-US"/>
-          </a:p>
-        </p:txBody>
-      </p:sp>
     </p:spTree>
     <p:extLst>
       <p:ext uri="{BB962C8B-B14F-4D97-AF65-F5344CB8AC3E}">
-        <p14:creationId xmlns:p14="http://schemas.microsoft.com/office/powerpoint/2010/main" val="1024086991"/>
+        <p14:creationId xmlns:p14="http://schemas.microsoft.com/office/powerpoint/2010/main" val="667684786"/>
       </p:ext>
     </p:extLst>
   </p:cSld>
@@ -953,10 +677,6 @@
           <a:bodyPr/>
           <a:lstStyle/>
           <a:p>
-            <a:r>
-              <a:rPr lang="en-US" dirty="0"/>
-              <a:t/>
-            </a:r>
             <a:endParaRPr lang="en-US" dirty="0"/>
           </a:p>
         </p:txBody>
@@ -1041,10 +761,6 @@
           <a:bodyPr/>
           <a:lstStyle/>
           <a:p>
-            <a:r>
-              <a:rPr lang="en-US" dirty="0"/>
-              <a:t/>
-            </a:r>
             <a:endParaRPr lang="en-US" dirty="0"/>
           </a:p>
         </p:txBody>
@@ -1129,10 +845,6 @@
           <a:bodyPr/>
           <a:lstStyle/>
           <a:p>
-            <a:r>
-              <a:rPr lang="en-US" dirty="0"/>
-              <a:t/>
-            </a:r>
             <a:endParaRPr lang="en-US" dirty="0"/>
           </a:p>
         </p:txBody>
@@ -1217,10 +929,6 @@
           <a:bodyPr/>
           <a:lstStyle/>
           <a:p>
-            <a:r>
-              <a:rPr lang="en-US" dirty="0"/>
-              <a:t/>
-            </a:r>
             <a:endParaRPr lang="en-US" dirty="0"/>
           </a:p>
         </p:txBody>
@@ -1305,10 +1013,6 @@
           <a:bodyPr/>
           <a:lstStyle/>
           <a:p>
-            <a:r>
-              <a:rPr lang="en-US" dirty="0"/>
-              <a:t/>
-            </a:r>
             <a:endParaRPr lang="en-US" dirty="0"/>
           </a:p>
         </p:txBody>
@@ -1393,10 +1097,6 @@
           <a:bodyPr/>
           <a:lstStyle/>
           <a:p>
-            <a:r>
-              <a:rPr lang="en-US" dirty="0"/>
-              <a:t/>
-            </a:r>
             <a:endParaRPr lang="en-US" dirty="0"/>
           </a:p>
         </p:txBody>
@@ -1481,10 +1181,6 @@
           <a:bodyPr/>
           <a:lstStyle/>
           <a:p>
-            <a:r>
-              <a:rPr lang="en-US" dirty="0"/>
-              <a:t/>
-            </a:r>
             <a:endParaRPr lang="en-US" dirty="0"/>
           </a:p>
         </p:txBody>
@@ -1569,10 +1265,6 @@
           <a:bodyPr/>
           <a:lstStyle/>
           <a:p>
-            <a:r>
-              <a:rPr lang="en-US" dirty="0"/>
-              <a:t/>
-            </a:r>
             <a:endParaRPr lang="en-US" dirty="0"/>
           </a:p>
         </p:txBody>
@@ -1657,10 +1349,6 @@
           <a:bodyPr/>
           <a:lstStyle/>
           <a:p>
-            <a:r>
-              <a:rPr lang="en-US" dirty="0"/>
-              <a:t/>
-            </a:r>
             <a:endParaRPr lang="en-US" dirty="0"/>
           </a:p>
         </p:txBody>
@@ -1745,10 +1433,6 @@
           <a:bodyPr/>
           <a:lstStyle/>
           <a:p>
-            <a:r>
-              <a:rPr lang="en-US" dirty="0"/>
-              <a:t/>
-            </a:r>
             <a:endParaRPr lang="en-US" dirty="0"/>
           </a:p>
         </p:txBody>
@@ -1833,10 +1517,6 @@
           <a:bodyPr/>
           <a:lstStyle/>
           <a:p>
-            <a:r>
-              <a:rPr lang="en-US" dirty="0"/>
-              <a:t/>
-            </a:r>
             <a:endParaRPr lang="en-US" dirty="0"/>
           </a:p>
         </p:txBody>
@@ -1921,10 +1601,6 @@
           <a:bodyPr/>
           <a:lstStyle/>
           <a:p>
-            <a:r>
-              <a:rPr lang="en-US" dirty="0"/>
-              <a:t/>
-            </a:r>
             <a:endParaRPr lang="en-US" dirty="0"/>
           </a:p>
         </p:txBody>
@@ -1998,6 +1674,11 @@
 <file path=ppt/slideMasters/slideMaster1.xml><?xml version="1.0" encoding="utf-8"?>
 <p:sldMaster xmlns:a="http://schemas.openxmlformats.org/drawingml/2006/main" xmlns:r="http://schemas.openxmlformats.org/officeDocument/2006/relationships" xmlns:p="http://schemas.openxmlformats.org/presentationml/2006/main">
   <p:cSld>
+    <p:bg>
+      <p:bgRef idx="1001">
+        <a:schemeClr val="bg1"/>
+      </p:bgRef>
+    </p:bg>
     <p:spTree>
       <p:nvGrpSpPr>
         <p:cNvPr id="1" name=""/>
@@ -2280,6 +1961,7 @@
         <a:solidFill>
           <a:srgbClr val="10162B"/>
         </a:solidFill>
+        <a:effectLst/>
       </p:bgPr>
     </p:bg>
     <p:spTree>
@@ -2361,11 +2043,11 @@
           <a:bodyPr wrap="square" lIns="0" tIns="0" rIns="0" bIns="0" rtlCol="0" anchor="ctr"/>
           <a:lstStyle/>
           <a:p>
-            <a:pPr indent="0" marL="0">
+            <a:pPr marL="0" indent="0">
               <a:buNone/>
             </a:pPr>
             <a:r>
-              <a:rPr lang="en-US" sz="1300" b="1" spc="200" kern="0" dirty="0">
+              <a:rPr lang="en-US" sz="1300" b="1" kern="0" spc="200" dirty="0">
                 <a:solidFill>
                   <a:srgbClr val="D4AF37"/>
                 </a:solidFill>
@@ -2400,7 +2082,7 @@
           <a:bodyPr wrap="square" lIns="0" tIns="0" rIns="0" bIns="0" rtlCol="0" anchor="ctr"/>
           <a:lstStyle/>
           <a:p>
-            <a:pPr indent="0" marL="0">
+            <a:pPr marL="0" indent="0">
               <a:buNone/>
             </a:pPr>
             <a:r>
@@ -2439,7 +2121,7 @@
           <a:bodyPr wrap="square" lIns="0" tIns="0" rIns="0" bIns="0" rtlCol="0" anchor="ctr"/>
           <a:lstStyle/>
           <a:p>
-            <a:pPr indent="0" marL="0">
+            <a:pPr marL="0" indent="0">
               <a:buNone/>
             </a:pPr>
             <a:r>
@@ -2501,7 +2183,7 @@
           <a:bodyPr wrap="square" lIns="0" tIns="0" rIns="0" bIns="0" rtlCol="0" anchor="ctr"/>
           <a:lstStyle/>
           <a:p>
-            <a:pPr indent="0" marL="0">
+            <a:pPr marL="0" indent="0">
               <a:buNone/>
             </a:pPr>
             <a:r>
@@ -2521,14 +2203,14 @@
       </p:sp>
       <p:pic>
         <p:nvPicPr>
-          <p:cNvPr id="9" name="Image 0" descr="/home/claude/knapsack_pptx/icons/gradcap_gold.png">    </p:cNvPr>
+          <p:cNvPr id="9" name="Image 0" descr="/home/claude/knapsack_pptx/icons/gradcap_gold.png"/>
           <p:cNvPicPr>
             <a:picLocks noChangeAspect="1"/>
           </p:cNvPicPr>
           <p:nvPr/>
         </p:nvPicPr>
         <p:blipFill>
-          <a:blip r:embed="rId1"/>
+          <a:blip r:embed="rId3"/>
           <a:stretch>
             <a:fillRect/>
           </a:stretch>
@@ -2564,7 +2246,7 @@
           <a:bodyPr wrap="square" lIns="0" tIns="0" rIns="0" bIns="0" rtlCol="0" anchor="t"/>
           <a:lstStyle/>
           <a:p>
-            <a:pPr indent="0" marL="0">
+            <a:pPr marL="0" indent="0">
               <a:lnSpc>
                 <a:spcPts val="2000"/>
               </a:lnSpc>
@@ -2579,15 +2261,31 @@
                 <a:ea typeface="Calibri" pitchFamily="34" charset="-122"/>
                 <a:cs typeface="Calibri" pitchFamily="34" charset="-120"/>
               </a:rPr>
-              <a:t>Maycon
+              <a:t>Maycon Carpes e </a:t>
+            </a:r>
+            <a:r>
+              <a:rPr lang="en-US" sz="1600" b="1" dirty="0" err="1">
+                <a:solidFill>
+                  <a:srgbClr val="FFFFFF"/>
+                </a:solidFill>
+                <a:latin typeface="Calibri" pitchFamily="34" charset="0"/>
+                <a:ea typeface="Calibri" pitchFamily="34" charset="-122"/>
+                <a:cs typeface="Calibri" pitchFamily="34" charset="-120"/>
+              </a:rPr>
+              <a:t>Cauã</a:t>
+            </a:r>
+            <a:r>
+              <a:rPr lang="en-US" sz="1600" b="1" dirty="0">
+                <a:solidFill>
+                  <a:srgbClr val="FFFFFF"/>
+                </a:solidFill>
+                <a:latin typeface="Calibri" pitchFamily="34" charset="0"/>
+                <a:ea typeface="Calibri" pitchFamily="34" charset="-122"/>
+                <a:cs typeface="Calibri" pitchFamily="34" charset="-120"/>
+              </a:rPr>
+              <a:t> Fortes
 </a:t>
             </a:r>
-            <a:pPr indent="0" marL="0">
-              <a:lnSpc>
-                <a:spcPts val="2000"/>
-              </a:lnSpc>
-              <a:buNone/>
-            </a:pPr>
             <a:r>
               <a:rPr lang="en-US" sz="1300" dirty="0">
                 <a:solidFill>
@@ -2600,23 +2298,6 @@
               <a:t>Sistemas de Informação — IFSULDEMINAS, Campus Machado
 </a:t>
             </a:r>
-            <a:pPr indent="0" marL="0">
-              <a:lnSpc>
-                <a:spcPts val="2000"/>
-              </a:lnSpc>
-              <a:buNone/>
-            </a:pPr>
-            <a:r>
-              <a:rPr lang="en-US" sz="1300" dirty="0">
-                <a:solidFill>
-                  <a:srgbClr val="9BA6C4"/>
-                </a:solidFill>
-                <a:latin typeface="Calibri" pitchFamily="34" charset="0"/>
-                <a:ea typeface="Calibri" pitchFamily="34" charset="-122"/>
-                <a:cs typeface="Calibri" pitchFamily="34" charset="-120"/>
-              </a:rPr>
-              <a:t>Orientadora: Profª. Drª. Daniela Augusta Guimarães Dias</a:t>
-            </a:r>
             <a:endParaRPr lang="en-US" sz="1600" dirty="0"/>
           </a:p>
         </p:txBody>
@@ -2642,7 +2323,7 @@
           <a:bodyPr wrap="square" lIns="0" tIns="0" rIns="0" bIns="0" rtlCol="0" anchor="ctr"/>
           <a:lstStyle/>
           <a:p>
-            <a:pPr algn="r" indent="0" marL="0">
+            <a:pPr marL="0" indent="0" algn="r">
               <a:buNone/>
             </a:pPr>
             <a:r>
@@ -2676,6 +2357,7 @@
         <a:solidFill>
           <a:srgbClr val="FFFFFF"/>
         </a:solidFill>
+        <a:effectLst/>
       </p:bgPr>
     </p:bg>
     <p:spTree>
@@ -2713,11 +2395,11 @@
           <a:bodyPr wrap="square" lIns="0" tIns="0" rIns="0" bIns="0" rtlCol="0" anchor="ctr"/>
           <a:lstStyle/>
           <a:p>
-            <a:pPr algn="l" indent="0" marL="0">
+            <a:pPr marL="0" indent="0" algn="l">
               <a:buNone/>
             </a:pPr>
             <a:r>
-              <a:rPr lang="en-US" sz="1200" b="1" spc="200" kern="0" dirty="0">
+              <a:rPr lang="en-US" sz="1200" b="1" kern="0" spc="200" dirty="0">
                 <a:solidFill>
                   <a:srgbClr val="D4AF37"/>
                 </a:solidFill>
@@ -2752,7 +2434,7 @@
           <a:bodyPr wrap="square" lIns="0" tIns="0" rIns="0" bIns="0" rtlCol="0" anchor="ctr"/>
           <a:lstStyle/>
           <a:p>
-            <a:pPr indent="0" marL="0">
+            <a:pPr marL="0" indent="0">
               <a:buNone/>
             </a:pPr>
             <a:r>
@@ -2799,14 +2481,14 @@
       </p:sp>
       <p:pic>
         <p:nvPicPr>
-          <p:cNvPr id="5" name="Image 0" descr="/home/claude/knapsack_pptx/icons/clock_navy.png">    </p:cNvPr>
+          <p:cNvPr id="5" name="Image 0" descr="/home/claude/knapsack_pptx/icons/clock_navy.png"/>
           <p:cNvPicPr>
             <a:picLocks noChangeAspect="1"/>
           </p:cNvPicPr>
           <p:nvPr/>
         </p:nvPicPr>
         <p:blipFill>
-          <a:blip r:embed="rId1"/>
+          <a:blip r:embed="rId3"/>
           <a:stretch>
             <a:fillRect/>
           </a:stretch>
@@ -2842,7 +2524,7 @@
           <a:bodyPr wrap="square" lIns="0" tIns="0" rIns="0" bIns="0" rtlCol="0" anchor="ctr"/>
           <a:lstStyle/>
           <a:p>
-            <a:pPr indent="0" marL="0">
+            <a:pPr marL="0" indent="0">
               <a:buNone/>
             </a:pPr>
             <a:r>
@@ -2881,7 +2563,7 @@
           <a:bodyPr wrap="square" lIns="0" tIns="0" rIns="0" bIns="0" rtlCol="0" anchor="t"/>
           <a:lstStyle/>
           <a:p>
-            <a:pPr indent="0" marL="0">
+            <a:pPr marL="0" indent="0">
               <a:lnSpc>
                 <a:spcPts val="1700"/>
               </a:lnSpc>
@@ -2898,12 +2580,6 @@
               </a:rPr>
               <a:t>Tabu é mais rápido em instâncias pequenas (</a:t>
             </a:r>
-            <a:pPr indent="0" marL="0">
-              <a:lnSpc>
-                <a:spcPts val="1700"/>
-              </a:lnSpc>
-              <a:buNone/>
-            </a:pPr>
             <a:r>
               <a:rPr lang="en-US" sz="1250" b="1" dirty="0">
                 <a:solidFill>
@@ -2915,12 +2591,6 @@
               </a:rPr>
               <a:t>0.001s</a:t>
             </a:r>
-            <a:pPr indent="0" marL="0">
-              <a:lnSpc>
-                <a:spcPts val="1700"/>
-              </a:lnSpc>
-              <a:buNone/>
-            </a:pPr>
             <a:r>
               <a:rPr lang="en-US" sz="1250" dirty="0">
                 <a:solidFill>
@@ -2932,12 +2602,6 @@
               </a:rPr>
               <a:t> vs </a:t>
             </a:r>
-            <a:pPr indent="0" marL="0">
-              <a:lnSpc>
-                <a:spcPts val="1700"/>
-              </a:lnSpc>
-              <a:buNone/>
-            </a:pPr>
             <a:r>
               <a:rPr lang="en-US" sz="1250" b="1" dirty="0">
                 <a:solidFill>
@@ -2949,12 +2613,6 @@
               </a:rPr>
               <a:t>0.02s</a:t>
             </a:r>
-            <a:pPr indent="0" marL="0">
-              <a:lnSpc>
-                <a:spcPts val="1700"/>
-              </a:lnSpc>
-              <a:buNone/>
-            </a:pPr>
             <a:r>
               <a:rPr lang="en-US" sz="1250" dirty="0">
                 <a:solidFill>
@@ -2999,14 +2657,14 @@
       </p:sp>
       <p:pic>
         <p:nvPicPr>
-          <p:cNvPr id="9" name="Image 1" descr="/home/claude/knapsack_pptx/icons/chartline_navy.png">    </p:cNvPr>
+          <p:cNvPr id="9" name="Image 1" descr="/home/claude/knapsack_pptx/icons/chartline_navy.png"/>
           <p:cNvPicPr>
             <a:picLocks noChangeAspect="1"/>
           </p:cNvPicPr>
           <p:nvPr/>
         </p:nvPicPr>
         <p:blipFill>
-          <a:blip r:embed="rId2"/>
+          <a:blip r:embed="rId4"/>
           <a:stretch>
             <a:fillRect/>
           </a:stretch>
@@ -3042,7 +2700,7 @@
           <a:bodyPr wrap="square" lIns="0" tIns="0" rIns="0" bIns="0" rtlCol="0" anchor="ctr"/>
           <a:lstStyle/>
           <a:p>
-            <a:pPr indent="0" marL="0">
+            <a:pPr marL="0" indent="0">
               <a:buNone/>
             </a:pPr>
             <a:r>
@@ -3081,7 +2739,7 @@
           <a:bodyPr wrap="square" lIns="0" tIns="0" rIns="0" bIns="0" rtlCol="0" anchor="t"/>
           <a:lstStyle/>
           <a:p>
-            <a:pPr indent="0" marL="0">
+            <a:pPr marL="0" indent="0">
               <a:lnSpc>
                 <a:spcPts val="1700"/>
               </a:lnSpc>
@@ -3098,12 +2756,6 @@
               </a:rPr>
               <a:t>Tabu converge rapidamente graças à inicialização gulosa; o AG converge de forma gradual, sustentado pela </a:t>
             </a:r>
-            <a:pPr indent="0" marL="0">
-              <a:lnSpc>
-                <a:spcPts val="1700"/>
-              </a:lnSpc>
-              <a:buNone/>
-            </a:pPr>
             <a:r>
               <a:rPr lang="en-US" sz="1250" b="1" dirty="0">
                 <a:solidFill>
@@ -3115,12 +2767,6 @@
               </a:rPr>
               <a:t>diversidade populacional</a:t>
             </a:r>
-            <a:pPr indent="0" marL="0">
-              <a:lnSpc>
-                <a:spcPts val="1700"/>
-              </a:lnSpc>
-              <a:buNone/>
-            </a:pPr>
             <a:r>
               <a:rPr lang="en-US" sz="1250" dirty="0">
                 <a:solidFill>
@@ -3157,7 +2803,7 @@
           <a:bodyPr wrap="square" lIns="0" tIns="0" rIns="0" bIns="0" rtlCol="0" anchor="ctr"/>
           <a:lstStyle/>
           <a:p>
-            <a:pPr indent="0" marL="0">
+            <a:pPr marL="0" indent="0">
               <a:buNone/>
             </a:pPr>
             <a:r>
@@ -3177,7 +2823,7 @@
       </p:sp>
       <p:graphicFrame>
         <p:nvGraphicFramePr>
-          <p:cNvPr id="13" name="Chart 0" descr=""/>
+          <p:cNvPr id="13" name="Chart 0"/>
           <p:cNvGraphicFramePr/>
           <p:nvPr/>
         </p:nvGraphicFramePr>
@@ -3185,9 +2831,9 @@
           <a:off x="5852160" y="1965960"/>
           <a:ext cx="5760720" cy="3291840"/>
         </p:xfrm>
-        <a:graphic xmlns:a="http://schemas.openxmlformats.org/drawingml/2006/main">
+        <a:graphic>
           <a:graphicData uri="http://schemas.openxmlformats.org/drawingml/2006/chart">
-            <c:chart xmlns:c="http://schemas.openxmlformats.org/drawingml/2006/chart" r:id="rId3"/>
+            <c:chart xmlns:c="http://schemas.openxmlformats.org/drawingml/2006/chart" xmlns:r="http://schemas.openxmlformats.org/officeDocument/2006/relationships" r:id="rId5"/>
           </a:graphicData>
         </a:graphic>
       </p:graphicFrame>
@@ -3212,7 +2858,7 @@
           <a:bodyPr wrap="square" lIns="0" tIns="0" rIns="0" bIns="0" rtlCol="0" anchor="ctr"/>
           <a:lstStyle/>
           <a:p>
-            <a:pPr indent="0" marL="0">
+            <a:pPr marL="0" indent="0">
               <a:buNone/>
             </a:pPr>
             <a:r>
@@ -3251,7 +2897,7 @@
           <a:bodyPr wrap="square" lIns="0" tIns="0" rIns="0" bIns="0" rtlCol="0" anchor="ctr"/>
           <a:lstStyle/>
           <a:p>
-            <a:pPr algn="r" indent="0" marL="0">
+            <a:pPr marL="0" indent="0" algn="r">
               <a:buNone/>
             </a:pPr>
             <a:r>
@@ -3285,6 +2931,7 @@
         <a:solidFill>
           <a:srgbClr val="10162B"/>
         </a:solidFill>
+        <a:effectLst/>
       </p:bgPr>
     </p:bg>
     <p:spTree>
@@ -3322,11 +2969,11 @@
           <a:bodyPr wrap="square" lIns="0" tIns="0" rIns="0" bIns="0" rtlCol="0" anchor="ctr"/>
           <a:lstStyle/>
           <a:p>
-            <a:pPr algn="l" indent="0" marL="0">
+            <a:pPr marL="0" indent="0" algn="l">
               <a:buNone/>
             </a:pPr>
             <a:r>
-              <a:rPr lang="en-US" sz="1200" b="1" spc="200" kern="0" dirty="0">
+              <a:rPr lang="en-US" sz="1200" b="1" kern="0" spc="200" dirty="0">
                 <a:solidFill>
                   <a:srgbClr val="D4AF37"/>
                 </a:solidFill>
@@ -3361,7 +3008,7 @@
           <a:bodyPr wrap="square" lIns="0" tIns="0" rIns="0" bIns="0" rtlCol="0" anchor="ctr"/>
           <a:lstStyle/>
           <a:p>
-            <a:pPr algn="l" indent="0" marL="0">
+            <a:pPr marL="0" indent="0" algn="l">
               <a:buNone/>
             </a:pPr>
             <a:r>
@@ -3428,14 +3075,14 @@
       </p:sp>
       <p:pic>
         <p:nvPicPr>
-          <p:cNvPr id="6" name="Image 0" descr="/home/claude/knapsack_pptx/icons/check_gold.png">    </p:cNvPr>
+          <p:cNvPr id="6" name="Image 0" descr="/home/claude/knapsack_pptx/icons/check_gold.png"/>
           <p:cNvPicPr>
             <a:picLocks noChangeAspect="1"/>
           </p:cNvPicPr>
           <p:nvPr/>
         </p:nvPicPr>
         <p:blipFill>
-          <a:blip r:embed="rId1"/>
+          <a:blip r:embed="rId3"/>
           <a:stretch>
             <a:fillRect/>
           </a:stretch>
@@ -3471,7 +3118,7 @@
           <a:bodyPr wrap="square" lIns="0" tIns="0" rIns="0" bIns="0" rtlCol="0" anchor="t"/>
           <a:lstStyle/>
           <a:p>
-            <a:pPr indent="0" marL="0">
+            <a:pPr marL="0" indent="0">
               <a:buNone/>
             </a:pPr>
             <a:r>
@@ -3510,7 +3157,7 @@
           <a:bodyPr wrap="square" lIns="0" tIns="0" rIns="0" bIns="0" rtlCol="0" anchor="t"/>
           <a:lstStyle/>
           <a:p>
-            <a:pPr indent="0" marL="0">
+            <a:pPr marL="0" indent="0">
               <a:buNone/>
             </a:pPr>
             <a:r>
@@ -3577,14 +3224,14 @@
       </p:sp>
       <p:pic>
         <p:nvPicPr>
-          <p:cNvPr id="11" name="Image 1" descr="/home/claude/knapsack_pptx/icons/clock_ice.png">    </p:cNvPr>
+          <p:cNvPr id="11" name="Image 1" descr="/home/claude/knapsack_pptx/icons/clock_ice.png"/>
           <p:cNvPicPr>
             <a:picLocks noChangeAspect="1"/>
           </p:cNvPicPr>
           <p:nvPr/>
         </p:nvPicPr>
         <p:blipFill>
-          <a:blip r:embed="rId2"/>
+          <a:blip r:embed="rId4"/>
           <a:stretch>
             <a:fillRect/>
           </a:stretch>
@@ -3620,7 +3267,7 @@
           <a:bodyPr wrap="square" lIns="0" tIns="0" rIns="0" bIns="0" rtlCol="0" anchor="t"/>
           <a:lstStyle/>
           <a:p>
-            <a:pPr indent="0" marL="0">
+            <a:pPr marL="0" indent="0">
               <a:buNone/>
             </a:pPr>
             <a:r>
@@ -3659,7 +3306,7 @@
           <a:bodyPr wrap="square" lIns="0" tIns="0" rIns="0" bIns="0" rtlCol="0" anchor="t"/>
           <a:lstStyle/>
           <a:p>
-            <a:pPr indent="0" marL="0">
+            <a:pPr marL="0" indent="0">
               <a:buNone/>
             </a:pPr>
             <a:r>
@@ -3726,14 +3373,14 @@
       </p:sp>
       <p:pic>
         <p:nvPicPr>
-          <p:cNvPr id="16" name="Image 2" descr="/home/claude/knapsack_pptx/icons/layers_ice.png">    </p:cNvPr>
+          <p:cNvPr id="16" name="Image 2" descr="/home/claude/knapsack_pptx/icons/layers_ice.png"/>
           <p:cNvPicPr>
             <a:picLocks noChangeAspect="1"/>
           </p:cNvPicPr>
           <p:nvPr/>
         </p:nvPicPr>
         <p:blipFill>
-          <a:blip r:embed="rId3"/>
+          <a:blip r:embed="rId5"/>
           <a:stretch>
             <a:fillRect/>
           </a:stretch>
@@ -3769,7 +3416,7 @@
           <a:bodyPr wrap="square" lIns="0" tIns="0" rIns="0" bIns="0" rtlCol="0" anchor="t"/>
           <a:lstStyle/>
           <a:p>
-            <a:pPr indent="0" marL="0">
+            <a:pPr marL="0" indent="0">
               <a:buNone/>
             </a:pPr>
             <a:r>
@@ -3808,7 +3455,7 @@
           <a:bodyPr wrap="square" lIns="0" tIns="0" rIns="0" bIns="0" rtlCol="0" anchor="t"/>
           <a:lstStyle/>
           <a:p>
-            <a:pPr indent="0" marL="0">
+            <a:pPr marL="0" indent="0">
               <a:buNone/>
             </a:pPr>
             <a:r>
@@ -3875,14 +3522,14 @@
       </p:sp>
       <p:pic>
         <p:nvPicPr>
-          <p:cNvPr id="21" name="Image 3" descr="/home/claude/knapsack_pptx/icons/target_gold.png">    </p:cNvPr>
+          <p:cNvPr id="21" name="Image 3" descr="/home/claude/knapsack_pptx/icons/target_gold.png"/>
           <p:cNvPicPr>
             <a:picLocks noChangeAspect="1"/>
           </p:cNvPicPr>
           <p:nvPr/>
         </p:nvPicPr>
         <p:blipFill>
-          <a:blip r:embed="rId4"/>
+          <a:blip r:embed="rId6"/>
           <a:stretch>
             <a:fillRect/>
           </a:stretch>
@@ -3918,7 +3565,7 @@
           <a:bodyPr wrap="square" lIns="0" tIns="0" rIns="0" bIns="0" rtlCol="0" anchor="t"/>
           <a:lstStyle/>
           <a:p>
-            <a:pPr indent="0" marL="0">
+            <a:pPr marL="0" indent="0">
               <a:buNone/>
             </a:pPr>
             <a:r>
@@ -3957,7 +3604,7 @@
           <a:bodyPr wrap="square" lIns="0" tIns="0" rIns="0" bIns="0" rtlCol="0" anchor="t"/>
           <a:lstStyle/>
           <a:p>
-            <a:pPr indent="0" marL="0">
+            <a:pPr marL="0" indent="0">
               <a:buNone/>
             </a:pPr>
             <a:r>
@@ -3996,7 +3643,7 @@
           <a:bodyPr wrap="square" lIns="0" tIns="0" rIns="0" bIns="0" rtlCol="0" anchor="ctr"/>
           <a:lstStyle/>
           <a:p>
-            <a:pPr algn="r" indent="0" marL="0">
+            <a:pPr marL="0" indent="0" algn="r">
               <a:buNone/>
             </a:pPr>
             <a:r>
@@ -4030,6 +3677,7 @@
         <a:solidFill>
           <a:srgbClr val="10162B"/>
         </a:solidFill>
+        <a:effectLst/>
       </p:bgPr>
     </p:bg>
     <p:spTree>
@@ -4089,7 +3737,7 @@
           <a:bodyPr wrap="square" lIns="0" tIns="0" rIns="0" bIns="0" rtlCol="0" anchor="ctr"/>
           <a:lstStyle/>
           <a:p>
-            <a:pPr indent="0" marL="0">
+            <a:pPr marL="0" indent="0">
               <a:buNone/>
             </a:pPr>
             <a:r>
@@ -4128,7 +3776,7 @@
           <a:bodyPr wrap="square" lIns="0" tIns="0" rIns="0" bIns="0" rtlCol="0" anchor="ctr"/>
           <a:lstStyle/>
           <a:p>
-            <a:pPr indent="0" marL="0">
+            <a:pPr marL="0" indent="0">
               <a:buNone/>
             </a:pPr>
             <a:r>
@@ -4190,11 +3838,11 @@
           <a:bodyPr wrap="square" lIns="0" tIns="0" rIns="0" bIns="0" rtlCol="0" anchor="ctr"/>
           <a:lstStyle/>
           <a:p>
-            <a:pPr indent="0" marL="0">
+            <a:pPr marL="0" indent="0">
               <a:buNone/>
             </a:pPr>
             <a:r>
-              <a:rPr lang="en-US" sz="1200" b="1" spc="200" kern="0" dirty="0">
+              <a:rPr lang="en-US" sz="1200" b="1" kern="0" spc="200" dirty="0">
                 <a:solidFill>
                   <a:srgbClr val="D4AF37"/>
                 </a:solidFill>
@@ -4210,14 +3858,14 @@
       </p:sp>
       <p:pic>
         <p:nvPicPr>
-          <p:cNvPr id="7" name="Image 0" descr="/home/claude/knapsack_pptx/icons/table_ice.png">    </p:cNvPr>
+          <p:cNvPr id="7" name="Image 0" descr="/home/claude/knapsack_pptx/icons/table_ice.png"/>
           <p:cNvPicPr>
             <a:picLocks noChangeAspect="1"/>
           </p:cNvPicPr>
           <p:nvPr/>
         </p:nvPicPr>
         <p:blipFill>
-          <a:blip r:embed="rId1"/>
+          <a:blip r:embed="rId3"/>
           <a:stretch>
             <a:fillRect/>
           </a:stretch>
@@ -4253,7 +3901,7 @@
           <a:bodyPr wrap="square" lIns="0" tIns="0" rIns="0" bIns="0" rtlCol="0" anchor="t"/>
           <a:lstStyle/>
           <a:p>
-            <a:pPr indent="0" marL="0">
+            <a:pPr marL="0" indent="0">
               <a:lnSpc>
                 <a:spcPts val="1500"/>
               </a:lnSpc>
@@ -4271,12 +3919,6 @@
               <a:t>Dados das instâncias
 </a:t>
             </a:r>
-            <a:pPr indent="0" marL="0">
-              <a:lnSpc>
-                <a:spcPts val="1500"/>
-              </a:lnSpc>
-              <a:buNone/>
-            </a:pPr>
             <a:r>
               <a:rPr lang="en-US" sz="1200" dirty="0">
                 <a:solidFill>
@@ -4294,14 +3936,14 @@
       </p:sp>
       <p:pic>
         <p:nvPicPr>
-          <p:cNvPr id="9" name="Image 1" descr="/home/claude/knapsack_pptx/icons/code_ice.png">    </p:cNvPr>
+          <p:cNvPr id="9" name="Image 1" descr="/home/claude/knapsack_pptx/icons/code_ice.png"/>
           <p:cNvPicPr>
             <a:picLocks noChangeAspect="1"/>
           </p:cNvPicPr>
           <p:nvPr/>
         </p:nvPicPr>
         <p:blipFill>
-          <a:blip r:embed="rId2"/>
+          <a:blip r:embed="rId4"/>
           <a:stretch>
             <a:fillRect/>
           </a:stretch>
@@ -4337,7 +3979,7 @@
           <a:bodyPr wrap="square" lIns="0" tIns="0" rIns="0" bIns="0" rtlCol="0" anchor="t"/>
           <a:lstStyle/>
           <a:p>
-            <a:pPr indent="0" marL="0">
+            <a:pPr marL="0" indent="0">
               <a:lnSpc>
                 <a:spcPts val="1500"/>
               </a:lnSpc>
@@ -4355,12 +3997,6 @@
               <a:t>Linguagem de implementação
 </a:t>
             </a:r>
-            <a:pPr indent="0" marL="0">
-              <a:lnSpc>
-                <a:spcPts val="1500"/>
-              </a:lnSpc>
-              <a:buNone/>
-            </a:pPr>
             <a:r>
               <a:rPr lang="en-US" sz="1200" dirty="0">
                 <a:solidFill>
@@ -4378,14 +4014,14 @@
       </p:sp>
       <p:pic>
         <p:nvPicPr>
-          <p:cNvPr id="11" name="Image 2" descr="/home/claude/knapsack_pptx/icons/filecode_ice.png">    </p:cNvPr>
+          <p:cNvPr id="11" name="Image 2" descr="/home/claude/knapsack_pptx/icons/filecode_ice.png"/>
           <p:cNvPicPr>
             <a:picLocks noChangeAspect="1"/>
           </p:cNvPicPr>
           <p:nvPr/>
         </p:nvPicPr>
         <p:blipFill>
-          <a:blip r:embed="rId3"/>
+          <a:blip r:embed="rId5"/>
           <a:stretch>
             <a:fillRect/>
           </a:stretch>
@@ -4421,7 +4057,7 @@
           <a:bodyPr wrap="square" lIns="0" tIns="0" rIns="0" bIns="0" rtlCol="0" anchor="t"/>
           <a:lstStyle/>
           <a:p>
-            <a:pPr indent="0" marL="0">
+            <a:pPr marL="0" indent="0">
               <a:lnSpc>
                 <a:spcPts val="1500"/>
               </a:lnSpc>
@@ -4439,12 +4075,6 @@
               <a:t>Saídas geradas
 </a:t>
             </a:r>
-            <a:pPr indent="0" marL="0">
-              <a:lnSpc>
-                <a:spcPts val="1500"/>
-              </a:lnSpc>
-              <a:buNone/>
-            </a:pPr>
             <a:r>
               <a:rPr lang="en-US" sz="1200" dirty="0">
                 <a:solidFill>
@@ -4489,14 +4119,14 @@
       </p:sp>
       <p:pic>
         <p:nvPicPr>
-          <p:cNvPr id="14" name="Image 3" descr="/home/claude/knapsack_pptx/icons/gradcap_gold.png">    </p:cNvPr>
+          <p:cNvPr id="14" name="Image 3" descr="/home/claude/knapsack_pptx/icons/gradcap_gold.png"/>
           <p:cNvPicPr>
             <a:picLocks noChangeAspect="1"/>
           </p:cNvPicPr>
           <p:nvPr/>
         </p:nvPicPr>
         <p:blipFill>
-          <a:blip r:embed="rId4"/>
+          <a:blip r:embed="rId6"/>
           <a:stretch>
             <a:fillRect/>
           </a:stretch>
@@ -4532,7 +4162,7 @@
           <a:bodyPr wrap="square" lIns="0" tIns="0" rIns="0" bIns="0" rtlCol="0" anchor="t"/>
           <a:lstStyle/>
           <a:p>
-            <a:pPr indent="0" marL="0">
+            <a:pPr marL="0" indent="0">
               <a:lnSpc>
                 <a:spcPts val="1600"/>
               </a:lnSpc>
@@ -4550,12 +4180,6 @@
               <a:t>Maycon
 </a:t>
             </a:r>
-            <a:pPr indent="0" marL="0">
-              <a:lnSpc>
-                <a:spcPts val="1600"/>
-              </a:lnSpc>
-              <a:buNone/>
-            </a:pPr>
             <a:r>
               <a:rPr lang="en-US" sz="1150" dirty="0">
                 <a:solidFill>
@@ -4566,24 +4190,7 @@
                 <a:cs typeface="Calibri" pitchFamily="34" charset="-120"/>
               </a:rPr>
               <a:t>Sistemas de Informação
-</a:t>
-            </a:r>
-            <a:pPr indent="0" marL="0">
-              <a:lnSpc>
-                <a:spcPts val="1600"/>
-              </a:lnSpc>
-              <a:buNone/>
-            </a:pPr>
-            <a:r>
-              <a:rPr lang="en-US" sz="1150" dirty="0">
-                <a:solidFill>
-                  <a:srgbClr val="9BA6C4"/>
-                </a:solidFill>
-                <a:latin typeface="Calibri" pitchFamily="34" charset="0"/>
-                <a:ea typeface="Calibri" pitchFamily="34" charset="-122"/>
-                <a:cs typeface="Calibri" pitchFamily="34" charset="-120"/>
-              </a:rPr>
-              <a:t>IFSULDEMINAS — Campus Machado</a:t>
+IFSULDEMINAS — Campus Machado</a:t>
             </a:r>
             <a:endParaRPr lang="en-US" sz="1500" dirty="0"/>
           </a:p>
@@ -4610,7 +4217,7 @@
           <a:bodyPr wrap="square" lIns="0" tIns="0" rIns="0" bIns="0" rtlCol="0" anchor="ctr"/>
           <a:lstStyle/>
           <a:p>
-            <a:pPr algn="r" indent="0" marL="0">
+            <a:pPr marL="0" indent="0" algn="r">
               <a:buNone/>
             </a:pPr>
             <a:r>
@@ -4644,6 +4251,7 @@
         <a:solidFill>
           <a:srgbClr val="FFFFFF"/>
         </a:solidFill>
+        <a:effectLst/>
       </p:bgPr>
     </p:bg>
     <p:spTree>
@@ -4681,11 +4289,11 @@
           <a:bodyPr wrap="square" lIns="0" tIns="0" rIns="0" bIns="0" rtlCol="0" anchor="ctr"/>
           <a:lstStyle/>
           <a:p>
-            <a:pPr algn="l" indent="0" marL="0">
+            <a:pPr marL="0" indent="0" algn="l">
               <a:buNone/>
             </a:pPr>
             <a:r>
-              <a:rPr lang="en-US" sz="1200" b="1" spc="200" kern="0" dirty="0">
+              <a:rPr lang="en-US" sz="1200" b="1" kern="0" spc="200" dirty="0">
                 <a:solidFill>
                   <a:srgbClr val="D4AF37"/>
                 </a:solidFill>
@@ -4720,7 +4328,7 @@
           <a:bodyPr wrap="square" lIns="0" tIns="0" rIns="0" bIns="0" rtlCol="0" anchor="ctr"/>
           <a:lstStyle/>
           <a:p>
-            <a:pPr indent="0" marL="0">
+            <a:pPr marL="0" indent="0">
               <a:buNone/>
             </a:pPr>
             <a:r>
@@ -4759,7 +4367,7 @@
           <a:bodyPr wrap="square" lIns="0" tIns="0" rIns="0" bIns="0" rtlCol="0" anchor="t"/>
           <a:lstStyle/>
           <a:p>
-            <a:pPr indent="0" marL="0">
+            <a:pPr marL="0" indent="0">
               <a:lnSpc>
                 <a:spcPts val="2400"/>
               </a:lnSpc>
@@ -4776,12 +4384,6 @@
               </a:rPr>
               <a:t>Dado um conjunto de N itens, cada um com peso </a:t>
             </a:r>
-            <a:pPr indent="0" marL="0">
-              <a:lnSpc>
-                <a:spcPts val="2400"/>
-              </a:lnSpc>
-              <a:buNone/>
-            </a:pPr>
             <a:r>
               <a:rPr lang="en-US" sz="1500" b="1" i="1" dirty="0">
                 <a:solidFill>
@@ -4793,12 +4395,6 @@
               </a:rPr>
               <a:t>wᵢ</a:t>
             </a:r>
-            <a:pPr indent="0" marL="0">
-              <a:lnSpc>
-                <a:spcPts val="2400"/>
-              </a:lnSpc>
-              <a:buNone/>
-            </a:pPr>
             <a:r>
               <a:rPr lang="en-US" sz="1500" dirty="0">
                 <a:solidFill>
@@ -4810,12 +4406,6 @@
               </a:rPr>
               <a:t> e lucro </a:t>
             </a:r>
-            <a:pPr indent="0" marL="0">
-              <a:lnSpc>
-                <a:spcPts val="2400"/>
-              </a:lnSpc>
-              <a:buNone/>
-            </a:pPr>
             <a:r>
               <a:rPr lang="en-US" sz="1500" b="1" i="1" dirty="0">
                 <a:solidFill>
@@ -4827,12 +4417,6 @@
               </a:rPr>
               <a:t>pᵢ</a:t>
             </a:r>
-            <a:pPr indent="0" marL="0">
-              <a:lnSpc>
-                <a:spcPts val="2400"/>
-              </a:lnSpc>
-              <a:buNone/>
-            </a:pPr>
             <a:r>
               <a:rPr lang="en-US" sz="1500" dirty="0">
                 <a:solidFill>
@@ -4844,12 +4428,6 @@
               </a:rPr>
               <a:t>, e uma mochila com capacidade </a:t>
             </a:r>
-            <a:pPr indent="0" marL="0">
-              <a:lnSpc>
-                <a:spcPts val="2400"/>
-              </a:lnSpc>
-              <a:buNone/>
-            </a:pPr>
             <a:r>
               <a:rPr lang="en-US" sz="1500" b="1" i="1" dirty="0">
                 <a:solidFill>
@@ -4861,12 +4439,6 @@
               </a:rPr>
               <a:t>C</a:t>
             </a:r>
-            <a:pPr indent="0" marL="0">
-              <a:lnSpc>
-                <a:spcPts val="2400"/>
-              </a:lnSpc>
-              <a:buNone/>
-            </a:pPr>
             <a:r>
               <a:rPr lang="en-US" sz="1500" dirty="0">
                 <a:solidFill>
@@ -4878,12 +4450,6 @@
               </a:rPr>
               <a:t>, o objetivo é selecionar o subconjunto de itens que </a:t>
             </a:r>
-            <a:pPr indent="0" marL="0">
-              <a:lnSpc>
-                <a:spcPts val="2400"/>
-              </a:lnSpc>
-              <a:buNone/>
-            </a:pPr>
             <a:r>
               <a:rPr lang="en-US" sz="1500" b="1" dirty="0">
                 <a:solidFill>
@@ -4895,12 +4461,6 @@
               </a:rPr>
               <a:t>maximize o lucro total</a:t>
             </a:r>
-            <a:pPr indent="0" marL="0">
-              <a:lnSpc>
-                <a:spcPts val="2400"/>
-              </a:lnSpc>
-              <a:buNone/>
-            </a:pPr>
             <a:r>
               <a:rPr lang="en-US" sz="1500" dirty="0">
                 <a:solidFill>
@@ -4964,7 +4524,7 @@
           <a:bodyPr wrap="square" lIns="0" tIns="0" rIns="0" bIns="0" rtlCol="0" anchor="ctr"/>
           <a:lstStyle/>
           <a:p>
-            <a:pPr algn="l" indent="0" marL="0">
+            <a:pPr marL="0" indent="0" algn="l">
               <a:buNone/>
             </a:pPr>
             <a:r>
@@ -4978,9 +4538,6 @@
               </a:rPr>
               <a:t>maximizar   </a:t>
             </a:r>
-            <a:pPr algn="l" indent="0" marL="0">
-              <a:buNone/>
-            </a:pPr>
             <a:r>
               <a:rPr lang="en-US" sz="1500" b="1" i="1" dirty="0">
                 <a:solidFill>
@@ -4992,9 +4549,6 @@
               </a:rPr>
               <a:t>Σ pᵢxᵢ</a:t>
             </a:r>
-            <a:pPr algn="l" indent="0" marL="0">
-              <a:buNone/>
-            </a:pPr>
             <a:r>
               <a:rPr lang="en-US" sz="1500" b="1" dirty="0">
                 <a:solidFill>
@@ -5006,9 +4560,6 @@
               </a:rPr>
               <a:t>        sujeito a   </a:t>
             </a:r>
-            <a:pPr algn="l" indent="0" marL="0">
-              <a:buNone/>
-            </a:pPr>
             <a:r>
               <a:rPr lang="en-US" sz="1500" b="1" i="1" dirty="0">
                 <a:solidFill>
@@ -5045,7 +4596,7 @@
           <a:bodyPr wrap="square" lIns="0" tIns="0" rIns="0" bIns="0" rtlCol="0" anchor="ctr"/>
           <a:lstStyle/>
           <a:p>
-            <a:pPr indent="0" marL="0">
+            <a:pPr marL="0" indent="0">
               <a:buNone/>
             </a:pPr>
             <a:r>
@@ -5087,14 +4638,14 @@
       </p:sp>
       <p:pic>
         <p:nvPicPr>
-          <p:cNvPr id="9" name="Image 0" descr="/home/claude/knapsack_pptx/icons/flask_gold.png">    </p:cNvPr>
+          <p:cNvPr id="9" name="Image 0" descr="/home/claude/knapsack_pptx/icons/flask_gold.png"/>
           <p:cNvPicPr>
             <a:picLocks noChangeAspect="1"/>
           </p:cNvPicPr>
           <p:nvPr/>
         </p:nvPicPr>
         <p:blipFill>
-          <a:blip r:embed="rId1"/>
+          <a:blip r:embed="rId3"/>
           <a:stretch>
             <a:fillRect/>
           </a:stretch>
@@ -5130,7 +4681,7 @@
           <a:bodyPr wrap="square" lIns="0" tIns="0" rIns="0" bIns="0" rtlCol="0" anchor="t"/>
           <a:lstStyle/>
           <a:p>
-            <a:pPr indent="0" marL="0">
+            <a:pPr marL="0" indent="0">
               <a:lnSpc>
                 <a:spcPts val="1400"/>
               </a:lnSpc>
@@ -5148,12 +4699,6 @@
               <a:t>Classe NP-Difícil
 </a:t>
             </a:r>
-            <a:pPr indent="0" marL="0">
-              <a:lnSpc>
-                <a:spcPts val="1400"/>
-              </a:lnSpc>
-              <a:buNone/>
-            </a:pPr>
             <a:r>
               <a:rPr lang="en-US" sz="1050" dirty="0">
                 <a:solidFill>
@@ -5291,55 +4836,7 @@
       </p:sp>
       <p:pic>
         <p:nvPicPr>
-          <p:cNvPr id="16" name="Image 1" descr="/home/claude/knapsack_pptx/icons/weight_navy.png">    </p:cNvPr>
-          <p:cNvPicPr>
-            <a:picLocks noChangeAspect="1"/>
-          </p:cNvPicPr>
-          <p:nvPr/>
-        </p:nvPicPr>
-        <p:blipFill>
-          <a:blip r:embed="rId2"/>
-          <a:stretch>
-            <a:fillRect/>
-          </a:stretch>
-        </p:blipFill>
-        <p:spPr>
-          <a:xfrm>
-            <a:off x="8915400" y="4343400"/>
-            <a:ext cx="384048" cy="384048"/>
-          </a:xfrm>
-          <a:prstGeom prst="rect">
-            <a:avLst/>
-          </a:prstGeom>
-        </p:spPr>
-      </p:pic>
-      <p:pic>
-        <p:nvPicPr>
-          <p:cNvPr id="17" name="Image 2" descr="/home/claude/knapsack_pptx/icons/coins_gold.png">    </p:cNvPr>
-          <p:cNvPicPr>
-            <a:picLocks noChangeAspect="1"/>
-          </p:cNvPicPr>
-          <p:nvPr/>
-        </p:nvPicPr>
-        <p:blipFill>
-          <a:blip r:embed="rId3"/>
-          <a:stretch>
-            <a:fillRect/>
-          </a:stretch>
-        </p:blipFill>
-        <p:spPr>
-          <a:xfrm>
-            <a:off x="7178040" y="2468880"/>
-            <a:ext cx="502920" cy="502920"/>
-          </a:xfrm>
-          <a:prstGeom prst="rect">
-            <a:avLst/>
-          </a:prstGeom>
-        </p:spPr>
-      </p:pic>
-      <p:pic>
-        <p:nvPicPr>
-          <p:cNvPr id="18" name="Image 3" descr="/home/claude/knapsack_pptx/icons/coins_gold.png">    </p:cNvPr>
+          <p:cNvPr id="16" name="Image 1" descr="/home/claude/knapsack_pptx/icons/weight_navy.png"/>
           <p:cNvPicPr>
             <a:picLocks noChangeAspect="1"/>
           </p:cNvPicPr>
@@ -5353,7 +4850,7 @@
         </p:blipFill>
         <p:spPr>
           <a:xfrm>
-            <a:off x="11109960" y="3291840"/>
+            <a:off x="8915400" y="4343400"/>
             <a:ext cx="384048" cy="384048"/>
           </a:xfrm>
           <a:prstGeom prst="rect">
@@ -5363,7 +4860,7 @@
       </p:pic>
       <p:pic>
         <p:nvPicPr>
-          <p:cNvPr id="19" name="Image 4" descr="/home/claude/knapsack_pptx/icons/weight_navy.png">    </p:cNvPr>
+          <p:cNvPr id="17" name="Image 2" descr="/home/claude/knapsack_pptx/icons/coins_gold.png"/>
           <p:cNvPicPr>
             <a:picLocks noChangeAspect="1"/>
           </p:cNvPicPr>
@@ -5377,6 +4874,54 @@
         </p:blipFill>
         <p:spPr>
           <a:xfrm>
+            <a:off x="7178040" y="2468880"/>
+            <a:ext cx="502920" cy="502920"/>
+          </a:xfrm>
+          <a:prstGeom prst="rect">
+            <a:avLst/>
+          </a:prstGeom>
+        </p:spPr>
+      </p:pic>
+      <p:pic>
+        <p:nvPicPr>
+          <p:cNvPr id="18" name="Image 3" descr="/home/claude/knapsack_pptx/icons/coins_gold.png"/>
+          <p:cNvPicPr>
+            <a:picLocks noChangeAspect="1"/>
+          </p:cNvPicPr>
+          <p:nvPr/>
+        </p:nvPicPr>
+        <p:blipFill>
+          <a:blip r:embed="rId5"/>
+          <a:stretch>
+            <a:fillRect/>
+          </a:stretch>
+        </p:blipFill>
+        <p:spPr>
+          <a:xfrm>
+            <a:off x="11109960" y="3291840"/>
+            <a:ext cx="384048" cy="384048"/>
+          </a:xfrm>
+          <a:prstGeom prst="rect">
+            <a:avLst/>
+          </a:prstGeom>
+        </p:spPr>
+      </p:pic>
+      <p:pic>
+        <p:nvPicPr>
+          <p:cNvPr id="19" name="Image 4" descr="/home/claude/knapsack_pptx/icons/weight_navy.png"/>
+          <p:cNvPicPr>
+            <a:picLocks noChangeAspect="1"/>
+          </p:cNvPicPr>
+          <p:nvPr/>
+        </p:nvPicPr>
+        <p:blipFill>
+          <a:blip r:embed="rId4"/>
+          <a:stretch>
+            <a:fillRect/>
+          </a:stretch>
+        </p:blipFill>
+        <p:spPr>
+          <a:xfrm>
             <a:off x="7223760" y="3931920"/>
             <a:ext cx="365760" cy="365760"/>
           </a:xfrm>
@@ -5406,7 +4951,7 @@
           <a:bodyPr wrap="square" lIns="0" tIns="0" rIns="0" bIns="0" rtlCol="0" anchor="ctr"/>
           <a:lstStyle/>
           <a:p>
-            <a:pPr algn="ctr" indent="0" marL="0">
+            <a:pPr marL="0" indent="0" algn="ctr">
               <a:buNone/>
             </a:pPr>
             <a:r>
@@ -5445,7 +4990,7 @@
           <a:bodyPr wrap="square" lIns="0" tIns="0" rIns="0" bIns="0" rtlCol="0" anchor="ctr"/>
           <a:lstStyle/>
           <a:p>
-            <a:pPr algn="r" indent="0" marL="0">
+            <a:pPr marL="0" indent="0" algn="r">
               <a:buNone/>
             </a:pPr>
             <a:r>
@@ -5479,6 +5024,7 @@
         <a:solidFill>
           <a:srgbClr val="10162B"/>
         </a:solidFill>
+        <a:effectLst/>
       </p:bgPr>
     </p:bg>
     <p:spTree>
@@ -5516,11 +5062,11 @@
           <a:bodyPr wrap="square" lIns="0" tIns="0" rIns="0" bIns="0" rtlCol="0" anchor="ctr"/>
           <a:lstStyle/>
           <a:p>
-            <a:pPr algn="l" indent="0" marL="0">
+            <a:pPr marL="0" indent="0" algn="l">
               <a:buNone/>
             </a:pPr>
             <a:r>
-              <a:rPr lang="en-US" sz="1200" b="1" spc="200" kern="0" dirty="0">
+              <a:rPr lang="en-US" sz="1200" b="1" kern="0" spc="200" dirty="0">
                 <a:solidFill>
                   <a:srgbClr val="D4AF37"/>
                 </a:solidFill>
@@ -5555,7 +5101,7 @@
           <a:bodyPr wrap="square" lIns="0" tIns="0" rIns="0" bIns="0" rtlCol="0" anchor="ctr"/>
           <a:lstStyle/>
           <a:p>
-            <a:pPr algn="l" indent="0" marL="0">
+            <a:pPr marL="0" indent="0" algn="l">
               <a:buNone/>
             </a:pPr>
             <a:r>
@@ -5594,7 +5140,7 @@
           <a:bodyPr wrap="square" lIns="0" tIns="0" rIns="0" bIns="0" rtlCol="0" anchor="ctr"/>
           <a:lstStyle/>
           <a:p>
-            <a:pPr indent="0" marL="0">
+            <a:pPr marL="0" indent="0">
               <a:buNone/>
             </a:pPr>
             <a:r>
@@ -5614,7 +5160,7 @@
       </p:sp>
       <p:graphicFrame>
         <p:nvGraphicFramePr>
-          <p:cNvPr id="4" name="Table 0"/>
+          <p:cNvPr id="5" name="Table 0"/>
           <p:cNvGraphicFramePr>
             <a:graphicFrameLocks noGrp="1"/>
           </p:cNvGraphicFramePr>
@@ -5635,11 +5181,41 @@
             <a:tbl>
               <a:tblPr/>
               <a:tblGrid>
-                <a:gridCol w="2377440"/>
-                <a:gridCol w="1554480"/>
-                <a:gridCol w="2377440"/>
-                <a:gridCol w="2651760"/>
-                <a:gridCol w="2103120"/>
+                <a:gridCol w="2377440">
+                  <a:extLst>
+                    <a:ext uri="{9D8B030D-6E8A-4147-A177-3AD203B41FA5}">
+                      <a16:colId xmlns:a16="http://schemas.microsoft.com/office/drawing/2014/main" val="20000"/>
+                    </a:ext>
+                  </a:extLst>
+                </a:gridCol>
+                <a:gridCol w="1554480">
+                  <a:extLst>
+                    <a:ext uri="{9D8B030D-6E8A-4147-A177-3AD203B41FA5}">
+                      <a16:colId xmlns:a16="http://schemas.microsoft.com/office/drawing/2014/main" val="20001"/>
+                    </a:ext>
+                  </a:extLst>
+                </a:gridCol>
+                <a:gridCol w="2377440">
+                  <a:extLst>
+                    <a:ext uri="{9D8B030D-6E8A-4147-A177-3AD203B41FA5}">
+                      <a16:colId xmlns:a16="http://schemas.microsoft.com/office/drawing/2014/main" val="20002"/>
+                    </a:ext>
+                  </a:extLst>
+                </a:gridCol>
+                <a:gridCol w="2651760">
+                  <a:extLst>
+                    <a:ext uri="{9D8B030D-6E8A-4147-A177-3AD203B41FA5}">
+                      <a16:colId xmlns:a16="http://schemas.microsoft.com/office/drawing/2014/main" val="20003"/>
+                    </a:ext>
+                  </a:extLst>
+                </a:gridCol>
+                <a:gridCol w="2103120">
+                  <a:extLst>
+                    <a:ext uri="{9D8B030D-6E8A-4147-A177-3AD203B41FA5}">
+                      <a16:colId xmlns:a16="http://schemas.microsoft.com/office/drawing/2014/main" val="20004"/>
+                    </a:ext>
+                  </a:extLst>
+                </a:gridCol>
               </a:tblGrid>
               <a:tr h="420624">
                 <a:tc>
@@ -5647,7 +5223,7 @@
                     <a:bodyPr/>
                     <a:lstStyle/>
                     <a:p>
-                      <a:pPr algn="ctr" indent="0" marL="0">
+                      <a:pPr marL="0" indent="0" algn="ctr">
                         <a:buNone/>
                       </a:pPr>
                       <a:r>
@@ -5708,7 +5284,7 @@
                     <a:bodyPr/>
                     <a:lstStyle/>
                     <a:p>
-                      <a:pPr algn="ctr" indent="0" marL="0">
+                      <a:pPr marL="0" indent="0" algn="ctr">
                         <a:buNone/>
                       </a:pPr>
                       <a:r>
@@ -5769,7 +5345,7 @@
                     <a:bodyPr/>
                     <a:lstStyle/>
                     <a:p>
-                      <a:pPr algn="ctr" indent="0" marL="0">
+                      <a:pPr marL="0" indent="0" algn="ctr">
                         <a:buNone/>
                       </a:pPr>
                       <a:r>
@@ -5830,7 +5406,7 @@
                     <a:bodyPr/>
                     <a:lstStyle/>
                     <a:p>
-                      <a:pPr algn="ctr" indent="0" marL="0">
+                      <a:pPr marL="0" indent="0" algn="ctr">
                         <a:buNone/>
                       </a:pPr>
                       <a:r>
@@ -5891,7 +5467,7 @@
                     <a:bodyPr/>
                     <a:lstStyle/>
                     <a:p>
-                      <a:pPr algn="ctr" indent="0" marL="0">
+                      <a:pPr marL="0" indent="0" algn="ctr">
                         <a:buNone/>
                       </a:pPr>
                       <a:r>
@@ -5947,6 +5523,11 @@
                     </a:solidFill>
                   </a:tcPr>
                 </a:tc>
+                <a:extLst>
+                  <a:ext uri="{0D108BD9-81ED-4DB2-BD59-A6C34878D82A}">
+                    <a16:rowId xmlns:a16="http://schemas.microsoft.com/office/drawing/2014/main" val="10000"/>
+                  </a:ext>
+                </a:extLst>
               </a:tr>
               <a:tr h="420624">
                 <a:tc>
@@ -5954,7 +5535,7 @@
                     <a:bodyPr/>
                     <a:lstStyle/>
                     <a:p>
-                      <a:pPr algn="l" indent="0" marL="0">
+                      <a:pPr marL="0" indent="0" algn="l">
                         <a:buNone/>
                       </a:pPr>
                       <a:r>
@@ -6015,7 +5596,7 @@
                     <a:bodyPr/>
                     <a:lstStyle/>
                     <a:p>
-                      <a:pPr algn="ctr" indent="0" marL="0">
+                      <a:pPr marL="0" indent="0" algn="ctr">
                         <a:buNone/>
                       </a:pPr>
                       <a:r>
@@ -6076,7 +5657,7 @@
                     <a:bodyPr/>
                     <a:lstStyle/>
                     <a:p>
-                      <a:pPr algn="ctr" indent="0" marL="0">
+                      <a:pPr marL="0" indent="0" algn="ctr">
                         <a:buNone/>
                       </a:pPr>
                       <a:r>
@@ -6137,7 +5718,7 @@
                     <a:bodyPr/>
                     <a:lstStyle/>
                     <a:p>
-                      <a:pPr algn="ctr" indent="0" marL="0">
+                      <a:pPr marL="0" indent="0" algn="ctr">
                         <a:buNone/>
                       </a:pPr>
                       <a:r>
@@ -6198,7 +5779,7 @@
                     <a:bodyPr/>
                     <a:lstStyle/>
                     <a:p>
-                      <a:pPr algn="l" indent="0" marL="0">
+                      <a:pPr marL="0" indent="0" algn="l">
                         <a:buNone/>
                       </a:pPr>
                       <a:r>
@@ -6254,6 +5835,11 @@
                     </a:solidFill>
                   </a:tcPr>
                 </a:tc>
+                <a:extLst>
+                  <a:ext uri="{0D108BD9-81ED-4DB2-BD59-A6C34878D82A}">
+                    <a16:rowId xmlns:a16="http://schemas.microsoft.com/office/drawing/2014/main" val="10001"/>
+                  </a:ext>
+                </a:extLst>
               </a:tr>
               <a:tr h="420624">
                 <a:tc>
@@ -6261,7 +5847,7 @@
                     <a:bodyPr/>
                     <a:lstStyle/>
                     <a:p>
-                      <a:pPr algn="l" indent="0" marL="0">
+                      <a:pPr marL="0" indent="0" algn="l">
                         <a:buNone/>
                       </a:pPr>
                       <a:r>
@@ -6322,7 +5908,7 @@
                     <a:bodyPr/>
                     <a:lstStyle/>
                     <a:p>
-                      <a:pPr algn="ctr" indent="0" marL="0">
+                      <a:pPr marL="0" indent="0" algn="ctr">
                         <a:buNone/>
                       </a:pPr>
                       <a:r>
@@ -6383,7 +5969,7 @@
                     <a:bodyPr/>
                     <a:lstStyle/>
                     <a:p>
-                      <a:pPr algn="ctr" indent="0" marL="0">
+                      <a:pPr marL="0" indent="0" algn="ctr">
                         <a:buNone/>
                       </a:pPr>
                       <a:r>
@@ -6444,7 +6030,7 @@
                     <a:bodyPr/>
                     <a:lstStyle/>
                     <a:p>
-                      <a:pPr algn="ctr" indent="0" marL="0">
+                      <a:pPr marL="0" indent="0" algn="ctr">
                         <a:buNone/>
                       </a:pPr>
                       <a:r>
@@ -6505,7 +6091,7 @@
                     <a:bodyPr/>
                     <a:lstStyle/>
                     <a:p>
-                      <a:pPr algn="l" indent="0" marL="0">
+                      <a:pPr marL="0" indent="0" algn="l">
                         <a:buNone/>
                       </a:pPr>
                       <a:r>
@@ -6561,6 +6147,11 @@
                     </a:solidFill>
                   </a:tcPr>
                 </a:tc>
+                <a:extLst>
+                  <a:ext uri="{0D108BD9-81ED-4DB2-BD59-A6C34878D82A}">
+                    <a16:rowId xmlns:a16="http://schemas.microsoft.com/office/drawing/2014/main" val="10002"/>
+                  </a:ext>
+                </a:extLst>
               </a:tr>
               <a:tr h="420624">
                 <a:tc>
@@ -6568,7 +6159,7 @@
                     <a:bodyPr/>
                     <a:lstStyle/>
                     <a:p>
-                      <a:pPr algn="l" indent="0" marL="0">
+                      <a:pPr marL="0" indent="0" algn="l">
                         <a:buNone/>
                       </a:pPr>
                       <a:r>
@@ -6629,7 +6220,7 @@
                     <a:bodyPr/>
                     <a:lstStyle/>
                     <a:p>
-                      <a:pPr algn="ctr" indent="0" marL="0">
+                      <a:pPr marL="0" indent="0" algn="ctr">
                         <a:buNone/>
                       </a:pPr>
                       <a:r>
@@ -6690,7 +6281,7 @@
                     <a:bodyPr/>
                     <a:lstStyle/>
                     <a:p>
-                      <a:pPr algn="ctr" indent="0" marL="0">
+                      <a:pPr marL="0" indent="0" algn="ctr">
                         <a:buNone/>
                       </a:pPr>
                       <a:r>
@@ -6751,7 +6342,7 @@
                     <a:bodyPr/>
                     <a:lstStyle/>
                     <a:p>
-                      <a:pPr algn="ctr" indent="0" marL="0">
+                      <a:pPr marL="0" indent="0" algn="ctr">
                         <a:buNone/>
                       </a:pPr>
                       <a:r>
@@ -6812,7 +6403,7 @@
                     <a:bodyPr/>
                     <a:lstStyle/>
                     <a:p>
-                      <a:pPr algn="l" indent="0" marL="0">
+                      <a:pPr marL="0" indent="0" algn="l">
                         <a:buNone/>
                       </a:pPr>
                       <a:r>
@@ -6868,6 +6459,11 @@
                     </a:solidFill>
                   </a:tcPr>
                 </a:tc>
+                <a:extLst>
+                  <a:ext uri="{0D108BD9-81ED-4DB2-BD59-A6C34878D82A}">
+                    <a16:rowId xmlns:a16="http://schemas.microsoft.com/office/drawing/2014/main" val="10003"/>
+                  </a:ext>
+                </a:extLst>
               </a:tr>
               <a:tr h="420624">
                 <a:tc>
@@ -6875,7 +6471,7 @@
                     <a:bodyPr/>
                     <a:lstStyle/>
                     <a:p>
-                      <a:pPr algn="l" indent="0" marL="0">
+                      <a:pPr marL="0" indent="0" algn="l">
                         <a:buNone/>
                       </a:pPr>
                       <a:r>
@@ -6936,7 +6532,7 @@
                     <a:bodyPr/>
                     <a:lstStyle/>
                     <a:p>
-                      <a:pPr algn="ctr" indent="0" marL="0">
+                      <a:pPr marL="0" indent="0" algn="ctr">
                         <a:buNone/>
                       </a:pPr>
                       <a:r>
@@ -6997,7 +6593,7 @@
                     <a:bodyPr/>
                     <a:lstStyle/>
                     <a:p>
-                      <a:pPr algn="ctr" indent="0" marL="0">
+                      <a:pPr marL="0" indent="0" algn="ctr">
                         <a:buNone/>
                       </a:pPr>
                       <a:r>
@@ -7058,7 +6654,7 @@
                     <a:bodyPr/>
                     <a:lstStyle/>
                     <a:p>
-                      <a:pPr algn="ctr" indent="0" marL="0">
+                      <a:pPr marL="0" indent="0" algn="ctr">
                         <a:buNone/>
                       </a:pPr>
                       <a:r>
@@ -7119,7 +6715,7 @@
                     <a:bodyPr/>
                     <a:lstStyle/>
                     <a:p>
-                      <a:pPr algn="l" indent="0" marL="0">
+                      <a:pPr marL="0" indent="0" algn="l">
                         <a:buNone/>
                       </a:pPr>
                       <a:r>
@@ -7175,6 +6771,11 @@
                     </a:solidFill>
                   </a:tcPr>
                 </a:tc>
+                <a:extLst>
+                  <a:ext uri="{0D108BD9-81ED-4DB2-BD59-A6C34878D82A}">
+                    <a16:rowId xmlns:a16="http://schemas.microsoft.com/office/drawing/2014/main" val="10004"/>
+                  </a:ext>
+                </a:extLst>
               </a:tr>
               <a:tr h="420624">
                 <a:tc>
@@ -7182,7 +6783,7 @@
                     <a:bodyPr/>
                     <a:lstStyle/>
                     <a:p>
-                      <a:pPr algn="l" indent="0" marL="0">
+                      <a:pPr marL="0" indent="0" algn="l">
                         <a:buNone/>
                       </a:pPr>
                       <a:r>
@@ -7243,7 +6844,7 @@
                     <a:bodyPr/>
                     <a:lstStyle/>
                     <a:p>
-                      <a:pPr algn="ctr" indent="0" marL="0">
+                      <a:pPr marL="0" indent="0" algn="ctr">
                         <a:buNone/>
                       </a:pPr>
                       <a:r>
@@ -7304,7 +6905,7 @@
                     <a:bodyPr/>
                     <a:lstStyle/>
                     <a:p>
-                      <a:pPr algn="ctr" indent="0" marL="0">
+                      <a:pPr marL="0" indent="0" algn="ctr">
                         <a:buNone/>
                       </a:pPr>
                       <a:r>
@@ -7365,7 +6966,7 @@
                     <a:bodyPr/>
                     <a:lstStyle/>
                     <a:p>
-                      <a:pPr algn="ctr" indent="0" marL="0">
+                      <a:pPr marL="0" indent="0" algn="ctr">
                         <a:buNone/>
                       </a:pPr>
                       <a:r>
@@ -7426,7 +7027,7 @@
                     <a:bodyPr/>
                     <a:lstStyle/>
                     <a:p>
-                      <a:pPr algn="l" indent="0" marL="0">
+                      <a:pPr marL="0" indent="0" algn="l">
                         <a:buNone/>
                       </a:pPr>
                       <a:r>
@@ -7482,6 +7083,11 @@
                     </a:solidFill>
                   </a:tcPr>
                 </a:tc>
+                <a:extLst>
+                  <a:ext uri="{0D108BD9-81ED-4DB2-BD59-A6C34878D82A}">
+                    <a16:rowId xmlns:a16="http://schemas.microsoft.com/office/drawing/2014/main" val="10005"/>
+                  </a:ext>
+                </a:extLst>
               </a:tr>
               <a:tr h="420624">
                 <a:tc>
@@ -7489,7 +7095,7 @@
                     <a:bodyPr/>
                     <a:lstStyle/>
                     <a:p>
-                      <a:pPr algn="l" indent="0" marL="0">
+                      <a:pPr marL="0" indent="0" algn="l">
                         <a:buNone/>
                       </a:pPr>
                       <a:r>
@@ -7550,7 +7156,7 @@
                     <a:bodyPr/>
                     <a:lstStyle/>
                     <a:p>
-                      <a:pPr algn="ctr" indent="0" marL="0">
+                      <a:pPr marL="0" indent="0" algn="ctr">
                         <a:buNone/>
                       </a:pPr>
                       <a:r>
@@ -7611,7 +7217,7 @@
                     <a:bodyPr/>
                     <a:lstStyle/>
                     <a:p>
-                      <a:pPr algn="ctr" indent="0" marL="0">
+                      <a:pPr marL="0" indent="0" algn="ctr">
                         <a:buNone/>
                       </a:pPr>
                       <a:r>
@@ -7672,7 +7278,7 @@
                     <a:bodyPr/>
                     <a:lstStyle/>
                     <a:p>
-                      <a:pPr algn="ctr" indent="0" marL="0">
+                      <a:pPr marL="0" indent="0" algn="ctr">
                         <a:buNone/>
                       </a:pPr>
                       <a:r>
@@ -7733,7 +7339,7 @@
                     <a:bodyPr/>
                     <a:lstStyle/>
                     <a:p>
-                      <a:pPr algn="l" indent="0" marL="0">
+                      <a:pPr marL="0" indent="0" algn="l">
                         <a:buNone/>
                       </a:pPr>
                       <a:r>
@@ -7789,6 +7395,11 @@
                     </a:solidFill>
                   </a:tcPr>
                 </a:tc>
+                <a:extLst>
+                  <a:ext uri="{0D108BD9-81ED-4DB2-BD59-A6C34878D82A}">
+                    <a16:rowId xmlns:a16="http://schemas.microsoft.com/office/drawing/2014/main" val="10006"/>
+                  </a:ext>
+                </a:extLst>
               </a:tr>
               <a:tr h="420624">
                 <a:tc>
@@ -7796,7 +7407,7 @@
                     <a:bodyPr/>
                     <a:lstStyle/>
                     <a:p>
-                      <a:pPr algn="l" indent="0" marL="0">
+                      <a:pPr marL="0" indent="0" algn="l">
                         <a:buNone/>
                       </a:pPr>
                       <a:r>
@@ -7857,7 +7468,7 @@
                     <a:bodyPr/>
                     <a:lstStyle/>
                     <a:p>
-                      <a:pPr algn="ctr" indent="0" marL="0">
+                      <a:pPr marL="0" indent="0" algn="ctr">
                         <a:buNone/>
                       </a:pPr>
                       <a:r>
@@ -7918,7 +7529,7 @@
                     <a:bodyPr/>
                     <a:lstStyle/>
                     <a:p>
-                      <a:pPr algn="ctr" indent="0" marL="0">
+                      <a:pPr marL="0" indent="0" algn="ctr">
                         <a:buNone/>
                       </a:pPr>
                       <a:r>
@@ -7979,7 +7590,7 @@
                     <a:bodyPr/>
                     <a:lstStyle/>
                     <a:p>
-                      <a:pPr algn="ctr" indent="0" marL="0">
+                      <a:pPr marL="0" indent="0" algn="ctr">
                         <a:buNone/>
                       </a:pPr>
                       <a:r>
@@ -8040,7 +7651,7 @@
                     <a:bodyPr/>
                     <a:lstStyle/>
                     <a:p>
-                      <a:pPr algn="l" indent="0" marL="0">
+                      <a:pPr marL="0" indent="0" algn="l">
                         <a:buNone/>
                       </a:pPr>
                       <a:r>
@@ -8096,6 +7707,11 @@
                     </a:solidFill>
                   </a:tcPr>
                 </a:tc>
+                <a:extLst>
+                  <a:ext uri="{0D108BD9-81ED-4DB2-BD59-A6C34878D82A}">
+                    <a16:rowId xmlns:a16="http://schemas.microsoft.com/office/drawing/2014/main" val="10007"/>
+                  </a:ext>
+                </a:extLst>
               </a:tr>
               <a:tr h="420624">
                 <a:tc>
@@ -8103,7 +7719,7 @@
                     <a:bodyPr/>
                     <a:lstStyle/>
                     <a:p>
-                      <a:pPr algn="l" indent="0" marL="0">
+                      <a:pPr marL="0" indent="0" algn="l">
                         <a:buNone/>
                       </a:pPr>
                       <a:r>
@@ -8164,7 +7780,7 @@
                     <a:bodyPr/>
                     <a:lstStyle/>
                     <a:p>
-                      <a:pPr algn="ctr" indent="0" marL="0">
+                      <a:pPr marL="0" indent="0" algn="ctr">
                         <a:buNone/>
                       </a:pPr>
                       <a:r>
@@ -8225,7 +7841,7 @@
                     <a:bodyPr/>
                     <a:lstStyle/>
                     <a:p>
-                      <a:pPr algn="ctr" indent="0" marL="0">
+                      <a:pPr marL="0" indent="0" algn="ctr">
                         <a:buNone/>
                       </a:pPr>
                       <a:r>
@@ -8286,7 +7902,7 @@
                     <a:bodyPr/>
                     <a:lstStyle/>
                     <a:p>
-                      <a:pPr algn="ctr" indent="0" marL="0">
+                      <a:pPr marL="0" indent="0" algn="ctr">
                         <a:buNone/>
                       </a:pPr>
                       <a:r>
@@ -8347,7 +7963,7 @@
                     <a:bodyPr/>
                     <a:lstStyle/>
                     <a:p>
-                      <a:pPr algn="l" indent="0" marL="0">
+                      <a:pPr marL="0" indent="0" algn="l">
                         <a:buNone/>
                       </a:pPr>
                       <a:r>
@@ -8403,6 +8019,11 @@
                     </a:solidFill>
                   </a:tcPr>
                 </a:tc>
+                <a:extLst>
+                  <a:ext uri="{0D108BD9-81ED-4DB2-BD59-A6C34878D82A}">
+                    <a16:rowId xmlns:a16="http://schemas.microsoft.com/office/drawing/2014/main" val="10008"/>
+                  </a:ext>
+                </a:extLst>
               </a:tr>
               <a:tr h="420624">
                 <a:tc>
@@ -8410,7 +8031,7 @@
                     <a:bodyPr/>
                     <a:lstStyle/>
                     <a:p>
-                      <a:pPr algn="l" indent="0" marL="0">
+                      <a:pPr marL="0" indent="0" algn="l">
                         <a:buNone/>
                       </a:pPr>
                       <a:r>
@@ -8471,7 +8092,7 @@
                     <a:bodyPr/>
                     <a:lstStyle/>
                     <a:p>
-                      <a:pPr algn="ctr" indent="0" marL="0">
+                      <a:pPr marL="0" indent="0" algn="ctr">
                         <a:buNone/>
                       </a:pPr>
                       <a:r>
@@ -8532,7 +8153,7 @@
                     <a:bodyPr/>
                     <a:lstStyle/>
                     <a:p>
-                      <a:pPr algn="ctr" indent="0" marL="0">
+                      <a:pPr marL="0" indent="0" algn="ctr">
                         <a:buNone/>
                       </a:pPr>
                       <a:r>
@@ -8593,7 +8214,7 @@
                     <a:bodyPr/>
                     <a:lstStyle/>
                     <a:p>
-                      <a:pPr algn="ctr" indent="0" marL="0">
+                      <a:pPr marL="0" indent="0" algn="ctr">
                         <a:buNone/>
                       </a:pPr>
                       <a:r>
@@ -8654,7 +8275,7 @@
                     <a:bodyPr/>
                     <a:lstStyle/>
                     <a:p>
-                      <a:pPr algn="l" indent="0" marL="0">
+                      <a:pPr marL="0" indent="0" algn="l">
                         <a:buNone/>
                       </a:pPr>
                       <a:r>
@@ -8710,6 +8331,11 @@
                     </a:solidFill>
                   </a:tcPr>
                 </a:tc>
+                <a:extLst>
+                  <a:ext uri="{0D108BD9-81ED-4DB2-BD59-A6C34878D82A}">
+                    <a16:rowId xmlns:a16="http://schemas.microsoft.com/office/drawing/2014/main" val="10009"/>
+                  </a:ext>
+                </a:extLst>
               </a:tr>
             </a:tbl>
           </a:graphicData>
@@ -8736,7 +8362,7 @@
           <a:bodyPr wrap="square" lIns="0" tIns="0" rIns="0" bIns="0" rtlCol="0" anchor="ctr"/>
           <a:lstStyle/>
           <a:p>
-            <a:pPr indent="0" marL="0">
+            <a:pPr marL="0" indent="0">
               <a:buNone/>
             </a:pPr>
             <a:r>
@@ -8775,7 +8401,7 @@
           <a:bodyPr wrap="square" lIns="0" tIns="0" rIns="0" bIns="0" rtlCol="0" anchor="ctr"/>
           <a:lstStyle/>
           <a:p>
-            <a:pPr algn="r" indent="0" marL="0">
+            <a:pPr marL="0" indent="0" algn="r">
               <a:buNone/>
             </a:pPr>
             <a:r>
@@ -8809,6 +8435,7 @@
         <a:solidFill>
           <a:srgbClr val="10162B"/>
         </a:solidFill>
+        <a:effectLst/>
       </p:bgPr>
     </p:bg>
     <p:spTree>
@@ -8846,11 +8473,11 @@
           <a:bodyPr wrap="square" lIns="0" tIns="0" rIns="0" bIns="0" rtlCol="0" anchor="ctr"/>
           <a:lstStyle/>
           <a:p>
-            <a:pPr algn="l" indent="0" marL="0">
+            <a:pPr marL="0" indent="0" algn="l">
               <a:buNone/>
             </a:pPr>
             <a:r>
-              <a:rPr lang="en-US" sz="1200" b="1" spc="200" kern="0" dirty="0">
+              <a:rPr lang="en-US" sz="1200" b="1" kern="0" spc="200" dirty="0">
                 <a:solidFill>
                   <a:srgbClr val="D4AF37"/>
                 </a:solidFill>
@@ -8885,7 +8512,7 @@
           <a:bodyPr wrap="square" lIns="0" tIns="0" rIns="0" bIns="0" rtlCol="0" anchor="ctr"/>
           <a:lstStyle/>
           <a:p>
-            <a:pPr algn="l" indent="0" marL="0">
+            <a:pPr marL="0" indent="0" algn="l">
               <a:buNone/>
             </a:pPr>
             <a:r>
@@ -8924,7 +8551,7 @@
           <a:bodyPr wrap="square" lIns="0" tIns="0" rIns="0" bIns="0" rtlCol="0" anchor="ctr"/>
           <a:lstStyle/>
           <a:p>
-            <a:pPr indent="0" marL="0">
+            <a:pPr marL="0" indent="0">
               <a:buNone/>
             </a:pPr>
             <a:r>
@@ -8971,14 +8598,14 @@
       </p:sp>
       <p:pic>
         <p:nvPicPr>
-          <p:cNvPr id="6" name="Image 0" descr="/home/claude/knapsack_pptx/icons/folder_ice.png">    </p:cNvPr>
+          <p:cNvPr id="6" name="Image 0" descr="/home/claude/knapsack_pptx/icons/folder_ice.png"/>
           <p:cNvPicPr>
             <a:picLocks noChangeAspect="1"/>
           </p:cNvPicPr>
           <p:nvPr/>
         </p:nvPicPr>
         <p:blipFill>
-          <a:blip r:embed="rId1"/>
+          <a:blip r:embed="rId3"/>
           <a:stretch>
             <a:fillRect/>
           </a:stretch>
@@ -9014,7 +8641,7 @@
           <a:bodyPr wrap="square" lIns="0" tIns="0" rIns="0" bIns="0" rtlCol="0" anchor="ctr"/>
           <a:lstStyle/>
           <a:p>
-            <a:pPr indent="0" marL="0">
+            <a:pPr marL="0" indent="0">
               <a:buNone/>
             </a:pPr>
             <a:r>
@@ -9053,7 +8680,7 @@
           <a:bodyPr wrap="square" lIns="0" tIns="0" rIns="0" bIns="0" rtlCol="0" anchor="t"/>
           <a:lstStyle/>
           <a:p>
-            <a:pPr indent="0" marL="0">
+            <a:pPr marL="0" indent="0">
               <a:lnSpc>
                 <a:spcPts val="1400"/>
               </a:lnSpc>
@@ -9073,7 +8700,7 @@
             <a:endParaRPr lang="en-US" sz="1050" dirty="0"/>
           </a:p>
           <a:p>
-            <a:pPr indent="0" marL="0">
+            <a:pPr marL="0" indent="0">
               <a:lnSpc>
                 <a:spcPts val="1400"/>
               </a:lnSpc>
@@ -9123,14 +8750,14 @@
       </p:sp>
       <p:pic>
         <p:nvPicPr>
-          <p:cNvPr id="10" name="Image 1" descr="/home/claude/knapsack_pptx/icons/cogs_gold.png">    </p:cNvPr>
+          <p:cNvPr id="10" name="Image 1" descr="/home/claude/knapsack_pptx/icons/cogs_gold.png"/>
           <p:cNvPicPr>
             <a:picLocks noChangeAspect="1"/>
           </p:cNvPicPr>
           <p:nvPr/>
         </p:nvPicPr>
         <p:blipFill>
-          <a:blip r:embed="rId2"/>
+          <a:blip r:embed="rId4"/>
           <a:stretch>
             <a:fillRect/>
           </a:stretch>
@@ -9166,7 +8793,7 @@
           <a:bodyPr wrap="square" lIns="0" tIns="0" rIns="0" bIns="0" rtlCol="0" anchor="ctr"/>
           <a:lstStyle/>
           <a:p>
-            <a:pPr indent="0" marL="0">
+            <a:pPr marL="0" indent="0">
               <a:buNone/>
             </a:pPr>
             <a:r>
@@ -9205,7 +8832,7 @@
           <a:bodyPr wrap="square" lIns="0" tIns="0" rIns="0" bIns="0" rtlCol="0" anchor="t"/>
           <a:lstStyle/>
           <a:p>
-            <a:pPr indent="0" marL="0">
+            <a:pPr marL="0" indent="0">
               <a:lnSpc>
                 <a:spcPts val="1400"/>
               </a:lnSpc>
@@ -9225,7 +8852,7 @@
             <a:endParaRPr lang="en-US" sz="1050" dirty="0"/>
           </a:p>
           <a:p>
-            <a:pPr indent="0" marL="0">
+            <a:pPr marL="0" indent="0">
               <a:lnSpc>
                 <a:spcPts val="1400"/>
               </a:lnSpc>
@@ -9245,7 +8872,7 @@
             <a:endParaRPr lang="en-US" sz="1050" dirty="0"/>
           </a:p>
           <a:p>
-            <a:pPr indent="0" marL="0">
+            <a:pPr marL="0" indent="0">
               <a:lnSpc>
                 <a:spcPts val="1400"/>
               </a:lnSpc>
@@ -9295,14 +8922,14 @@
       </p:sp>
       <p:pic>
         <p:nvPicPr>
-          <p:cNvPr id="14" name="Image 2" descr="/home/claude/knapsack_pptx/icons/code_ice.png">    </p:cNvPr>
+          <p:cNvPr id="14" name="Image 2" descr="/home/claude/knapsack_pptx/icons/code_ice.png"/>
           <p:cNvPicPr>
             <a:picLocks noChangeAspect="1"/>
           </p:cNvPicPr>
           <p:nvPr/>
         </p:nvPicPr>
         <p:blipFill>
-          <a:blip r:embed="rId3"/>
+          <a:blip r:embed="rId5"/>
           <a:stretch>
             <a:fillRect/>
           </a:stretch>
@@ -9338,7 +8965,7 @@
           <a:bodyPr wrap="square" lIns="0" tIns="0" rIns="0" bIns="0" rtlCol="0" anchor="ctr"/>
           <a:lstStyle/>
           <a:p>
-            <a:pPr indent="0" marL="0">
+            <a:pPr marL="0" indent="0">
               <a:buNone/>
             </a:pPr>
             <a:r>
@@ -9377,7 +9004,7 @@
           <a:bodyPr wrap="square" lIns="0" tIns="0" rIns="0" bIns="0" rtlCol="0" anchor="t"/>
           <a:lstStyle/>
           <a:p>
-            <a:pPr indent="0" marL="0">
+            <a:pPr marL="0" indent="0">
               <a:lnSpc>
                 <a:spcPts val="1400"/>
               </a:lnSpc>
@@ -9397,7 +9024,7 @@
             <a:endParaRPr lang="en-US" sz="1050" dirty="0"/>
           </a:p>
           <a:p>
-            <a:pPr indent="0" marL="0">
+            <a:pPr marL="0" indent="0">
               <a:lnSpc>
                 <a:spcPts val="1400"/>
               </a:lnSpc>
@@ -9447,14 +9074,14 @@
       </p:sp>
       <p:pic>
         <p:nvPicPr>
-          <p:cNvPr id="18" name="Image 3" descr="/home/claude/knapsack_pptx/icons/chartbar_gold.png">    </p:cNvPr>
+          <p:cNvPr id="18" name="Image 3" descr="/home/claude/knapsack_pptx/icons/chartbar_gold.png"/>
           <p:cNvPicPr>
             <a:picLocks noChangeAspect="1"/>
           </p:cNvPicPr>
           <p:nvPr/>
         </p:nvPicPr>
         <p:blipFill>
-          <a:blip r:embed="rId4"/>
+          <a:blip r:embed="rId6"/>
           <a:stretch>
             <a:fillRect/>
           </a:stretch>
@@ -9490,7 +9117,7 @@
           <a:bodyPr wrap="square" lIns="0" tIns="0" rIns="0" bIns="0" rtlCol="0" anchor="ctr"/>
           <a:lstStyle/>
           <a:p>
-            <a:pPr indent="0" marL="0">
+            <a:pPr marL="0" indent="0">
               <a:buNone/>
             </a:pPr>
             <a:r>
@@ -9529,7 +9156,7 @@
           <a:bodyPr wrap="square" lIns="0" tIns="0" rIns="0" bIns="0" rtlCol="0" anchor="t"/>
           <a:lstStyle/>
           <a:p>
-            <a:pPr indent="0" marL="0">
+            <a:pPr marL="0" indent="0">
               <a:lnSpc>
                 <a:spcPts val="1400"/>
               </a:lnSpc>
@@ -9549,7 +9176,7 @@
             <a:endParaRPr lang="en-US" sz="1050" dirty="0"/>
           </a:p>
           <a:p>
-            <a:pPr indent="0" marL="0">
+            <a:pPr marL="0" indent="0">
               <a:lnSpc>
                 <a:spcPts val="1400"/>
               </a:lnSpc>
@@ -9599,14 +9226,14 @@
       </p:sp>
       <p:pic>
         <p:nvPicPr>
-          <p:cNvPr id="22" name="Image 4" descr="/home/claude/knapsack_pptx/icons/filecode_ice.png">    </p:cNvPr>
+          <p:cNvPr id="22" name="Image 4" descr="/home/claude/knapsack_pptx/icons/filecode_ice.png"/>
           <p:cNvPicPr>
             <a:picLocks noChangeAspect="1"/>
           </p:cNvPicPr>
           <p:nvPr/>
         </p:nvPicPr>
         <p:blipFill>
-          <a:blip r:embed="rId5"/>
+          <a:blip r:embed="rId7"/>
           <a:stretch>
             <a:fillRect/>
           </a:stretch>
@@ -9642,7 +9269,7 @@
           <a:bodyPr wrap="square" lIns="0" tIns="0" rIns="0" bIns="0" rtlCol="0" anchor="ctr"/>
           <a:lstStyle/>
           <a:p>
-            <a:pPr indent="0" marL="0">
+            <a:pPr marL="0" indent="0">
               <a:buNone/>
             </a:pPr>
             <a:r>
@@ -9681,7 +9308,7 @@
           <a:bodyPr wrap="square" lIns="0" tIns="0" rIns="0" bIns="0" rtlCol="0" anchor="t"/>
           <a:lstStyle/>
           <a:p>
-            <a:pPr indent="0" marL="0">
+            <a:pPr marL="0" indent="0">
               <a:lnSpc>
                 <a:spcPts val="1400"/>
               </a:lnSpc>
@@ -9726,14 +9353,14 @@
       </p:sp>
       <p:pic>
         <p:nvPicPr>
-          <p:cNvPr id="26" name="Image 5" descr="/home/claude/knapsack_pptx/icons/sitemap_gold.png">    </p:cNvPr>
+          <p:cNvPr id="26" name="Image 5" descr="/home/claude/knapsack_pptx/icons/sitemap_gold.png"/>
           <p:cNvPicPr>
             <a:picLocks noChangeAspect="1"/>
           </p:cNvPicPr>
           <p:nvPr/>
         </p:nvPicPr>
         <p:blipFill>
-          <a:blip r:embed="rId6"/>
+          <a:blip r:embed="rId8"/>
           <a:stretch>
             <a:fillRect/>
           </a:stretch>
@@ -9769,7 +9396,7 @@
           <a:bodyPr wrap="square" lIns="0" tIns="0" rIns="0" bIns="0" rtlCol="0" anchor="ctr"/>
           <a:lstStyle/>
           <a:p>
-            <a:pPr indent="0" marL="0">
+            <a:pPr marL="0" indent="0">
               <a:lnSpc>
                 <a:spcPts val="1800"/>
               </a:lnSpc>
@@ -9786,12 +9413,6 @@
               </a:rPr>
               <a:t>Princípios de projeto:  </a:t>
             </a:r>
-            <a:pPr indent="0" marL="0">
-              <a:lnSpc>
-                <a:spcPts val="1800"/>
-              </a:lnSpc>
-              <a:buNone/>
-            </a:pPr>
             <a:r>
               <a:rPr lang="en-US" sz="1250" dirty="0">
                 <a:solidFill>
@@ -9828,7 +9449,7 @@
           <a:bodyPr wrap="square" lIns="0" tIns="0" rIns="0" bIns="0" rtlCol="0" anchor="ctr"/>
           <a:lstStyle/>
           <a:p>
-            <a:pPr algn="r" indent="0" marL="0">
+            <a:pPr marL="0" indent="0" algn="r">
               <a:buNone/>
             </a:pPr>
             <a:r>
@@ -9862,6 +9483,7 @@
         <a:solidFill>
           <a:srgbClr val="10162B"/>
         </a:solidFill>
+        <a:effectLst/>
       </p:bgPr>
     </p:bg>
     <p:spTree>
@@ -9899,11 +9521,11 @@
           <a:bodyPr wrap="square" lIns="0" tIns="0" rIns="0" bIns="0" rtlCol="0" anchor="ctr"/>
           <a:lstStyle/>
           <a:p>
-            <a:pPr algn="l" indent="0" marL="0">
+            <a:pPr marL="0" indent="0" algn="l">
               <a:buNone/>
             </a:pPr>
             <a:r>
-              <a:rPr lang="en-US" sz="1200" b="1" spc="200" kern="0" dirty="0">
+              <a:rPr lang="en-US" sz="1200" b="1" kern="0" spc="200" dirty="0">
                 <a:solidFill>
                   <a:srgbClr val="D4AF37"/>
                 </a:solidFill>
@@ -9938,7 +9560,7 @@
           <a:bodyPr wrap="square" lIns="0" tIns="0" rIns="0" bIns="0" rtlCol="0" anchor="ctr"/>
           <a:lstStyle/>
           <a:p>
-            <a:pPr algn="l" indent="0" marL="0">
+            <a:pPr marL="0" indent="0" algn="l">
               <a:buNone/>
             </a:pPr>
             <a:r>
@@ -9977,7 +9599,7 @@
           <a:bodyPr wrap="square" lIns="0" tIns="0" rIns="0" bIns="0" rtlCol="0" anchor="t"/>
           <a:lstStyle/>
           <a:p>
-            <a:pPr indent="0" marL="0">
+            <a:pPr marL="0" indent="0">
               <a:lnSpc>
                 <a:spcPts val="2000"/>
               </a:lnSpc>
@@ -9994,12 +9616,6 @@
               </a:rPr>
               <a:t>Meta-heurística de </a:t>
             </a:r>
-            <a:pPr indent="0" marL="0">
-              <a:lnSpc>
-                <a:spcPts val="2000"/>
-              </a:lnSpc>
-              <a:buNone/>
-            </a:pPr>
             <a:r>
               <a:rPr lang="en-US" sz="1450" b="1" dirty="0">
                 <a:solidFill>
@@ -10011,12 +9627,6 @@
               </a:rPr>
               <a:t>busca local com memória de curto prazo</a:t>
             </a:r>
-            <a:pPr indent="0" marL="0">
-              <a:lnSpc>
-                <a:spcPts val="2000"/>
-              </a:lnSpc>
-              <a:buNone/>
-            </a:pPr>
             <a:r>
               <a:rPr lang="en-US" sz="1450" dirty="0">
                 <a:solidFill>
@@ -10028,12 +9638,6 @@
               </a:rPr>
               <a:t>. Explora vizinhanças da solução atual, evitando revisitar movimentos recentes por meio de uma </a:t>
             </a:r>
-            <a:pPr indent="0" marL="0">
-              <a:lnSpc>
-                <a:spcPts val="2000"/>
-              </a:lnSpc>
-              <a:buNone/>
-            </a:pPr>
             <a:r>
               <a:rPr lang="en-US" sz="1450" b="1" dirty="0">
                 <a:solidFill>
@@ -10045,12 +9649,6 @@
               </a:rPr>
               <a:t>lista tabu</a:t>
             </a:r>
-            <a:pPr indent="0" marL="0">
-              <a:lnSpc>
-                <a:spcPts val="2000"/>
-              </a:lnSpc>
-              <a:buNone/>
-            </a:pPr>
             <a:r>
               <a:rPr lang="en-US" sz="1450" dirty="0">
                 <a:solidFill>
@@ -10115,14 +9713,14 @@
       </p:sp>
       <p:pic>
         <p:nvPicPr>
-          <p:cNvPr id="7" name="Image 0" descr="/home/claude/knapsack_pptx/icons/random_ice.png">    </p:cNvPr>
+          <p:cNvPr id="7" name="Image 0" descr="/home/claude/knapsack_pptx/icons/random_ice.png"/>
           <p:cNvPicPr>
             <a:picLocks noChangeAspect="1"/>
           </p:cNvPicPr>
           <p:nvPr/>
         </p:nvPicPr>
         <p:blipFill>
-          <a:blip r:embed="rId1"/>
+          <a:blip r:embed="rId3"/>
           <a:stretch>
             <a:fillRect/>
           </a:stretch>
@@ -10158,7 +9756,7 @@
           <a:bodyPr wrap="square" lIns="0" tIns="0" rIns="0" bIns="0" rtlCol="0" anchor="t"/>
           <a:lstStyle/>
           <a:p>
-            <a:pPr algn="ctr" indent="0" marL="0">
+            <a:pPr marL="0" indent="0" algn="ctr">
               <a:buNone/>
             </a:pPr>
             <a:r>
@@ -10197,7 +9795,7 @@
           <a:bodyPr wrap="square" lIns="0" tIns="0" rIns="0" bIns="0" rtlCol="0" anchor="t"/>
           <a:lstStyle/>
           <a:p>
-            <a:pPr algn="ctr" indent="0" marL="0">
+            <a:pPr marL="0" indent="0" algn="ctr">
               <a:buNone/>
             </a:pPr>
             <a:r>
@@ -10236,7 +9834,7 @@
           <a:bodyPr wrap="square" lIns="0" tIns="0" rIns="0" bIns="0" rtlCol="0" anchor="ctr"/>
           <a:lstStyle/>
           <a:p>
-            <a:pPr algn="ctr" indent="0" marL="0">
+            <a:pPr marL="0" indent="0" algn="ctr">
               <a:buNone/>
             </a:pPr>
             <a:r>
@@ -10303,14 +9901,14 @@
       </p:sp>
       <p:pic>
         <p:nvPicPr>
-          <p:cNvPr id="13" name="Image 1" descr="/home/claude/knapsack_pptx/icons/search_ice.png">    </p:cNvPr>
+          <p:cNvPr id="13" name="Image 1" descr="/home/claude/knapsack_pptx/icons/search_ice.png"/>
           <p:cNvPicPr>
             <a:picLocks noChangeAspect="1"/>
           </p:cNvPicPr>
           <p:nvPr/>
         </p:nvPicPr>
         <p:blipFill>
-          <a:blip r:embed="rId2"/>
+          <a:blip r:embed="rId4"/>
           <a:stretch>
             <a:fillRect/>
           </a:stretch>
@@ -10346,7 +9944,7 @@
           <a:bodyPr wrap="square" lIns="0" tIns="0" rIns="0" bIns="0" rtlCol="0" anchor="t"/>
           <a:lstStyle/>
           <a:p>
-            <a:pPr algn="ctr" indent="0" marL="0">
+            <a:pPr marL="0" indent="0" algn="ctr">
               <a:buNone/>
             </a:pPr>
             <a:r>
@@ -10385,7 +9983,7 @@
           <a:bodyPr wrap="square" lIns="0" tIns="0" rIns="0" bIns="0" rtlCol="0" anchor="t"/>
           <a:lstStyle/>
           <a:p>
-            <a:pPr algn="ctr" indent="0" marL="0">
+            <a:pPr marL="0" indent="0" algn="ctr">
               <a:buNone/>
             </a:pPr>
             <a:r>
@@ -10424,7 +10022,7 @@
           <a:bodyPr wrap="square" lIns="0" tIns="0" rIns="0" bIns="0" rtlCol="0" anchor="ctr"/>
           <a:lstStyle/>
           <a:p>
-            <a:pPr algn="ctr" indent="0" marL="0">
+            <a:pPr marL="0" indent="0" algn="ctr">
               <a:buNone/>
             </a:pPr>
             <a:r>
@@ -10491,14 +10089,14 @@
       </p:sp>
       <p:pic>
         <p:nvPicPr>
-          <p:cNvPr id="19" name="Image 2" descr="/home/claude/knapsack_pptx/icons/xmark_gold.png">    </p:cNvPr>
+          <p:cNvPr id="19" name="Image 2" descr="/home/claude/knapsack_pptx/icons/xmark_gold.png"/>
           <p:cNvPicPr>
             <a:picLocks noChangeAspect="1"/>
           </p:cNvPicPr>
           <p:nvPr/>
         </p:nvPicPr>
         <p:blipFill>
-          <a:blip r:embed="rId3"/>
+          <a:blip r:embed="rId5"/>
           <a:stretch>
             <a:fillRect/>
           </a:stretch>
@@ -10534,7 +10132,7 @@
           <a:bodyPr wrap="square" lIns="0" tIns="0" rIns="0" bIns="0" rtlCol="0" anchor="t"/>
           <a:lstStyle/>
           <a:p>
-            <a:pPr algn="ctr" indent="0" marL="0">
+            <a:pPr marL="0" indent="0" algn="ctr">
               <a:buNone/>
             </a:pPr>
             <a:r>
@@ -10573,7 +10171,7 @@
           <a:bodyPr wrap="square" lIns="0" tIns="0" rIns="0" bIns="0" rtlCol="0" anchor="t"/>
           <a:lstStyle/>
           <a:p>
-            <a:pPr algn="ctr" indent="0" marL="0">
+            <a:pPr marL="0" indent="0" algn="ctr">
               <a:buNone/>
             </a:pPr>
             <a:r>
@@ -10612,7 +10210,7 @@
           <a:bodyPr wrap="square" lIns="0" tIns="0" rIns="0" bIns="0" rtlCol="0" anchor="ctr"/>
           <a:lstStyle/>
           <a:p>
-            <a:pPr algn="ctr" indent="0" marL="0">
+            <a:pPr marL="0" indent="0" algn="ctr">
               <a:buNone/>
             </a:pPr>
             <a:r>
@@ -10679,14 +10277,14 @@
       </p:sp>
       <p:pic>
         <p:nvPicPr>
-          <p:cNvPr id="25" name="Image 3" descr="/home/claude/knapsack_pptx/icons/check_gold.png">    </p:cNvPr>
+          <p:cNvPr id="25" name="Image 3" descr="/home/claude/knapsack_pptx/icons/check_gold.png"/>
           <p:cNvPicPr>
             <a:picLocks noChangeAspect="1"/>
           </p:cNvPicPr>
           <p:nvPr/>
         </p:nvPicPr>
         <p:blipFill>
-          <a:blip r:embed="rId4"/>
+          <a:blip r:embed="rId6"/>
           <a:stretch>
             <a:fillRect/>
           </a:stretch>
@@ -10722,7 +10320,7 @@
           <a:bodyPr wrap="square" lIns="0" tIns="0" rIns="0" bIns="0" rtlCol="0" anchor="t"/>
           <a:lstStyle/>
           <a:p>
-            <a:pPr algn="ctr" indent="0" marL="0">
+            <a:pPr marL="0" indent="0" algn="ctr">
               <a:buNone/>
             </a:pPr>
             <a:r>
@@ -10761,7 +10359,7 @@
           <a:bodyPr wrap="square" lIns="0" tIns="0" rIns="0" bIns="0" rtlCol="0" anchor="t"/>
           <a:lstStyle/>
           <a:p>
-            <a:pPr algn="ctr" indent="0" marL="0">
+            <a:pPr marL="0" indent="0" algn="ctr">
               <a:buNone/>
             </a:pPr>
             <a:r>
@@ -10800,7 +10398,7 @@
           <a:bodyPr wrap="square" lIns="0" tIns="0" rIns="0" bIns="0" rtlCol="0" anchor="ctr"/>
           <a:lstStyle/>
           <a:p>
-            <a:pPr algn="ctr" indent="0" marL="0">
+            <a:pPr marL="0" indent="0" algn="ctr">
               <a:buNone/>
             </a:pPr>
             <a:r>
@@ -10867,14 +10465,14 @@
       </p:sp>
       <p:pic>
         <p:nvPicPr>
-          <p:cNvPr id="31" name="Image 4" descr="/home/claude/knapsack_pptx/icons/target_ice.png">    </p:cNvPr>
+          <p:cNvPr id="31" name="Image 4" descr="/home/claude/knapsack_pptx/icons/target_ice.png"/>
           <p:cNvPicPr>
             <a:picLocks noChangeAspect="1"/>
           </p:cNvPicPr>
           <p:nvPr/>
         </p:nvPicPr>
         <p:blipFill>
-          <a:blip r:embed="rId5"/>
+          <a:blip r:embed="rId7"/>
           <a:stretch>
             <a:fillRect/>
           </a:stretch>
@@ -10910,7 +10508,7 @@
           <a:bodyPr wrap="square" lIns="0" tIns="0" rIns="0" bIns="0" rtlCol="0" anchor="t"/>
           <a:lstStyle/>
           <a:p>
-            <a:pPr algn="ctr" indent="0" marL="0">
+            <a:pPr marL="0" indent="0" algn="ctr">
               <a:buNone/>
             </a:pPr>
             <a:r>
@@ -10949,7 +10547,7 @@
           <a:bodyPr wrap="square" lIns="0" tIns="0" rIns="0" bIns="0" rtlCol="0" anchor="t"/>
           <a:lstStyle/>
           <a:p>
-            <a:pPr algn="ctr" indent="0" marL="0">
+            <a:pPr marL="0" indent="0" algn="ctr">
               <a:buNone/>
             </a:pPr>
             <a:r>
@@ -10988,7 +10586,7 @@
           <a:bodyPr wrap="square" lIns="0" tIns="0" rIns="0" bIns="0" rtlCol="0" anchor="ctr"/>
           <a:lstStyle/>
           <a:p>
-            <a:pPr algn="ctr" indent="0" marL="0">
+            <a:pPr marL="0" indent="0" algn="ctr">
               <a:buNone/>
             </a:pPr>
             <a:r>
@@ -11030,14 +10628,14 @@
       </p:sp>
       <p:pic>
         <p:nvPicPr>
-          <p:cNvPr id="36" name="Image 5" descr="/home/claude/knapsack_pptx/icons/brain_gold.png">    </p:cNvPr>
+          <p:cNvPr id="36" name="Image 5" descr="/home/claude/knapsack_pptx/icons/brain_gold.png"/>
           <p:cNvPicPr>
             <a:picLocks noChangeAspect="1"/>
           </p:cNvPicPr>
           <p:nvPr/>
         </p:nvPicPr>
         <p:blipFill>
-          <a:blip r:embed="rId6"/>
+          <a:blip r:embed="rId8"/>
           <a:stretch>
             <a:fillRect/>
           </a:stretch>
@@ -11073,7 +10671,7 @@
           <a:bodyPr wrap="square" lIns="0" tIns="0" rIns="0" bIns="0" rtlCol="0" anchor="ctr"/>
           <a:lstStyle/>
           <a:p>
-            <a:pPr indent="0" marL="0">
+            <a:pPr marL="0" indent="0">
               <a:lnSpc>
                 <a:spcPts val="1700"/>
               </a:lnSpc>
@@ -11090,12 +10688,6 @@
               </a:rPr>
               <a:t>Lista Tabu FIFO: </a:t>
             </a:r>
-            <a:pPr indent="0" marL="0">
-              <a:lnSpc>
-                <a:spcPts val="1700"/>
-              </a:lnSpc>
-              <a:buNone/>
-            </a:pPr>
             <a:r>
               <a:rPr lang="en-US" sz="1250" dirty="0">
                 <a:solidFill>
@@ -11132,7 +10724,7 @@
           <a:bodyPr wrap="square" lIns="0" tIns="0" rIns="0" bIns="0" rtlCol="0" anchor="ctr"/>
           <a:lstStyle/>
           <a:p>
-            <a:pPr algn="r" indent="0" marL="0">
+            <a:pPr marL="0" indent="0" algn="r">
               <a:buNone/>
             </a:pPr>
             <a:r>
@@ -11166,6 +10758,7 @@
         <a:solidFill>
           <a:srgbClr val="10162B"/>
         </a:solidFill>
+        <a:effectLst/>
       </p:bgPr>
     </p:bg>
     <p:spTree>
@@ -11203,11 +10796,11 @@
           <a:bodyPr wrap="square" lIns="0" tIns="0" rIns="0" bIns="0" rtlCol="0" anchor="ctr"/>
           <a:lstStyle/>
           <a:p>
-            <a:pPr algn="l" indent="0" marL="0">
+            <a:pPr marL="0" indent="0" algn="l">
               <a:buNone/>
             </a:pPr>
             <a:r>
-              <a:rPr lang="en-US" sz="1200" b="1" spc="200" kern="0" dirty="0">
+              <a:rPr lang="en-US" sz="1200" b="1" kern="0" spc="200" dirty="0">
                 <a:solidFill>
                   <a:srgbClr val="D4AF37"/>
                 </a:solidFill>
@@ -11242,7 +10835,7 @@
           <a:bodyPr wrap="square" lIns="0" tIns="0" rIns="0" bIns="0" rtlCol="0" anchor="ctr"/>
           <a:lstStyle/>
           <a:p>
-            <a:pPr algn="l" indent="0" marL="0">
+            <a:pPr marL="0" indent="0" algn="l">
               <a:buNone/>
             </a:pPr>
             <a:r>
@@ -11283,8 +10876,20 @@
             <a:tbl>
               <a:tblPr/>
               <a:tblGrid>
-                <a:gridCol w="2926080"/>
-                <a:gridCol w="3108960"/>
+                <a:gridCol w="2926080">
+                  <a:extLst>
+                    <a:ext uri="{9D8B030D-6E8A-4147-A177-3AD203B41FA5}">
+                      <a16:colId xmlns:a16="http://schemas.microsoft.com/office/drawing/2014/main" val="20000"/>
+                    </a:ext>
+                  </a:extLst>
+                </a:gridCol>
+                <a:gridCol w="3108960">
+                  <a:extLst>
+                    <a:ext uri="{9D8B030D-6E8A-4147-A177-3AD203B41FA5}">
+                      <a16:colId xmlns:a16="http://schemas.microsoft.com/office/drawing/2014/main" val="20001"/>
+                    </a:ext>
+                  </a:extLst>
+                </a:gridCol>
               </a:tblGrid>
               <a:tr h="487680">
                 <a:tc>
@@ -11292,7 +10897,7 @@
                     <a:bodyPr/>
                     <a:lstStyle/>
                     <a:p>
-                      <a:pPr algn="l" indent="0" marL="0">
+                      <a:pPr marL="0" indent="0" algn="l">
                         <a:buNone/>
                       </a:pPr>
                       <a:r>
@@ -11353,7 +10958,7 @@
                     <a:bodyPr/>
                     <a:lstStyle/>
                     <a:p>
-                      <a:pPr algn="l" indent="0" marL="0">
+                      <a:pPr marL="0" indent="0" algn="l">
                         <a:buNone/>
                       </a:pPr>
                       <a:r>
@@ -11409,6 +11014,11 @@
                     </a:solidFill>
                   </a:tcPr>
                 </a:tc>
+                <a:extLst>
+                  <a:ext uri="{0D108BD9-81ED-4DB2-BD59-A6C34878D82A}">
+                    <a16:rowId xmlns:a16="http://schemas.microsoft.com/office/drawing/2014/main" val="10000"/>
+                  </a:ext>
+                </a:extLst>
               </a:tr>
               <a:tr h="487680">
                 <a:tc>
@@ -11416,7 +11026,7 @@
                     <a:bodyPr/>
                     <a:lstStyle/>
                     <a:p>
-                      <a:pPr algn="l" indent="0" marL="0">
+                      <a:pPr marL="0" indent="0" algn="l">
                         <a:buNone/>
                       </a:pPr>
                       <a:r>
@@ -11477,7 +11087,7 @@
                     <a:bodyPr/>
                     <a:lstStyle/>
                     <a:p>
-                      <a:pPr algn="l" indent="0" marL="0">
+                      <a:pPr marL="0" indent="0" algn="l">
                         <a:buNone/>
                       </a:pPr>
                       <a:r>
@@ -11533,6 +11143,11 @@
                     </a:solidFill>
                   </a:tcPr>
                 </a:tc>
+                <a:extLst>
+                  <a:ext uri="{0D108BD9-81ED-4DB2-BD59-A6C34878D82A}">
+                    <a16:rowId xmlns:a16="http://schemas.microsoft.com/office/drawing/2014/main" val="10001"/>
+                  </a:ext>
+                </a:extLst>
               </a:tr>
               <a:tr h="487680">
                 <a:tc>
@@ -11540,7 +11155,7 @@
                     <a:bodyPr/>
                     <a:lstStyle/>
                     <a:p>
-                      <a:pPr algn="l" indent="0" marL="0">
+                      <a:pPr marL="0" indent="0" algn="l">
                         <a:buNone/>
                       </a:pPr>
                       <a:r>
@@ -11601,7 +11216,7 @@
                     <a:bodyPr/>
                     <a:lstStyle/>
                     <a:p>
-                      <a:pPr algn="l" indent="0" marL="0">
+                      <a:pPr marL="0" indent="0" algn="l">
                         <a:buNone/>
                       </a:pPr>
                       <a:r>
@@ -11657,6 +11272,11 @@
                     </a:solidFill>
                   </a:tcPr>
                 </a:tc>
+                <a:extLst>
+                  <a:ext uri="{0D108BD9-81ED-4DB2-BD59-A6C34878D82A}">
+                    <a16:rowId xmlns:a16="http://schemas.microsoft.com/office/drawing/2014/main" val="10002"/>
+                  </a:ext>
+                </a:extLst>
               </a:tr>
             </a:tbl>
           </a:graphicData>
@@ -11683,7 +11303,7 @@
           <a:bodyPr wrap="square" lIns="0" tIns="0" rIns="0" bIns="0" rtlCol="0" anchor="ctr"/>
           <a:lstStyle/>
           <a:p>
-            <a:pPr indent="0" marL="0">
+            <a:pPr marL="0" indent="0">
               <a:buNone/>
             </a:pPr>
             <a:r>
@@ -11730,14 +11350,14 @@
       </p:sp>
       <p:pic>
         <p:nvPicPr>
-          <p:cNvPr id="7" name="Image 0" descr="/home/claude/knapsack_pptx/icons/cogs_gold.png">    </p:cNvPr>
+          <p:cNvPr id="4" name="Image 0" descr="/home/claude/knapsack_pptx/icons/cogs_gold.png"/>
           <p:cNvPicPr>
             <a:picLocks noChangeAspect="1"/>
           </p:cNvPicPr>
           <p:nvPr/>
         </p:nvPicPr>
         <p:blipFill>
-          <a:blip r:embed="rId1"/>
+          <a:blip r:embed="rId3"/>
           <a:stretch>
             <a:fillRect/>
           </a:stretch>
@@ -11773,7 +11393,7 @@
           <a:bodyPr wrap="square" lIns="0" tIns="0" rIns="0" bIns="0" rtlCol="0" anchor="ctr"/>
           <a:lstStyle/>
           <a:p>
-            <a:pPr algn="ctr" indent="0" marL="0">
+            <a:pPr marL="0" indent="0" algn="ctr">
               <a:buNone/>
             </a:pPr>
             <a:r>
@@ -11812,7 +11432,7 @@
           <a:bodyPr wrap="square" lIns="0" tIns="0" rIns="0" bIns="0" rtlCol="0" anchor="ctr"/>
           <a:lstStyle/>
           <a:p>
-            <a:pPr algn="ctr" indent="0" marL="0">
+            <a:pPr marL="0" indent="0" algn="ctr">
               <a:buNone/>
             </a:pPr>
             <a:r>
@@ -11874,7 +11494,7 @@
           <a:bodyPr wrap="square" lIns="0" tIns="0" rIns="0" bIns="0" rtlCol="0" anchor="t"/>
           <a:lstStyle/>
           <a:p>
-            <a:pPr algn="ctr" indent="0" marL="0">
+            <a:pPr marL="0" indent="0" algn="ctr">
               <a:buNone/>
             </a:pPr>
             <a:r>
@@ -11888,9 +11508,6 @@
               </a:rPr>
               <a:t>9 </a:t>
             </a:r>
-            <a:pPr algn="ctr" indent="0" marL="0">
-              <a:buNone/>
-            </a:pPr>
             <a:r>
               <a:rPr lang="en-US" sz="1350" dirty="0">
                 <a:solidFill>
@@ -11902,9 +11519,6 @@
               </a:rPr>
               <a:t>combinações  ×  </a:t>
             </a:r>
-            <a:pPr algn="ctr" indent="0" marL="0">
-              <a:buNone/>
-            </a:pPr>
             <a:r>
               <a:rPr lang="en-US" sz="1350" b="1" dirty="0">
                 <a:solidFill>
@@ -11916,9 +11530,6 @@
               </a:rPr>
               <a:t>9 </a:t>
             </a:r>
-            <a:pPr algn="ctr" indent="0" marL="0">
-              <a:buNone/>
-            </a:pPr>
             <a:r>
               <a:rPr lang="en-US" sz="1350" dirty="0">
                 <a:solidFill>
@@ -11930,9 +11541,6 @@
               </a:rPr>
               <a:t>instâncias  ×  </a:t>
             </a:r>
-            <a:pPr algn="ctr" indent="0" marL="0">
-              <a:buNone/>
-            </a:pPr>
             <a:r>
               <a:rPr lang="en-US" sz="1350" b="1" dirty="0">
                 <a:solidFill>
@@ -11944,9 +11552,6 @@
               </a:rPr>
               <a:t>3 </a:t>
             </a:r>
-            <a:pPr algn="ctr" indent="0" marL="0">
-              <a:buNone/>
-            </a:pPr>
             <a:r>
               <a:rPr lang="en-US" sz="1350" dirty="0">
                 <a:solidFill>
@@ -11983,7 +11588,7 @@
           <a:bodyPr wrap="square" lIns="0" tIns="0" rIns="0" bIns="0" rtlCol="0" anchor="ctr"/>
           <a:lstStyle/>
           <a:p>
-            <a:pPr algn="r" indent="0" marL="0">
+            <a:pPr marL="0" indent="0" algn="r">
               <a:buNone/>
             </a:pPr>
             <a:r>
@@ -12017,6 +11622,7 @@
         <a:solidFill>
           <a:srgbClr val="10162B"/>
         </a:solidFill>
+        <a:effectLst/>
       </p:bgPr>
     </p:bg>
     <p:spTree>
@@ -12054,11 +11660,11 @@
           <a:bodyPr wrap="square" lIns="0" tIns="0" rIns="0" bIns="0" rtlCol="0" anchor="ctr"/>
           <a:lstStyle/>
           <a:p>
-            <a:pPr algn="l" indent="0" marL="0">
+            <a:pPr marL="0" indent="0" algn="l">
               <a:buNone/>
             </a:pPr>
             <a:r>
-              <a:rPr lang="en-US" sz="1200" b="1" spc="200" kern="0" dirty="0">
+              <a:rPr lang="en-US" sz="1200" b="1" kern="0" spc="200" dirty="0">
                 <a:solidFill>
                   <a:srgbClr val="D4AF37"/>
                 </a:solidFill>
@@ -12093,7 +11699,7 @@
           <a:bodyPr wrap="square" lIns="0" tIns="0" rIns="0" bIns="0" rtlCol="0" anchor="ctr"/>
           <a:lstStyle/>
           <a:p>
-            <a:pPr algn="l" indent="0" marL="0">
+            <a:pPr marL="0" indent="0" algn="l">
               <a:buNone/>
             </a:pPr>
             <a:r>
@@ -12132,7 +11738,7 @@
           <a:bodyPr wrap="square" lIns="0" tIns="0" rIns="0" bIns="0" rtlCol="0" anchor="t"/>
           <a:lstStyle/>
           <a:p>
-            <a:pPr indent="0" marL="0">
+            <a:pPr marL="0" indent="0">
               <a:lnSpc>
                 <a:spcPts val="2000"/>
               </a:lnSpc>
@@ -12149,12 +11755,6 @@
               </a:rPr>
               <a:t>Meta-heurística </a:t>
             </a:r>
-            <a:pPr indent="0" marL="0">
-              <a:lnSpc>
-                <a:spcPts val="2000"/>
-              </a:lnSpc>
-              <a:buNone/>
-            </a:pPr>
             <a:r>
               <a:rPr lang="en-US" sz="1450" b="1" dirty="0">
                 <a:solidFill>
@@ -12166,12 +11766,6 @@
               </a:rPr>
               <a:t>populacional</a:t>
             </a:r>
-            <a:pPr indent="0" marL="0">
-              <a:lnSpc>
-                <a:spcPts val="2000"/>
-              </a:lnSpc>
-              <a:buNone/>
-            </a:pPr>
             <a:r>
               <a:rPr lang="en-US" sz="1450" dirty="0">
                 <a:solidFill>
@@ -12236,14 +11830,14 @@
       </p:sp>
       <p:pic>
         <p:nvPicPr>
-          <p:cNvPr id="7" name="Image 0" descr="/home/claude/knapsack_pptx/icons/layers_ice.png">    </p:cNvPr>
+          <p:cNvPr id="7" name="Image 0" descr="/home/claude/knapsack_pptx/icons/layers_ice.png"/>
           <p:cNvPicPr>
             <a:picLocks noChangeAspect="1"/>
           </p:cNvPicPr>
           <p:nvPr/>
         </p:nvPicPr>
         <p:blipFill>
-          <a:blip r:embed="rId1"/>
+          <a:blip r:embed="rId3"/>
           <a:stretch>
             <a:fillRect/>
           </a:stretch>
@@ -12279,7 +11873,7 @@
           <a:bodyPr wrap="square" lIns="0" tIns="0" rIns="0" bIns="0" rtlCol="0" anchor="t"/>
           <a:lstStyle/>
           <a:p>
-            <a:pPr algn="ctr" indent="0" marL="0">
+            <a:pPr marL="0" indent="0" algn="ctr">
               <a:buNone/>
             </a:pPr>
             <a:r>
@@ -12318,7 +11912,7 @@
           <a:bodyPr wrap="square" lIns="0" tIns="0" rIns="0" bIns="0" rtlCol="0" anchor="t"/>
           <a:lstStyle/>
           <a:p>
-            <a:pPr algn="ctr" indent="0" marL="0">
+            <a:pPr marL="0" indent="0" algn="ctr">
               <a:buNone/>
             </a:pPr>
             <a:r>
@@ -12357,7 +11951,7 @@
           <a:bodyPr wrap="square" lIns="0" tIns="0" rIns="0" bIns="0" rtlCol="0" anchor="ctr"/>
           <a:lstStyle/>
           <a:p>
-            <a:pPr algn="ctr" indent="0" marL="0">
+            <a:pPr marL="0" indent="0" algn="ctr">
               <a:buNone/>
             </a:pPr>
             <a:r>
@@ -12424,14 +12018,14 @@
       </p:sp>
       <p:pic>
         <p:nvPicPr>
-          <p:cNvPr id="13" name="Image 1" descr="/home/claude/knapsack_pptx/icons/chartline_gold.png">    </p:cNvPr>
+          <p:cNvPr id="13" name="Image 1" descr="/home/claude/knapsack_pptx/icons/chartline_gold.png"/>
           <p:cNvPicPr>
             <a:picLocks noChangeAspect="1"/>
           </p:cNvPicPr>
           <p:nvPr/>
         </p:nvPicPr>
         <p:blipFill>
-          <a:blip r:embed="rId2"/>
+          <a:blip r:embed="rId4"/>
           <a:stretch>
             <a:fillRect/>
           </a:stretch>
@@ -12467,7 +12061,7 @@
           <a:bodyPr wrap="square" lIns="0" tIns="0" rIns="0" bIns="0" rtlCol="0" anchor="t"/>
           <a:lstStyle/>
           <a:p>
-            <a:pPr algn="ctr" indent="0" marL="0">
+            <a:pPr marL="0" indent="0" algn="ctr">
               <a:buNone/>
             </a:pPr>
             <a:r>
@@ -12506,7 +12100,7 @@
           <a:bodyPr wrap="square" lIns="0" tIns="0" rIns="0" bIns="0" rtlCol="0" anchor="t"/>
           <a:lstStyle/>
           <a:p>
-            <a:pPr algn="ctr" indent="0" marL="0">
+            <a:pPr marL="0" indent="0" algn="ctr">
               <a:buNone/>
             </a:pPr>
             <a:r>
@@ -12545,7 +12139,7 @@
           <a:bodyPr wrap="square" lIns="0" tIns="0" rIns="0" bIns="0" rtlCol="0" anchor="ctr"/>
           <a:lstStyle/>
           <a:p>
-            <a:pPr algn="ctr" indent="0" marL="0">
+            <a:pPr marL="0" indent="0" algn="ctr">
               <a:buNone/>
             </a:pPr>
             <a:r>
@@ -12612,14 +12206,14 @@
       </p:sp>
       <p:pic>
         <p:nvPicPr>
-          <p:cNvPr id="19" name="Image 2" descr="/home/claude/knapsack_pptx/icons/target_ice.png">    </p:cNvPr>
+          <p:cNvPr id="19" name="Image 2" descr="/home/claude/knapsack_pptx/icons/target_ice.png"/>
           <p:cNvPicPr>
             <a:picLocks noChangeAspect="1"/>
           </p:cNvPicPr>
           <p:nvPr/>
         </p:nvPicPr>
         <p:blipFill>
-          <a:blip r:embed="rId3"/>
+          <a:blip r:embed="rId5"/>
           <a:stretch>
             <a:fillRect/>
           </a:stretch>
@@ -12655,7 +12249,7 @@
           <a:bodyPr wrap="square" lIns="0" tIns="0" rIns="0" bIns="0" rtlCol="0" anchor="t"/>
           <a:lstStyle/>
           <a:p>
-            <a:pPr algn="ctr" indent="0" marL="0">
+            <a:pPr marL="0" indent="0" algn="ctr">
               <a:buNone/>
             </a:pPr>
             <a:r>
@@ -12694,7 +12288,7 @@
           <a:bodyPr wrap="square" lIns="0" tIns="0" rIns="0" bIns="0" rtlCol="0" anchor="t"/>
           <a:lstStyle/>
           <a:p>
-            <a:pPr algn="ctr" indent="0" marL="0">
+            <a:pPr marL="0" indent="0" algn="ctr">
               <a:buNone/>
             </a:pPr>
             <a:r>
@@ -12733,7 +12327,7 @@
           <a:bodyPr wrap="square" lIns="0" tIns="0" rIns="0" bIns="0" rtlCol="0" anchor="ctr"/>
           <a:lstStyle/>
           <a:p>
-            <a:pPr algn="ctr" indent="0" marL="0">
+            <a:pPr marL="0" indent="0" algn="ctr">
               <a:buNone/>
             </a:pPr>
             <a:r>
@@ -12800,14 +12394,14 @@
       </p:sp>
       <p:pic>
         <p:nvPicPr>
-          <p:cNvPr id="25" name="Image 3" descr="/home/claude/knapsack_pptx/icons/random_gold.png">    </p:cNvPr>
+          <p:cNvPr id="25" name="Image 3" descr="/home/claude/knapsack_pptx/icons/random_gold.png"/>
           <p:cNvPicPr>
             <a:picLocks noChangeAspect="1"/>
           </p:cNvPicPr>
           <p:nvPr/>
         </p:nvPicPr>
         <p:blipFill>
-          <a:blip r:embed="rId4"/>
+          <a:blip r:embed="rId6"/>
           <a:stretch>
             <a:fillRect/>
           </a:stretch>
@@ -12843,7 +12437,7 @@
           <a:bodyPr wrap="square" lIns="0" tIns="0" rIns="0" bIns="0" rtlCol="0" anchor="t"/>
           <a:lstStyle/>
           <a:p>
-            <a:pPr algn="ctr" indent="0" marL="0">
+            <a:pPr marL="0" indent="0" algn="ctr">
               <a:buNone/>
             </a:pPr>
             <a:r>
@@ -12882,7 +12476,7 @@
           <a:bodyPr wrap="square" lIns="0" tIns="0" rIns="0" bIns="0" rtlCol="0" anchor="t"/>
           <a:lstStyle/>
           <a:p>
-            <a:pPr algn="ctr" indent="0" marL="0">
+            <a:pPr marL="0" indent="0" algn="ctr">
               <a:buNone/>
             </a:pPr>
             <a:r>
@@ -12921,7 +12515,7 @@
           <a:bodyPr wrap="square" lIns="0" tIns="0" rIns="0" bIns="0" rtlCol="0" anchor="ctr"/>
           <a:lstStyle/>
           <a:p>
-            <a:pPr algn="ctr" indent="0" marL="0">
+            <a:pPr marL="0" indent="0" algn="ctr">
               <a:buNone/>
             </a:pPr>
             <a:r>
@@ -12988,14 +12582,14 @@
       </p:sp>
       <p:pic>
         <p:nvPicPr>
-          <p:cNvPr id="31" name="Image 4" descr="/home/claude/knapsack_pptx/icons/dna_ice.png">    </p:cNvPr>
+          <p:cNvPr id="31" name="Image 4" descr="/home/claude/knapsack_pptx/icons/dna_ice.png"/>
           <p:cNvPicPr>
             <a:picLocks noChangeAspect="1"/>
           </p:cNvPicPr>
           <p:nvPr/>
         </p:nvPicPr>
         <p:blipFill>
-          <a:blip r:embed="rId5"/>
+          <a:blip r:embed="rId7"/>
           <a:stretch>
             <a:fillRect/>
           </a:stretch>
@@ -13031,7 +12625,7 @@
           <a:bodyPr wrap="square" lIns="0" tIns="0" rIns="0" bIns="0" rtlCol="0" anchor="t"/>
           <a:lstStyle/>
           <a:p>
-            <a:pPr algn="ctr" indent="0" marL="0">
+            <a:pPr marL="0" indent="0" algn="ctr">
               <a:buNone/>
             </a:pPr>
             <a:r>
@@ -13070,7 +12664,7 @@
           <a:bodyPr wrap="square" lIns="0" tIns="0" rIns="0" bIns="0" rtlCol="0" anchor="t"/>
           <a:lstStyle/>
           <a:p>
-            <a:pPr algn="ctr" indent="0" marL="0">
+            <a:pPr marL="0" indent="0" algn="ctr">
               <a:buNone/>
             </a:pPr>
             <a:r>
@@ -13109,7 +12703,7 @@
           <a:bodyPr wrap="square" lIns="0" tIns="0" rIns="0" bIns="0" rtlCol="0" anchor="ctr"/>
           <a:lstStyle/>
           <a:p>
-            <a:pPr algn="ctr" indent="0" marL="0">
+            <a:pPr marL="0" indent="0" algn="ctr">
               <a:buNone/>
             </a:pPr>
             <a:r>
@@ -13176,14 +12770,14 @@
       </p:sp>
       <p:pic>
         <p:nvPicPr>
-          <p:cNvPr id="37" name="Image 5" descr="/home/claude/knapsack_pptx/icons/check_gold.png">    </p:cNvPr>
+          <p:cNvPr id="37" name="Image 5" descr="/home/claude/knapsack_pptx/icons/check_gold.png"/>
           <p:cNvPicPr>
             <a:picLocks noChangeAspect="1"/>
           </p:cNvPicPr>
           <p:nvPr/>
         </p:nvPicPr>
         <p:blipFill>
-          <a:blip r:embed="rId6"/>
+          <a:blip r:embed="rId8"/>
           <a:stretch>
             <a:fillRect/>
           </a:stretch>
@@ -13219,7 +12813,7 @@
           <a:bodyPr wrap="square" lIns="0" tIns="0" rIns="0" bIns="0" rtlCol="0" anchor="t"/>
           <a:lstStyle/>
           <a:p>
-            <a:pPr algn="ctr" indent="0" marL="0">
+            <a:pPr marL="0" indent="0" algn="ctr">
               <a:buNone/>
             </a:pPr>
             <a:r>
@@ -13258,7 +12852,7 @@
           <a:bodyPr wrap="square" lIns="0" tIns="0" rIns="0" bIns="0" rtlCol="0" anchor="t"/>
           <a:lstStyle/>
           <a:p>
-            <a:pPr algn="ctr" indent="0" marL="0">
+            <a:pPr marL="0" indent="0" algn="ctr">
               <a:buNone/>
             </a:pPr>
             <a:r>
@@ -13297,7 +12891,7 @@
           <a:bodyPr wrap="square" lIns="0" tIns="0" rIns="0" bIns="0" rtlCol="0" anchor="ctr"/>
           <a:lstStyle/>
           <a:p>
-            <a:pPr algn="ctr" indent="0" marL="0">
+            <a:pPr marL="0" indent="0" algn="ctr">
               <a:buNone/>
             </a:pPr>
             <a:r>
@@ -13364,14 +12958,14 @@
       </p:sp>
       <p:pic>
         <p:nvPicPr>
-          <p:cNvPr id="43" name="Image 6" descr="/home/claude/knapsack_pptx/icons/sitemap_ice.png">    </p:cNvPr>
+          <p:cNvPr id="43" name="Image 6" descr="/home/claude/knapsack_pptx/icons/sitemap_ice.png"/>
           <p:cNvPicPr>
             <a:picLocks noChangeAspect="1"/>
           </p:cNvPicPr>
           <p:nvPr/>
         </p:nvPicPr>
         <p:blipFill>
-          <a:blip r:embed="rId7"/>
+          <a:blip r:embed="rId9"/>
           <a:stretch>
             <a:fillRect/>
           </a:stretch>
@@ -13407,7 +13001,7 @@
           <a:bodyPr wrap="square" lIns="0" tIns="0" rIns="0" bIns="0" rtlCol="0" anchor="t"/>
           <a:lstStyle/>
           <a:p>
-            <a:pPr algn="ctr" indent="0" marL="0">
+            <a:pPr marL="0" indent="0" algn="ctr">
               <a:buNone/>
             </a:pPr>
             <a:r>
@@ -13446,7 +13040,7 @@
           <a:bodyPr wrap="square" lIns="0" tIns="0" rIns="0" bIns="0" rtlCol="0" anchor="t"/>
           <a:lstStyle/>
           <a:p>
-            <a:pPr algn="ctr" indent="0" marL="0">
+            <a:pPr marL="0" indent="0" algn="ctr">
               <a:buNone/>
             </a:pPr>
             <a:r>
@@ -13485,7 +13079,7 @@
           <a:bodyPr wrap="square" lIns="0" tIns="0" rIns="0" bIns="0" rtlCol="0" anchor="ctr"/>
           <a:lstStyle/>
           <a:p>
-            <a:pPr algn="ctr" indent="0" marL="0">
+            <a:pPr marL="0" indent="0" algn="ctr">
               <a:buNone/>
             </a:pPr>
             <a:r>
@@ -13527,14 +13121,14 @@
       </p:sp>
       <p:pic>
         <p:nvPicPr>
-          <p:cNvPr id="48" name="Image 7" descr="/home/claude/knapsack_pptx/icons/brain_gold.png">    </p:cNvPr>
+          <p:cNvPr id="48" name="Image 7" descr="/home/claude/knapsack_pptx/icons/brain_gold.png"/>
           <p:cNvPicPr>
             <a:picLocks noChangeAspect="1"/>
           </p:cNvPicPr>
           <p:nvPr/>
         </p:nvPicPr>
         <p:blipFill>
-          <a:blip r:embed="rId8"/>
+          <a:blip r:embed="rId10"/>
           <a:stretch>
             <a:fillRect/>
           </a:stretch>
@@ -13570,7 +13164,7 @@
           <a:bodyPr wrap="square" lIns="0" tIns="0" rIns="0" bIns="0" rtlCol="0" anchor="ctr"/>
           <a:lstStyle/>
           <a:p>
-            <a:pPr indent="0" marL="0">
+            <a:pPr marL="0" indent="0">
               <a:lnSpc>
                 <a:spcPts val="1600"/>
               </a:lnSpc>
@@ -13587,12 +13181,6 @@
               </a:rPr>
               <a:t>Reparo de factibilidade: </a:t>
             </a:r>
-            <a:pPr indent="0" marL="0">
-              <a:lnSpc>
-                <a:spcPts val="1600"/>
-              </a:lnSpc>
-              <a:buNone/>
-            </a:pPr>
             <a:r>
               <a:rPr lang="en-US" sz="1200" dirty="0">
                 <a:solidFill>
@@ -13629,7 +13217,7 @@
           <a:bodyPr wrap="square" lIns="0" tIns="0" rIns="0" bIns="0" rtlCol="0" anchor="ctr"/>
           <a:lstStyle/>
           <a:p>
-            <a:pPr algn="r" indent="0" marL="0">
+            <a:pPr marL="0" indent="0" algn="r">
               <a:buNone/>
             </a:pPr>
             <a:r>
@@ -13663,6 +13251,7 @@
         <a:solidFill>
           <a:srgbClr val="10162B"/>
         </a:solidFill>
+        <a:effectLst/>
       </p:bgPr>
     </p:bg>
     <p:spTree>
@@ -13700,11 +13289,11 @@
           <a:bodyPr wrap="square" lIns="0" tIns="0" rIns="0" bIns="0" rtlCol="0" anchor="ctr"/>
           <a:lstStyle/>
           <a:p>
-            <a:pPr algn="l" indent="0" marL="0">
+            <a:pPr marL="0" indent="0" algn="l">
               <a:buNone/>
             </a:pPr>
             <a:r>
-              <a:rPr lang="en-US" sz="1200" b="1" spc="200" kern="0" dirty="0">
+              <a:rPr lang="en-US" sz="1200" b="1" kern="0" spc="200" dirty="0">
                 <a:solidFill>
                   <a:srgbClr val="D4AF37"/>
                 </a:solidFill>
@@ -13739,7 +13328,7 @@
           <a:bodyPr wrap="square" lIns="0" tIns="0" rIns="0" bIns="0" rtlCol="0" anchor="ctr"/>
           <a:lstStyle/>
           <a:p>
-            <a:pPr algn="l" indent="0" marL="0">
+            <a:pPr marL="0" indent="0" algn="l">
               <a:buNone/>
             </a:pPr>
             <a:r>
@@ -13780,8 +13369,20 @@
             <a:tbl>
               <a:tblPr/>
               <a:tblGrid>
-                <a:gridCol w="2926080"/>
-                <a:gridCol w="3108960"/>
+                <a:gridCol w="2926080">
+                  <a:extLst>
+                    <a:ext uri="{9D8B030D-6E8A-4147-A177-3AD203B41FA5}">
+                      <a16:colId xmlns:a16="http://schemas.microsoft.com/office/drawing/2014/main" val="20000"/>
+                    </a:ext>
+                  </a:extLst>
+                </a:gridCol>
+                <a:gridCol w="3108960">
+                  <a:extLst>
+                    <a:ext uri="{9D8B030D-6E8A-4147-A177-3AD203B41FA5}">
+                      <a16:colId xmlns:a16="http://schemas.microsoft.com/office/drawing/2014/main" val="20001"/>
+                    </a:ext>
+                  </a:extLst>
+                </a:gridCol>
               </a:tblGrid>
               <a:tr h="530352">
                 <a:tc>
@@ -13789,7 +13390,7 @@
                     <a:bodyPr/>
                     <a:lstStyle/>
                     <a:p>
-                      <a:pPr algn="l" indent="0" marL="0">
+                      <a:pPr marL="0" indent="0" algn="l">
                         <a:buNone/>
                       </a:pPr>
                       <a:r>
@@ -13850,7 +13451,7 @@
                     <a:bodyPr/>
                     <a:lstStyle/>
                     <a:p>
-                      <a:pPr algn="l" indent="0" marL="0">
+                      <a:pPr marL="0" indent="0" algn="l">
                         <a:buNone/>
                       </a:pPr>
                       <a:r>
@@ -13906,6 +13507,11 @@
                     </a:solidFill>
                   </a:tcPr>
                 </a:tc>
+                <a:extLst>
+                  <a:ext uri="{0D108BD9-81ED-4DB2-BD59-A6C34878D82A}">
+                    <a16:rowId xmlns:a16="http://schemas.microsoft.com/office/drawing/2014/main" val="10000"/>
+                  </a:ext>
+                </a:extLst>
               </a:tr>
               <a:tr h="530352">
                 <a:tc>
@@ -13913,7 +13519,7 @@
                     <a:bodyPr/>
                     <a:lstStyle/>
                     <a:p>
-                      <a:pPr algn="l" indent="0" marL="0">
+                      <a:pPr marL="0" indent="0" algn="l">
                         <a:buNone/>
                       </a:pPr>
                       <a:r>
@@ -13974,7 +13580,7 @@
                     <a:bodyPr/>
                     <a:lstStyle/>
                     <a:p>
-                      <a:pPr algn="l" indent="0" marL="0">
+                      <a:pPr marL="0" indent="0" algn="l">
                         <a:buNone/>
                       </a:pPr>
                       <a:r>
@@ -14030,6 +13636,11 @@
                     </a:solidFill>
                   </a:tcPr>
                 </a:tc>
+                <a:extLst>
+                  <a:ext uri="{0D108BD9-81ED-4DB2-BD59-A6C34878D82A}">
+                    <a16:rowId xmlns:a16="http://schemas.microsoft.com/office/drawing/2014/main" val="10001"/>
+                  </a:ext>
+                </a:extLst>
               </a:tr>
               <a:tr h="530352">
                 <a:tc>
@@ -14037,7 +13648,7 @@
                     <a:bodyPr/>
                     <a:lstStyle/>
                     <a:p>
-                      <a:pPr algn="l" indent="0" marL="0">
+                      <a:pPr marL="0" indent="0" algn="l">
                         <a:buNone/>
                       </a:pPr>
                       <a:r>
@@ -14098,7 +13709,7 @@
                     <a:bodyPr/>
                     <a:lstStyle/>
                     <a:p>
-                      <a:pPr algn="l" indent="0" marL="0">
+                      <a:pPr marL="0" indent="0" algn="l">
                         <a:buNone/>
                       </a:pPr>
                       <a:r>
@@ -14154,6 +13765,11 @@
                     </a:solidFill>
                   </a:tcPr>
                 </a:tc>
+                <a:extLst>
+                  <a:ext uri="{0D108BD9-81ED-4DB2-BD59-A6C34878D82A}">
+                    <a16:rowId xmlns:a16="http://schemas.microsoft.com/office/drawing/2014/main" val="10002"/>
+                  </a:ext>
+                </a:extLst>
               </a:tr>
               <a:tr h="530352">
                 <a:tc>
@@ -14161,7 +13777,7 @@
                     <a:bodyPr/>
                     <a:lstStyle/>
                     <a:p>
-                      <a:pPr algn="l" indent="0" marL="0">
+                      <a:pPr marL="0" indent="0" algn="l">
                         <a:buNone/>
                       </a:pPr>
                       <a:r>
@@ -14222,7 +13838,7 @@
                     <a:bodyPr/>
                     <a:lstStyle/>
                     <a:p>
-                      <a:pPr algn="l" indent="0" marL="0">
+                      <a:pPr marL="0" indent="0" algn="l">
                         <a:buNone/>
                       </a:pPr>
                       <a:r>
@@ -14278,6 +13894,11 @@
                     </a:solidFill>
                   </a:tcPr>
                 </a:tc>
+                <a:extLst>
+                  <a:ext uri="{0D108BD9-81ED-4DB2-BD59-A6C34878D82A}">
+                    <a16:rowId xmlns:a16="http://schemas.microsoft.com/office/drawing/2014/main" val="10003"/>
+                  </a:ext>
+                </a:extLst>
               </a:tr>
               <a:tr h="530352">
                 <a:tc>
@@ -14285,7 +13906,7 @@
                     <a:bodyPr/>
                     <a:lstStyle/>
                     <a:p>
-                      <a:pPr algn="l" indent="0" marL="0">
+                      <a:pPr marL="0" indent="0" algn="l">
                         <a:buNone/>
                       </a:pPr>
                       <a:r>
@@ -14346,7 +13967,7 @@
                     <a:bodyPr/>
                     <a:lstStyle/>
                     <a:p>
-                      <a:pPr algn="l" indent="0" marL="0">
+                      <a:pPr marL="0" indent="0" algn="l">
                         <a:buNone/>
                       </a:pPr>
                       <a:r>
@@ -14402,6 +14023,11 @@
                     </a:solidFill>
                   </a:tcPr>
                 </a:tc>
+                <a:extLst>
+                  <a:ext uri="{0D108BD9-81ED-4DB2-BD59-A6C34878D82A}">
+                    <a16:rowId xmlns:a16="http://schemas.microsoft.com/office/drawing/2014/main" val="10004"/>
+                  </a:ext>
+                </a:extLst>
               </a:tr>
             </a:tbl>
           </a:graphicData>
@@ -14428,7 +14054,7 @@
           <a:bodyPr wrap="square" lIns="0" tIns="0" rIns="0" bIns="0" rtlCol="0" anchor="ctr"/>
           <a:lstStyle/>
           <a:p>
-            <a:pPr indent="0" marL="0">
+            <a:pPr marL="0" indent="0">
               <a:buNone/>
             </a:pPr>
             <a:r>
@@ -14475,14 +14101,14 @@
       </p:sp>
       <p:pic>
         <p:nvPicPr>
-          <p:cNvPr id="7" name="Image 0" descr="/home/claude/knapsack_pptx/icons/dna_gold.png">    </p:cNvPr>
+          <p:cNvPr id="7" name="Image 0" descr="/home/claude/knapsack_pptx/icons/dna_gold.png"/>
           <p:cNvPicPr>
             <a:picLocks noChangeAspect="1"/>
           </p:cNvPicPr>
           <p:nvPr/>
         </p:nvPicPr>
         <p:blipFill>
-          <a:blip r:embed="rId1"/>
+          <a:blip r:embed="rId3"/>
           <a:stretch>
             <a:fillRect/>
           </a:stretch>
@@ -14518,7 +14144,7 @@
           <a:bodyPr wrap="square" lIns="0" tIns="0" rIns="0" bIns="0" rtlCol="0" anchor="ctr"/>
           <a:lstStyle/>
           <a:p>
-            <a:pPr algn="ctr" indent="0" marL="0">
+            <a:pPr marL="0" indent="0" algn="ctr">
               <a:buNone/>
             </a:pPr>
             <a:r>
@@ -14538,7 +14164,7 @@
       </p:sp>
       <p:sp>
         <p:nvSpPr>
-          <p:cNvPr id="9" name="Text 5"/>
+          <p:cNvPr id="4" name="Text 5"/>
           <p:cNvSpPr/>
           <p:nvPr/>
         </p:nvSpPr>
@@ -14557,7 +14183,7 @@
           <a:bodyPr wrap="square" lIns="0" tIns="0" rIns="0" bIns="0" rtlCol="0" anchor="ctr"/>
           <a:lstStyle/>
           <a:p>
-            <a:pPr algn="ctr" indent="0" marL="0">
+            <a:pPr marL="0" indent="0" algn="ctr">
               <a:buNone/>
             </a:pPr>
             <a:r>
@@ -14619,7 +14245,7 @@
           <a:bodyPr wrap="square" lIns="0" tIns="0" rIns="0" bIns="0" rtlCol="0" anchor="t"/>
           <a:lstStyle/>
           <a:p>
-            <a:pPr algn="ctr" indent="0" marL="0">
+            <a:pPr marL="0" indent="0" algn="ctr">
               <a:buNone/>
             </a:pPr>
             <a:r>
@@ -14633,9 +14259,6 @@
               </a:rPr>
               <a:t>12 </a:t>
             </a:r>
-            <a:pPr algn="ctr" indent="0" marL="0">
-              <a:buNone/>
-            </a:pPr>
             <a:r>
               <a:rPr lang="en-US" sz="1350" dirty="0">
                 <a:solidFill>
@@ -14647,9 +14270,6 @@
               </a:rPr>
               <a:t>combinações  ×  </a:t>
             </a:r>
-            <a:pPr algn="ctr" indent="0" marL="0">
-              <a:buNone/>
-            </a:pPr>
             <a:r>
               <a:rPr lang="en-US" sz="1350" b="1" dirty="0">
                 <a:solidFill>
@@ -14661,9 +14281,6 @@
               </a:rPr>
               <a:t>9 </a:t>
             </a:r>
-            <a:pPr algn="ctr" indent="0" marL="0">
-              <a:buNone/>
-            </a:pPr>
             <a:r>
               <a:rPr lang="en-US" sz="1350" dirty="0">
                 <a:solidFill>
@@ -14675,9 +14292,6 @@
               </a:rPr>
               <a:t>instâncias  ×  </a:t>
             </a:r>
-            <a:pPr algn="ctr" indent="0" marL="0">
-              <a:buNone/>
-            </a:pPr>
             <a:r>
               <a:rPr lang="en-US" sz="1350" b="1" dirty="0">
                 <a:solidFill>
@@ -14689,9 +14303,6 @@
               </a:rPr>
               <a:t>3 </a:t>
             </a:r>
-            <a:pPr algn="ctr" indent="0" marL="0">
-              <a:buNone/>
-            </a:pPr>
             <a:r>
               <a:rPr lang="en-US" sz="1350" dirty="0">
                 <a:solidFill>
@@ -14728,7 +14339,7 @@
           <a:bodyPr wrap="square" lIns="0" tIns="0" rIns="0" bIns="0" rtlCol="0" anchor="ctr"/>
           <a:lstStyle/>
           <a:p>
-            <a:pPr algn="r" indent="0" marL="0">
+            <a:pPr marL="0" indent="0" algn="r">
               <a:buNone/>
             </a:pPr>
             <a:r>
@@ -14762,6 +14373,7 @@
         <a:solidFill>
           <a:srgbClr val="10162B"/>
         </a:solidFill>
+        <a:effectLst/>
       </p:bgPr>
     </p:bg>
     <p:spTree>
@@ -14799,11 +14411,11 @@
           <a:bodyPr wrap="square" lIns="0" tIns="0" rIns="0" bIns="0" rtlCol="0" anchor="ctr"/>
           <a:lstStyle/>
           <a:p>
-            <a:pPr algn="l" indent="0" marL="0">
+            <a:pPr marL="0" indent="0" algn="l">
               <a:buNone/>
             </a:pPr>
             <a:r>
-              <a:rPr lang="en-US" sz="1200" b="1" spc="200" kern="0" dirty="0">
+              <a:rPr lang="en-US" sz="1200" b="1" kern="0" spc="200" dirty="0">
                 <a:solidFill>
                   <a:srgbClr val="D4AF37"/>
                 </a:solidFill>
@@ -14838,7 +14450,7 @@
           <a:bodyPr wrap="square" lIns="0" tIns="0" rIns="0" bIns="0" rtlCol="0" anchor="ctr"/>
           <a:lstStyle/>
           <a:p>
-            <a:pPr algn="l" indent="0" marL="0">
+            <a:pPr marL="0" indent="0" algn="l">
               <a:buNone/>
             </a:pPr>
             <a:r>
@@ -14865,26 +14477,62 @@
           <p:nvPr>
             <p:extLst>
               <p:ext uri="{D42A27DB-BD31-4B8C-83A1-F6EECF244321}">
-                <p14:modId xmlns:p14="http://schemas.microsoft.com/office/powerpoint/2010/main" val="1579011935"/>
+                <p14:modId xmlns:p14="http://schemas.microsoft.com/office/powerpoint/2010/main" val="3258250948"/>
               </p:ext>
             </p:extLst>
           </p:nvPr>
         </p:nvGraphicFramePr>
         <p:xfrm>
           <a:off x="548640" y="1600200"/>
-          <a:ext cx="11064240" cy="4023360"/>
+          <a:ext cx="11064240" cy="4047744"/>
         </p:xfrm>
         <a:graphic>
           <a:graphicData uri="http://schemas.openxmlformats.org/drawingml/2006/table">
             <a:tbl>
               <a:tblPr/>
               <a:tblGrid>
-                <a:gridCol w="2103120"/>
-                <a:gridCol w="1828800"/>
-                <a:gridCol w="1828800"/>
-                <a:gridCol w="1783080"/>
-                <a:gridCol w="1828800"/>
-                <a:gridCol w="1691640"/>
+                <a:gridCol w="2103120">
+                  <a:extLst>
+                    <a:ext uri="{9D8B030D-6E8A-4147-A177-3AD203B41FA5}">
+                      <a16:colId xmlns:a16="http://schemas.microsoft.com/office/drawing/2014/main" val="20000"/>
+                    </a:ext>
+                  </a:extLst>
+                </a:gridCol>
+                <a:gridCol w="1828800">
+                  <a:extLst>
+                    <a:ext uri="{9D8B030D-6E8A-4147-A177-3AD203B41FA5}">
+                      <a16:colId xmlns:a16="http://schemas.microsoft.com/office/drawing/2014/main" val="20001"/>
+                    </a:ext>
+                  </a:extLst>
+                </a:gridCol>
+                <a:gridCol w="1828800">
+                  <a:extLst>
+                    <a:ext uri="{9D8B030D-6E8A-4147-A177-3AD203B41FA5}">
+                      <a16:colId xmlns:a16="http://schemas.microsoft.com/office/drawing/2014/main" val="20002"/>
+                    </a:ext>
+                  </a:extLst>
+                </a:gridCol>
+                <a:gridCol w="1783080">
+                  <a:extLst>
+                    <a:ext uri="{9D8B030D-6E8A-4147-A177-3AD203B41FA5}">
+                      <a16:colId xmlns:a16="http://schemas.microsoft.com/office/drawing/2014/main" val="20003"/>
+                    </a:ext>
+                  </a:extLst>
+                </a:gridCol>
+                <a:gridCol w="1828800">
+                  <a:extLst>
+                    <a:ext uri="{9D8B030D-6E8A-4147-A177-3AD203B41FA5}">
+                      <a16:colId xmlns:a16="http://schemas.microsoft.com/office/drawing/2014/main" val="20004"/>
+                    </a:ext>
+                  </a:extLst>
+                </a:gridCol>
+                <a:gridCol w="1691640">
+                  <a:extLst>
+                    <a:ext uri="{9D8B030D-6E8A-4147-A177-3AD203B41FA5}">
+                      <a16:colId xmlns:a16="http://schemas.microsoft.com/office/drawing/2014/main" val="20005"/>
+                    </a:ext>
+                  </a:extLst>
+                </a:gridCol>
               </a:tblGrid>
               <a:tr h="402336">
                 <a:tc>
@@ -14892,7 +14540,7 @@
                     <a:bodyPr/>
                     <a:lstStyle/>
                     <a:p>
-                      <a:pPr algn="ctr" indent="0" marL="0">
+                      <a:pPr marL="0" indent="0" algn="ctr">
                         <a:buNone/>
                       </a:pPr>
                       <a:r>
@@ -14953,7 +14601,7 @@
                     <a:bodyPr/>
                     <a:lstStyle/>
                     <a:p>
-                      <a:pPr algn="ctr" indent="0" marL="0">
+                      <a:pPr marL="0" indent="0" algn="ctr">
                         <a:buNone/>
                       </a:pPr>
                       <a:r>
@@ -15014,7 +14662,7 @@
                     <a:bodyPr/>
                     <a:lstStyle/>
                     <a:p>
-                      <a:pPr algn="ctr" indent="0" marL="0">
+                      <a:pPr marL="0" indent="0" algn="ctr">
                         <a:buNone/>
                       </a:pPr>
                       <a:r>
@@ -15028,7 +14676,7 @@
                       <a:endParaRPr lang="en-US" sz="1150" dirty="0"/>
                     </a:p>
                     <a:p>
-                      <a:pPr algn="ctr" indent="0" marL="0">
+                      <a:pPr marL="0" indent="0" algn="ctr">
                         <a:buNone/>
                       </a:pPr>
                       <a:r>
@@ -15089,7 +14737,7 @@
                     <a:bodyPr/>
                     <a:lstStyle/>
                     <a:p>
-                      <a:pPr algn="ctr" indent="0" marL="0">
+                      <a:pPr marL="0" indent="0" algn="ctr">
                         <a:buNone/>
                       </a:pPr>
                       <a:r>
@@ -15103,7 +14751,7 @@
                       <a:endParaRPr lang="en-US" sz="1150" dirty="0"/>
                     </a:p>
                     <a:p>
-                      <a:pPr algn="ctr" indent="0" marL="0">
+                      <a:pPr marL="0" indent="0" algn="ctr">
                         <a:buNone/>
                       </a:pPr>
                       <a:r>
@@ -15164,7 +14812,7 @@
                     <a:bodyPr/>
                     <a:lstStyle/>
                     <a:p>
-                      <a:pPr algn="ctr" indent="0" marL="0">
+                      <a:pPr marL="0" indent="0" algn="ctr">
                         <a:buNone/>
                       </a:pPr>
                       <a:r>
@@ -15178,7 +14826,7 @@
                       <a:endParaRPr lang="en-US" sz="1150" dirty="0"/>
                     </a:p>
                     <a:p>
-                      <a:pPr algn="ctr" indent="0" marL="0">
+                      <a:pPr marL="0" indent="0" algn="ctr">
                         <a:buNone/>
                       </a:pPr>
                       <a:r>
@@ -15239,7 +14887,7 @@
                     <a:bodyPr/>
                     <a:lstStyle/>
                     <a:p>
-                      <a:pPr algn="ctr" indent="0" marL="0">
+                      <a:pPr marL="0" indent="0" algn="ctr">
                         <a:buNone/>
                       </a:pPr>
                       <a:r>
@@ -15253,7 +14901,7 @@
                       <a:endParaRPr lang="en-US" sz="1150" dirty="0"/>
                     </a:p>
                     <a:p>
-                      <a:pPr algn="ctr" indent="0" marL="0">
+                      <a:pPr marL="0" indent="0" algn="ctr">
                         <a:buNone/>
                       </a:pPr>
                       <a:r>
@@ -15309,6 +14957,11 @@
                     </a:solidFill>
                   </a:tcPr>
                 </a:tc>
+                <a:extLst>
+                  <a:ext uri="{0D108BD9-81ED-4DB2-BD59-A6C34878D82A}">
+                    <a16:rowId xmlns:a16="http://schemas.microsoft.com/office/drawing/2014/main" val="10000"/>
+                  </a:ext>
+                </a:extLst>
               </a:tr>
               <a:tr h="402336">
                 <a:tc>
@@ -15316,7 +14969,7 @@
                     <a:bodyPr/>
                     <a:lstStyle/>
                     <a:p>
-                      <a:pPr algn="l" indent="0" marL="0">
+                      <a:pPr marL="0" indent="0" algn="l">
                         <a:buNone/>
                       </a:pPr>
                       <a:r>
@@ -15377,7 +15030,7 @@
                     <a:bodyPr/>
                     <a:lstStyle/>
                     <a:p>
-                      <a:pPr algn="ctr" indent="0" marL="0">
+                      <a:pPr marL="0" indent="0" algn="ctr">
                         <a:buNone/>
                       </a:pPr>
                       <a:r>
@@ -15438,7 +15091,7 @@
                     <a:bodyPr/>
                     <a:lstStyle/>
                     <a:p>
-                      <a:pPr algn="ctr" indent="0" marL="0">
+                      <a:pPr marL="0" indent="0" algn="ctr">
                         <a:buNone/>
                       </a:pPr>
                       <a:r>
@@ -15499,7 +15152,7 @@
                     <a:bodyPr/>
                     <a:lstStyle/>
                     <a:p>
-                      <a:pPr algn="ctr" indent="0" marL="0">
+                      <a:pPr marL="0" indent="0" algn="ctr">
                         <a:buNone/>
                       </a:pPr>
                       <a:r>
@@ -15560,7 +15213,7 @@
                     <a:bodyPr/>
                     <a:lstStyle/>
                     <a:p>
-                      <a:pPr algn="ctr" indent="0" marL="0">
+                      <a:pPr marL="0" indent="0" algn="ctr">
                         <a:buNone/>
                       </a:pPr>
                       <a:r>
@@ -15621,7 +15274,7 @@
                     <a:bodyPr/>
                     <a:lstStyle/>
                     <a:p>
-                      <a:pPr algn="ctr" indent="0" marL="0">
+                      <a:pPr marL="0" indent="0" algn="ctr">
                         <a:buNone/>
                       </a:pPr>
                       <a:r>
@@ -15677,6 +15330,11 @@
                     </a:solidFill>
                   </a:tcPr>
                 </a:tc>
+                <a:extLst>
+                  <a:ext uri="{0D108BD9-81ED-4DB2-BD59-A6C34878D82A}">
+                    <a16:rowId xmlns:a16="http://schemas.microsoft.com/office/drawing/2014/main" val="10001"/>
+                  </a:ext>
+                </a:extLst>
               </a:tr>
               <a:tr h="402336">
                 <a:tc>
@@ -15684,7 +15342,7 @@
                     <a:bodyPr/>
                     <a:lstStyle/>
                     <a:p>
-                      <a:pPr algn="l" indent="0" marL="0">
+                      <a:pPr marL="0" indent="0" algn="l">
                         <a:buNone/>
                       </a:pPr>
                       <a:r>
@@ -15745,7 +15403,7 @@
                     <a:bodyPr/>
                     <a:lstStyle/>
                     <a:p>
-                      <a:pPr algn="ctr" indent="0" marL="0">
+                      <a:pPr marL="0" indent="0" algn="ctr">
                         <a:buNone/>
                       </a:pPr>
                       <a:r>
@@ -15806,7 +15464,133 @@
                     <a:bodyPr/>
                     <a:lstStyle/>
                     <a:p>
-                      <a:pPr algn="ctr" indent="0" marL="0">
+                      <a:pPr marL="0" indent="0" algn="ctr">
+                        <a:buNone/>
+                      </a:pPr>
+                      <a:r>
+                        <a:rPr lang="en-US" sz="1150" dirty="0">
+                          <a:solidFill>
+                            <a:srgbClr val="CADCFC"/>
+                          </a:solidFill>
+                        </a:rPr>
+                        <a:t>47</a:t>
+                      </a:r>
+                      <a:endParaRPr lang="en-US" sz="1150" dirty="0"/>
+                    </a:p>
+                  </a:txBody>
+                  <a:tcPr marL="50800" marR="50800" marT="38100" marB="38100" anchor="ctr">
+                    <a:lnL w="9525" cap="flat" cmpd="sng" algn="ctr">
+                      <a:solidFill>
+                        <a:srgbClr val="2A3560"/>
+                      </a:solidFill>
+                      <a:prstDash val="solid"/>
+                      <a:round/>
+                      <a:headEnd type="none" w="med" len="med"/>
+                      <a:tailEnd type="none" w="med" len="med"/>
+                    </a:lnL>
+                    <a:lnR w="9525" cap="flat" cmpd="sng" algn="ctr">
+                      <a:solidFill>
+                        <a:srgbClr val="2A3560"/>
+                      </a:solidFill>
+                      <a:prstDash val="solid"/>
+                      <a:round/>
+                      <a:headEnd type="none" w="med" len="med"/>
+                      <a:tailEnd type="none" w="med" len="med"/>
+                    </a:lnR>
+                    <a:lnT w="9525" cap="flat" cmpd="sng" algn="ctr">
+                      <a:solidFill>
+                        <a:srgbClr val="2A3560"/>
+                      </a:solidFill>
+                      <a:prstDash val="solid"/>
+                      <a:round/>
+                      <a:headEnd type="none" w="med" len="med"/>
+                      <a:tailEnd type="none" w="med" len="med"/>
+                    </a:lnT>
+                    <a:lnB w="9525" cap="flat" cmpd="sng" algn="ctr">
+                      <a:solidFill>
+                        <a:srgbClr val="2A3560"/>
+                      </a:solidFill>
+                      <a:prstDash val="solid"/>
+                      <a:round/>
+                      <a:headEnd type="none" w="med" len="med"/>
+                      <a:tailEnd type="none" w="med" len="med"/>
+                    </a:lnB>
+                    <a:solidFill>
+                      <a:srgbClr val="10162B"/>
+                    </a:solidFill>
+                  </a:tcPr>
+                </a:tc>
+                <a:tc>
+                  <a:txBody>
+                    <a:bodyPr/>
+                    <a:lstStyle/>
+                    <a:p>
+                      <a:pPr marL="0" indent="0" algn="ctr">
+                        <a:buNone/>
+                      </a:pPr>
+                      <a:r>
+                        <a:rPr lang="en-US" sz="1150" b="1" dirty="0">
+                          <a:solidFill>
+                            <a:srgbClr val="D97757"/>
+                          </a:solidFill>
+                        </a:rPr>
+                        <a:t>7.84%</a:t>
+                      </a:r>
+                      <a:endParaRPr lang="en-US" sz="1150" dirty="0">
+                        <a:solidFill>
+                          <a:srgbClr val="D97757"/>
+                        </a:solidFill>
+                      </a:endParaRPr>
+                    </a:p>
+                  </a:txBody>
+                  <a:tcPr marL="50800" marR="50800" marT="38100" marB="38100" anchor="ctr">
+                    <a:lnL w="9525" cap="flat" cmpd="sng" algn="ctr">
+                      <a:solidFill>
+                        <a:srgbClr val="2A3560"/>
+                      </a:solidFill>
+                      <a:prstDash val="solid"/>
+                      <a:round/>
+                      <a:headEnd type="none" w="med" len="med"/>
+                      <a:tailEnd type="none" w="med" len="med"/>
+                    </a:lnL>
+                    <a:lnR w="9525" cap="flat" cmpd="sng" algn="ctr">
+                      <a:solidFill>
+                        <a:srgbClr val="2A3560"/>
+                      </a:solidFill>
+                      <a:prstDash val="solid"/>
+                      <a:round/>
+                      <a:headEnd type="none" w="med" len="med"/>
+                      <a:tailEnd type="none" w="med" len="med"/>
+                    </a:lnR>
+                    <a:lnT w="9525" cap="flat" cmpd="sng" algn="ctr">
+                      <a:solidFill>
+                        <a:srgbClr val="2A3560"/>
+                      </a:solidFill>
+                      <a:prstDash val="solid"/>
+                      <a:round/>
+                      <a:headEnd type="none" w="med" len="med"/>
+                      <a:tailEnd type="none" w="med" len="med"/>
+                    </a:lnT>
+                    <a:lnB w="9525" cap="flat" cmpd="sng" algn="ctr">
+                      <a:solidFill>
+                        <a:srgbClr val="2A3560"/>
+                      </a:solidFill>
+                      <a:prstDash val="solid"/>
+                      <a:round/>
+                      <a:headEnd type="none" w="med" len="med"/>
+                      <a:tailEnd type="none" w="med" len="med"/>
+                    </a:lnB>
+                    <a:solidFill>
+                      <a:srgbClr val="10162B"/>
+                    </a:solidFill>
+                  </a:tcPr>
+                </a:tc>
+                <a:tc>
+                  <a:txBody>
+                    <a:bodyPr/>
+                    <a:lstStyle/>
+                    <a:p>
+                      <a:pPr marL="0" indent="0" algn="ctr">
                         <a:buNone/>
                       </a:pPr>
                       <a:r>
@@ -15867,7 +15651,7 @@
                     <a:bodyPr/>
                     <a:lstStyle/>
                     <a:p>
-                      <a:pPr algn="ctr" indent="0" marL="0">
+                      <a:pPr marL="0" indent="0" algn="ctr">
                         <a:buNone/>
                       </a:pPr>
                       <a:r>
@@ -15923,12 +15707,80 @@
                     </a:solidFill>
                   </a:tcPr>
                 </a:tc>
+                <a:extLst>
+                  <a:ext uri="{0D108BD9-81ED-4DB2-BD59-A6C34878D82A}">
+                    <a16:rowId xmlns:a16="http://schemas.microsoft.com/office/drawing/2014/main" val="10002"/>
+                  </a:ext>
+                </a:extLst>
+              </a:tr>
+              <a:tr h="402336">
                 <a:tc>
                   <a:txBody>
                     <a:bodyPr/>
                     <a:lstStyle/>
                     <a:p>
-                      <a:pPr algn="ctr" indent="0" marL="0">
+                      <a:pPr marL="0" indent="0" algn="l">
+                        <a:buNone/>
+                      </a:pPr>
+                      <a:r>
+                        <a:rPr lang="en-US" sz="1150" b="1" dirty="0">
+                          <a:solidFill>
+                            <a:srgbClr val="CADCFC"/>
+                          </a:solidFill>
+                        </a:rPr>
+                        <a:t>P03</a:t>
+                      </a:r>
+                      <a:endParaRPr lang="en-US" sz="1150" dirty="0"/>
+                    </a:p>
+                  </a:txBody>
+                  <a:tcPr marL="50800" marR="50800" marT="38100" marB="38100" anchor="ctr">
+                    <a:lnL w="9525" cap="flat" cmpd="sng" algn="ctr">
+                      <a:solidFill>
+                        <a:srgbClr val="2A3560"/>
+                      </a:solidFill>
+                      <a:prstDash val="solid"/>
+                      <a:round/>
+                      <a:headEnd type="none" w="med" len="med"/>
+                      <a:tailEnd type="none" w="med" len="med"/>
+                    </a:lnL>
+                    <a:lnR w="9525" cap="flat" cmpd="sng" algn="ctr">
+                      <a:solidFill>
+                        <a:srgbClr val="2A3560"/>
+                      </a:solidFill>
+                      <a:prstDash val="solid"/>
+                      <a:round/>
+                      <a:headEnd type="none" w="med" len="med"/>
+                      <a:tailEnd type="none" w="med" len="med"/>
+                    </a:lnR>
+                    <a:lnT w="9525" cap="flat" cmpd="sng" algn="ctr">
+                      <a:solidFill>
+                        <a:srgbClr val="2A3560"/>
+                      </a:solidFill>
+                      <a:prstDash val="solid"/>
+                      <a:round/>
+                      <a:headEnd type="none" w="med" len="med"/>
+                      <a:tailEnd type="none" w="med" len="med"/>
+                    </a:lnT>
+                    <a:lnB w="9525" cap="flat" cmpd="sng" algn="ctr">
+                      <a:solidFill>
+                        <a:srgbClr val="2A3560"/>
+                      </a:solidFill>
+                      <a:prstDash val="solid"/>
+                      <a:round/>
+                      <a:headEnd type="none" w="med" len="med"/>
+                      <a:tailEnd type="none" w="med" len="med"/>
+                    </a:lnB>
+                    <a:solidFill>
+                      <a:srgbClr val="161D38"/>
+                    </a:solidFill>
+                  </a:tcPr>
+                </a:tc>
+                <a:tc>
+                  <a:txBody>
+                    <a:bodyPr/>
+                    <a:lstStyle/>
+                    <a:p>
+                      <a:pPr marL="0" indent="0" algn="ctr">
                         <a:buNone/>
                       </a:pPr>
                       <a:r>
@@ -15937,7 +15789,7 @@
                             <a:srgbClr val="CADCFC"/>
                           </a:solidFill>
                         </a:rPr>
-                        <a:t>51</a:t>
+                        <a:t>150</a:t>
                       </a:r>
                       <a:endParaRPr lang="en-US" sz="1150" dirty="0"/>
                     </a:p>
@@ -15980,7 +15832,7 @@
                       <a:tailEnd type="none" w="med" len="med"/>
                     </a:lnB>
                     <a:solidFill>
-                      <a:srgbClr val="10162B"/>
+                      <a:srgbClr val="161D38"/>
                     </a:solidFill>
                   </a:tcPr>
                 </a:tc>
@@ -15989,7 +15841,68 @@
                     <a:bodyPr/>
                     <a:lstStyle/>
                     <a:p>
-                      <a:pPr algn="ctr" indent="0" marL="0">
+                      <a:pPr marL="0" indent="0" algn="ctr">
+                        <a:buNone/>
+                      </a:pPr>
+                      <a:r>
+                        <a:rPr lang="en-US" sz="1150" dirty="0">
+                          <a:solidFill>
+                            <a:srgbClr val="CADCFC"/>
+                          </a:solidFill>
+                        </a:rPr>
+                        <a:t>150</a:t>
+                      </a:r>
+                      <a:endParaRPr lang="en-US" sz="1150" dirty="0"/>
+                    </a:p>
+                  </a:txBody>
+                  <a:tcPr marL="50800" marR="50800" marT="38100" marB="38100" anchor="ctr">
+                    <a:lnL w="9525" cap="flat" cmpd="sng" algn="ctr">
+                      <a:solidFill>
+                        <a:srgbClr val="2A3560"/>
+                      </a:solidFill>
+                      <a:prstDash val="solid"/>
+                      <a:round/>
+                      <a:headEnd type="none" w="med" len="med"/>
+                      <a:tailEnd type="none" w="med" len="med"/>
+                    </a:lnL>
+                    <a:lnR w="9525" cap="flat" cmpd="sng" algn="ctr">
+                      <a:solidFill>
+                        <a:srgbClr val="2A3560"/>
+                      </a:solidFill>
+                      <a:prstDash val="solid"/>
+                      <a:round/>
+                      <a:headEnd type="none" w="med" len="med"/>
+                      <a:tailEnd type="none" w="med" len="med"/>
+                    </a:lnR>
+                    <a:lnT w="9525" cap="flat" cmpd="sng" algn="ctr">
+                      <a:solidFill>
+                        <a:srgbClr val="2A3560"/>
+                      </a:solidFill>
+                      <a:prstDash val="solid"/>
+                      <a:round/>
+                      <a:headEnd type="none" w="med" len="med"/>
+                      <a:tailEnd type="none" w="med" len="med"/>
+                    </a:lnT>
+                    <a:lnB w="9525" cap="flat" cmpd="sng" algn="ctr">
+                      <a:solidFill>
+                        <a:srgbClr val="2A3560"/>
+                      </a:solidFill>
+                      <a:prstDash val="solid"/>
+                      <a:round/>
+                      <a:headEnd type="none" w="med" len="med"/>
+                      <a:tailEnd type="none" w="med" len="med"/>
+                    </a:lnB>
+                    <a:solidFill>
+                      <a:srgbClr val="161D38"/>
+                    </a:solidFill>
+                  </a:tcPr>
+                </a:tc>
+                <a:tc>
+                  <a:txBody>
+                    <a:bodyPr/>
+                    <a:lstStyle/>
+                    <a:p>
+                      <a:pPr marL="0" indent="0" algn="ctr">
                         <a:buNone/>
                       </a:pPr>
                       <a:r>
@@ -16041,69 +15954,6 @@
                       <a:tailEnd type="none" w="med" len="med"/>
                     </a:lnB>
                     <a:solidFill>
-                      <a:srgbClr val="10162B"/>
-                    </a:solidFill>
-                  </a:tcPr>
-                </a:tc>
-              </a:tr>
-              <a:tr h="402336">
-                <a:tc>
-                  <a:txBody>
-                    <a:bodyPr/>
-                    <a:lstStyle/>
-                    <a:p>
-                      <a:pPr algn="l" indent="0" marL="0">
-                        <a:buNone/>
-                      </a:pPr>
-                      <a:r>
-                        <a:rPr lang="en-US" sz="1150" b="1" dirty="0">
-                          <a:solidFill>
-                            <a:srgbClr val="CADCFC"/>
-                          </a:solidFill>
-                        </a:rPr>
-                        <a:t>P03</a:t>
-                      </a:r>
-                      <a:endParaRPr lang="en-US" sz="1150" dirty="0"/>
-                    </a:p>
-                  </a:txBody>
-                  <a:tcPr marL="50800" marR="50800" marT="38100" marB="38100" anchor="ctr">
-                    <a:lnL w="9525" cap="flat" cmpd="sng" algn="ctr">
-                      <a:solidFill>
-                        <a:srgbClr val="2A3560"/>
-                      </a:solidFill>
-                      <a:prstDash val="solid"/>
-                      <a:round/>
-                      <a:headEnd type="none" w="med" len="med"/>
-                      <a:tailEnd type="none" w="med" len="med"/>
-                    </a:lnL>
-                    <a:lnR w="9525" cap="flat" cmpd="sng" algn="ctr">
-                      <a:solidFill>
-                        <a:srgbClr val="2A3560"/>
-                      </a:solidFill>
-                      <a:prstDash val="solid"/>
-                      <a:round/>
-                      <a:headEnd type="none" w="med" len="med"/>
-                      <a:tailEnd type="none" w="med" len="med"/>
-                    </a:lnR>
-                    <a:lnT w="9525" cap="flat" cmpd="sng" algn="ctr">
-                      <a:solidFill>
-                        <a:srgbClr val="2A3560"/>
-                      </a:solidFill>
-                      <a:prstDash val="solid"/>
-                      <a:round/>
-                      <a:headEnd type="none" w="med" len="med"/>
-                      <a:tailEnd type="none" w="med" len="med"/>
-                    </a:lnT>
-                    <a:lnB w="9525" cap="flat" cmpd="sng" algn="ctr">
-                      <a:solidFill>
-                        <a:srgbClr val="2A3560"/>
-                      </a:solidFill>
-                      <a:prstDash val="solid"/>
-                      <a:round/>
-                      <a:headEnd type="none" w="med" len="med"/>
-                      <a:tailEnd type="none" w="med" len="med"/>
-                    </a:lnB>
-                    <a:solidFill>
                       <a:srgbClr val="161D38"/>
                     </a:solidFill>
                   </a:tcPr>
@@ -16113,7 +15963,7 @@
                     <a:bodyPr/>
                     <a:lstStyle/>
                     <a:p>
-                      <a:pPr algn="ctr" indent="0" marL="0">
+                      <a:pPr marL="0" indent="0" algn="ctr">
                         <a:buNone/>
                       </a:pPr>
                       <a:r>
@@ -16174,68 +16024,7 @@
                     <a:bodyPr/>
                     <a:lstStyle/>
                     <a:p>
-                      <a:pPr algn="ctr" indent="0" marL="0">
-                        <a:buNone/>
-                      </a:pPr>
-                      <a:r>
-                        <a:rPr lang="en-US" sz="1150" dirty="0">
-                          <a:solidFill>
-                            <a:srgbClr val="CADCFC"/>
-                          </a:solidFill>
-                        </a:rPr>
-                        <a:t>150</a:t>
-                      </a:r>
-                      <a:endParaRPr lang="en-US" sz="1150" dirty="0"/>
-                    </a:p>
-                  </a:txBody>
-                  <a:tcPr marL="50800" marR="50800" marT="38100" marB="38100" anchor="ctr">
-                    <a:lnL w="9525" cap="flat" cmpd="sng" algn="ctr">
-                      <a:solidFill>
-                        <a:srgbClr val="2A3560"/>
-                      </a:solidFill>
-                      <a:prstDash val="solid"/>
-                      <a:round/>
-                      <a:headEnd type="none" w="med" len="med"/>
-                      <a:tailEnd type="none" w="med" len="med"/>
-                    </a:lnL>
-                    <a:lnR w="9525" cap="flat" cmpd="sng" algn="ctr">
-                      <a:solidFill>
-                        <a:srgbClr val="2A3560"/>
-                      </a:solidFill>
-                      <a:prstDash val="solid"/>
-                      <a:round/>
-                      <a:headEnd type="none" w="med" len="med"/>
-                      <a:tailEnd type="none" w="med" len="med"/>
-                    </a:lnR>
-                    <a:lnT w="9525" cap="flat" cmpd="sng" algn="ctr">
-                      <a:solidFill>
-                        <a:srgbClr val="2A3560"/>
-                      </a:solidFill>
-                      <a:prstDash val="solid"/>
-                      <a:round/>
-                      <a:headEnd type="none" w="med" len="med"/>
-                      <a:tailEnd type="none" w="med" len="med"/>
-                    </a:lnT>
-                    <a:lnB w="9525" cap="flat" cmpd="sng" algn="ctr">
-                      <a:solidFill>
-                        <a:srgbClr val="2A3560"/>
-                      </a:solidFill>
-                      <a:prstDash val="solid"/>
-                      <a:round/>
-                      <a:headEnd type="none" w="med" len="med"/>
-                      <a:tailEnd type="none" w="med" len="med"/>
-                    </a:lnB>
-                    <a:solidFill>
-                      <a:srgbClr val="161D38"/>
-                    </a:solidFill>
-                  </a:tcPr>
-                </a:tc>
-                <a:tc>
-                  <a:txBody>
-                    <a:bodyPr/>
-                    <a:lstStyle/>
-                    <a:p>
-                      <a:pPr algn="ctr" indent="0" marL="0">
+                      <a:pPr marL="0" indent="0" algn="ctr">
                         <a:buNone/>
                       </a:pPr>
                       <a:r>
@@ -16291,12 +16080,80 @@
                     </a:solidFill>
                   </a:tcPr>
                 </a:tc>
+                <a:extLst>
+                  <a:ext uri="{0D108BD9-81ED-4DB2-BD59-A6C34878D82A}">
+                    <a16:rowId xmlns:a16="http://schemas.microsoft.com/office/drawing/2014/main" val="10003"/>
+                  </a:ext>
+                </a:extLst>
+              </a:tr>
+              <a:tr h="402336">
                 <a:tc>
                   <a:txBody>
                     <a:bodyPr/>
                     <a:lstStyle/>
                     <a:p>
-                      <a:pPr algn="ctr" indent="0" marL="0">
+                      <a:pPr marL="0" indent="0" algn="l">
+                        <a:buNone/>
+                      </a:pPr>
+                      <a:r>
+                        <a:rPr lang="en-US" sz="1150" b="1" dirty="0">
+                          <a:solidFill>
+                            <a:srgbClr val="CADCFC"/>
+                          </a:solidFill>
+                        </a:rPr>
+                        <a:t>P04</a:t>
+                      </a:r>
+                      <a:endParaRPr lang="en-US" sz="1150" dirty="0"/>
+                    </a:p>
+                  </a:txBody>
+                  <a:tcPr marL="50800" marR="50800" marT="38100" marB="38100" anchor="ctr">
+                    <a:lnL w="9525" cap="flat" cmpd="sng" algn="ctr">
+                      <a:solidFill>
+                        <a:srgbClr val="2A3560"/>
+                      </a:solidFill>
+                      <a:prstDash val="solid"/>
+                      <a:round/>
+                      <a:headEnd type="none" w="med" len="med"/>
+                      <a:tailEnd type="none" w="med" len="med"/>
+                    </a:lnL>
+                    <a:lnR w="9525" cap="flat" cmpd="sng" algn="ctr">
+                      <a:solidFill>
+                        <a:srgbClr val="2A3560"/>
+                      </a:solidFill>
+                      <a:prstDash val="solid"/>
+                      <a:round/>
+                      <a:headEnd type="none" w="med" len="med"/>
+                      <a:tailEnd type="none" w="med" len="med"/>
+                    </a:lnR>
+                    <a:lnT w="9525" cap="flat" cmpd="sng" algn="ctr">
+                      <a:solidFill>
+                        <a:srgbClr val="2A3560"/>
+                      </a:solidFill>
+                      <a:prstDash val="solid"/>
+                      <a:round/>
+                      <a:headEnd type="none" w="med" len="med"/>
+                      <a:tailEnd type="none" w="med" len="med"/>
+                    </a:lnT>
+                    <a:lnB w="9525" cap="flat" cmpd="sng" algn="ctr">
+                      <a:solidFill>
+                        <a:srgbClr val="2A3560"/>
+                      </a:solidFill>
+                      <a:prstDash val="solid"/>
+                      <a:round/>
+                      <a:headEnd type="none" w="med" len="med"/>
+                      <a:tailEnd type="none" w="med" len="med"/>
+                    </a:lnB>
+                    <a:solidFill>
+                      <a:srgbClr val="10162B"/>
+                    </a:solidFill>
+                  </a:tcPr>
+                </a:tc>
+                <a:tc>
+                  <a:txBody>
+                    <a:bodyPr/>
+                    <a:lstStyle/>
+                    <a:p>
+                      <a:pPr marL="0" indent="0" algn="ctr">
                         <a:buNone/>
                       </a:pPr>
                       <a:r>
@@ -16305,7 +16162,7 @@
                             <a:srgbClr val="CADCFC"/>
                           </a:solidFill>
                         </a:rPr>
-                        <a:t>150</a:t>
+                        <a:t>107</a:t>
                       </a:r>
                       <a:endParaRPr lang="en-US" sz="1150" dirty="0"/>
                     </a:p>
@@ -16348,7 +16205,7 @@
                       <a:tailEnd type="none" w="med" len="med"/>
                     </a:lnB>
                     <a:solidFill>
-                      <a:srgbClr val="161D38"/>
+                      <a:srgbClr val="10162B"/>
                     </a:solidFill>
                   </a:tcPr>
                 </a:tc>
@@ -16357,7 +16214,190 @@
                     <a:bodyPr/>
                     <a:lstStyle/>
                     <a:p>
-                      <a:pPr algn="ctr" indent="0" marL="0">
+                      <a:pPr marL="0" indent="0" algn="ctr">
+                        <a:buNone/>
+                      </a:pPr>
+                      <a:r>
+                        <a:rPr lang="en-US" sz="1150" dirty="0">
+                          <a:solidFill>
+                            <a:srgbClr val="CADCFC"/>
+                          </a:solidFill>
+                        </a:rPr>
+                        <a:t>103</a:t>
+                      </a:r>
+                      <a:endParaRPr lang="en-US" sz="1150" dirty="0"/>
+                    </a:p>
+                  </a:txBody>
+                  <a:tcPr marL="50800" marR="50800" marT="38100" marB="38100" anchor="ctr">
+                    <a:lnL w="9525" cap="flat" cmpd="sng" algn="ctr">
+                      <a:solidFill>
+                        <a:srgbClr val="2A3560"/>
+                      </a:solidFill>
+                      <a:prstDash val="solid"/>
+                      <a:round/>
+                      <a:headEnd type="none" w="med" len="med"/>
+                      <a:tailEnd type="none" w="med" len="med"/>
+                    </a:lnL>
+                    <a:lnR w="9525" cap="flat" cmpd="sng" algn="ctr">
+                      <a:solidFill>
+                        <a:srgbClr val="2A3560"/>
+                      </a:solidFill>
+                      <a:prstDash val="solid"/>
+                      <a:round/>
+                      <a:headEnd type="none" w="med" len="med"/>
+                      <a:tailEnd type="none" w="med" len="med"/>
+                    </a:lnR>
+                    <a:lnT w="9525" cap="flat" cmpd="sng" algn="ctr">
+                      <a:solidFill>
+                        <a:srgbClr val="2A3560"/>
+                      </a:solidFill>
+                      <a:prstDash val="solid"/>
+                      <a:round/>
+                      <a:headEnd type="none" w="med" len="med"/>
+                      <a:tailEnd type="none" w="med" len="med"/>
+                    </a:lnT>
+                    <a:lnB w="9525" cap="flat" cmpd="sng" algn="ctr">
+                      <a:solidFill>
+                        <a:srgbClr val="2A3560"/>
+                      </a:solidFill>
+                      <a:prstDash val="solid"/>
+                      <a:round/>
+                      <a:headEnd type="none" w="med" len="med"/>
+                      <a:tailEnd type="none" w="med" len="med"/>
+                    </a:lnB>
+                    <a:solidFill>
+                      <a:srgbClr val="10162B"/>
+                    </a:solidFill>
+                  </a:tcPr>
+                </a:tc>
+                <a:tc>
+                  <a:txBody>
+                    <a:bodyPr/>
+                    <a:lstStyle/>
+                    <a:p>
+                      <a:pPr marL="0" indent="0" algn="ctr">
+                        <a:buNone/>
+                      </a:pPr>
+                      <a:r>
+                        <a:rPr lang="en-US" sz="1150" b="1" dirty="0">
+                          <a:solidFill>
+                            <a:srgbClr val="D97757"/>
+                          </a:solidFill>
+                        </a:rPr>
+                        <a:t>3.74%</a:t>
+                      </a:r>
+                      <a:endParaRPr lang="en-US" sz="1150" dirty="0"/>
+                    </a:p>
+                  </a:txBody>
+                  <a:tcPr marL="50800" marR="50800" marT="38100" marB="38100" anchor="ctr">
+                    <a:lnL w="9525" cap="flat" cmpd="sng" algn="ctr">
+                      <a:solidFill>
+                        <a:srgbClr val="2A3560"/>
+                      </a:solidFill>
+                      <a:prstDash val="solid"/>
+                      <a:round/>
+                      <a:headEnd type="none" w="med" len="med"/>
+                      <a:tailEnd type="none" w="med" len="med"/>
+                    </a:lnL>
+                    <a:lnR w="9525" cap="flat" cmpd="sng" algn="ctr">
+                      <a:solidFill>
+                        <a:srgbClr val="2A3560"/>
+                      </a:solidFill>
+                      <a:prstDash val="solid"/>
+                      <a:round/>
+                      <a:headEnd type="none" w="med" len="med"/>
+                      <a:tailEnd type="none" w="med" len="med"/>
+                    </a:lnR>
+                    <a:lnT w="9525" cap="flat" cmpd="sng" algn="ctr">
+                      <a:solidFill>
+                        <a:srgbClr val="2A3560"/>
+                      </a:solidFill>
+                      <a:prstDash val="solid"/>
+                      <a:round/>
+                      <a:headEnd type="none" w="med" len="med"/>
+                      <a:tailEnd type="none" w="med" len="med"/>
+                    </a:lnT>
+                    <a:lnB w="9525" cap="flat" cmpd="sng" algn="ctr">
+                      <a:solidFill>
+                        <a:srgbClr val="2A3560"/>
+                      </a:solidFill>
+                      <a:prstDash val="solid"/>
+                      <a:round/>
+                      <a:headEnd type="none" w="med" len="med"/>
+                      <a:tailEnd type="none" w="med" len="med"/>
+                    </a:lnB>
+                    <a:solidFill>
+                      <a:srgbClr val="10162B"/>
+                    </a:solidFill>
+                  </a:tcPr>
+                </a:tc>
+                <a:tc>
+                  <a:txBody>
+                    <a:bodyPr/>
+                    <a:lstStyle/>
+                    <a:p>
+                      <a:pPr marL="0" indent="0" algn="ctr">
+                        <a:buNone/>
+                      </a:pPr>
+                      <a:r>
+                        <a:rPr lang="en-US" sz="1150" dirty="0">
+                          <a:solidFill>
+                            <a:srgbClr val="CADCFC"/>
+                          </a:solidFill>
+                        </a:rPr>
+                        <a:t>107</a:t>
+                      </a:r>
+                      <a:endParaRPr lang="en-US" sz="1150" dirty="0"/>
+                    </a:p>
+                  </a:txBody>
+                  <a:tcPr marL="50800" marR="50800" marT="38100" marB="38100" anchor="ctr">
+                    <a:lnL w="9525" cap="flat" cmpd="sng" algn="ctr">
+                      <a:solidFill>
+                        <a:srgbClr val="2A3560"/>
+                      </a:solidFill>
+                      <a:prstDash val="solid"/>
+                      <a:round/>
+                      <a:headEnd type="none" w="med" len="med"/>
+                      <a:tailEnd type="none" w="med" len="med"/>
+                    </a:lnL>
+                    <a:lnR w="9525" cap="flat" cmpd="sng" algn="ctr">
+                      <a:solidFill>
+                        <a:srgbClr val="2A3560"/>
+                      </a:solidFill>
+                      <a:prstDash val="solid"/>
+                      <a:round/>
+                      <a:headEnd type="none" w="med" len="med"/>
+                      <a:tailEnd type="none" w="med" len="med"/>
+                    </a:lnR>
+                    <a:lnT w="9525" cap="flat" cmpd="sng" algn="ctr">
+                      <a:solidFill>
+                        <a:srgbClr val="2A3560"/>
+                      </a:solidFill>
+                      <a:prstDash val="solid"/>
+                      <a:round/>
+                      <a:headEnd type="none" w="med" len="med"/>
+                      <a:tailEnd type="none" w="med" len="med"/>
+                    </a:lnT>
+                    <a:lnB w="9525" cap="flat" cmpd="sng" algn="ctr">
+                      <a:solidFill>
+                        <a:srgbClr val="2A3560"/>
+                      </a:solidFill>
+                      <a:prstDash val="solid"/>
+                      <a:round/>
+                      <a:headEnd type="none" w="med" len="med"/>
+                      <a:tailEnd type="none" w="med" len="med"/>
+                    </a:lnB>
+                    <a:solidFill>
+                      <a:srgbClr val="10162B"/>
+                    </a:solidFill>
+                  </a:tcPr>
+                </a:tc>
+                <a:tc>
+                  <a:txBody>
+                    <a:bodyPr/>
+                    <a:lstStyle/>
+                    <a:p>
+                      <a:pPr marL="0" indent="0" algn="ctr">
                         <a:buNone/>
                       </a:pPr>
                       <a:r>
@@ -16409,10 +16449,15 @@
                       <a:tailEnd type="none" w="med" len="med"/>
                     </a:lnB>
                     <a:solidFill>
-                      <a:srgbClr val="161D38"/>
+                      <a:srgbClr val="10162B"/>
                     </a:solidFill>
                   </a:tcPr>
                 </a:tc>
+                <a:extLst>
+                  <a:ext uri="{0D108BD9-81ED-4DB2-BD59-A6C34878D82A}">
+                    <a16:rowId xmlns:a16="http://schemas.microsoft.com/office/drawing/2014/main" val="10004"/>
+                  </a:ext>
+                </a:extLst>
               </a:tr>
               <a:tr h="402336">
                 <a:tc>
@@ -16420,7 +16465,7 @@
                     <a:bodyPr/>
                     <a:lstStyle/>
                     <a:p>
-                      <a:pPr algn="l" indent="0" marL="0">
+                      <a:pPr marL="0" indent="0" algn="l">
                         <a:buNone/>
                       </a:pPr>
                       <a:r>
@@ -16429,7 +16474,7 @@
                             <a:srgbClr val="CADCFC"/>
                           </a:solidFill>
                         </a:rPr>
-                        <a:t>P04</a:t>
+                        <a:t>P05</a:t>
                       </a:r>
                       <a:endParaRPr lang="en-US" sz="1150" dirty="0"/>
                     </a:p>
@@ -16472,7 +16517,7 @@
                       <a:tailEnd type="none" w="med" len="med"/>
                     </a:lnB>
                     <a:solidFill>
-                      <a:srgbClr val="10162B"/>
+                      <a:srgbClr val="161D38"/>
                     </a:solidFill>
                   </a:tcPr>
                 </a:tc>
@@ -16481,7 +16526,7 @@
                     <a:bodyPr/>
                     <a:lstStyle/>
                     <a:p>
-                      <a:pPr algn="ctr" indent="0" marL="0">
+                      <a:pPr marL="0" indent="0" algn="ctr">
                         <a:buNone/>
                       </a:pPr>
                       <a:r>
@@ -16490,7 +16535,7 @@
                             <a:srgbClr val="CADCFC"/>
                           </a:solidFill>
                         </a:rPr>
-                        <a:t>107</a:t>
+                        <a:t>900</a:t>
                       </a:r>
                       <a:endParaRPr lang="en-US" sz="1150" dirty="0"/>
                     </a:p>
@@ -16533,7 +16578,7 @@
                       <a:tailEnd type="none" w="med" len="med"/>
                     </a:lnB>
                     <a:solidFill>
-                      <a:srgbClr val="10162B"/>
+                      <a:srgbClr val="161D38"/>
                     </a:solidFill>
                   </a:tcPr>
                 </a:tc>
@@ -16542,7 +16587,7 @@
                     <a:bodyPr/>
                     <a:lstStyle/>
                     <a:p>
-                      <a:pPr algn="ctr" indent="0" marL="0">
+                      <a:pPr marL="0" indent="0" algn="ctr">
                         <a:buNone/>
                       </a:pPr>
                       <a:r>
@@ -16551,7 +16596,7 @@
                             <a:srgbClr val="CADCFC"/>
                           </a:solidFill>
                         </a:rPr>
-                        <a:t>103</a:t>
+                        <a:t>858</a:t>
                       </a:r>
                       <a:endParaRPr lang="en-US" sz="1150" dirty="0"/>
                     </a:p>
@@ -16594,7 +16639,7 @@
                       <a:tailEnd type="none" w="med" len="med"/>
                     </a:lnB>
                     <a:solidFill>
-                      <a:srgbClr val="10162B"/>
+                      <a:srgbClr val="161D38"/>
                     </a:solidFill>
                   </a:tcPr>
                 </a:tc>
@@ -16603,7 +16648,7 @@
                     <a:bodyPr/>
                     <a:lstStyle/>
                     <a:p>
-                      <a:pPr algn="ctr" indent="0" marL="0">
+                      <a:pPr marL="0" indent="0" algn="ctr">
                         <a:buNone/>
                       </a:pPr>
                       <a:r>
@@ -16612,7 +16657,7 @@
                             <a:srgbClr val="D97757"/>
                           </a:solidFill>
                         </a:rPr>
-                        <a:t>3.74%</a:t>
+                        <a:t>4.67%</a:t>
                       </a:r>
                       <a:endParaRPr lang="en-US" sz="1150" dirty="0"/>
                     </a:p>
@@ -16655,7 +16700,7 @@
                       <a:tailEnd type="none" w="med" len="med"/>
                     </a:lnB>
                     <a:solidFill>
-                      <a:srgbClr val="10162B"/>
+                      <a:srgbClr val="161D38"/>
                     </a:solidFill>
                   </a:tcPr>
                 </a:tc>
@@ -16664,7 +16709,7 @@
                     <a:bodyPr/>
                     <a:lstStyle/>
                     <a:p>
-                      <a:pPr algn="ctr" indent="0" marL="0">
+                      <a:pPr marL="0" indent="0" algn="ctr">
                         <a:buNone/>
                       </a:pPr>
                       <a:r>
@@ -16673,7 +16718,7 @@
                             <a:srgbClr val="CADCFC"/>
                           </a:solidFill>
                         </a:rPr>
-                        <a:t>107</a:t>
+                        <a:t>900</a:t>
                       </a:r>
                       <a:endParaRPr lang="en-US" sz="1150" dirty="0"/>
                     </a:p>
@@ -16716,7 +16761,7 @@
                       <a:tailEnd type="none" w="med" len="med"/>
                     </a:lnB>
                     <a:solidFill>
-                      <a:srgbClr val="10162B"/>
+                      <a:srgbClr val="161D38"/>
                     </a:solidFill>
                   </a:tcPr>
                 </a:tc>
@@ -16725,7 +16770,7 @@
                     <a:bodyPr/>
                     <a:lstStyle/>
                     <a:p>
-                      <a:pPr algn="ctr" indent="0" marL="0">
+                      <a:pPr marL="0" indent="0" algn="ctr">
                         <a:buNone/>
                       </a:pPr>
                       <a:r>
@@ -16777,10 +16822,15 @@
                       <a:tailEnd type="none" w="med" len="med"/>
                     </a:lnB>
                     <a:solidFill>
-                      <a:srgbClr val="10162B"/>
+                      <a:srgbClr val="161D38"/>
                     </a:solidFill>
                   </a:tcPr>
                 </a:tc>
+                <a:extLst>
+                  <a:ext uri="{0D108BD9-81ED-4DB2-BD59-A6C34878D82A}">
+                    <a16:rowId xmlns:a16="http://schemas.microsoft.com/office/drawing/2014/main" val="10005"/>
+                  </a:ext>
+                </a:extLst>
               </a:tr>
               <a:tr h="402336">
                 <a:tc>
@@ -16788,7 +16838,7 @@
                     <a:bodyPr/>
                     <a:lstStyle/>
                     <a:p>
-                      <a:pPr algn="l" indent="0" marL="0">
+                      <a:pPr marL="0" indent="0" algn="l">
                         <a:buNone/>
                       </a:pPr>
                       <a:r>
@@ -16797,7 +16847,7 @@
                             <a:srgbClr val="CADCFC"/>
                           </a:solidFill>
                         </a:rPr>
-                        <a:t>P05</a:t>
+                        <a:t>P06</a:t>
                       </a:r>
                       <a:endParaRPr lang="en-US" sz="1150" dirty="0"/>
                     </a:p>
@@ -16840,7 +16890,7 @@
                       <a:tailEnd type="none" w="med" len="med"/>
                     </a:lnB>
                     <a:solidFill>
-                      <a:srgbClr val="161D38"/>
+                      <a:srgbClr val="10162B"/>
                     </a:solidFill>
                   </a:tcPr>
                 </a:tc>
@@ -16849,7 +16899,7 @@
                     <a:bodyPr/>
                     <a:lstStyle/>
                     <a:p>
-                      <a:pPr algn="ctr" indent="0" marL="0">
+                      <a:pPr marL="0" indent="0" algn="ctr">
                         <a:buNone/>
                       </a:pPr>
                       <a:r>
@@ -16858,7 +16908,7 @@
                             <a:srgbClr val="CADCFC"/>
                           </a:solidFill>
                         </a:rPr>
-                        <a:t>900</a:t>
+                        <a:t>1.735</a:t>
                       </a:r>
                       <a:endParaRPr lang="en-US" sz="1150" dirty="0"/>
                     </a:p>
@@ -16901,7 +16951,7 @@
                       <a:tailEnd type="none" w="med" len="med"/>
                     </a:lnB>
                     <a:solidFill>
-                      <a:srgbClr val="161D38"/>
+                      <a:srgbClr val="10162B"/>
                     </a:solidFill>
                   </a:tcPr>
                 </a:tc>
@@ -16910,7 +16960,7 @@
                     <a:bodyPr/>
                     <a:lstStyle/>
                     <a:p>
-                      <a:pPr algn="ctr" indent="0" marL="0">
+                      <a:pPr marL="0" indent="0" algn="ctr">
                         <a:buNone/>
                       </a:pPr>
                       <a:r>
@@ -16919,7 +16969,7 @@
                             <a:srgbClr val="CADCFC"/>
                           </a:solidFill>
                         </a:rPr>
-                        <a:t>891</a:t>
+                        <a:t>1.735</a:t>
                       </a:r>
                       <a:endParaRPr lang="en-US" sz="1150" dirty="0"/>
                     </a:p>
@@ -16962,7 +17012,7 @@
                       <a:tailEnd type="none" w="med" len="med"/>
                     </a:lnB>
                     <a:solidFill>
-                      <a:srgbClr val="161D38"/>
+                      <a:srgbClr val="10162B"/>
                     </a:solidFill>
                   </a:tcPr>
                 </a:tc>
@@ -16971,129 +17021,7 @@
                     <a:bodyPr/>
                     <a:lstStyle/>
                     <a:p>
-                      <a:pPr algn="ctr" indent="0" marL="0">
-                        <a:buNone/>
-                      </a:pPr>
-                      <a:r>
-                        <a:rPr lang="en-US" sz="1150" b="1" dirty="0">
-                          <a:solidFill>
-                            <a:srgbClr val="D97757"/>
-                          </a:solidFill>
-                        </a:rPr>
-                        <a:t>1.00%</a:t>
-                      </a:r>
-                      <a:endParaRPr lang="en-US" sz="1150" dirty="0"/>
-                    </a:p>
-                  </a:txBody>
-                  <a:tcPr marL="50800" marR="50800" marT="38100" marB="38100" anchor="ctr">
-                    <a:lnL w="9525" cap="flat" cmpd="sng" algn="ctr">
-                      <a:solidFill>
-                        <a:srgbClr val="2A3560"/>
-                      </a:solidFill>
-                      <a:prstDash val="solid"/>
-                      <a:round/>
-                      <a:headEnd type="none" w="med" len="med"/>
-                      <a:tailEnd type="none" w="med" len="med"/>
-                    </a:lnL>
-                    <a:lnR w="9525" cap="flat" cmpd="sng" algn="ctr">
-                      <a:solidFill>
-                        <a:srgbClr val="2A3560"/>
-                      </a:solidFill>
-                      <a:prstDash val="solid"/>
-                      <a:round/>
-                      <a:headEnd type="none" w="med" len="med"/>
-                      <a:tailEnd type="none" w="med" len="med"/>
-                    </a:lnR>
-                    <a:lnT w="9525" cap="flat" cmpd="sng" algn="ctr">
-                      <a:solidFill>
-                        <a:srgbClr val="2A3560"/>
-                      </a:solidFill>
-                      <a:prstDash val="solid"/>
-                      <a:round/>
-                      <a:headEnd type="none" w="med" len="med"/>
-                      <a:tailEnd type="none" w="med" len="med"/>
-                    </a:lnT>
-                    <a:lnB w="9525" cap="flat" cmpd="sng" algn="ctr">
-                      <a:solidFill>
-                        <a:srgbClr val="2A3560"/>
-                      </a:solidFill>
-                      <a:prstDash val="solid"/>
-                      <a:round/>
-                      <a:headEnd type="none" w="med" len="med"/>
-                      <a:tailEnd type="none" w="med" len="med"/>
-                    </a:lnB>
-                    <a:solidFill>
-                      <a:srgbClr val="161D38"/>
-                    </a:solidFill>
-                  </a:tcPr>
-                </a:tc>
-                <a:tc>
-                  <a:txBody>
-                    <a:bodyPr/>
-                    <a:lstStyle/>
-                    <a:p>
-                      <a:pPr algn="ctr" indent="0" marL="0">
-                        <a:buNone/>
-                      </a:pPr>
-                      <a:r>
-                        <a:rPr lang="en-US" sz="1150" dirty="0">
-                          <a:solidFill>
-                            <a:srgbClr val="CADCFC"/>
-                          </a:solidFill>
-                        </a:rPr>
-                        <a:t>900</a:t>
-                      </a:r>
-                      <a:endParaRPr lang="en-US" sz="1150" dirty="0"/>
-                    </a:p>
-                  </a:txBody>
-                  <a:tcPr marL="50800" marR="50800" marT="38100" marB="38100" anchor="ctr">
-                    <a:lnL w="9525" cap="flat" cmpd="sng" algn="ctr">
-                      <a:solidFill>
-                        <a:srgbClr val="2A3560"/>
-                      </a:solidFill>
-                      <a:prstDash val="solid"/>
-                      <a:round/>
-                      <a:headEnd type="none" w="med" len="med"/>
-                      <a:tailEnd type="none" w="med" len="med"/>
-                    </a:lnL>
-                    <a:lnR w="9525" cap="flat" cmpd="sng" algn="ctr">
-                      <a:solidFill>
-                        <a:srgbClr val="2A3560"/>
-                      </a:solidFill>
-                      <a:prstDash val="solid"/>
-                      <a:round/>
-                      <a:headEnd type="none" w="med" len="med"/>
-                      <a:tailEnd type="none" w="med" len="med"/>
-                    </a:lnR>
-                    <a:lnT w="9525" cap="flat" cmpd="sng" algn="ctr">
-                      <a:solidFill>
-                        <a:srgbClr val="2A3560"/>
-                      </a:solidFill>
-                      <a:prstDash val="solid"/>
-                      <a:round/>
-                      <a:headEnd type="none" w="med" len="med"/>
-                      <a:tailEnd type="none" w="med" len="med"/>
-                    </a:lnT>
-                    <a:lnB w="9525" cap="flat" cmpd="sng" algn="ctr">
-                      <a:solidFill>
-                        <a:srgbClr val="2A3560"/>
-                      </a:solidFill>
-                      <a:prstDash val="solid"/>
-                      <a:round/>
-                      <a:headEnd type="none" w="med" len="med"/>
-                      <a:tailEnd type="none" w="med" len="med"/>
-                    </a:lnB>
-                    <a:solidFill>
-                      <a:srgbClr val="161D38"/>
-                    </a:solidFill>
-                  </a:tcPr>
-                </a:tc>
-                <a:tc>
-                  <a:txBody>
-                    <a:bodyPr/>
-                    <a:lstStyle/>
-                    <a:p>
-                      <a:pPr algn="ctr" indent="0" marL="0">
+                      <a:pPr marL="0" indent="0" algn="ctr">
                         <a:buNone/>
                       </a:pPr>
                       <a:r>
@@ -17145,69 +17073,6 @@
                       <a:tailEnd type="none" w="med" len="med"/>
                     </a:lnB>
                     <a:solidFill>
-                      <a:srgbClr val="161D38"/>
-                    </a:solidFill>
-                  </a:tcPr>
-                </a:tc>
-              </a:tr>
-              <a:tr h="402336">
-                <a:tc>
-                  <a:txBody>
-                    <a:bodyPr/>
-                    <a:lstStyle/>
-                    <a:p>
-                      <a:pPr algn="l" indent="0" marL="0">
-                        <a:buNone/>
-                      </a:pPr>
-                      <a:r>
-                        <a:rPr lang="en-US" sz="1150" b="1" dirty="0">
-                          <a:solidFill>
-                            <a:srgbClr val="CADCFC"/>
-                          </a:solidFill>
-                        </a:rPr>
-                        <a:t>P06</a:t>
-                      </a:r>
-                      <a:endParaRPr lang="en-US" sz="1150" dirty="0"/>
-                    </a:p>
-                  </a:txBody>
-                  <a:tcPr marL="50800" marR="50800" marT="38100" marB="38100" anchor="ctr">
-                    <a:lnL w="9525" cap="flat" cmpd="sng" algn="ctr">
-                      <a:solidFill>
-                        <a:srgbClr val="2A3560"/>
-                      </a:solidFill>
-                      <a:prstDash val="solid"/>
-                      <a:round/>
-                      <a:headEnd type="none" w="med" len="med"/>
-                      <a:tailEnd type="none" w="med" len="med"/>
-                    </a:lnL>
-                    <a:lnR w="9525" cap="flat" cmpd="sng" algn="ctr">
-                      <a:solidFill>
-                        <a:srgbClr val="2A3560"/>
-                      </a:solidFill>
-                      <a:prstDash val="solid"/>
-                      <a:round/>
-                      <a:headEnd type="none" w="med" len="med"/>
-                      <a:tailEnd type="none" w="med" len="med"/>
-                    </a:lnR>
-                    <a:lnT w="9525" cap="flat" cmpd="sng" algn="ctr">
-                      <a:solidFill>
-                        <a:srgbClr val="2A3560"/>
-                      </a:solidFill>
-                      <a:prstDash val="solid"/>
-                      <a:round/>
-                      <a:headEnd type="none" w="med" len="med"/>
-                      <a:tailEnd type="none" w="med" len="med"/>
-                    </a:lnT>
-                    <a:lnB w="9525" cap="flat" cmpd="sng" algn="ctr">
-                      <a:solidFill>
-                        <a:srgbClr val="2A3560"/>
-                      </a:solidFill>
-                      <a:prstDash val="solid"/>
-                      <a:round/>
-                      <a:headEnd type="none" w="med" len="med"/>
-                      <a:tailEnd type="none" w="med" len="med"/>
-                    </a:lnB>
-                    <a:solidFill>
                       <a:srgbClr val="10162B"/>
                     </a:solidFill>
                   </a:tcPr>
@@ -17217,7 +17082,7 @@
                     <a:bodyPr/>
                     <a:lstStyle/>
                     <a:p>
-                      <a:pPr algn="ctr" indent="0" marL="0">
+                      <a:pPr marL="0" indent="0" algn="ctr">
                         <a:buNone/>
                       </a:pPr>
                       <a:r>
@@ -17278,68 +17143,7 @@
                     <a:bodyPr/>
                     <a:lstStyle/>
                     <a:p>
-                      <a:pPr algn="ctr" indent="0" marL="0">
-                        <a:buNone/>
-                      </a:pPr>
-                      <a:r>
-                        <a:rPr lang="en-US" sz="1150" dirty="0">
-                          <a:solidFill>
-                            <a:srgbClr val="CADCFC"/>
-                          </a:solidFill>
-                        </a:rPr>
-                        <a:t>1.735</a:t>
-                      </a:r>
-                      <a:endParaRPr lang="en-US" sz="1150" dirty="0"/>
-                    </a:p>
-                  </a:txBody>
-                  <a:tcPr marL="50800" marR="50800" marT="38100" marB="38100" anchor="ctr">
-                    <a:lnL w="9525" cap="flat" cmpd="sng" algn="ctr">
-                      <a:solidFill>
-                        <a:srgbClr val="2A3560"/>
-                      </a:solidFill>
-                      <a:prstDash val="solid"/>
-                      <a:round/>
-                      <a:headEnd type="none" w="med" len="med"/>
-                      <a:tailEnd type="none" w="med" len="med"/>
-                    </a:lnL>
-                    <a:lnR w="9525" cap="flat" cmpd="sng" algn="ctr">
-                      <a:solidFill>
-                        <a:srgbClr val="2A3560"/>
-                      </a:solidFill>
-                      <a:prstDash val="solid"/>
-                      <a:round/>
-                      <a:headEnd type="none" w="med" len="med"/>
-                      <a:tailEnd type="none" w="med" len="med"/>
-                    </a:lnR>
-                    <a:lnT w="9525" cap="flat" cmpd="sng" algn="ctr">
-                      <a:solidFill>
-                        <a:srgbClr val="2A3560"/>
-                      </a:solidFill>
-                      <a:prstDash val="solid"/>
-                      <a:round/>
-                      <a:headEnd type="none" w="med" len="med"/>
-                      <a:tailEnd type="none" w="med" len="med"/>
-                    </a:lnT>
-                    <a:lnB w="9525" cap="flat" cmpd="sng" algn="ctr">
-                      <a:solidFill>
-                        <a:srgbClr val="2A3560"/>
-                      </a:solidFill>
-                      <a:prstDash val="solid"/>
-                      <a:round/>
-                      <a:headEnd type="none" w="med" len="med"/>
-                      <a:tailEnd type="none" w="med" len="med"/>
-                    </a:lnB>
-                    <a:solidFill>
-                      <a:srgbClr val="10162B"/>
-                    </a:solidFill>
-                  </a:tcPr>
-                </a:tc>
-                <a:tc>
-                  <a:txBody>
-                    <a:bodyPr/>
-                    <a:lstStyle/>
-                    <a:p>
-                      <a:pPr algn="ctr" indent="0" marL="0">
+                      <a:pPr marL="0" indent="0" algn="ctr">
                         <a:buNone/>
                       </a:pPr>
                       <a:r>
@@ -17395,12 +17199,80 @@
                     </a:solidFill>
                   </a:tcPr>
                 </a:tc>
+                <a:extLst>
+                  <a:ext uri="{0D108BD9-81ED-4DB2-BD59-A6C34878D82A}">
+                    <a16:rowId xmlns:a16="http://schemas.microsoft.com/office/drawing/2014/main" val="10006"/>
+                  </a:ext>
+                </a:extLst>
+              </a:tr>
+              <a:tr h="402336">
                 <a:tc>
                   <a:txBody>
                     <a:bodyPr/>
                     <a:lstStyle/>
                     <a:p>
-                      <a:pPr algn="ctr" indent="0" marL="0">
+                      <a:pPr marL="0" indent="0" algn="l">
+                        <a:buNone/>
+                      </a:pPr>
+                      <a:r>
+                        <a:rPr lang="en-US" sz="1150" b="1" dirty="0">
+                          <a:solidFill>
+                            <a:srgbClr val="CADCFC"/>
+                          </a:solidFill>
+                        </a:rPr>
+                        <a:t>P07</a:t>
+                      </a:r>
+                      <a:endParaRPr lang="en-US" sz="1150" dirty="0"/>
+                    </a:p>
+                  </a:txBody>
+                  <a:tcPr marL="50800" marR="50800" marT="38100" marB="38100" anchor="ctr">
+                    <a:lnL w="9525" cap="flat" cmpd="sng" algn="ctr">
+                      <a:solidFill>
+                        <a:srgbClr val="2A3560"/>
+                      </a:solidFill>
+                      <a:prstDash val="solid"/>
+                      <a:round/>
+                      <a:headEnd type="none" w="med" len="med"/>
+                      <a:tailEnd type="none" w="med" len="med"/>
+                    </a:lnL>
+                    <a:lnR w="9525" cap="flat" cmpd="sng" algn="ctr">
+                      <a:solidFill>
+                        <a:srgbClr val="2A3560"/>
+                      </a:solidFill>
+                      <a:prstDash val="solid"/>
+                      <a:round/>
+                      <a:headEnd type="none" w="med" len="med"/>
+                      <a:tailEnd type="none" w="med" len="med"/>
+                    </a:lnR>
+                    <a:lnT w="9525" cap="flat" cmpd="sng" algn="ctr">
+                      <a:solidFill>
+                        <a:srgbClr val="2A3560"/>
+                      </a:solidFill>
+                      <a:prstDash val="solid"/>
+                      <a:round/>
+                      <a:headEnd type="none" w="med" len="med"/>
+                      <a:tailEnd type="none" w="med" len="med"/>
+                    </a:lnT>
+                    <a:lnB w="9525" cap="flat" cmpd="sng" algn="ctr">
+                      <a:solidFill>
+                        <a:srgbClr val="2A3560"/>
+                      </a:solidFill>
+                      <a:prstDash val="solid"/>
+                      <a:round/>
+                      <a:headEnd type="none" w="med" len="med"/>
+                      <a:tailEnd type="none" w="med" len="med"/>
+                    </a:lnB>
+                    <a:solidFill>
+                      <a:srgbClr val="161D38"/>
+                    </a:solidFill>
+                  </a:tcPr>
+                </a:tc>
+                <a:tc>
+                  <a:txBody>
+                    <a:bodyPr/>
+                    <a:lstStyle/>
+                    <a:p>
+                      <a:pPr marL="0" indent="0" algn="ctr">
                         <a:buNone/>
                       </a:pPr>
                       <a:r>
@@ -17409,7 +17281,7 @@
                             <a:srgbClr val="CADCFC"/>
                           </a:solidFill>
                         </a:rPr>
-                        <a:t>1.735</a:t>
+                        <a:t>1.458</a:t>
                       </a:r>
                       <a:endParaRPr lang="en-US" sz="1150" dirty="0"/>
                     </a:p>
@@ -17452,7 +17324,7 @@
                       <a:tailEnd type="none" w="med" len="med"/>
                     </a:lnB>
                     <a:solidFill>
-                      <a:srgbClr val="10162B"/>
+                      <a:srgbClr val="161D38"/>
                     </a:solidFill>
                   </a:tcPr>
                 </a:tc>
@@ -17461,7 +17333,204 @@
                     <a:bodyPr/>
                     <a:lstStyle/>
                     <a:p>
-                      <a:pPr algn="ctr" indent="0" marL="0">
+                      <a:pPr marL="0" indent="0" algn="ctr">
+                        <a:buNone/>
+                      </a:pPr>
+                      <a:r>
+                        <a:rPr lang="en-US" sz="1150" dirty="0">
+                          <a:solidFill>
+                            <a:srgbClr val="CADCFC"/>
+                          </a:solidFill>
+                        </a:rPr>
+                        <a:t>1.456</a:t>
+                      </a:r>
+                      <a:endParaRPr lang="en-US" sz="1150" dirty="0"/>
+                    </a:p>
+                  </a:txBody>
+                  <a:tcPr marL="50800" marR="50800" marT="38100" marB="38100" anchor="ctr">
+                    <a:lnL w="9525" cap="flat" cmpd="sng" algn="ctr">
+                      <a:solidFill>
+                        <a:srgbClr val="2A3560"/>
+                      </a:solidFill>
+                      <a:prstDash val="solid"/>
+                      <a:round/>
+                      <a:headEnd type="none" w="med" len="med"/>
+                      <a:tailEnd type="none" w="med" len="med"/>
+                    </a:lnL>
+                    <a:lnR w="9525" cap="flat" cmpd="sng" algn="ctr">
+                      <a:solidFill>
+                        <a:srgbClr val="2A3560"/>
+                      </a:solidFill>
+                      <a:prstDash val="solid"/>
+                      <a:round/>
+                      <a:headEnd type="none" w="med" len="med"/>
+                      <a:tailEnd type="none" w="med" len="med"/>
+                    </a:lnR>
+                    <a:lnT w="9525" cap="flat" cmpd="sng" algn="ctr">
+                      <a:solidFill>
+                        <a:srgbClr val="2A3560"/>
+                      </a:solidFill>
+                      <a:prstDash val="solid"/>
+                      <a:round/>
+                      <a:headEnd type="none" w="med" len="med"/>
+                      <a:tailEnd type="none" w="med" len="med"/>
+                    </a:lnT>
+                    <a:lnB w="9525" cap="flat" cmpd="sng" algn="ctr">
+                      <a:solidFill>
+                        <a:srgbClr val="2A3560"/>
+                      </a:solidFill>
+                      <a:prstDash val="solid"/>
+                      <a:round/>
+                      <a:headEnd type="none" w="med" len="med"/>
+                      <a:tailEnd type="none" w="med" len="med"/>
+                    </a:lnB>
+                    <a:solidFill>
+                      <a:srgbClr val="161D38"/>
+                    </a:solidFill>
+                  </a:tcPr>
+                </a:tc>
+                <a:tc>
+                  <a:txBody>
+                    <a:bodyPr/>
+                    <a:lstStyle/>
+                    <a:p>
+                      <a:pPr marL="0" marR="0" lvl="0" indent="0" algn="ctr" defTabSz="914400" rtl="0" eaLnBrk="1" fontAlgn="auto" latinLnBrk="0" hangingPunct="1">
+                        <a:lnSpc>
+                          <a:spcPct val="100000"/>
+                        </a:lnSpc>
+                        <a:spcBef>
+                          <a:spcPts val="0"/>
+                        </a:spcBef>
+                        <a:spcAft>
+                          <a:spcPts val="0"/>
+                        </a:spcAft>
+                        <a:buClrTx/>
+                        <a:buSzTx/>
+                        <a:buFontTx/>
+                        <a:buNone/>
+                        <a:tabLst/>
+                        <a:defRPr/>
+                      </a:pPr>
+                      <a:r>
+                        <a:rPr lang="en-US" sz="1150" b="1" dirty="0">
+                          <a:solidFill>
+                            <a:srgbClr val="4CAF7D"/>
+                          </a:solidFill>
+                        </a:rPr>
+                        <a:t>0.14%</a:t>
+                      </a:r>
+                      <a:endParaRPr lang="en-US" sz="1150" dirty="0"/>
+                    </a:p>
+                  </a:txBody>
+                  <a:tcPr marL="50800" marR="50800" marT="38100" marB="38100" anchor="ctr">
+                    <a:lnL w="9525" cap="flat" cmpd="sng" algn="ctr">
+                      <a:solidFill>
+                        <a:srgbClr val="2A3560"/>
+                      </a:solidFill>
+                      <a:prstDash val="solid"/>
+                      <a:round/>
+                      <a:headEnd type="none" w="med" len="med"/>
+                      <a:tailEnd type="none" w="med" len="med"/>
+                    </a:lnL>
+                    <a:lnR w="9525" cap="flat" cmpd="sng" algn="ctr">
+                      <a:solidFill>
+                        <a:srgbClr val="2A3560"/>
+                      </a:solidFill>
+                      <a:prstDash val="solid"/>
+                      <a:round/>
+                      <a:headEnd type="none" w="med" len="med"/>
+                      <a:tailEnd type="none" w="med" len="med"/>
+                    </a:lnR>
+                    <a:lnT w="9525" cap="flat" cmpd="sng" algn="ctr">
+                      <a:solidFill>
+                        <a:srgbClr val="2A3560"/>
+                      </a:solidFill>
+                      <a:prstDash val="solid"/>
+                      <a:round/>
+                      <a:headEnd type="none" w="med" len="med"/>
+                      <a:tailEnd type="none" w="med" len="med"/>
+                    </a:lnT>
+                    <a:lnB w="9525" cap="flat" cmpd="sng" algn="ctr">
+                      <a:solidFill>
+                        <a:srgbClr val="2A3560"/>
+                      </a:solidFill>
+                      <a:prstDash val="solid"/>
+                      <a:round/>
+                      <a:headEnd type="none" w="med" len="med"/>
+                      <a:tailEnd type="none" w="med" len="med"/>
+                    </a:lnB>
+                    <a:solidFill>
+                      <a:srgbClr val="161D38"/>
+                    </a:solidFill>
+                  </a:tcPr>
+                </a:tc>
+                <a:tc>
+                  <a:txBody>
+                    <a:bodyPr/>
+                    <a:lstStyle/>
+                    <a:p>
+                      <a:pPr marL="0" indent="0" algn="ctr">
+                        <a:buNone/>
+                      </a:pPr>
+                      <a:r>
+                        <a:rPr lang="en-US" sz="1150" dirty="0">
+                          <a:solidFill>
+                            <a:srgbClr val="CADCFC"/>
+                          </a:solidFill>
+                        </a:rPr>
+                        <a:t>1.458</a:t>
+                      </a:r>
+                      <a:endParaRPr lang="en-US" sz="1150" dirty="0"/>
+                    </a:p>
+                  </a:txBody>
+                  <a:tcPr marL="50800" marR="50800" marT="38100" marB="38100" anchor="ctr">
+                    <a:lnL w="9525" cap="flat" cmpd="sng" algn="ctr">
+                      <a:solidFill>
+                        <a:srgbClr val="2A3560"/>
+                      </a:solidFill>
+                      <a:prstDash val="solid"/>
+                      <a:round/>
+                      <a:headEnd type="none" w="med" len="med"/>
+                      <a:tailEnd type="none" w="med" len="med"/>
+                    </a:lnL>
+                    <a:lnR w="9525" cap="flat" cmpd="sng" algn="ctr">
+                      <a:solidFill>
+                        <a:srgbClr val="2A3560"/>
+                      </a:solidFill>
+                      <a:prstDash val="solid"/>
+                      <a:round/>
+                      <a:headEnd type="none" w="med" len="med"/>
+                      <a:tailEnd type="none" w="med" len="med"/>
+                    </a:lnR>
+                    <a:lnT w="9525" cap="flat" cmpd="sng" algn="ctr">
+                      <a:solidFill>
+                        <a:srgbClr val="2A3560"/>
+                      </a:solidFill>
+                      <a:prstDash val="solid"/>
+                      <a:round/>
+                      <a:headEnd type="none" w="med" len="med"/>
+                      <a:tailEnd type="none" w="med" len="med"/>
+                    </a:lnT>
+                    <a:lnB w="9525" cap="flat" cmpd="sng" algn="ctr">
+                      <a:solidFill>
+                        <a:srgbClr val="2A3560"/>
+                      </a:solidFill>
+                      <a:prstDash val="solid"/>
+                      <a:round/>
+                      <a:headEnd type="none" w="med" len="med"/>
+                      <a:tailEnd type="none" w="med" len="med"/>
+                    </a:lnB>
+                    <a:solidFill>
+                      <a:srgbClr val="161D38"/>
+                    </a:solidFill>
+                  </a:tcPr>
+                </a:tc>
+                <a:tc>
+                  <a:txBody>
+                    <a:bodyPr/>
+                    <a:lstStyle/>
+                    <a:p>
+                      <a:pPr marL="0" indent="0" algn="ctr">
                         <a:buNone/>
                       </a:pPr>
                       <a:r>
@@ -17513,10 +17582,15 @@
                       <a:tailEnd type="none" w="med" len="med"/>
                     </a:lnB>
                     <a:solidFill>
-                      <a:srgbClr val="10162B"/>
+                      <a:srgbClr val="161D38"/>
                     </a:solidFill>
                   </a:tcPr>
                 </a:tc>
+                <a:extLst>
+                  <a:ext uri="{0D108BD9-81ED-4DB2-BD59-A6C34878D82A}">
+                    <a16:rowId xmlns:a16="http://schemas.microsoft.com/office/drawing/2014/main" val="10007"/>
+                  </a:ext>
+                </a:extLst>
               </a:tr>
               <a:tr h="402336">
                 <a:tc>
@@ -17524,7 +17598,7 @@
                     <a:bodyPr/>
                     <a:lstStyle/>
                     <a:p>
-                      <a:pPr algn="l" indent="0" marL="0">
+                      <a:pPr marL="0" indent="0" algn="l">
                         <a:buNone/>
                       </a:pPr>
                       <a:r>
@@ -17533,7 +17607,7 @@
                             <a:srgbClr val="CADCFC"/>
                           </a:solidFill>
                         </a:rPr>
-                        <a:t>P07</a:t>
+                        <a:t>P08</a:t>
                       </a:r>
                       <a:endParaRPr lang="en-US" sz="1150" dirty="0"/>
                     </a:p>
@@ -17576,7 +17650,7 @@
                       <a:tailEnd type="none" w="med" len="med"/>
                     </a:lnB>
                     <a:solidFill>
-                      <a:srgbClr val="161D38"/>
+                      <a:srgbClr val="10162B"/>
                     </a:solidFill>
                   </a:tcPr>
                 </a:tc>
@@ -17585,7 +17659,7 @@
                     <a:bodyPr/>
                     <a:lstStyle/>
                     <a:p>
-                      <a:pPr algn="ctr" indent="0" marL="0">
+                      <a:pPr marL="0" indent="0" algn="ctr">
                         <a:buNone/>
                       </a:pPr>
                       <a:r>
@@ -17594,7 +17668,7 @@
                             <a:srgbClr val="CADCFC"/>
                           </a:solidFill>
                         </a:rPr>
-                        <a:t>1.458</a:t>
+                        <a:t>13.549.094</a:t>
                       </a:r>
                       <a:endParaRPr lang="en-US" sz="1150" dirty="0"/>
                     </a:p>
@@ -17637,7 +17711,7 @@
                       <a:tailEnd type="none" w="med" len="med"/>
                     </a:lnB>
                     <a:solidFill>
-                      <a:srgbClr val="161D38"/>
+                      <a:srgbClr val="10162B"/>
                     </a:solidFill>
                   </a:tcPr>
                 </a:tc>
@@ -17646,7 +17720,7 @@
                     <a:bodyPr/>
                     <a:lstStyle/>
                     <a:p>
-                      <a:pPr algn="ctr" indent="0" marL="0">
+                      <a:pPr marL="0" indent="0" algn="ctr">
                         <a:buNone/>
                       </a:pPr>
                       <a:r>
@@ -17655,7 +17729,7 @@
                             <a:srgbClr val="CADCFC"/>
                           </a:solidFill>
                         </a:rPr>
-                        <a:t>1.400</a:t>
+                        <a:t>13.415.886</a:t>
                       </a:r>
                       <a:endParaRPr lang="en-US" sz="1150" dirty="0"/>
                     </a:p>
@@ -17698,7 +17772,7 @@
                       <a:tailEnd type="none" w="med" len="med"/>
                     </a:lnB>
                     <a:solidFill>
-                      <a:srgbClr val="161D38"/>
+                      <a:srgbClr val="10162B"/>
                     </a:solidFill>
                   </a:tcPr>
                 </a:tc>
@@ -17707,16 +17781,30 @@
                     <a:bodyPr/>
                     <a:lstStyle/>
                     <a:p>
-                      <a:pPr algn="ctr" indent="0" marL="0">
+                      <a:pPr marL="0" marR="0" lvl="0" indent="0" algn="ctr" defTabSz="914400" rtl="0" eaLnBrk="1" fontAlgn="auto" latinLnBrk="0" hangingPunct="1">
+                        <a:lnSpc>
+                          <a:spcPct val="100000"/>
+                        </a:lnSpc>
+                        <a:spcBef>
+                          <a:spcPts val="0"/>
+                        </a:spcBef>
+                        <a:spcAft>
+                          <a:spcPts val="0"/>
+                        </a:spcAft>
+                        <a:buClrTx/>
+                        <a:buSzTx/>
+                        <a:buFontTx/>
                         <a:buNone/>
+                        <a:tabLst/>
+                        <a:defRPr/>
                       </a:pPr>
                       <a:r>
                         <a:rPr lang="en-US" sz="1150" b="1" dirty="0">
                           <a:solidFill>
-                            <a:srgbClr val="D97757"/>
+                            <a:srgbClr val="4CAF7D"/>
                           </a:solidFill>
                         </a:rPr>
-                        <a:t>3.98%</a:t>
+                        <a:t>0.73%</a:t>
                       </a:r>
                       <a:endParaRPr lang="en-US" sz="1150" dirty="0"/>
                     </a:p>
@@ -17759,7 +17847,7 @@
                       <a:tailEnd type="none" w="med" len="med"/>
                     </a:lnB>
                     <a:solidFill>
-                      <a:srgbClr val="161D38"/>
+                      <a:srgbClr val="10162B"/>
                     </a:solidFill>
                   </a:tcPr>
                 </a:tc>
@@ -17768,7 +17856,7 @@
                     <a:bodyPr/>
                     <a:lstStyle/>
                     <a:p>
-                      <a:pPr algn="ctr" indent="0" marL="0">
+                      <a:pPr marL="0" indent="0" algn="ctr">
                         <a:buNone/>
                       </a:pPr>
                       <a:r>
@@ -17777,7 +17865,7 @@
                             <a:srgbClr val="CADCFC"/>
                           </a:solidFill>
                         </a:rPr>
-                        <a:t>1.458</a:t>
+                        <a:t>13.549.094</a:t>
                       </a:r>
                       <a:endParaRPr lang="en-US" sz="1150" dirty="0"/>
                     </a:p>
@@ -17820,7 +17908,7 @@
                       <a:tailEnd type="none" w="med" len="med"/>
                     </a:lnB>
                     <a:solidFill>
-                      <a:srgbClr val="161D38"/>
+                      <a:srgbClr val="10162B"/>
                     </a:solidFill>
                   </a:tcPr>
                 </a:tc>
@@ -17829,7 +17917,7 @@
                     <a:bodyPr/>
                     <a:lstStyle/>
                     <a:p>
-                      <a:pPr algn="ctr" indent="0" marL="0">
+                      <a:pPr marL="0" indent="0" algn="ctr">
                         <a:buNone/>
                       </a:pPr>
                       <a:r>
@@ -17881,10 +17969,15 @@
                       <a:tailEnd type="none" w="med" len="med"/>
                     </a:lnB>
                     <a:solidFill>
-                      <a:srgbClr val="161D38"/>
+                      <a:srgbClr val="10162B"/>
                     </a:solidFill>
                   </a:tcPr>
                 </a:tc>
+                <a:extLst>
+                  <a:ext uri="{0D108BD9-81ED-4DB2-BD59-A6C34878D82A}">
+                    <a16:rowId xmlns:a16="http://schemas.microsoft.com/office/drawing/2014/main" val="10008"/>
+                  </a:ext>
+                </a:extLst>
               </a:tr>
               <a:tr h="402336">
                 <a:tc>
@@ -17892,7 +17985,7 @@
                     <a:bodyPr/>
                     <a:lstStyle/>
                     <a:p>
-                      <a:pPr algn="l" indent="0" marL="0">
+                      <a:pPr marL="0" indent="0" algn="l">
                         <a:buNone/>
                       </a:pPr>
                       <a:r>
@@ -17901,7 +17994,7 @@
                             <a:srgbClr val="CADCFC"/>
                           </a:solidFill>
                         </a:rPr>
-                        <a:t>P08</a:t>
+                        <a:t>knapPI_1_100</a:t>
                       </a:r>
                       <a:endParaRPr lang="en-US" sz="1150" dirty="0"/>
                     </a:p>
@@ -17944,7 +18037,7 @@
                       <a:tailEnd type="none" w="med" len="med"/>
                     </a:lnB>
                     <a:solidFill>
-                      <a:srgbClr val="10162B"/>
+                      <a:srgbClr val="161D38"/>
                     </a:solidFill>
                   </a:tcPr>
                 </a:tc>
@@ -17953,7 +18046,7 @@
                     <a:bodyPr/>
                     <a:lstStyle/>
                     <a:p>
-                      <a:pPr algn="ctr" indent="0" marL="0">
+                      <a:pPr marL="0" indent="0" algn="ctr">
                         <a:buNone/>
                       </a:pPr>
                       <a:r>
@@ -17962,7 +18055,7 @@
                             <a:srgbClr val="CADCFC"/>
                           </a:solidFill>
                         </a:rPr>
-                        <a:t>13.549.094</a:t>
+                        <a:t>9.147</a:t>
                       </a:r>
                       <a:endParaRPr lang="en-US" sz="1150" dirty="0"/>
                     </a:p>
@@ -18005,7 +18098,7 @@
                       <a:tailEnd type="none" w="med" len="med"/>
                     </a:lnB>
                     <a:solidFill>
-                      <a:srgbClr val="10162B"/>
+                      <a:srgbClr val="161D38"/>
                     </a:solidFill>
                   </a:tcPr>
                 </a:tc>
@@ -18014,7 +18107,7 @@
                     <a:bodyPr/>
                     <a:lstStyle/>
                     <a:p>
-                      <a:pPr algn="ctr" indent="0" marL="0">
+                      <a:pPr marL="0" indent="0" algn="ctr">
                         <a:buNone/>
                       </a:pPr>
                       <a:r>
@@ -18023,7 +18116,7 @@
                             <a:srgbClr val="CADCFC"/>
                           </a:solidFill>
                         </a:rPr>
-                        <a:t>12.486.804</a:t>
+                        <a:t>8.817</a:t>
                       </a:r>
                       <a:endParaRPr lang="en-US" sz="1150" dirty="0"/>
                     </a:p>
@@ -18066,7 +18159,7 @@
                       <a:tailEnd type="none" w="med" len="med"/>
                     </a:lnB>
                     <a:solidFill>
-                      <a:srgbClr val="10162B"/>
+                      <a:srgbClr val="161D38"/>
                     </a:solidFill>
                   </a:tcPr>
                 </a:tc>
@@ -18075,7 +18168,7 @@
                     <a:bodyPr/>
                     <a:lstStyle/>
                     <a:p>
-                      <a:pPr algn="ctr" indent="0" marL="0">
+                      <a:pPr marL="0" indent="0" algn="ctr">
                         <a:buNone/>
                       </a:pPr>
                       <a:r>
@@ -18084,7 +18177,7 @@
                             <a:srgbClr val="D97757"/>
                           </a:solidFill>
                         </a:rPr>
-                        <a:t>7.84%</a:t>
+                        <a:t>3.61%</a:t>
                       </a:r>
                       <a:endParaRPr lang="en-US" sz="1150" dirty="0"/>
                     </a:p>
@@ -18127,7 +18220,7 @@
                       <a:tailEnd type="none" w="med" len="med"/>
                     </a:lnB>
                     <a:solidFill>
-                      <a:srgbClr val="10162B"/>
+                      <a:srgbClr val="161D38"/>
                     </a:solidFill>
                   </a:tcPr>
                 </a:tc>
@@ -18136,7 +18229,7 @@
                     <a:bodyPr/>
                     <a:lstStyle/>
                     <a:p>
-                      <a:pPr algn="ctr" indent="0" marL="0">
+                      <a:pPr marL="0" indent="0" algn="ctr">
                         <a:buNone/>
                       </a:pPr>
                       <a:r>
@@ -18145,7 +18238,7 @@
                             <a:srgbClr val="CADCFC"/>
                           </a:solidFill>
                         </a:rPr>
-                        <a:t>13.549.094</a:t>
+                        <a:t>9.147</a:t>
                       </a:r>
                       <a:endParaRPr lang="en-US" sz="1150" dirty="0"/>
                     </a:p>
@@ -18188,7 +18281,7 @@
                       <a:tailEnd type="none" w="med" len="med"/>
                     </a:lnB>
                     <a:solidFill>
-                      <a:srgbClr val="10162B"/>
+                      <a:srgbClr val="161D38"/>
                     </a:solidFill>
                   </a:tcPr>
                 </a:tc>
@@ -18197,7 +18290,7 @@
                     <a:bodyPr/>
                     <a:lstStyle/>
                     <a:p>
-                      <a:pPr algn="ctr" indent="0" marL="0">
+                      <a:pPr marL="0" indent="0" algn="ctr">
                         <a:buNone/>
                       </a:pPr>
                       <a:r>
@@ -18249,378 +18342,15 @@
                       <a:tailEnd type="none" w="med" len="med"/>
                     </a:lnB>
                     <a:solidFill>
-                      <a:srgbClr val="10162B"/>
-                    </a:solidFill>
-                  </a:tcPr>
-                </a:tc>
-              </a:tr>
-              <a:tr h="402336">
-                <a:tc>
-                  <a:txBody>
-                    <a:bodyPr/>
-                    <a:lstStyle/>
-                    <a:p>
-                      <a:pPr algn="l" indent="0" marL="0">
-                        <a:buNone/>
-                      </a:pPr>
-                      <a:r>
-                        <a:rPr lang="en-US" sz="1150" b="1" dirty="0">
-                          <a:solidFill>
-                            <a:srgbClr val="CADCFC"/>
-                          </a:solidFill>
-                        </a:rPr>
-                        <a:t>knapPI_1_100</a:t>
-                      </a:r>
-                      <a:endParaRPr lang="en-US" sz="1150" dirty="0"/>
-                    </a:p>
-                  </a:txBody>
-                  <a:tcPr marL="50800" marR="50800" marT="38100" marB="38100" anchor="ctr">
-                    <a:lnL w="9525" cap="flat" cmpd="sng" algn="ctr">
-                      <a:solidFill>
-                        <a:srgbClr val="2A3560"/>
-                      </a:solidFill>
-                      <a:prstDash val="solid"/>
-                      <a:round/>
-                      <a:headEnd type="none" w="med" len="med"/>
-                      <a:tailEnd type="none" w="med" len="med"/>
-                    </a:lnL>
-                    <a:lnR w="9525" cap="flat" cmpd="sng" algn="ctr">
-                      <a:solidFill>
-                        <a:srgbClr val="2A3560"/>
-                      </a:solidFill>
-                      <a:prstDash val="solid"/>
-                      <a:round/>
-                      <a:headEnd type="none" w="med" len="med"/>
-                      <a:tailEnd type="none" w="med" len="med"/>
-                    </a:lnR>
-                    <a:lnT w="9525" cap="flat" cmpd="sng" algn="ctr">
-                      <a:solidFill>
-                        <a:srgbClr val="2A3560"/>
-                      </a:solidFill>
-                      <a:prstDash val="solid"/>
-                      <a:round/>
-                      <a:headEnd type="none" w="med" len="med"/>
-                      <a:tailEnd type="none" w="med" len="med"/>
-                    </a:lnT>
-                    <a:lnB w="9525" cap="flat" cmpd="sng" algn="ctr">
-                      <a:solidFill>
-                        <a:srgbClr val="2A3560"/>
-                      </a:solidFill>
-                      <a:prstDash val="solid"/>
-                      <a:round/>
-                      <a:headEnd type="none" w="med" len="med"/>
-                      <a:tailEnd type="none" w="med" len="med"/>
-                    </a:lnB>
-                    <a:solidFill>
                       <a:srgbClr val="161D38"/>
                     </a:solidFill>
                   </a:tcPr>
                 </a:tc>
-                <a:tc>
-                  <a:txBody>
-                    <a:bodyPr/>
-                    <a:lstStyle/>
-                    <a:p>
-                      <a:pPr algn="ctr" indent="0" marL="0">
-                        <a:buNone/>
-                      </a:pPr>
-                      <a:r>
-                        <a:rPr lang="en-US" sz="1150" dirty="0">
-                          <a:solidFill>
-                            <a:srgbClr val="CADCFC"/>
-                          </a:solidFill>
-                        </a:rPr>
-                        <a:t>9.147</a:t>
-                      </a:r>
-                      <a:endParaRPr lang="en-US" sz="1150" dirty="0"/>
-                    </a:p>
-                  </a:txBody>
-                  <a:tcPr marL="50800" marR="50800" marT="38100" marB="38100" anchor="ctr">
-                    <a:lnL w="9525" cap="flat" cmpd="sng" algn="ctr">
-                      <a:solidFill>
-                        <a:srgbClr val="2A3560"/>
-                      </a:solidFill>
-                      <a:prstDash val="solid"/>
-                      <a:round/>
-                      <a:headEnd type="none" w="med" len="med"/>
-                      <a:tailEnd type="none" w="med" len="med"/>
-                    </a:lnL>
-                    <a:lnR w="9525" cap="flat" cmpd="sng" algn="ctr">
-                      <a:solidFill>
-                        <a:srgbClr val="2A3560"/>
-                      </a:solidFill>
-                      <a:prstDash val="solid"/>
-                      <a:round/>
-                      <a:headEnd type="none" w="med" len="med"/>
-                      <a:tailEnd type="none" w="med" len="med"/>
-                    </a:lnR>
-                    <a:lnT w="9525" cap="flat" cmpd="sng" algn="ctr">
-                      <a:solidFill>
-                        <a:srgbClr val="2A3560"/>
-                      </a:solidFill>
-                      <a:prstDash val="solid"/>
-                      <a:round/>
-                      <a:headEnd type="none" w="med" len="med"/>
-                      <a:tailEnd type="none" w="med" len="med"/>
-                    </a:lnT>
-                    <a:lnB w="9525" cap="flat" cmpd="sng" algn="ctr">
-                      <a:solidFill>
-                        <a:srgbClr val="2A3560"/>
-                      </a:solidFill>
-                      <a:prstDash val="solid"/>
-                      <a:round/>
-                      <a:headEnd type="none" w="med" len="med"/>
-                      <a:tailEnd type="none" w="med" len="med"/>
-                    </a:lnB>
-                    <a:solidFill>
-                      <a:srgbClr val="161D38"/>
-                    </a:solidFill>
-                  </a:tcPr>
-                </a:tc>
-                <a:tc>
-                  <a:txBody>
-                    <a:bodyPr/>
-                    <a:lstStyle/>
-                    <a:p>
-                      <a:pPr algn="ctr" indent="0" marL="0">
-                        <a:buNone/>
-                      </a:pPr>
-                      <a:r>
-                        <a:rPr lang="en-US" sz="1150" dirty="0">
-                          <a:solidFill>
-                            <a:srgbClr val="CADCFC"/>
-                          </a:solidFill>
-                        </a:rPr>
-                        <a:t>8.679</a:t>
-                      </a:r>
-                      <a:endParaRPr lang="en-US" sz="1150" dirty="0"/>
-                    </a:p>
-                  </a:txBody>
-                  <a:tcPr marL="50800" marR="50800" marT="38100" marB="38100" anchor="ctr">
-                    <a:lnL w="9525" cap="flat" cmpd="sng" algn="ctr">
-                      <a:solidFill>
-                        <a:srgbClr val="2A3560"/>
-                      </a:solidFill>
-                      <a:prstDash val="solid"/>
-                      <a:round/>
-                      <a:headEnd type="none" w="med" len="med"/>
-                      <a:tailEnd type="none" w="med" len="med"/>
-                    </a:lnL>
-                    <a:lnR w="9525" cap="flat" cmpd="sng" algn="ctr">
-                      <a:solidFill>
-                        <a:srgbClr val="2A3560"/>
-                      </a:solidFill>
-                      <a:prstDash val="solid"/>
-                      <a:round/>
-                      <a:headEnd type="none" w="med" len="med"/>
-                      <a:tailEnd type="none" w="med" len="med"/>
-                    </a:lnR>
-                    <a:lnT w="9525" cap="flat" cmpd="sng" algn="ctr">
-                      <a:solidFill>
-                        <a:srgbClr val="2A3560"/>
-                      </a:solidFill>
-                      <a:prstDash val="solid"/>
-                      <a:round/>
-                      <a:headEnd type="none" w="med" len="med"/>
-                      <a:tailEnd type="none" w="med" len="med"/>
-                    </a:lnT>
-                    <a:lnB w="9525" cap="flat" cmpd="sng" algn="ctr">
-                      <a:solidFill>
-                        <a:srgbClr val="2A3560"/>
-                      </a:solidFill>
-                      <a:prstDash val="solid"/>
-                      <a:round/>
-                      <a:headEnd type="none" w="med" len="med"/>
-                      <a:tailEnd type="none" w="med" len="med"/>
-                    </a:lnB>
-                    <a:solidFill>
-                      <a:srgbClr val="161D38"/>
-                    </a:solidFill>
-                  </a:tcPr>
-                </a:tc>
-                <a:tc>
-                  <a:txBody>
-                    <a:bodyPr/>
-                    <a:lstStyle/>
-                    <a:p>
-                      <a:pPr algn="ctr" indent="0" marL="0">
-                        <a:buNone/>
-                      </a:pPr>
-                      <a:r>
-                        <a:rPr lang="en-US" sz="1150" b="1" dirty="0">
-                          <a:solidFill>
-                            <a:srgbClr val="D97757"/>
-                          </a:solidFill>
-                        </a:rPr>
-                        <a:t>5.12%</a:t>
-                      </a:r>
-                      <a:endParaRPr lang="en-US" sz="1150" dirty="0"/>
-                    </a:p>
-                  </a:txBody>
-                  <a:tcPr marL="50800" marR="50800" marT="38100" marB="38100" anchor="ctr">
-                    <a:lnL w="9525" cap="flat" cmpd="sng" algn="ctr">
-                      <a:solidFill>
-                        <a:srgbClr val="2A3560"/>
-                      </a:solidFill>
-                      <a:prstDash val="solid"/>
-                      <a:round/>
-                      <a:headEnd type="none" w="med" len="med"/>
-                      <a:tailEnd type="none" w="med" len="med"/>
-                    </a:lnL>
-                    <a:lnR w="9525" cap="flat" cmpd="sng" algn="ctr">
-                      <a:solidFill>
-                        <a:srgbClr val="2A3560"/>
-                      </a:solidFill>
-                      <a:prstDash val="solid"/>
-                      <a:round/>
-                      <a:headEnd type="none" w="med" len="med"/>
-                      <a:tailEnd type="none" w="med" len="med"/>
-                    </a:lnR>
-                    <a:lnT w="9525" cap="flat" cmpd="sng" algn="ctr">
-                      <a:solidFill>
-                        <a:srgbClr val="2A3560"/>
-                      </a:solidFill>
-                      <a:prstDash val="solid"/>
-                      <a:round/>
-                      <a:headEnd type="none" w="med" len="med"/>
-                      <a:tailEnd type="none" w="med" len="med"/>
-                    </a:lnT>
-                    <a:lnB w="9525" cap="flat" cmpd="sng" algn="ctr">
-                      <a:solidFill>
-                        <a:srgbClr val="2A3560"/>
-                      </a:solidFill>
-                      <a:prstDash val="solid"/>
-                      <a:round/>
-                      <a:headEnd type="none" w="med" len="med"/>
-                      <a:tailEnd type="none" w="med" len="med"/>
-                    </a:lnB>
-                    <a:solidFill>
-                      <a:srgbClr val="161D38"/>
-                    </a:solidFill>
-                  </a:tcPr>
-                </a:tc>
-                <a:tc>
-                  <a:txBody>
-                    <a:bodyPr/>
-                    <a:lstStyle/>
-                    <a:p>
-                      <a:pPr algn="ctr" indent="0" marL="0">
-                        <a:buNone/>
-                      </a:pPr>
-                      <a:r>
-                        <a:rPr lang="en-US" sz="1150" dirty="0">
-                          <a:solidFill>
-                            <a:srgbClr val="CADCFC"/>
-                          </a:solidFill>
-                        </a:rPr>
-                        <a:t>9.147</a:t>
-                      </a:r>
-                      <a:endParaRPr lang="en-US" sz="1150" dirty="0"/>
-                    </a:p>
-                  </a:txBody>
-                  <a:tcPr marL="50800" marR="50800" marT="38100" marB="38100" anchor="ctr">
-                    <a:lnL w="9525" cap="flat" cmpd="sng" algn="ctr">
-                      <a:solidFill>
-                        <a:srgbClr val="2A3560"/>
-                      </a:solidFill>
-                      <a:prstDash val="solid"/>
-                      <a:round/>
-                      <a:headEnd type="none" w="med" len="med"/>
-                      <a:tailEnd type="none" w="med" len="med"/>
-                    </a:lnL>
-                    <a:lnR w="9525" cap="flat" cmpd="sng" algn="ctr">
-                      <a:solidFill>
-                        <a:srgbClr val="2A3560"/>
-                      </a:solidFill>
-                      <a:prstDash val="solid"/>
-                      <a:round/>
-                      <a:headEnd type="none" w="med" len="med"/>
-                      <a:tailEnd type="none" w="med" len="med"/>
-                    </a:lnR>
-                    <a:lnT w="9525" cap="flat" cmpd="sng" algn="ctr">
-                      <a:solidFill>
-                        <a:srgbClr val="2A3560"/>
-                      </a:solidFill>
-                      <a:prstDash val="solid"/>
-                      <a:round/>
-                      <a:headEnd type="none" w="med" len="med"/>
-                      <a:tailEnd type="none" w="med" len="med"/>
-                    </a:lnT>
-                    <a:lnB w="9525" cap="flat" cmpd="sng" algn="ctr">
-                      <a:solidFill>
-                        <a:srgbClr val="2A3560"/>
-                      </a:solidFill>
-                      <a:prstDash val="solid"/>
-                      <a:round/>
-                      <a:headEnd type="none" w="med" len="med"/>
-                      <a:tailEnd type="none" w="med" len="med"/>
-                    </a:lnB>
-                    <a:solidFill>
-                      <a:srgbClr val="161D38"/>
-                    </a:solidFill>
-                  </a:tcPr>
-                </a:tc>
-                <a:tc>
-                  <a:txBody>
-                    <a:bodyPr/>
-                    <a:lstStyle/>
-                    <a:p>
-                      <a:pPr algn="ctr" indent="0" marL="0">
-                        <a:buNone/>
-                      </a:pPr>
-                      <a:r>
-                        <a:rPr lang="en-US" sz="1150" b="1" dirty="0">
-                          <a:solidFill>
-                            <a:srgbClr val="4CAF7D"/>
-                          </a:solidFill>
-                        </a:rPr>
-                        <a:t>0.00%</a:t>
-                      </a:r>
-                      <a:endParaRPr lang="en-US" sz="1150" dirty="0"/>
-                    </a:p>
-                  </a:txBody>
-                  <a:tcPr marL="50800" marR="50800" marT="38100" marB="38100" anchor="ctr">
-                    <a:lnL w="9525" cap="flat" cmpd="sng" algn="ctr">
-                      <a:solidFill>
-                        <a:srgbClr val="2A3560"/>
-                      </a:solidFill>
-                      <a:prstDash val="solid"/>
-                      <a:round/>
-                      <a:headEnd type="none" w="med" len="med"/>
-                      <a:tailEnd type="none" w="med" len="med"/>
-                    </a:lnL>
-                    <a:lnR w="9525" cap="flat" cmpd="sng" algn="ctr">
-                      <a:solidFill>
-                        <a:srgbClr val="2A3560"/>
-                      </a:solidFill>
-                      <a:prstDash val="solid"/>
-                      <a:round/>
-                      <a:headEnd type="none" w="med" len="med"/>
-                      <a:tailEnd type="none" w="med" len="med"/>
-                    </a:lnR>
-                    <a:lnT w="9525" cap="flat" cmpd="sng" algn="ctr">
-                      <a:solidFill>
-                        <a:srgbClr val="2A3560"/>
-                      </a:solidFill>
-                      <a:prstDash val="solid"/>
-                      <a:round/>
-                      <a:headEnd type="none" w="med" len="med"/>
-                      <a:tailEnd type="none" w="med" len="med"/>
-                    </a:lnT>
-                    <a:lnB w="9525" cap="flat" cmpd="sng" algn="ctr">
-                      <a:solidFill>
-                        <a:srgbClr val="2A3560"/>
-                      </a:solidFill>
-                      <a:prstDash val="solid"/>
-                      <a:round/>
-                      <a:headEnd type="none" w="med" len="med"/>
-                      <a:tailEnd type="none" w="med" len="med"/>
-                    </a:lnB>
-                    <a:solidFill>
-                      <a:srgbClr val="161D38"/>
-                    </a:solidFill>
-                  </a:tcPr>
-                </a:tc>
+                <a:extLst>
+                  <a:ext uri="{0D108BD9-81ED-4DB2-BD59-A6C34878D82A}">
+                    <a16:rowId xmlns:a16="http://schemas.microsoft.com/office/drawing/2014/main" val="10009"/>
+                  </a:ext>
+                </a:extLst>
               </a:tr>
             </a:tbl>
           </a:graphicData>
@@ -18650,14 +18380,14 @@
       </p:sp>
       <p:pic>
         <p:nvPicPr>
-          <p:cNvPr id="6" name="Image 0" descr="/home/claude/knapsack_pptx/icons/check_gold.png">    </p:cNvPr>
+          <p:cNvPr id="6" name="Image 0" descr="/home/claude/knapsack_pptx/icons/check_gold.png"/>
           <p:cNvPicPr>
             <a:picLocks noChangeAspect="1"/>
           </p:cNvPicPr>
           <p:nvPr/>
         </p:nvPicPr>
         <p:blipFill>
-          <a:blip r:embed="rId1"/>
+          <a:blip r:embed="rId3"/>
           <a:stretch>
             <a:fillRect/>
           </a:stretch>
@@ -18693,7 +18423,7 @@
           <a:bodyPr wrap="square" lIns="0" tIns="0" rIns="0" bIns="0" rtlCol="0" anchor="ctr"/>
           <a:lstStyle/>
           <a:p>
-            <a:pPr indent="0" marL="0">
+            <a:pPr marL="0" indent="0">
               <a:buNone/>
             </a:pPr>
             <a:r>
@@ -18707,9 +18437,6 @@
               </a:rPr>
               <a:t>AG: </a:t>
             </a:r>
-            <a:pPr indent="0" marL="0">
-              <a:buNone/>
-            </a:pPr>
             <a:r>
               <a:rPr lang="en-US" sz="1250" dirty="0">
                 <a:solidFill>
@@ -18754,14 +18481,14 @@
       </p:sp>
       <p:pic>
         <p:nvPicPr>
-          <p:cNvPr id="9" name="Image 1" descr="/home/claude/knapsack_pptx/icons/xmark_gold.png">    </p:cNvPr>
+          <p:cNvPr id="9" name="Image 1" descr="/home/claude/knapsack_pptx/icons/xmark_gold.png"/>
           <p:cNvPicPr>
             <a:picLocks noChangeAspect="1"/>
           </p:cNvPicPr>
           <p:nvPr/>
         </p:nvPicPr>
         <p:blipFill>
-          <a:blip r:embed="rId2"/>
+          <a:blip r:embed="rId4"/>
           <a:stretch>
             <a:fillRect/>
           </a:stretch>
@@ -18778,7 +18505,7 @@
       </p:pic>
       <p:sp>
         <p:nvSpPr>
-          <p:cNvPr id="10" name="Text 5"/>
+          <p:cNvPr id="4" name="Text 5"/>
           <p:cNvSpPr/>
           <p:nvPr/>
         </p:nvSpPr>
@@ -18797,7 +18524,7 @@
           <a:bodyPr wrap="square" lIns="0" tIns="0" rIns="0" bIns="0" rtlCol="0" anchor="ctr"/>
           <a:lstStyle/>
           <a:p>
-            <a:pPr indent="0" marL="0">
+            <a:pPr marL="0" indent="0">
               <a:buNone/>
             </a:pPr>
             <a:r>
@@ -18811,9 +18538,6 @@
               </a:rPr>
               <a:t>Tabu: </a:t>
             </a:r>
-            <a:pPr indent="0" marL="0">
-              <a:buNone/>
-            </a:pPr>
             <a:r>
               <a:rPr lang="en-US" sz="1250" dirty="0">
                 <a:solidFill>
@@ -18850,7 +18574,7 @@
           <a:bodyPr wrap="square" lIns="0" tIns="0" rIns="0" bIns="0" rtlCol="0" anchor="ctr"/>
           <a:lstStyle/>
           <a:p>
-            <a:pPr algn="r" indent="0" marL="0">
+            <a:pPr marL="0" indent="0" algn="r">
               <a:buNone/>
             </a:pPr>
             <a:r>
@@ -19169,4 +18893,319 @@
     </a:ext>
   </a:extLst>
 </a:theme>
+</file>
+
+<file path=ppt/theme/theme2.xml><?xml version="1.0" encoding="utf-8"?>
+<a:theme xmlns:a="http://schemas.openxmlformats.org/drawingml/2006/main" name="Tema do Office">
+  <a:themeElements>
+    <a:clrScheme name="Office">
+      <a:dk1>
+        <a:sysClr val="windowText" lastClr="000000"/>
+      </a:dk1>
+      <a:lt1>
+        <a:sysClr val="window" lastClr="FFFFFF"/>
+      </a:lt1>
+      <a:dk2>
+        <a:srgbClr val="0E2841"/>
+      </a:dk2>
+      <a:lt2>
+        <a:srgbClr val="E8E8E8"/>
+      </a:lt2>
+      <a:accent1>
+        <a:srgbClr val="156082"/>
+      </a:accent1>
+      <a:accent2>
+        <a:srgbClr val="E97132"/>
+      </a:accent2>
+      <a:accent3>
+        <a:srgbClr val="196B24"/>
+      </a:accent3>
+      <a:accent4>
+        <a:srgbClr val="0F9ED5"/>
+      </a:accent4>
+      <a:accent5>
+        <a:srgbClr val="A02B93"/>
+      </a:accent5>
+      <a:accent6>
+        <a:srgbClr val="4EA72E"/>
+      </a:accent6>
+      <a:hlink>
+        <a:srgbClr val="467886"/>
+      </a:hlink>
+      <a:folHlink>
+        <a:srgbClr val="96607D"/>
+      </a:folHlink>
+    </a:clrScheme>
+    <a:fontScheme name="Office">
+      <a:majorFont>
+        <a:latin typeface="Aptos Display" panose="02110004020202020204"/>
+        <a:ea typeface=""/>
+        <a:cs typeface=""/>
+        <a:font script="Jpan" typeface="游ゴシック Light"/>
+        <a:font script="Hang" typeface="맑은 고딕"/>
+        <a:font script="Hans" typeface="等线 Light"/>
+        <a:font script="Hant" typeface="新細明體"/>
+        <a:font script="Arab" typeface="Times New Roman"/>
+        <a:font script="Hebr" typeface="Times New Roman"/>
+        <a:font script="Thai" typeface="Angsana New"/>
+        <a:font script="Ethi" typeface="Nyala"/>
+        <a:font script="Beng" typeface="Vrinda"/>
+        <a:font script="Gujr" typeface="Shruti"/>
+        <a:font script="Khmr" typeface="MoolBoran"/>
+        <a:font script="Knda" typeface="Tunga"/>
+        <a:font script="Guru" typeface="Raavi"/>
+        <a:font script="Cans" typeface="Euphemia"/>
+        <a:font script="Cher" typeface="Plantagenet Cherokee"/>
+        <a:font script="Yiii" typeface="Microsoft Yi Baiti"/>
+        <a:font script="Tibt" typeface="Microsoft Himalaya"/>
+        <a:font script="Thaa" typeface="MV Boli"/>
+        <a:font script="Deva" typeface="Mangal"/>
+        <a:font script="Telu" typeface="Gautami"/>
+        <a:font script="Taml" typeface="Latha"/>
+        <a:font script="Syrc" typeface="Estrangelo Edessa"/>
+        <a:font script="Orya" typeface="Kalinga"/>
+        <a:font script="Mlym" typeface="Kartika"/>
+        <a:font script="Laoo" typeface="DokChampa"/>
+        <a:font script="Sinh" typeface="Iskoola Pota"/>
+        <a:font script="Mong" typeface="Mongolian Baiti"/>
+        <a:font script="Viet" typeface="Times New Roman"/>
+        <a:font script="Uigh" typeface="Microsoft Uighur"/>
+        <a:font script="Geor" typeface="Sylfaen"/>
+        <a:font script="Armn" typeface="Arial"/>
+        <a:font script="Bugi" typeface="Leelawadee UI"/>
+        <a:font script="Bopo" typeface="Microsoft JhengHei"/>
+        <a:font script="Java" typeface="Javanese Text"/>
+        <a:font script="Lisu" typeface="Segoe UI"/>
+        <a:font script="Mymr" typeface="Myanmar Text"/>
+        <a:font script="Nkoo" typeface="Ebrima"/>
+        <a:font script="Olck" typeface="Nirmala UI"/>
+        <a:font script="Osma" typeface="Ebrima"/>
+        <a:font script="Phag" typeface="Phagspa"/>
+        <a:font script="Syrn" typeface="Estrangelo Edessa"/>
+        <a:font script="Syrj" typeface="Estrangelo Edessa"/>
+        <a:font script="Syre" typeface="Estrangelo Edessa"/>
+        <a:font script="Sora" typeface="Nirmala UI"/>
+        <a:font script="Tale" typeface="Microsoft Tai Le"/>
+        <a:font script="Talu" typeface="Microsoft New Tai Lue"/>
+        <a:font script="Tfng" typeface="Ebrima"/>
+      </a:majorFont>
+      <a:minorFont>
+        <a:latin typeface="Aptos" panose="02110004020202020204"/>
+        <a:ea typeface=""/>
+        <a:cs typeface=""/>
+        <a:font script="Jpan" typeface="游ゴシック"/>
+        <a:font script="Hang" typeface="맑은 고딕"/>
+        <a:font script="Hans" typeface="等线"/>
+        <a:font script="Hant" typeface="新細明體"/>
+        <a:font script="Arab" typeface="Arial"/>
+        <a:font script="Hebr" typeface="Arial"/>
+        <a:font script="Thai" typeface="Cordia New"/>
+        <a:font script="Ethi" typeface="Nyala"/>
+        <a:font script="Beng" typeface="Vrinda"/>
+        <a:font script="Gujr" typeface="Shruti"/>
+        <a:font script="Khmr" typeface="DaunPenh"/>
+        <a:font script="Knda" typeface="Tunga"/>
+        <a:font script="Guru" typeface="Raavi"/>
+        <a:font script="Cans" typeface="Euphemia"/>
+        <a:font script="Cher" typeface="Plantagenet Cherokee"/>
+        <a:font script="Yiii" typeface="Microsoft Yi Baiti"/>
+        <a:font script="Tibt" typeface="Microsoft Himalaya"/>
+        <a:font script="Thaa" typeface="MV Boli"/>
+        <a:font script="Deva" typeface="Mangal"/>
+        <a:font script="Telu" typeface="Gautami"/>
+        <a:font script="Taml" typeface="Latha"/>
+        <a:font script="Syrc" typeface="Estrangelo Edessa"/>
+        <a:font script="Orya" typeface="Kalinga"/>
+        <a:font script="Mlym" typeface="Kartika"/>
+        <a:font script="Laoo" typeface="DokChampa"/>
+        <a:font script="Sinh" typeface="Iskoola Pota"/>
+        <a:font script="Mong" typeface="Mongolian Baiti"/>
+        <a:font script="Viet" typeface="Arial"/>
+        <a:font script="Uigh" typeface="Microsoft Uighur"/>
+        <a:font script="Geor" typeface="Sylfaen"/>
+        <a:font script="Armn" typeface="Arial"/>
+        <a:font script="Bugi" typeface="Leelawadee UI"/>
+        <a:font script="Bopo" typeface="Microsoft JhengHei"/>
+        <a:font script="Java" typeface="Javanese Text"/>
+        <a:font script="Lisu" typeface="Segoe UI"/>
+        <a:font script="Mymr" typeface="Myanmar Text"/>
+        <a:font script="Nkoo" typeface="Ebrima"/>
+        <a:font script="Olck" typeface="Nirmala UI"/>
+        <a:font script="Osma" typeface="Ebrima"/>
+        <a:font script="Phag" typeface="Phagspa"/>
+        <a:font script="Syrn" typeface="Estrangelo Edessa"/>
+        <a:font script="Syrj" typeface="Estrangelo Edessa"/>
+        <a:font script="Syre" typeface="Estrangelo Edessa"/>
+        <a:font script="Sora" typeface="Nirmala UI"/>
+        <a:font script="Tale" typeface="Microsoft Tai Le"/>
+        <a:font script="Talu" typeface="Microsoft New Tai Lue"/>
+        <a:font script="Tfng" typeface="Ebrima"/>
+      </a:minorFont>
+    </a:fontScheme>
+    <a:fmtScheme name="Office">
+      <a:fillStyleLst>
+        <a:solidFill>
+          <a:schemeClr val="phClr"/>
+        </a:solidFill>
+        <a:gradFill rotWithShape="1">
+          <a:gsLst>
+            <a:gs pos="0">
+              <a:schemeClr val="phClr">
+                <a:lumMod val="110000"/>
+                <a:satMod val="105000"/>
+                <a:tint val="67000"/>
+              </a:schemeClr>
+            </a:gs>
+            <a:gs pos="50000">
+              <a:schemeClr val="phClr">
+                <a:lumMod val="105000"/>
+                <a:satMod val="103000"/>
+                <a:tint val="73000"/>
+              </a:schemeClr>
+            </a:gs>
+            <a:gs pos="100000">
+              <a:schemeClr val="phClr">
+                <a:lumMod val="105000"/>
+                <a:satMod val="109000"/>
+                <a:tint val="81000"/>
+              </a:schemeClr>
+            </a:gs>
+          </a:gsLst>
+          <a:lin ang="5400000" scaled="0"/>
+        </a:gradFill>
+        <a:gradFill rotWithShape="1">
+          <a:gsLst>
+            <a:gs pos="0">
+              <a:schemeClr val="phClr">
+                <a:satMod val="103000"/>
+                <a:lumMod val="102000"/>
+                <a:tint val="94000"/>
+              </a:schemeClr>
+            </a:gs>
+            <a:gs pos="50000">
+              <a:schemeClr val="phClr">
+                <a:satMod val="110000"/>
+                <a:lumMod val="100000"/>
+                <a:shade val="100000"/>
+              </a:schemeClr>
+            </a:gs>
+            <a:gs pos="100000">
+              <a:schemeClr val="phClr">
+                <a:lumMod val="99000"/>
+                <a:satMod val="120000"/>
+                <a:shade val="78000"/>
+              </a:schemeClr>
+            </a:gs>
+          </a:gsLst>
+          <a:lin ang="5400000" scaled="0"/>
+        </a:gradFill>
+      </a:fillStyleLst>
+      <a:lnStyleLst>
+        <a:ln w="12700" cap="flat" cmpd="sng" algn="ctr">
+          <a:solidFill>
+            <a:schemeClr val="phClr"/>
+          </a:solidFill>
+          <a:prstDash val="solid"/>
+          <a:miter lim="800000"/>
+        </a:ln>
+        <a:ln w="19050" cap="flat" cmpd="sng" algn="ctr">
+          <a:solidFill>
+            <a:schemeClr val="phClr"/>
+          </a:solidFill>
+          <a:prstDash val="solid"/>
+          <a:miter lim="800000"/>
+        </a:ln>
+        <a:ln w="25400" cap="flat" cmpd="sng" algn="ctr">
+          <a:solidFill>
+            <a:schemeClr val="phClr"/>
+          </a:solidFill>
+          <a:prstDash val="solid"/>
+          <a:miter lim="800000"/>
+        </a:ln>
+      </a:lnStyleLst>
+      <a:effectStyleLst>
+        <a:effectStyle>
+          <a:effectLst/>
+        </a:effectStyle>
+        <a:effectStyle>
+          <a:effectLst/>
+        </a:effectStyle>
+        <a:effectStyle>
+          <a:effectLst>
+            <a:outerShdw blurRad="57150" dist="19050" dir="5400000" algn="ctr" rotWithShape="0">
+              <a:srgbClr val="000000">
+                <a:alpha val="63000"/>
+              </a:srgbClr>
+            </a:outerShdw>
+          </a:effectLst>
+        </a:effectStyle>
+      </a:effectStyleLst>
+      <a:bgFillStyleLst>
+        <a:solidFill>
+          <a:schemeClr val="phClr"/>
+        </a:solidFill>
+        <a:solidFill>
+          <a:schemeClr val="phClr">
+            <a:tint val="95000"/>
+            <a:satMod val="170000"/>
+          </a:schemeClr>
+        </a:solidFill>
+        <a:gradFill rotWithShape="1">
+          <a:gsLst>
+            <a:gs pos="0">
+              <a:schemeClr val="phClr">
+                <a:tint val="93000"/>
+                <a:satMod val="150000"/>
+                <a:shade val="98000"/>
+                <a:lumMod val="102000"/>
+              </a:schemeClr>
+            </a:gs>
+            <a:gs pos="50000">
+              <a:schemeClr val="phClr">
+                <a:tint val="98000"/>
+                <a:satMod val="130000"/>
+                <a:shade val="90000"/>
+                <a:lumMod val="103000"/>
+              </a:schemeClr>
+            </a:gs>
+            <a:gs pos="100000">
+              <a:schemeClr val="phClr">
+                <a:shade val="63000"/>
+                <a:satMod val="120000"/>
+              </a:schemeClr>
+            </a:gs>
+          </a:gsLst>
+          <a:lin ang="5400000" scaled="0"/>
+        </a:gradFill>
+      </a:bgFillStyleLst>
+    </a:fmtScheme>
+  </a:themeElements>
+  <a:objectDefaults>
+    <a:lnDef>
+      <a:spPr/>
+      <a:bodyPr/>
+      <a:lstStyle/>
+      <a:style>
+        <a:lnRef idx="2">
+          <a:schemeClr val="accent1"/>
+        </a:lnRef>
+        <a:fillRef idx="0">
+          <a:schemeClr val="accent1"/>
+        </a:fillRef>
+        <a:effectRef idx="1">
+          <a:schemeClr val="accent1"/>
+        </a:effectRef>
+        <a:fontRef idx="minor">
+          <a:schemeClr val="tx1"/>
+        </a:fontRef>
+      </a:style>
+    </a:lnDef>
+  </a:objectDefaults>
+  <a:extraClrSchemeLst/>
+  <a:extLst>
+    <a:ext uri="{05A4C25C-085E-4340-85A3-A5531E510DB2}">
+      <thm15:themeFamily xmlns:thm15="http://schemas.microsoft.com/office/thememl/2012/main" name="Office Theme" id="{2E142A2C-CD16-42D6-873A-C26D2A0506FA}" vid="{1BDDFF52-6CD6-40A5-AB3C-68EB2F1E4D0A}"/>
+    </a:ext>
+  </a:extLst>
+</a:theme>
 </file>